--- a/nullify_presentation.pptx
+++ b/nullify_presentation.pptx
@@ -16,7 +16,6 @@
     <p:sldId id="264" r:id="rId16"/>
     <p:sldId id="265" r:id="rId17"/>
     <p:sldId id="266" r:id="rId18"/>
-    <p:sldId id="267" r:id="rId19"/>
   </p:sldIdLst>
   <p:sldSz cx="12191695" cy="6858000" type="screen4x3"/>
   <p:notesSz cx="6858000" cy="9144000"/>
@@ -513,36 +512,27 @@
           <a:lstStyle/>
           <a:p>
             <a:r>
-              <a:t>[JUDGES PRESENTATION SCRIPT - SLIDE 1: INTRO &amp; VISION]</a:t>
-            </a:r>
-          </a:p>
-          <a:p>
-            <a:r>
-              <a:t>"Good morning, esteemed judges. Today, we are thrilled to present NULLIFY — an autonomous, multi-agent cybersecurity platform built to fundamentally change how organizations detect, dissect, and neutralize malware.</a:t>
-            </a:r>
-          </a:p>
-          <a:p/>
-          <a:p>
-            <a:r>
-              <a:t>Our guiding thesis is simple: 'See it. Trace it. Nullify it.' </a:t>
-            </a:r>
-          </a:p>
-          <a:p/>
-          <a:p>
-            <a:r>
-              <a:t>In modern cybersecurity, latency kills. By the time a traditional sandbox spins up a virtual machine, executes a suspicious binary, and waits for a timeout, an advanced threat has already traversed the network, exfiltrated credentials, or deployed ransomware. </a:t>
-            </a:r>
-          </a:p>
-          <a:p/>
-          <a:p>
-            <a:r>
-              <a:t>Nullify solves this by fusing an ultra-fast, native C-Core accelerator with a collaborative team of six specialized AI agents and the EMBER 2017 machine learning model. It delivers enterprise-grade threat classification and auto-synthesized YARA defense rules in under 15 milliseconds. </a:t>
-            </a:r>
-          </a:p>
-          <a:p/>
-          <a:p>
-            <a:r>
-              <a:t>Let's dive into the problem we are solving."</a:t>
+              <a:t>Good morning, judges. Today we are presenting NULLIFY.</a:t>
+            </a:r>
+          </a:p>
+          <a:p>
+            <a:r>
+              <a:t>Our mission is simple: 'See it. Trace it. Nullify it.'</a:t>
+            </a:r>
+          </a:p>
+          <a:p>
+            <a:r>
+              <a:t>In cybersecurity, speed is everything. By the time a traditional security tool opens a file and spins up a sandbox, the damage is already done.</a:t>
+            </a:r>
+          </a:p>
+          <a:p>
+            <a:r>
+              <a:t>Nullify combines the raw speed of native C code with six autonomous AI agents. It catches zero-day malware and writes ready-to-use defense rules in under 15 milliseconds.</a:t>
+            </a:r>
+          </a:p>
+          <a:p>
+            <a:r>
+              <a:t>Let's show you how.</a:t>
             </a:r>
           </a:p>
         </p:txBody>
@@ -612,30 +602,17 @@
           <a:lstStyle/>
           <a:p>
             <a:r>
-              <a:t>[JUDGES PRESENTATION SCRIPT - SLIDE 10: ENTERPRISE ARCHITECTURE]</a:t>
-            </a:r>
-          </a:p>
-          <a:p>
-            <a:r>
-              <a:t>"A frequent question from technical evaluators is: 'How does this deploy in a real enterprise?'</a:t>
-            </a:r>
-          </a:p>
-          <a:p/>
-          <a:p>
-            <a:r>
-              <a:t>First: Nullify is 100% air-gapped capable. If you are a defense contractor, a bank, or a hospital, you cannot upload proprietary binaries to VirusTotal or commercial cloud sandboxes without violating data compliance. Nullify runs on-premise without phoning home a single byte.</a:t>
-            </a:r>
-          </a:p>
-          <a:p/>
-          <a:p>
-            <a:r>
-              <a:t>Second: Out of the box, we provide a production FastAPI REST engine with full OpenAPI schemas. You can hook it into Splunk, Microsoft Sentinel, or Cortex XSOAR in an afternoon. When a suspicious attachment arrives, your SOAR playbook calls /api/v1/scan and receives a complete JSON verdict with YARA signatures in milliseconds.</a:t>
-            </a:r>
-          </a:p>
-          <a:p/>
-          <a:p>
-            <a:r>
-              <a:t>Third: Modular architecture. Our agent mesh is strictly decoupled. If a customer wants to integrate a private on-premise LLM, add custom YARA repositories, or hook into a local CAPEv2 cluster, the pluggable interfaces make it trivial."</a:t>
+              <a:t>In enterprise security, data privacy is non-negotiable.</a:t>
+            </a:r>
+          </a:p>
+          <a:p>
+            <a:r>
+              <a:t>When companies send files to VirusTotal or cloud sandboxes, proprietary source code and intellectual property leak out.</a:t>
+            </a:r>
+          </a:p>
+          <a:p>
+            <a:r>
+              <a:t>Nullify runs 100% on-premise. It works in air-gapped environments with zero internet access, and connects easily to Splunk or Microsoft Sentinel via our REST API.</a:t>
             </a:r>
           </a:p>
         </p:txBody>
@@ -705,150 +682,17 @@
           <a:lstStyle/>
           <a:p>
             <a:r>
-              <a:t>[JUDGES PRESENTATION SCRIPT - SLIDE 11: COMPETITIVE ADVANTAGE]</a:t>
-            </a:r>
-          </a:p>
-          <a:p>
-            <a:r>
-              <a:t>"Here is how Nullify stacks up against existing market solutions.</a:t>
-            </a:r>
-          </a:p>
-          <a:p/>
-          <a:p>
-            <a:r>
-              <a:t>Traditional Antivirus is fast, but it is blind to zero-day polymorphic threats because it relies on static hashes and signatures.</a:t>
-            </a:r>
-          </a:p>
-          <a:p/>
-          <a:p>
-            <a:r>
-              <a:t>Cloud Sandboxes offer deep behavioral visibility, but at an astronomical cost of 5 to 20 minutes per sample. That is completely unworkable for real-time edge filtering or email gateways.</a:t>
-            </a:r>
-          </a:p>
-          <a:p/>
-          <a:p>
-            <a:r>
-              <a:t>Ad-hoc Python tools like pefile or basic YARA scanners lack machine learning classification, lack multi-agent reasoning, and choke on high-throughput workloads.</a:t>
-            </a:r>
-          </a:p>
-          <a:p/>
-          <a:p>
-            <a:r>
-              <a:t>Nullify is the only platform that combines the microsecond speed of native C, the predictive accuracy of the 2,381-dimensional EMBER model, explainable MITRE attribution, and automated YARA rule synthesis in a single, air-gapped system."</a:t>
-            </a:r>
-          </a:p>
-        </p:txBody>
-      </p:sp>
-      <p:sp>
-        <p:nvSpPr>
-          <p:cNvPr id="4" name="Slide Number Placeholder 3"/>
-          <p:cNvSpPr>
-            <a:spLocks noGrp="1"/>
-          </p:cNvSpPr>
-          <p:nvPr>
-            <p:ph type="sldNum" idx="5" sz="quarter"/>
-          </p:nvPr>
-        </p:nvSpPr>
-        <p:spPr/>
-      </p:sp>
-    </p:spTree>
-  </p:cSld>
-  <p:clrMapOvr>
-    <a:masterClrMapping/>
-  </p:clrMapOvr>
-</p:notes>
-</file>
-
-<file path=ppt/notesSlides/notesSlide12.xml><?xml version="1.0" encoding="utf-8"?>
-<p:notes xmlns:a="http://schemas.openxmlformats.org/drawingml/2006/main" xmlns:p="http://schemas.openxmlformats.org/presentationml/2006/main" xmlns:r="http://schemas.openxmlformats.org/officeDocument/2006/relationships">
-  <p:cSld>
-    <p:spTree>
-      <p:nvGrpSpPr>
-        <p:cNvPr id="1" name=""/>
-        <p:cNvGrpSpPr/>
-        <p:nvPr/>
-      </p:nvGrpSpPr>
-      <p:grpSpPr>
-        <a:xfrm>
-          <a:off x="0" y="0"/>
-          <a:ext cx="0" cy="0"/>
-          <a:chOff x="0" y="0"/>
-          <a:chExt cx="0" cy="0"/>
-        </a:xfrm>
-      </p:grpSpPr>
-      <p:sp>
-        <p:nvSpPr>
-          <p:cNvPr id="2" name="Slide Image Placeholder 1"/>
-          <p:cNvSpPr>
-            <a:spLocks noGrp="1"/>
-          </p:cNvSpPr>
-          <p:nvPr>
-            <p:ph type="sldImg" idx="2"/>
-          </p:nvPr>
-        </p:nvSpPr>
-        <p:spPr/>
-      </p:sp>
-      <p:sp>
-        <p:nvSpPr>
-          <p:cNvPr id="3" name="Notes Placeholder 2"/>
-          <p:cNvSpPr>
-            <a:spLocks noGrp="1"/>
-          </p:cNvSpPr>
-          <p:nvPr>
-            <p:ph type="body" idx="3" sz="quarter"/>
-          </p:nvPr>
-        </p:nvSpPr>
-        <p:spPr/>
-        <p:txBody>
-          <a:bodyPr/>
-          <a:lstStyle/>
-          <a:p>
-            <a:r>
-              <a:t>[JUDGES PRESENTATION SCRIPT - SLIDE 12: CONCLUSION &amp; LIVE DEMO]</a:t>
-            </a:r>
-          </a:p>
-          <a:p>
-            <a:r>
-              <a:t>"To conclude: Nullify represents a paradigm shift in threat intelligence.</a:t>
-            </a:r>
-          </a:p>
-          <a:p/>
-          <a:p>
-            <a:r>
-              <a:t>We are taking cybersecurity from slow, retroactive manual investigation to autonomous, sub-millisecond threat neutralization.</a:t>
-            </a:r>
-          </a:p>
-          <a:p/>
-          <a:p>
-            <a:r>
-              <a:t>On our roadmap:</a:t>
-            </a:r>
-          </a:p>
-          <a:p>
-            <a:r>
-              <a:t>- v1.1 brings kernel-level eBPF monitoring for zero-overhead runtime process isolation.</a:t>
-            </a:r>
-          </a:p>
-          <a:p>
-            <a:r>
-              <a:t>- v1.2 brings automated native C memory unpacking for commercial crypters.</a:t>
-            </a:r>
-          </a:p>
-          <a:p>
-            <a:r>
-              <a:t>- v1.3 federates this intelligence into a distributed enterprise mesh.</a:t>
-            </a:r>
-          </a:p>
-          <a:p/>
-          <a:p>
-            <a:r>
-              <a:t>The entire system is fully functional right now. We invite the judges to witness a live scan of synthetic trojans, ransomware, and Linux binaries using our Web Console or our interactive CLI.</a:t>
-            </a:r>
-          </a:p>
-          <a:p/>
-          <a:p>
-            <a:r>
-              <a:t>Thank you for your time, and we now welcome your questions."</a:t>
+              <a:t>In conclusion: Nullify is not a mock-up or a slide concept. It is a live, working, tested system.</a:t>
+            </a:r>
+          </a:p>
+          <a:p>
+            <a:r>
+              <a:t>We invite the judges right now to give us any sample — a trojan, ransomware, or a safe binary — and watch Nullify classify it and generate defense rules live on screen.</a:t>
+            </a:r>
+          </a:p>
+          <a:p>
+            <a:r>
+              <a:t>Thank you, and we welcome your questions!</a:t>
             </a:r>
           </a:p>
         </p:txBody>
@@ -918,36 +762,27 @@
           <a:lstStyle/>
           <a:p>
             <a:r>
-              <a:t>[JUDGES PRESENTATION SCRIPT - SLIDE 2: THE PROBLEM]</a:t>
-            </a:r>
-          </a:p>
-          <a:p>
-            <a:r>
-              <a:t>"To understand why Nullify is necessary, consider the reality of a modern Security Operations Center (SOC).</a:t>
-            </a:r>
-          </a:p>
-          <a:p/>
-          <a:p>
-            <a:r>
-              <a:t>First, threat volume is overwhelming. Over 450,000 new malware strains appear daily. Threat actors use commercial crypters and polymorphic engines that alter every byte of a binary while retaining execution payload. Traditional MD5 and SHA256 blacklists fail on minute one.</a:t>
-            </a:r>
-          </a:p>
-          <a:p/>
-          <a:p>
-            <a:r>
-              <a:t>Second, the latency penalty. When a SOC needs deep behavioral insight, they send files to a sandbox. Booting a VM, waiting through anti-evasion sleeps, and analyzing API hooks takes anywhere from 5 to 20 minutes. You cannot put line-rate firewalls or email pipelines on pause for 15 minutes.</a:t>
-            </a:r>
-          </a:p>
-          <a:p/>
-          <a:p>
-            <a:r>
-              <a:t>Third, engineering fragility. Most open-source triage tools are built in interpreted Python. When subjected to thousands of files, they choke on GIL contention, memory fragmentation, and 50ms PE-parsing bottlenecks.</a:t>
-            </a:r>
-          </a:p>
-          <a:p/>
-          <a:p>
-            <a:r>
-              <a:t>Nullify was built from the ground up to solve all three issues."</a:t>
+              <a:t>Every security team faces the same dilemma:</a:t>
+            </a:r>
+          </a:p>
+          <a:p>
+            <a:r>
+              <a:t>1. Attackers release 450,000 new files a day. Traditional antivirus only knows old files.</a:t>
+            </a:r>
+          </a:p>
+          <a:p>
+            <a:r>
+              <a:t>2. Sandboxes take 15 minutes to run a single test. That is too slow for real-time networks.</a:t>
+            </a:r>
+          </a:p>
+          <a:p>
+            <a:r>
+              <a:t>3. Most modern tools use Python, which locks up and crashes under heavy traffic.</a:t>
+            </a:r>
+          </a:p>
+          <a:p>
+            <a:r>
+              <a:t>Nullify changes this completely.</a:t>
             </a:r>
           </a:p>
         </p:txBody>
@@ -1017,36 +852,27 @@
           <a:lstStyle/>
           <a:p>
             <a:r>
-              <a:t>[JUDGES PRESENTATION SCRIPT - SLIDE 3: THE SOLUTION]</a:t>
-            </a:r>
-          </a:p>
-          <a:p>
-            <a:r>
-              <a:t>"Nullify bridges this gap through what we call the Autonomous Threat Defense Triad.</a:t>
-            </a:r>
-          </a:p>
-          <a:p/>
-          <a:p>
-            <a:r>
-              <a:t>First, the Native C Accelerator. We realized that file parsing, cryptographic hashing, and entropy calculations should never run in Python. We rewrote these performance bottlenecks in pure C11 compiled with -O3. The result is a standalone binary and ctypes shared library that triages binaries in under 15 milliseconds.</a:t>
-            </a:r>
-          </a:p>
-          <a:p/>
-          <a:p>
-            <a:r>
-              <a:t>Second, our 6-Agent Autonomous Architecture. Instead of an uncontrollable single prompt, we decouple threat analysis into six discrete, deterministic agents. From static header analysis to process-tree behavioral tracing and machine learning, each agent has one job and executes it with clinical precision.</a:t>
-            </a:r>
-          </a:p>
-          <a:p/>
-          <a:p>
-            <a:r>
-              <a:t>Third, Active Defense Synthesis. Nullify doesn't just alert you that a file is malicious. It translates observed attacker behavior into MITRE ATT&amp;CK techniques and writes a bespoke, syntactically validated YARA rule on the spot. In seconds, your entire enterprise fleet is inoculated against the new sample.</a:t>
-            </a:r>
-          </a:p>
-          <a:p/>
-          <a:p>
-            <a:r>
-              <a:t>Let's look at how these six agents collaborate."</a:t>
+              <a:t>Here is how Nullify works:</a:t>
+            </a:r>
+          </a:p>
+          <a:p>
+            <a:r>
+              <a:t>1. It is fast: We moved the heavy lifting to pure C. It analyzes files in under 15 milliseconds.</a:t>
+            </a:r>
+          </a:p>
+          <a:p>
+            <a:r>
+              <a:t>2. It is accurate: Six focused AI agents collaborate to trace the file's behavior.</a:t>
+            </a:r>
+          </a:p>
+          <a:p>
+            <a:r>
+              <a:t>3. It takes action: It writes ready-to-deploy defense rules immediately.</a:t>
+            </a:r>
+          </a:p>
+          <a:p>
+            <a:r>
+              <a:t>No waiting 15 minutes for a sandbox. No leaking sensitive files to cloud APIs.</a:t>
             </a:r>
           </a:p>
         </p:txBody>
@@ -1116,48 +942,22 @@
           <a:lstStyle/>
           <a:p>
             <a:r>
-              <a:t>[JUDGES PRESENTATION SCRIPT - SLIDE 4: THE 6 AGENTS]</a:t>
-            </a:r>
-          </a:p>
-          <a:p>
-            <a:r>
-              <a:t>"Rather than a fragile prompt chain, Nullify's architecture is a coordinated mesh of six autonomous agents.</a:t>
-            </a:r>
-          </a:p>
-          <a:p/>
-          <a:p>
-            <a:r>
-              <a:t>Agent 1: Triage. The gatekeeper. Using our compiled C-core, it inspects file headers, computes cryptographic hashes in a single streaming pass, and checks Shannon entropy in microseconds.</a:t>
-            </a:r>
-          </a:p>
-          <a:p/>
-          <a:p>
-            <a:r>
-              <a:t>Agent 2: Static Analysis. It parses PE section headers and import directories directly in memory, flagging high-risk APIs like VirtualAllocEx and WriteProcessMemory, and scanning for persistence mechanisms like Registry Run keys.</a:t>
-            </a:r>
-          </a:p>
-          <a:p/>
-          <a:p>
-            <a:r>
-              <a:t>Agent 3: Behavioral Correlation. When log telemetry is available, this agent reconstructs execution trees from Sysmon JSONL or Windows EVTX events, exposing suspicious parent-child process chains and LOLBin execution.</a:t>
-            </a:r>
-          </a:p>
-          <a:p/>
-          <a:p>
-            <a:r>
-              <a:t>Agent 4: Classification. The quantitative core. It extracts 2,381 structural features matching the EMBER 2017 specification and scores the sample against our gradient-boosted decision trees.</a:t>
-            </a:r>
-          </a:p>
-          <a:p/>
-          <a:p>
-            <a:r>
-              <a:t>Agent 5: Explainable Reasoning. It evaluates the combined evidence from static heuristics, behavioral telemetry, and ML probabilities. It resolves ambiguities and writes a coherent, human-grade threat explanation.</a:t>
-            </a:r>
-          </a:p>
-          <a:p/>
-          <a:p>
-            <a:r>
-              <a:t>Agent 6: Defense Synthesis. Finally, this agent takes the findings and outputs a complete, deployable YARA rule, ensuring that security analysts don't just know what happened, but have the immediate means to block it."</a:t>
+              <a:t>Notice how our agents are structured:</a:t>
+            </a:r>
+          </a:p>
+          <a:p>
+            <a:r>
+              <a:t>Stage 1 handles raw speed: Triage and Static Analysis run in native C code. They take less than a millisecond to dissect headers, hashes, and imports.</a:t>
+            </a:r>
+          </a:p>
+          <a:p>
+            <a:r>
+              <a:t>Stage 2 handles intelligence: Behavioral analysis, 2,381-feature machine learning, human-readable reasoning, and automatic YARA rule generation.</a:t>
+            </a:r>
+          </a:p>
+          <a:p>
+            <a:r>
+              <a:t>Each agent does one job perfectly.</a:t>
             </a:r>
           </a:p>
         </p:txBody>
@@ -1227,42 +1027,27 @@
           <a:lstStyle/>
           <a:p>
             <a:r>
-              <a:t>[JUDGES PRESENTATION SCRIPT - SLIDE 5: C-CORE ACCELERATION]</a:t>
-            </a:r>
-          </a:p>
-          <a:p>
-            <a:r>
-              <a:t>"Now, let's discuss a major engineering differentiator: our Native C-Core Accelerator.</a:t>
-            </a:r>
-          </a:p>
-          <a:p/>
-          <a:p>
-            <a:r>
-              <a:t>Most AI and security startups write everything in Python. While Python is great for rapid orchestration, it is fundamentally unsuitable for byte-level binary parsing and high-throughput hashing. </a:t>
-            </a:r>
-          </a:p>
-          <a:p/>
-          <a:p>
-            <a:r>
-              <a:t>Consider PE import directory parsing. In standard Python security stacks, pefile takes ~50 milliseconds per file just to walk the PE header and unpack import descriptors. In src/c/pe_imports.c, our native C routine maps the struct directly into memory and resolves RVAs in less than 0.1 milliseconds. That is over 500 times faster.</a:t>
-            </a:r>
-          </a:p>
-          <a:p/>
-          <a:p>
-            <a:r>
-              <a:t>For pattern scanning, instead of compiling heavy Python regular expressions, our C sliding-window scanner checks for registry keys, scheduled tasks, and PowerShell cradles in 0.8 milliseconds — an 18.7x speedup.</a:t>
-            </a:r>
-          </a:p>
-          <a:p/>
-          <a:p>
-            <a:r>
-              <a:t>For cryptographic hashing, Python's hashlib traditionally requires either reading the file three times or juggling multiple stream objects. In src/c/hash.c, we read in 64KB blocks and update MD5, SHA-1, and SHA-256 concurrently in a single IO pass.</a:t>
-            </a:r>
-          </a:p>
-          <a:p/>
-          <a:p>
-            <a:r>
-              <a:t>Best of all: zero external OpenSSL dependencies. It compiles into a standalone CLI binary nullify-core and a ctypes shared library with transparent fallback to pure Python if native compilation is unavailable."</a:t>
+              <a:t>Why is Nullify so fast? Because we identified the slowest parts of Python security tools and rewrote them in native C.</a:t>
+            </a:r>
+          </a:p>
+          <a:p>
+            <a:r>
+              <a:t>- Parsing Windows PE imports used to take 50 milliseconds. In C, it takes 0.1 milliseconds. That is over 500x faster.</a:t>
+            </a:r>
+          </a:p>
+          <a:p>
+            <a:r>
+              <a:t>- Pattern scanning is 18x faster.</a:t>
+            </a:r>
+          </a:p>
+          <a:p>
+            <a:r>
+              <a:t>- Concurrent file hashing is 8x faster.</a:t>
+            </a:r>
+          </a:p>
+          <a:p>
+            <a:r>
+              <a:t>And we built it with zero external C dependencies — no OpenSSL link issues, no memory leaks.</a:t>
             </a:r>
           </a:p>
         </p:txBody>
@@ -1332,36 +1117,17 @@
           <a:lstStyle/>
           <a:p>
             <a:r>
-              <a:t>[JUDGES PRESENTATION SCRIPT - SLIDE 6: MACHINE LEARNING]</a:t>
-            </a:r>
-          </a:p>
-          <a:p>
-            <a:r>
-              <a:t>"Moving to our Machine Learning layer. Many AI security projects use black-box language models that hallucinate or make uncalibrated guesses on binary content.</a:t>
-            </a:r>
-          </a:p>
-          <a:p/>
-          <a:p>
-            <a:r>
-              <a:t>Nullify anchors its statistical classification in the EMBER 2017 v2 benchmark — the gold standard dataset comprising 1.1 million verified binaries.</a:t>
-            </a:r>
-          </a:p>
-          <a:p/>
-          <a:p>
-            <a:r>
-              <a:t>We extract a 2,381-dimensional feature vector capturing byte entropy, byte frequency distributions, printable string metrics, and PE structural headers. Our gradient-boosted decision trees deliver an ROC-AUC exceeding 0.9995 with microsecond inference times on a standard CPU.</a:t>
-            </a:r>
-          </a:p>
-          <a:p/>
-          <a:p>
-            <a:r>
-              <a:t>Crucially, we engineered a specific safeguard for non-Windows targets. When scanning Linux ELF binaries, standard PE classifiers fail, generating high false-positive alerts. Nullify's triage layer intercepts ELF headers and reroutes analysis to behavioral and static indicators rather than feeding malformed structures to a Windows model.</a:t>
-            </a:r>
-          </a:p>
-          <a:p/>
-          <a:p>
-            <a:r>
-              <a:t>Furthermore, we verified 100% numerical parity: our native C feature extractor produces the exact same numerical vectors as Python, guaranteeing identical model predictions at 7x higher speed."</a:t>
+              <a:t>A lot of security AI projects use large language models that make uncalibrated guesses.</a:t>
+            </a:r>
+          </a:p>
+          <a:p>
+            <a:r>
+              <a:t>Nullify uses proven gradient-boosted trees trained on 1.1 million files from the EMBER benchmark.</a:t>
+            </a:r>
+          </a:p>
+          <a:p>
+            <a:r>
+              <a:t>We look at 2,381 structural features. And we engineered a specific Linux guard so non-Windows binaries never trigger false positives.</a:t>
             </a:r>
           </a:p>
         </p:txBody>
@@ -1431,36 +1197,22 @@
           <a:lstStyle/>
           <a:p>
             <a:r>
-              <a:t>[JUDGES PRESENTATION SCRIPT - SLIDE 7: EXPLAINABLE YARA DEFENSE]</a:t>
-            </a:r>
-          </a:p>
-          <a:p>
-            <a:r>
-              <a:t>"Here is where Nullify transforms threat detection into active organizational immunity.</a:t>
-            </a:r>
-          </a:p>
-          <a:p/>
-          <a:p>
-            <a:r>
-              <a:t>Traditional antivirus flags a file and displays an obscure alert like 'Win32.Malware.Gen'. The SOC analyst has to manually reverse engineer the binary to understand what it does.</a:t>
-            </a:r>
-          </a:p>
-          <a:p/>
-          <a:p>
-            <a:r>
-              <a:t>Nullify's Reasoning Agent provides immediate MITRE ATT&amp;CK attribution. If a sample imports VirtualAllocEx and CreateRemoteThread, it explicitly tags T1055 Process Injection. If it contains registry keys, it tags T1547.001.</a:t>
-            </a:r>
-          </a:p>
-          <a:p/>
-          <a:p>
-            <a:r>
-              <a:t>Even more importantly, our Defense Synthesis Agent dynamically writes an enterprise-grade YARA rule tailored to the specimen. On the right, you can see actual output from Nullify: complete with metadata, extracted string signatures, hex byte opcodes, and PE header conditions. </a:t>
-            </a:r>
-          </a:p>
-          <a:p/>
-          <a:p>
-            <a:r>
-              <a:t>This rule can be instantly ingested by CrowdStrike, SentinelOne, or Suricata to quarantine variants across the entire enterprise in seconds."</a:t>
+              <a:t>Telling an analyst 'this file is bad' is only half the job.</a:t>
+            </a:r>
+          </a:p>
+          <a:p>
+            <a:r>
+              <a:t>Nullify explains why: it maps the threat to MITRE ATT&amp;CK tactics.</a:t>
+            </a:r>
+          </a:p>
+          <a:p>
+            <a:r>
+              <a:t>And then it writes the actual YARA rule shown on screen.</a:t>
+            </a:r>
+          </a:p>
+          <a:p>
+            <a:r>
+              <a:t>You can copy this rule and deploy it to your firewalls and endpoints in seconds.</a:t>
             </a:r>
           </a:p>
         </p:txBody>
@@ -1530,50 +1282,27 @@
           <a:lstStyle/>
           <a:p>
             <a:r>
-              <a:t>[JUDGES PRESENTATION SCRIPT - SLIDE 8: BENCHMARKS]</a:t>
-            </a:r>
-          </a:p>
-          <a:p>
-            <a:r>
-              <a:t>"Let's look at the hard empirical data.</a:t>
-            </a:r>
-          </a:p>
-          <a:p/>
-          <a:p>
-            <a:r>
-              <a:t>In software testing, we maintain a 100% automated test pass rate with 62 out of 62 pytest cases executing cleanly across Linux ELF and Windows PE targets.</a:t>
-            </a:r>
-          </a:p>
-          <a:p/>
-          <a:p>
-            <a:r>
-              <a:t>Look at the comparison table on screen:</a:t>
-            </a:r>
-          </a:p>
-          <a:p>
-            <a:r>
-              <a:t>- A traditional cloud sandbox takes 180,000 milliseconds (3 full minutes) to deliver a verdict.</a:t>
-            </a:r>
-          </a:p>
-          <a:p>
-            <a:r>
-              <a:t>- A commercial EDR takes several seconds and provides an opaque vendor alert.</a:t>
-            </a:r>
-          </a:p>
-          <a:p>
-            <a:r>
-              <a:t>- Standard Python tooling takes ~85 milliseconds and consumes hundreds of megabytes of RAM.</a:t>
-            </a:r>
-          </a:p>
-          <a:p>
-            <a:r>
-              <a:t>- Nullify delivers full static triage, cryptographic multi-hashing, EMBER ML feature extraction, and MITRE attribution in 13.2 milliseconds.</a:t>
-            </a:r>
-          </a:p>
-          <a:p/>
-          <a:p>
-            <a:r>
-              <a:t>That translates to roughly 75 files per second per CPU core. A single commodity server running Nullify can process millions of binaries daily at line-rate without breaking a sweat."</a:t>
+              <a:t>Look at the numbers on screen:</a:t>
+            </a:r>
+          </a:p>
+          <a:p>
+            <a:r>
+              <a:t>A cloud sandbox takes 15 minutes.</a:t>
+            </a:r>
+          </a:p>
+          <a:p>
+            <a:r>
+              <a:t>Standard Python tools take 85 milliseconds and crash under load.</a:t>
+            </a:r>
+          </a:p>
+          <a:p>
+            <a:r>
+              <a:t>Traditional antivirus is fast, but blind to new malware.</a:t>
+            </a:r>
+          </a:p>
+          <a:p>
+            <a:r>
+              <a:t>Nullify gives you the best of both: 13.2 millisecond speed, zero-day machine learning, and automated YARA rules.</a:t>
             </a:r>
           </a:p>
         </p:txBody>
@@ -1643,30 +1372,17 @@
           <a:lstStyle/>
           <a:p>
             <a:r>
-              <a:t>[JUDGES PRESENTATION SCRIPT - SLIDE 9: USER EXPERIENCE]</a:t>
-            </a:r>
-          </a:p>
-          <a:p>
-            <a:r>
-              <a:t>"A powerful security engine is only as good as its usability. We designed Nullify to serve both executive analysts and hardcore command-line operators.</a:t>
-            </a:r>
-          </a:p>
-          <a:p/>
-          <a:p>
-            <a:r>
-              <a:t>On the left is our Web Console, running locally at localhost:8000. It follows the RAVN Minimalist Luxury design philosophy — high-contrast monochrome tones, Instrument Serif typography, and bento-box result cards. Analysts can drag and drop a suspicious file and watch the six agents run in real time, inspect confidence gauges, and copy auto-generated YARA rules in one click.</a:t>
-            </a:r>
-          </a:p>
-          <a:p/>
-          <a:p>
-            <a:r>
-              <a:t>On the right is our Terminal Console. Instead of forcing analysts to memorize complex flags, running 'nullify' with zero arguments boots an illuminated ASCII art console with an interactive numbered menu. Analysts can launch quick scans, batch analyze directories, or trigger sandboxed detonations with a single keystroke.</a:t>
-            </a:r>
-          </a:p>
-          <a:p/>
-          <a:p>
-            <a:r>
-              <a:t>Both interfaces sit on top of the exact same native C engine and agent pipeline."</a:t>
+              <a:t>We built Nullify with two clean interfaces:</a:t>
+            </a:r>
+          </a:p>
+          <a:p>
+            <a:r>
+              <a:t>On the left: A modern web console running at localhost:8000. Drag and drop any file, see live confidence scores, and copy YARA rules.</a:t>
+            </a:r>
+          </a:p>
+          <a:p>
+            <a:r>
+              <a:t>On the right: A single-command terminal interface. Just type 'nullify' with no confusing arguments, and an interactive menu guides you through scanning.</a:t>
             </a:r>
           </a:p>
         </p:txBody>
@@ -4687,7 +4403,7 @@
             <a:avLst/>
           </a:prstGeom>
           <a:solidFill>
-            <a:srgbClr val="191510"/>
+            <a:srgbClr val="15120E"/>
           </a:solidFill>
           <a:ln>
             <a:noFill/>
@@ -4723,18 +4439,18 @@
         </p:nvSpPr>
         <p:spPr>
           <a:xfrm>
-            <a:off x="457200" y="457200"/>
-            <a:ext cx="11277295" cy="5943600"/>
+            <a:off x="548640" y="548640"/>
+            <a:ext cx="11094415" cy="5760720"/>
           </a:xfrm>
           <a:prstGeom prst="roundRect">
             <a:avLst/>
           </a:prstGeom>
           <a:solidFill>
-            <a:srgbClr val="191510"/>
+            <a:srgbClr val="15120E"/>
           </a:solidFill>
-          <a:ln w="12700">
+          <a:ln w="19050">
             <a:solidFill>
-              <a:srgbClr val="352F27"/>
+              <a:srgbClr val="322B22"/>
             </a:solidFill>
           </a:ln>
         </p:spPr>
@@ -4768,18 +4484,18 @@
         </p:nvSpPr>
         <p:spPr>
           <a:xfrm>
-            <a:off x="822960" y="822960"/>
-            <a:ext cx="2377440" cy="320040"/>
+            <a:off x="1005840" y="1005840"/>
+            <a:ext cx="2926080" cy="365760"/>
           </a:xfrm>
           <a:prstGeom prst="roundRect">
             <a:avLst/>
           </a:prstGeom>
           <a:solidFill>
-            <a:srgbClr val="221D17"/>
+            <a:srgbClr val="201B15"/>
           </a:solidFill>
-          <a:ln w="9525">
+          <a:ln w="12700">
             <a:solidFill>
-              <a:srgbClr val="352F27"/>
+              <a:srgbClr val="322B22"/>
             </a:solidFill>
           </a:ln>
         </p:spPr>
@@ -4798,11 +4514,11 @@
           </a:fontRef>
         </p:style>
         <p:txBody>
-          <a:bodyPr rtlCol="0" anchor="ctr" wrap="none" lIns="0" tIns="0" rIns="0" bIns="0"/>
+          <a:bodyPr rtlCol="0" anchor="ctr" lIns="0" tIns="0" rIns="0" bIns="0"/>
           <a:lstStyle/>
           <a:p>
             <a:pPr algn="ctr">
-              <a:defRPr sz="800" b="1">
+              <a:defRPr sz="900" b="1">
                 <a:solidFill>
                   <a:srgbClr val="10B981"/>
                 </a:solidFill>
@@ -4810,7 +4526,7 @@
               </a:defRPr>
             </a:pPr>
             <a:r>
-              <a:t>● AUTONOMOUS DEFENSE PLATFORM</a:t>
+              <a:t>●  AUTONOMOUS CYBER DEFENSE</a:t>
             </a:r>
           </a:p>
         </p:txBody>
@@ -4823,18 +4539,18 @@
         </p:nvSpPr>
         <p:spPr>
           <a:xfrm>
-            <a:off x="3337560" y="822960"/>
-            <a:ext cx="2011680" cy="320040"/>
+            <a:off x="4069080" y="1005840"/>
+            <a:ext cx="2286000" cy="365760"/>
           </a:xfrm>
           <a:prstGeom prst="roundRect">
             <a:avLst/>
           </a:prstGeom>
           <a:solidFill>
-            <a:srgbClr val="221D17"/>
+            <a:srgbClr val="201B15"/>
           </a:solidFill>
-          <a:ln w="9525">
+          <a:ln w="12700">
             <a:solidFill>
-              <a:srgbClr val="352F27"/>
+              <a:srgbClr val="322B22"/>
             </a:solidFill>
           </a:ln>
         </p:spPr>
@@ -4853,19 +4569,19 @@
           </a:fontRef>
         </p:style>
         <p:txBody>
-          <a:bodyPr rtlCol="0" anchor="ctr" wrap="none" lIns="0" tIns="0" rIns="0" bIns="0"/>
+          <a:bodyPr rtlCol="0" anchor="ctr" lIns="0" tIns="0" rIns="0" bIns="0"/>
           <a:lstStyle/>
           <a:p>
             <a:pPr algn="ctr">
-              <a:defRPr sz="800" b="1">
-                <a:solidFill>
-                  <a:srgbClr val="A39E93"/>
+              <a:defRPr sz="900" b="1">
+                <a:solidFill>
+                  <a:srgbClr val="BFB9AF"/>
                 </a:solidFill>
                 <a:latin typeface="Consolas"/>
               </a:defRPr>
             </a:pPr>
             <a:r>
-              <a:t>SUB-MILLISECOND C-CORE</a:t>
+              <a:t>SUB-15ms C-ENGINE</a:t>
             </a:r>
           </a:p>
         </p:txBody>
@@ -4878,18 +4594,18 @@
         </p:nvSpPr>
         <p:spPr>
           <a:xfrm>
-            <a:off x="5486400" y="822960"/>
-            <a:ext cx="1828800" cy="320040"/>
+            <a:off x="6492240" y="1005840"/>
+            <a:ext cx="2286000" cy="365760"/>
           </a:xfrm>
           <a:prstGeom prst="roundRect">
             <a:avLst/>
           </a:prstGeom>
           <a:solidFill>
-            <a:srgbClr val="221D17"/>
+            <a:srgbClr val="201B15"/>
           </a:solidFill>
-          <a:ln w="9525">
+          <a:ln w="12700">
             <a:solidFill>
-              <a:srgbClr val="352F27"/>
+              <a:srgbClr val="322B22"/>
             </a:solidFill>
           </a:ln>
         </p:spPr>
@@ -4908,43 +4624,108 @@
           </a:fontRef>
         </p:style>
         <p:txBody>
-          <a:bodyPr rtlCol="0" anchor="ctr" wrap="none" lIns="0" tIns="0" rIns="0" bIns="0"/>
+          <a:bodyPr rtlCol="0" anchor="ctr" lIns="0" tIns="0" rIns="0" bIns="0"/>
           <a:lstStyle/>
           <a:p>
             <a:pPr algn="ctr">
-              <a:defRPr sz="800" b="1">
-                <a:solidFill>
-                  <a:srgbClr val="A39E93"/>
+              <a:defRPr sz="900" b="1">
+                <a:solidFill>
+                  <a:srgbClr val="BFB9AF"/>
                 </a:solidFill>
                 <a:latin typeface="Consolas"/>
               </a:defRPr>
             </a:pPr>
             <a:r>
-              <a:t>EMBER 2017 v2 ML</a:t>
-            </a:r>
-          </a:p>
-        </p:txBody>
-      </p:sp>
-      <p:sp>
-        <p:nvSpPr>
-          <p:cNvPr id="7" name="Rounded Rectangle 6"/>
+              <a:t>100% AIR-GAPPED</a:t>
+            </a:r>
+          </a:p>
+        </p:txBody>
+      </p:sp>
+      <p:sp>
+        <p:nvSpPr>
+          <p:cNvPr id="7" name="TextBox 6"/>
+          <p:cNvSpPr txBox="1"/>
+          <p:nvPr/>
+        </p:nvSpPr>
+        <p:spPr>
+          <a:xfrm>
+            <a:off x="1005840" y="1828800"/>
+            <a:ext cx="10058400" cy="2377440"/>
+          </a:xfrm>
+          <a:prstGeom prst="rect">
+            <a:avLst/>
+          </a:prstGeom>
+          <a:noFill/>
+        </p:spPr>
+        <p:txBody>
+          <a:bodyPr wrap="square" lIns="0" tIns="0" rIns="0" bIns="0">
+            <a:spAutoFit/>
+          </a:bodyPr>
+          <a:lstStyle/>
+          <a:p>
+            <a:pPr>
+              <a:defRPr sz="5600" b="1">
+                <a:solidFill>
+                  <a:srgbClr val="FAF8F5"/>
+                </a:solidFill>
+                <a:latin typeface="Georgia"/>
+              </a:defRPr>
+            </a:pPr>
+            <a:r>
+              <a:t>See it. Trace it.</a:t>
+            </a:r>
+          </a:p>
+          <a:p>
+            <a:pPr>
+              <a:defRPr i="1" sz="5600" b="1">
+                <a:solidFill>
+                  <a:srgbClr val="10B981"/>
+                </a:solidFill>
+                <a:latin typeface="Georgia"/>
+              </a:defRPr>
+            </a:pPr>
+            <a:r>
+              <a:t>Nullify it.</a:t>
+            </a:r>
+          </a:p>
+          <a:p>
+            <a:pPr>
+              <a:spcBef>
+                <a:spcPts val="1600"/>
+              </a:spcBef>
+              <a:defRPr sz="2000">
+                <a:solidFill>
+                  <a:srgbClr val="BFB9AF"/>
+                </a:solidFill>
+                <a:latin typeface="Segoe UI"/>
+              </a:defRPr>
+            </a:pPr>
+            <a:r>
+              <a:t>Autonomous AI Threat Defense — From Detection to Immunity in 15 Milliseconds.</a:t>
+            </a:r>
+          </a:p>
+        </p:txBody>
+      </p:sp>
+      <p:sp>
+        <p:nvSpPr>
+          <p:cNvPr id="8" name="Rounded Rectangle 7"/>
           <p:cNvSpPr/>
           <p:nvPr/>
         </p:nvSpPr>
         <p:spPr>
           <a:xfrm>
-            <a:off x="7452360" y="822960"/>
-            <a:ext cx="2103120" cy="320040"/>
+            <a:off x="1005840" y="4434840"/>
+            <a:ext cx="3291840" cy="1280160"/>
           </a:xfrm>
           <a:prstGeom prst="roundRect">
             <a:avLst/>
           </a:prstGeom>
           <a:solidFill>
-            <a:srgbClr val="221D17"/>
+            <a:srgbClr val="201B15"/>
           </a:solidFill>
-          <a:ln w="9525">
+          <a:ln w="12700">
             <a:solidFill>
-              <a:srgbClr val="352F27"/>
+              <a:srgbClr val="322B22"/>
             </a:solidFill>
           </a:ln>
         </p:spPr>
@@ -4963,47 +4744,13 @@
           </a:fontRef>
         </p:style>
         <p:txBody>
-          <a:bodyPr rtlCol="0" anchor="ctr" wrap="none" lIns="0" tIns="0" rIns="0" bIns="0"/>
-          <a:lstStyle/>
-          <a:p>
-            <a:pPr algn="ctr">
-              <a:defRPr sz="800" b="1">
-                <a:solidFill>
-                  <a:srgbClr val="A39E93"/>
-                </a:solidFill>
-                <a:latin typeface="Consolas"/>
-              </a:defRPr>
-            </a:pPr>
-            <a:r>
-              <a:t>EXPLAINABLE DEFENSE</a:t>
-            </a:r>
-          </a:p>
-        </p:txBody>
-      </p:sp>
-      <p:pic>
-        <p:nvPicPr>
-          <p:cNvPr id="8" name="Picture 7" descr="ascii-art-fateget.png"/>
-          <p:cNvPicPr>
-            <a:picLocks noChangeAspect="1"/>
-          </p:cNvPicPr>
-          <p:nvPr/>
-        </p:nvPicPr>
-        <p:blipFill>
-          <a:blip r:embed="rId2"/>
-          <a:stretch>
-            <a:fillRect/>
-          </a:stretch>
-        </p:blipFill>
-        <p:spPr>
-          <a:xfrm>
-            <a:off x="822960" y="1371600"/>
-            <a:ext cx="6217920" cy="1298448"/>
-          </a:xfrm>
-          <a:prstGeom prst="rect">
-            <a:avLst/>
-          </a:prstGeom>
-        </p:spPr>
-      </p:pic>
+          <a:bodyPr rtlCol="0" anchor="ctr"/>
+          <a:lstStyle/>
+          <a:p>
+            <a:pPr algn="ctr"/>
+          </a:p>
+        </p:txBody>
+      </p:sp>
       <p:sp>
         <p:nvSpPr>
           <p:cNvPr id="9" name="TextBox 8"/>
@@ -5012,8 +4759,8 @@
         </p:nvSpPr>
         <p:spPr>
           <a:xfrm>
-            <a:off x="822960" y="2788920"/>
-            <a:ext cx="10058400" cy="1280160"/>
+            <a:off x="1234440" y="4572000"/>
+            <a:ext cx="2834640" cy="1005840"/>
           </a:xfrm>
           <a:prstGeom prst="rect">
             <a:avLst/>
@@ -5027,31 +4774,31 @@
           <a:lstStyle/>
           <a:p>
             <a:pPr>
-              <a:defRPr sz="4400" b="1">
+              <a:defRPr sz="1600" b="1">
                 <a:solidFill>
                   <a:srgbClr val="FAF8F5"/>
                 </a:solidFill>
-                <a:latin typeface="Georgia"/>
-              </a:defRPr>
-            </a:pPr>
-            <a:r>
-              <a:t>See it. Trace it. Nullify it.</a:t>
+                <a:latin typeface="Segoe UI"/>
+              </a:defRPr>
+            </a:pPr>
+            <a:r>
+              <a:t>⚡ 15ms Speed</a:t>
             </a:r>
           </a:p>
           <a:p>
             <a:pPr>
               <a:spcBef>
-                <a:spcPts val="800"/>
+                <a:spcPts val="400"/>
               </a:spcBef>
-              <a:defRPr sz="1700">
-                <a:solidFill>
-                  <a:srgbClr val="A39E93"/>
+              <a:defRPr sz="1300">
+                <a:solidFill>
+                  <a:srgbClr val="BFB9AF"/>
                 </a:solidFill>
                 <a:latin typeface="Segoe UI"/>
               </a:defRPr>
             </a:pPr>
             <a:r>
-              <a:t>Autonomous Multi-Agent Threat Intelligence &amp; Real-Time Binary Neutralization</a:t>
+              <a:t>Native C11 core analyzes binaries faster than a blink.</a:t>
             </a:r>
           </a:p>
         </p:txBody>
@@ -5064,18 +4811,18 @@
         </p:nvSpPr>
         <p:spPr>
           <a:xfrm>
-            <a:off x="822960" y="4251960"/>
-            <a:ext cx="3291840" cy="1325880"/>
+            <a:off x="4480560" y="4434840"/>
+            <a:ext cx="3291840" cy="1280160"/>
           </a:xfrm>
           <a:prstGeom prst="roundRect">
             <a:avLst/>
           </a:prstGeom>
           <a:solidFill>
-            <a:srgbClr val="221D17"/>
+            <a:srgbClr val="201B15"/>
           </a:solidFill>
           <a:ln w="12700">
             <a:solidFill>
-              <a:srgbClr val="352F27"/>
+              <a:srgbClr val="322B22"/>
             </a:solidFill>
           </a:ln>
         </p:spPr>
@@ -5109,8 +4856,8 @@
         </p:nvSpPr>
         <p:spPr>
           <a:xfrm>
-            <a:off x="1005840" y="4370832"/>
-            <a:ext cx="2926080" cy="1097280"/>
+            <a:off x="4709160" y="4572000"/>
+            <a:ext cx="2834640" cy="1005840"/>
           </a:xfrm>
           <a:prstGeom prst="rect">
             <a:avLst/>
@@ -5124,7 +4871,7 @@
           <a:lstStyle/>
           <a:p>
             <a:pPr>
-              <a:defRPr sz="1300" b="1">
+              <a:defRPr sz="1600" b="1">
                 <a:solidFill>
                   <a:srgbClr val="FAF8F5"/>
                 </a:solidFill>
@@ -5132,7 +4879,7 @@
               </a:defRPr>
             </a:pPr>
             <a:r>
-              <a:t>⚡ Ultra-Fast C-Core</a:t>
+              <a:t>🤖 6 AI Agents</a:t>
             </a:r>
           </a:p>
           <a:p>
@@ -5140,15 +4887,15 @@
               <a:spcBef>
                 <a:spcPts val="400"/>
               </a:spcBef>
-              <a:defRPr sz="1050">
-                <a:solidFill>
-                  <a:srgbClr val="A39E93"/>
-                </a:solidFill>
-                <a:latin typeface="Calibri"/>
-              </a:defRPr>
-            </a:pPr>
-            <a:r>
-              <a:t>Pure C11 (-O3) standalone engine performing full PE/ELF static triage in under 15 milliseconds.</a:t>
+              <a:defRPr sz="1300">
+                <a:solidFill>
+                  <a:srgbClr val="BFB9AF"/>
+                </a:solidFill>
+                <a:latin typeface="Segoe UI"/>
+              </a:defRPr>
+            </a:pPr>
+            <a:r>
+              <a:t>Specialized agents team up to inspect, explain, and defend.</a:t>
             </a:r>
           </a:p>
         </p:txBody>
@@ -5161,18 +4908,18 @@
         </p:nvSpPr>
         <p:spPr>
           <a:xfrm>
-            <a:off x="4297680" y="4251960"/>
-            <a:ext cx="3291840" cy="1325880"/>
+            <a:off x="7955279" y="4434840"/>
+            <a:ext cx="3291840" cy="1280160"/>
           </a:xfrm>
           <a:prstGeom prst="roundRect">
             <a:avLst/>
           </a:prstGeom>
           <a:solidFill>
-            <a:srgbClr val="221D17"/>
+            <a:srgbClr val="201B15"/>
           </a:solidFill>
           <a:ln w="12700">
             <a:solidFill>
-              <a:srgbClr val="352F27"/>
+              <a:srgbClr val="322B22"/>
             </a:solidFill>
           </a:ln>
         </p:spPr>
@@ -5206,8 +4953,8 @@
         </p:nvSpPr>
         <p:spPr>
           <a:xfrm>
-            <a:off x="4480560" y="4370832"/>
-            <a:ext cx="2926080" cy="1097280"/>
+            <a:off x="8183879" y="4572000"/>
+            <a:ext cx="2834640" cy="1005840"/>
           </a:xfrm>
           <a:prstGeom prst="rect">
             <a:avLst/>
@@ -5221,7 +4968,7 @@
           <a:lstStyle/>
           <a:p>
             <a:pPr>
-              <a:defRPr sz="1300" b="1">
+              <a:defRPr sz="1600" b="1">
                 <a:solidFill>
                   <a:srgbClr val="FAF8F5"/>
                 </a:solidFill>
@@ -5229,7 +4976,7 @@
               </a:defRPr>
             </a:pPr>
             <a:r>
-              <a:t>🤖 6 Collaborative Agents</a:t>
+              <a:t>🛡️ Auto-YARA</a:t>
             </a:r>
           </a:p>
           <a:p>
@@ -5237,40 +4984,38 @@
               <a:spcBef>
                 <a:spcPts val="400"/>
               </a:spcBef>
-              <a:defRPr sz="1050">
-                <a:solidFill>
-                  <a:srgbClr val="A39E93"/>
-                </a:solidFill>
-                <a:latin typeface="Calibri"/>
-              </a:defRPr>
-            </a:pPr>
-            <a:r>
-              <a:t>Triage, Static, Behavioral, EMBER ML, Reasoning, and Defense Synthesis working in harmony.</a:t>
-            </a:r>
-          </a:p>
-        </p:txBody>
-      </p:sp>
-      <p:sp>
-        <p:nvSpPr>
-          <p:cNvPr id="14" name="Rounded Rectangle 13"/>
+              <a:defRPr sz="1300">
+                <a:solidFill>
+                  <a:srgbClr val="BFB9AF"/>
+                </a:solidFill>
+                <a:latin typeface="Segoe UI"/>
+              </a:defRPr>
+            </a:pPr>
+            <a:r>
+              <a:t>Writes instant defense rules to protect your whole network.</a:t>
+            </a:r>
+          </a:p>
+        </p:txBody>
+      </p:sp>
+      <p:sp>
+        <p:nvSpPr>
+          <p:cNvPr id="14" name="Rectangle 13"/>
           <p:cNvSpPr/>
           <p:nvPr/>
         </p:nvSpPr>
         <p:spPr>
           <a:xfrm>
-            <a:off x="7772400" y="4251960"/>
-            <a:ext cx="3291840" cy="1325880"/>
-          </a:xfrm>
-          <a:prstGeom prst="roundRect">
+            <a:off x="822960" y="6263640"/>
+            <a:ext cx="10545775" cy="9525"/>
+          </a:xfrm>
+          <a:prstGeom prst="rect">
             <a:avLst/>
           </a:prstGeom>
           <a:solidFill>
-            <a:srgbClr val="221D17"/>
+            <a:srgbClr val="322B22"/>
           </a:solidFill>
-          <a:ln w="12700">
-            <a:solidFill>
-              <a:srgbClr val="352F27"/>
-            </a:solidFill>
+          <a:ln>
+            <a:noFill/>
           </a:ln>
         </p:spPr>
         <p:style>
@@ -5303,60 +5048,8 @@
         </p:nvSpPr>
         <p:spPr>
           <a:xfrm>
-            <a:off x="7955279" y="4370832"/>
-            <a:ext cx="2926080" cy="1097280"/>
-          </a:xfrm>
-          <a:prstGeom prst="rect">
-            <a:avLst/>
-          </a:prstGeom>
-          <a:noFill/>
-        </p:spPr>
-        <p:txBody>
-          <a:bodyPr wrap="square" lIns="0" tIns="0" rIns="0" bIns="0">
-            <a:spAutoFit/>
-          </a:bodyPr>
-          <a:lstStyle/>
-          <a:p>
-            <a:pPr>
-              <a:defRPr sz="1300" b="1">
-                <a:solidFill>
-                  <a:srgbClr val="FAF8F5"/>
-                </a:solidFill>
-                <a:latin typeface="Segoe UI"/>
-              </a:defRPr>
-            </a:pPr>
-            <a:r>
-              <a:t>🛡️ Auto-Synthesizing YARA</a:t>
-            </a:r>
-          </a:p>
-          <a:p>
-            <a:pPr>
-              <a:spcBef>
-                <a:spcPts val="400"/>
-              </a:spcBef>
-              <a:defRPr sz="1050">
-                <a:solidFill>
-                  <a:srgbClr val="A39E93"/>
-                </a:solidFill>
-                <a:latin typeface="Calibri"/>
-              </a:defRPr>
-            </a:pPr>
-            <a:r>
-              <a:t>Translates observed threat heuristics directly into deployable enterprise detection rules.</a:t>
-            </a:r>
-          </a:p>
-        </p:txBody>
-      </p:sp>
-      <p:sp>
-        <p:nvSpPr>
-          <p:cNvPr id="16" name="TextBox 15"/>
-          <p:cNvSpPr txBox="1"/>
-          <p:nvPr/>
-        </p:nvSpPr>
-        <p:spPr>
-          <a:xfrm>
-            <a:off x="822960" y="5760720"/>
-            <a:ext cx="10058400" cy="365760"/>
+            <a:off x="822960" y="6327648"/>
+            <a:ext cx="10545775" cy="320040"/>
           </a:xfrm>
           <a:prstGeom prst="rect">
             <a:avLst/>
@@ -5369,111 +5062,32 @@
           </a:bodyPr>
           <a:lstStyle/>
           <a:p>
-            <a:pPr>
-              <a:defRPr sz="950">
-                <a:solidFill>
-                  <a:srgbClr val="10B981"/>
-                </a:solidFill>
-                <a:latin typeface="Consolas"/>
-              </a:defRPr>
-            </a:pPr>
-            <a:r>
-              <a:t>PRESENTED TO THE PANEL OF JUDGES  ●  PROJECT NULLIFY  ●  OPEN-SOURCE ENTERPRISE DEFENSE</a:t>
-            </a:r>
-          </a:p>
-        </p:txBody>
-      </p:sp>
-      <p:sp>
-        <p:nvSpPr>
-          <p:cNvPr id="17" name="Rectangle 16"/>
-          <p:cNvSpPr/>
-          <p:nvPr/>
-        </p:nvSpPr>
-        <p:spPr>
-          <a:xfrm>
-            <a:off x="731520" y="6263640"/>
-            <a:ext cx="10728655" cy="9525"/>
-          </a:xfrm>
-          <a:prstGeom prst="rect">
-            <a:avLst/>
-          </a:prstGeom>
-          <a:solidFill>
-            <a:srgbClr val="352F27"/>
-          </a:solidFill>
-          <a:ln>
-            <a:noFill/>
-          </a:ln>
-        </p:spPr>
-        <p:style>
-          <a:lnRef idx="1">
-            <a:schemeClr val="accent1"/>
-          </a:lnRef>
-          <a:fillRef idx="3">
-            <a:schemeClr val="accent1"/>
-          </a:fillRef>
-          <a:effectRef idx="2">
-            <a:schemeClr val="accent1"/>
-          </a:effectRef>
-          <a:fontRef idx="minor">
-            <a:schemeClr val="lt1"/>
-          </a:fontRef>
-        </p:style>
-        <p:txBody>
-          <a:bodyPr rtlCol="0" anchor="ctr"/>
-          <a:lstStyle/>
-          <a:p>
-            <a:pPr algn="ctr"/>
-          </a:p>
-        </p:txBody>
-      </p:sp>
-      <p:sp>
-        <p:nvSpPr>
-          <p:cNvPr id="18" name="TextBox 17"/>
-          <p:cNvSpPr txBox="1"/>
-          <p:nvPr/>
-        </p:nvSpPr>
-        <p:spPr>
-          <a:xfrm>
-            <a:off x="731520" y="6327648"/>
-            <a:ext cx="10728655" cy="320040"/>
-          </a:xfrm>
-          <a:prstGeom prst="rect">
-            <a:avLst/>
-          </a:prstGeom>
-          <a:noFill/>
-        </p:spPr>
-        <p:txBody>
-          <a:bodyPr wrap="none" lIns="0" tIns="0" rIns="0" bIns="0">
-            <a:spAutoFit/>
-          </a:bodyPr>
-          <a:lstStyle/>
-          <a:p>
-            <a:r>
-              <a:rPr sz="850">
-                <a:solidFill>
-                  <a:srgbClr val="736E65"/>
+            <a:r>
+              <a:rPr sz="950">
+                <a:solidFill>
+                  <a:srgbClr val="7D776E"/>
                 </a:solidFill>
                 <a:latin typeface="Consolas"/>
               </a:rPr>
-              <a:t>NULLIFY  ●  AUTONOMOUS MULTI-AGENT DEFENSE</a:t>
-            </a:r>
-            <a:r>
-              <a:rPr i="1" sz="900">
-                <a:solidFill>
-                  <a:srgbClr val="A39E93"/>
+              <a:t>NULLIFY  •  AUTONOMOUS CYBER DEFENSE</a:t>
+            </a:r>
+            <a:r>
+              <a:rPr i="1" sz="1000">
+                <a:solidFill>
+                  <a:srgbClr val="BFB9AF"/>
                 </a:solidFill>
                 <a:latin typeface="Georgia"/>
               </a:rPr>
-              <a:t>                       See it. Trace it. Nullify it.                       </a:t>
-            </a:r>
-            <a:r>
-              <a:rPr sz="850">
-                <a:solidFill>
-                  <a:srgbClr val="736E65"/>
+              <a:t>                               See it. Trace it. Nullify it.                               </a:t>
+            </a:r>
+            <a:r>
+              <a:rPr sz="950">
+                <a:solidFill>
+                  <a:srgbClr val="7D776E"/>
                 </a:solidFill>
                 <a:latin typeface="Consolas"/>
               </a:rPr>
-              <a:t>SLIDE 01 / 12</a:t>
+              <a:t>01 / 11</a:t>
             </a:r>
           </a:p>
         </p:txBody>
@@ -5547,8 +5161,44 @@
         </p:nvSpPr>
         <p:spPr>
           <a:xfrm>
-            <a:off x="731520" y="502920"/>
-            <a:ext cx="10698480" cy="365760"/>
+            <a:off x="822960" y="502920"/>
+            <a:ext cx="10515600" cy="320040"/>
+          </a:xfrm>
+          <a:prstGeom prst="rect">
+            <a:avLst/>
+          </a:prstGeom>
+          <a:noFill/>
+        </p:spPr>
+        <p:txBody>
+          <a:bodyPr wrap="none" lIns="0" tIns="0" rIns="0" bIns="0">
+            <a:spAutoFit/>
+          </a:bodyPr>
+          <a:lstStyle/>
+          <a:p>
+            <a:pPr>
+              <a:defRPr sz="1100" b="1">
+                <a:solidFill>
+                  <a:srgbClr val="059669"/>
+                </a:solidFill>
+                <a:latin typeface="Consolas"/>
+              </a:defRPr>
+            </a:pPr>
+            <a:r>
+              <a:t>●  SECURITY &amp; PRIVACY</a:t>
+            </a:r>
+          </a:p>
+        </p:txBody>
+      </p:sp>
+      <p:sp>
+        <p:nvSpPr>
+          <p:cNvPr id="4" name="TextBox 3"/>
+          <p:cNvSpPr txBox="1"/>
+          <p:nvPr/>
+        </p:nvSpPr>
+        <p:spPr>
+          <a:xfrm>
+            <a:off x="822960" y="822960"/>
+            <a:ext cx="10515600" cy="685800"/>
           </a:xfrm>
           <a:prstGeom prst="rect">
             <a:avLst/>
@@ -5562,51 +5212,15 @@
           <a:lstStyle/>
           <a:p>
             <a:pPr>
-              <a:defRPr sz="1000" b="1">
-                <a:solidFill>
-                  <a:srgbClr val="15803D"/>
-                </a:solidFill>
-                <a:latin typeface="Consolas"/>
-              </a:defRPr>
-            </a:pPr>
-            <a:r>
-              <a:t>09 // ENTERPRISE ARCHITECTURE</a:t>
-            </a:r>
-          </a:p>
-        </p:txBody>
-      </p:sp>
-      <p:sp>
-        <p:nvSpPr>
-          <p:cNvPr id="4" name="TextBox 3"/>
-          <p:cNvSpPr txBox="1"/>
-          <p:nvPr/>
-        </p:nvSpPr>
-        <p:spPr>
-          <a:xfrm>
-            <a:off x="731520" y="822960"/>
-            <a:ext cx="10698480" cy="731520"/>
-          </a:xfrm>
-          <a:prstGeom prst="rect">
-            <a:avLst/>
-          </a:prstGeom>
-          <a:noFill/>
-        </p:spPr>
-        <p:txBody>
-          <a:bodyPr wrap="square" lIns="0" tIns="0" rIns="0" bIns="0">
-            <a:spAutoFit/>
-          </a:bodyPr>
-          <a:lstStyle/>
-          <a:p>
-            <a:pPr>
-              <a:defRPr sz="2800" b="1">
-                <a:solidFill>
-                  <a:srgbClr val="191510"/>
+              <a:defRPr sz="3200" b="1">
+                <a:solidFill>
+                  <a:srgbClr val="15120E"/>
                 </a:solidFill>
                 <a:latin typeface="Georgia"/>
               </a:defRPr>
             </a:pPr>
             <a:r>
-              <a:t>Built for Zero-Trust &amp; Air-Gapped Environments</a:t>
+              <a:t>Your Data Never Leaves Your Network</a:t>
             </a:r>
           </a:p>
         </p:txBody>
@@ -5619,8 +5233,8 @@
         </p:nvSpPr>
         <p:spPr>
           <a:xfrm>
-            <a:off x="731520" y="1645920"/>
-            <a:ext cx="3429000" cy="4434840"/>
+            <a:off x="822960" y="1645920"/>
+            <a:ext cx="3383280" cy="4434840"/>
           </a:xfrm>
           <a:prstGeom prst="roundRect">
             <a:avLst/>
@@ -5630,7 +5244,7 @@
           </a:solidFill>
           <a:ln w="12700">
             <a:solidFill>
-              <a:srgbClr val="E5E2DD"/>
+              <a:srgbClr val="E2DCD2"/>
             </a:solidFill>
           </a:ln>
         </p:spPr>
@@ -5664,8 +5278,8 @@
         </p:nvSpPr>
         <p:spPr>
           <a:xfrm>
-            <a:off x="960120" y="1828800"/>
-            <a:ext cx="2971800" cy="4114800"/>
+            <a:off x="1097280" y="1920240"/>
+            <a:ext cx="2834640" cy="3840480"/>
           </a:xfrm>
           <a:prstGeom prst="rect">
             <a:avLst/>
@@ -5679,31 +5293,15 @@
           <a:lstStyle/>
           <a:p>
             <a:pPr>
-              <a:defRPr sz="850" b="1">
-                <a:solidFill>
-                  <a:srgbClr val="15803D"/>
-                </a:solidFill>
-                <a:latin typeface="Consolas"/>
-              </a:defRPr>
-            </a:pPr>
-            <a:r>
-              <a:t>ZERO TELEMETRY LEAKAGE</a:t>
-            </a:r>
-          </a:p>
-          <a:p>
-            <a:pPr>
-              <a:spcBef>
-                <a:spcPts val="400"/>
-              </a:spcBef>
-              <a:defRPr sz="1400" b="1">
-                <a:solidFill>
-                  <a:srgbClr val="191510"/>
+              <a:defRPr sz="2000" b="1">
+                <a:solidFill>
+                  <a:srgbClr val="059669"/>
                 </a:solidFill>
                 <a:latin typeface="Segoe UI"/>
               </a:defRPr>
             </a:pPr>
             <a:r>
-              <a:t>🔒 100% Local &amp; Air-Gapped</a:t>
+              <a:t>🔒 100% Local &amp; Private</a:t>
             </a:r>
           </a:p>
           <a:p>
@@ -5711,15 +5309,15 @@
               <a:spcBef>
                 <a:spcPts val="800"/>
               </a:spcBef>
-              <a:defRPr sz="1100">
-                <a:solidFill>
-                  <a:srgbClr val="66625B"/>
-                </a:solidFill>
-                <a:latin typeface="Calibri"/>
-              </a:defRPr>
-            </a:pPr>
-            <a:r>
-              <a:t>In defense, healthcare, and critical infrastructure, sending files to third-party cloud APIs (VirusTotal, cloud sandboxes) violates data sovereignty and leaks sensitive IP. Nullify runs 100% locally with zero cloud dependencies.</a:t>
+              <a:defRPr sz="1400" b="1">
+                <a:solidFill>
+                  <a:srgbClr val="15120E"/>
+                </a:solidFill>
+                <a:latin typeface="Segoe UI"/>
+              </a:defRPr>
+            </a:pPr>
+            <a:r>
+              <a:t>Zero Cloud Telemetry Leakage</a:t>
             </a:r>
           </a:p>
           <a:p>
@@ -5727,63 +5325,15 @@
               <a:spcBef>
                 <a:spcPts val="1400"/>
               </a:spcBef>
-              <a:defRPr sz="850" b="1">
-                <a:solidFill>
-                  <a:srgbClr val="191510"/>
-                </a:solidFill>
-                <a:latin typeface="Consolas"/>
-              </a:defRPr>
-            </a:pPr>
-            <a:r>
-              <a:t>KEY ADVANTAGES:</a:t>
-            </a:r>
-          </a:p>
-          <a:p>
-            <a:pPr>
-              <a:spcBef>
-                <a:spcPts val="300"/>
-              </a:spcBef>
-              <a:defRPr sz="1000">
-                <a:solidFill>
-                  <a:srgbClr val="66625B"/>
-                </a:solidFill>
-                <a:latin typeface="Calibri"/>
-              </a:defRPr>
-            </a:pPr>
-            <a:r>
-              <a:t>• Air-Gapped Ready: Operates with zero internet connectivity</a:t>
-            </a:r>
-          </a:p>
-          <a:p>
-            <a:pPr>
-              <a:spcBef>
-                <a:spcPts val="300"/>
-              </a:spcBef>
-              <a:defRPr sz="1000">
-                <a:solidFill>
-                  <a:srgbClr val="66625B"/>
-                </a:solidFill>
-                <a:latin typeface="Calibri"/>
-              </a:defRPr>
-            </a:pPr>
-            <a:r>
-              <a:t>• Confidential Data: Source code and proprietary binaries stay inside</a:t>
-            </a:r>
-          </a:p>
-          <a:p>
-            <a:pPr>
-              <a:spcBef>
-                <a:spcPts val="300"/>
-              </a:spcBef>
-              <a:defRPr sz="1000">
-                <a:solidFill>
-                  <a:srgbClr val="66625B"/>
-                </a:solidFill>
-                <a:latin typeface="Calibri"/>
-              </a:defRPr>
-            </a:pPr>
-            <a:r>
-              <a:t>• Compliance Assured: Fully compliant with HIPAA, GDPR, and FedRAMP</a:t>
+              <a:defRPr sz="1400">
+                <a:solidFill>
+                  <a:srgbClr val="555048"/>
+                </a:solidFill>
+                <a:latin typeface="Segoe UI"/>
+              </a:defRPr>
+            </a:pPr>
+            <a:r>
+              <a:t>Hospitals, defense contractors, and banks cannot upload confidential files to public cloud APIs. Nullify runs 100% on your hardware. Not a single byte is sent over the internet.</a:t>
             </a:r>
           </a:p>
         </p:txBody>
@@ -5796,8 +5346,8 @@
         </p:nvSpPr>
         <p:spPr>
           <a:xfrm>
-            <a:off x="4370832" y="1645920"/>
-            <a:ext cx="3429000" cy="4434840"/>
+            <a:off x="4434840" y="1645920"/>
+            <a:ext cx="3383280" cy="4434840"/>
           </a:xfrm>
           <a:prstGeom prst="roundRect">
             <a:avLst/>
@@ -5807,7 +5357,7 @@
           </a:solidFill>
           <a:ln w="12700">
             <a:solidFill>
-              <a:srgbClr val="E5E2DD"/>
+              <a:srgbClr val="E2DCD2"/>
             </a:solidFill>
           </a:ln>
         </p:spPr>
@@ -5841,8 +5391,8 @@
         </p:nvSpPr>
         <p:spPr>
           <a:xfrm>
-            <a:off x="4599432" y="1828800"/>
-            <a:ext cx="2971800" cy="4114800"/>
+            <a:off x="4709160" y="1920240"/>
+            <a:ext cx="2834640" cy="3840480"/>
           </a:xfrm>
           <a:prstGeom prst="rect">
             <a:avLst/>
@@ -5856,31 +5406,15 @@
           <a:lstStyle/>
           <a:p>
             <a:pPr>
-              <a:defRPr sz="850" b="1">
-                <a:solidFill>
-                  <a:srgbClr val="15803D"/>
-                </a:solidFill>
-                <a:latin typeface="Consolas"/>
-              </a:defRPr>
-            </a:pPr>
-            <a:r>
-              <a:t>SEAMLESS SIEM/SOAR INTEGRATION</a:t>
-            </a:r>
-          </a:p>
-          <a:p>
-            <a:pPr>
-              <a:spcBef>
-                <a:spcPts val="400"/>
-              </a:spcBef>
-              <a:defRPr sz="1400" b="1">
-                <a:solidFill>
-                  <a:srgbClr val="191510"/>
+              <a:defRPr sz="2000" b="1">
+                <a:solidFill>
+                  <a:srgbClr val="2563EB"/>
                 </a:solidFill>
                 <a:latin typeface="Segoe UI"/>
               </a:defRPr>
             </a:pPr>
             <a:r>
-              <a:t>🔌 Production REST API</a:t>
+              <a:t>🔌 Connects to Your SIEM</a:t>
             </a:r>
           </a:p>
           <a:p>
@@ -5888,15 +5422,15 @@
               <a:spcBef>
                 <a:spcPts val="800"/>
               </a:spcBef>
-              <a:defRPr sz="1100">
-                <a:solidFill>
-                  <a:srgbClr val="66625B"/>
-                </a:solidFill>
-                <a:latin typeface="Calibri"/>
-              </a:defRPr>
-            </a:pPr>
-            <a:r>
-              <a:t>Built on high-performance FastAPI with automatic OpenAPI documentation. Exposes asynchronous endpoints (/api/v1/scan, /api/v1/triage, /api/v1/health) for immediate integration into enterprise security pipelines.</a:t>
+              <a:defRPr sz="1400" b="1">
+                <a:solidFill>
+                  <a:srgbClr val="15120E"/>
+                </a:solidFill>
+                <a:latin typeface="Segoe UI"/>
+              </a:defRPr>
+            </a:pPr>
+            <a:r>
+              <a:t>Production REST API Built In</a:t>
             </a:r>
           </a:p>
           <a:p>
@@ -5904,63 +5438,15 @@
               <a:spcBef>
                 <a:spcPts val="1400"/>
               </a:spcBef>
-              <a:defRPr sz="850" b="1">
-                <a:solidFill>
-                  <a:srgbClr val="191510"/>
-                </a:solidFill>
-                <a:latin typeface="Consolas"/>
-              </a:defRPr>
-            </a:pPr>
-            <a:r>
-              <a:t>KEY ADVANTAGES:</a:t>
-            </a:r>
-          </a:p>
-          <a:p>
-            <a:pPr>
-              <a:spcBef>
-                <a:spcPts val="300"/>
-              </a:spcBef>
-              <a:defRPr sz="1000">
-                <a:solidFill>
-                  <a:srgbClr val="66625B"/>
-                </a:solidFill>
-                <a:latin typeface="Calibri"/>
-              </a:defRPr>
-            </a:pPr>
-            <a:r>
-              <a:t>• Splunk &amp; Microsoft Sentinel: Stream JSON verdicts directly into SIEM</a:t>
-            </a:r>
-          </a:p>
-          <a:p>
-            <a:pPr>
-              <a:spcBef>
-                <a:spcPts val="300"/>
-              </a:spcBef>
-              <a:defRPr sz="1000">
-                <a:solidFill>
-                  <a:srgbClr val="66625B"/>
-                </a:solidFill>
-                <a:latin typeface="Calibri"/>
-              </a:defRPr>
-            </a:pPr>
-            <a:r>
-              <a:t>• Cortex XSOAR / Tines: Automate endpoint isolation on critical findings</a:t>
-            </a:r>
-          </a:p>
-          <a:p>
-            <a:pPr>
-              <a:spcBef>
-                <a:spcPts val="300"/>
-              </a:spcBef>
-              <a:defRPr sz="1000">
-                <a:solidFill>
-                  <a:srgbClr val="66625B"/>
-                </a:solidFill>
-                <a:latin typeface="Calibri"/>
-              </a:defRPr>
-            </a:pPr>
-            <a:r>
-              <a:t>• Docker &amp; Kubernetes: Containerized microservice architecture</a:t>
+              <a:defRPr sz="1400">
+                <a:solidFill>
+                  <a:srgbClr val="555048"/>
+                </a:solidFill>
+                <a:latin typeface="Segoe UI"/>
+              </a:defRPr>
+            </a:pPr>
+            <a:r>
+              <a:t>Built with FastAPI and OpenAPI. Exposes clean REST endpoints so your security operations team can integrate it with Splunk, Microsoft Sentinel, or Cortex XSOAR in minutes.</a:t>
             </a:r>
           </a:p>
         </p:txBody>
@@ -5973,8 +5459,8 @@
         </p:nvSpPr>
         <p:spPr>
           <a:xfrm>
-            <a:off x="8010144" y="1645920"/>
-            <a:ext cx="3429000" cy="4434840"/>
+            <a:off x="8046720" y="1645920"/>
+            <a:ext cx="3383280" cy="4434840"/>
           </a:xfrm>
           <a:prstGeom prst="roundRect">
             <a:avLst/>
@@ -5984,7 +5470,7 @@
           </a:solidFill>
           <a:ln w="12700">
             <a:solidFill>
-              <a:srgbClr val="E5E2DD"/>
+              <a:srgbClr val="E2DCD2"/>
             </a:solidFill>
           </a:ln>
         </p:spPr>
@@ -6018,8 +5504,8 @@
         </p:nvSpPr>
         <p:spPr>
           <a:xfrm>
-            <a:off x="8238744" y="1828800"/>
-            <a:ext cx="2971800" cy="4114800"/>
+            <a:off x="8321040" y="1920240"/>
+            <a:ext cx="2834640" cy="3840480"/>
           </a:xfrm>
           <a:prstGeom prst="rect">
             <a:avLst/>
@@ -6033,31 +5519,15 @@
           <a:lstStyle/>
           <a:p>
             <a:pPr>
-              <a:defRPr sz="850" b="1">
-                <a:solidFill>
-                  <a:srgbClr val="15803D"/>
-                </a:solidFill>
-                <a:latin typeface="Consolas"/>
-              </a:defRPr>
-            </a:pPr>
-            <a:r>
-              <a:t>EXTENSIBLE AGENT ARCHITECTURE</a:t>
-            </a:r>
-          </a:p>
-          <a:p>
-            <a:pPr>
-              <a:spcBef>
-                <a:spcPts val="400"/>
-              </a:spcBef>
-              <a:defRPr sz="1400" b="1">
-                <a:solidFill>
-                  <a:srgbClr val="191510"/>
+              <a:defRPr sz="2000" b="1">
+                <a:solidFill>
+                  <a:srgbClr val="D97706"/>
                 </a:solidFill>
                 <a:latin typeface="Segoe UI"/>
               </a:defRPr>
             </a:pPr>
             <a:r>
-              <a:t>⚙️ Modular &amp; Future-Proof</a:t>
+              <a:t>📦 Docker &amp; Air-Gapped Ready</a:t>
             </a:r>
           </a:p>
           <a:p>
@@ -6065,15 +5535,15 @@
               <a:spcBef>
                 <a:spcPts val="800"/>
               </a:spcBef>
-              <a:defRPr sz="1100">
-                <a:solidFill>
-                  <a:srgbClr val="66625B"/>
-                </a:solidFill>
-                <a:latin typeface="Calibri"/>
-              </a:defRPr>
-            </a:pPr>
-            <a:r>
-              <a:t>Adding custom heuristics, connecting proprietary sandbox environments (e.g. CAPEv2), or swapping in private on-prem LLMs takes minutes. The decoupled agent interface isolates business logic from analysis modules.</a:t>
+              <a:defRPr sz="1400" b="1">
+                <a:solidFill>
+                  <a:srgbClr val="15120E"/>
+                </a:solidFill>
+                <a:latin typeface="Segoe UI"/>
+              </a:defRPr>
+            </a:pPr>
+            <a:r>
+              <a:t>Runs Anywhere Without Internet</a:t>
             </a:r>
           </a:p>
           <a:p>
@@ -6081,63 +5551,15 @@
               <a:spcBef>
                 <a:spcPts val="1400"/>
               </a:spcBef>
-              <a:defRPr sz="850" b="1">
-                <a:solidFill>
-                  <a:srgbClr val="191510"/>
-                </a:solidFill>
-                <a:latin typeface="Consolas"/>
-              </a:defRPr>
-            </a:pPr>
-            <a:r>
-              <a:t>KEY ADVANTAGES:</a:t>
-            </a:r>
-          </a:p>
-          <a:p>
-            <a:pPr>
-              <a:spcBef>
-                <a:spcPts val="300"/>
-              </a:spcBef>
-              <a:defRPr sz="1000">
-                <a:solidFill>
-                  <a:srgbClr val="66625B"/>
-                </a:solidFill>
-                <a:latin typeface="Calibri"/>
-              </a:defRPr>
-            </a:pPr>
-            <a:r>
-              <a:t>• Pluggable Agents: Add custom threat intel feeds with clean Python APIs</a:t>
-            </a:r>
-          </a:p>
-          <a:p>
-            <a:pPr>
-              <a:spcBef>
-                <a:spcPts val="300"/>
-              </a:spcBef>
-              <a:defRPr sz="1000">
-                <a:solidFill>
-                  <a:srgbClr val="66625B"/>
-                </a:solidFill>
-                <a:latin typeface="Calibri"/>
-              </a:defRPr>
-            </a:pPr>
-            <a:r>
-              <a:t>• Hardware Acceleration: Native C kernels exploit modern CPU SIMD/AVX2</a:t>
-            </a:r>
-          </a:p>
-          <a:p>
-            <a:pPr>
-              <a:spcBef>
-                <a:spcPts val="300"/>
-              </a:spcBef>
-              <a:defRPr sz="1000">
-                <a:solidFill>
-                  <a:srgbClr val="66625B"/>
-                </a:solidFill>
-                <a:latin typeface="Calibri"/>
-              </a:defRPr>
-            </a:pPr>
-            <a:r>
-              <a:t>• Enterprise Health Beacon: Built-in liveness, readiness, and metrics probes</a:t>
+              <a:defRPr sz="1400">
+                <a:solidFill>
+                  <a:srgbClr val="555048"/>
+                </a:solidFill>
+                <a:latin typeface="Segoe UI"/>
+              </a:defRPr>
+            </a:pPr>
+            <a:r>
+              <a:t>Ships as a lightweight Docker container or standalone binary. Operates seamlessly inside secure, offline, air-gapped data centers.</a:t>
             </a:r>
           </a:p>
         </p:txBody>
@@ -6150,14 +5572,14 @@
         </p:nvSpPr>
         <p:spPr>
           <a:xfrm>
-            <a:off x="731520" y="6263640"/>
-            <a:ext cx="10728655" cy="9525"/>
+            <a:off x="822960" y="6263640"/>
+            <a:ext cx="10545775" cy="9525"/>
           </a:xfrm>
           <a:prstGeom prst="rect">
             <a:avLst/>
           </a:prstGeom>
           <a:solidFill>
-            <a:srgbClr val="E5E2DD"/>
+            <a:srgbClr val="E2DCD2"/>
           </a:solidFill>
           <a:ln>
             <a:noFill/>
@@ -6193,8 +5615,8 @@
         </p:nvSpPr>
         <p:spPr>
           <a:xfrm>
-            <a:off x="731520" y="6327648"/>
-            <a:ext cx="10728655" cy="320040"/>
+            <a:off x="822960" y="6327648"/>
+            <a:ext cx="10545775" cy="320040"/>
           </a:xfrm>
           <a:prstGeom prst="rect">
             <a:avLst/>
@@ -6208,31 +5630,31 @@
           <a:lstStyle/>
           <a:p>
             <a:r>
-              <a:rPr sz="850">
-                <a:solidFill>
-                  <a:srgbClr val="8C877E"/>
+              <a:rPr sz="950">
+                <a:solidFill>
+                  <a:srgbClr val="827C73"/>
                 </a:solidFill>
                 <a:latin typeface="Consolas"/>
               </a:rPr>
-              <a:t>NULLIFY  ●  AUTONOMOUS MULTI-AGENT DEFENSE</a:t>
-            </a:r>
-            <a:r>
-              <a:rPr i="1" sz="900">
-                <a:solidFill>
-                  <a:srgbClr val="66625B"/>
+              <a:t>NULLIFY  •  AUTONOMOUS CYBER DEFENSE</a:t>
+            </a:r>
+            <a:r>
+              <a:rPr i="1" sz="1000">
+                <a:solidFill>
+                  <a:srgbClr val="555048"/>
                 </a:solidFill>
                 <a:latin typeface="Georgia"/>
               </a:rPr>
-              <a:t>                       See it. Trace it. Nullify it.                       </a:t>
-            </a:r>
-            <a:r>
-              <a:rPr sz="850">
-                <a:solidFill>
-                  <a:srgbClr val="8C877E"/>
+              <a:t>                               See it. Trace it. Nullify it.                               </a:t>
+            </a:r>
+            <a:r>
+              <a:rPr sz="950">
+                <a:solidFill>
+                  <a:srgbClr val="827C73"/>
                 </a:solidFill>
                 <a:latin typeface="Consolas"/>
               </a:rPr>
-              <a:t>SLIDE 10 / 12</a:t>
+              <a:t>10 / 11</a:t>
             </a:r>
           </a:p>
         </p:txBody>
@@ -6270,7 +5692,7 @@
             <a:avLst/>
           </a:prstGeom>
           <a:solidFill>
-            <a:srgbClr val="FBF8F3"/>
+            <a:srgbClr val="15120E"/>
           </a:solidFill>
           <a:ln>
             <a:noFill/>
@@ -6300,96 +5722,24 @@
       </p:sp>
       <p:sp>
         <p:nvSpPr>
-          <p:cNvPr id="3" name="TextBox 2"/>
-          <p:cNvSpPr txBox="1"/>
-          <p:nvPr/>
-        </p:nvSpPr>
-        <p:spPr>
-          <a:xfrm>
-            <a:off x="731520" y="502920"/>
-            <a:ext cx="10698480" cy="365760"/>
-          </a:xfrm>
-          <a:prstGeom prst="rect">
-            <a:avLst/>
-          </a:prstGeom>
-          <a:noFill/>
-        </p:spPr>
-        <p:txBody>
-          <a:bodyPr wrap="square" lIns="0" tIns="0" rIns="0" bIns="0">
-            <a:spAutoFit/>
-          </a:bodyPr>
-          <a:lstStyle/>
-          <a:p>
-            <a:pPr>
-              <a:defRPr sz="1000" b="1">
-                <a:solidFill>
-                  <a:srgbClr val="15803D"/>
-                </a:solidFill>
-                <a:latin typeface="Consolas"/>
-              </a:defRPr>
-            </a:pPr>
-            <a:r>
-              <a:t>10 // COMPETITIVE ANALYSIS</a:t>
-            </a:r>
-          </a:p>
-        </p:txBody>
-      </p:sp>
-      <p:sp>
-        <p:nvSpPr>
-          <p:cNvPr id="4" name="TextBox 3"/>
-          <p:cNvSpPr txBox="1"/>
-          <p:nvPr/>
-        </p:nvSpPr>
-        <p:spPr>
-          <a:xfrm>
-            <a:off x="731520" y="822960"/>
-            <a:ext cx="10698480" cy="731520"/>
-          </a:xfrm>
-          <a:prstGeom prst="rect">
-            <a:avLst/>
-          </a:prstGeom>
-          <a:noFill/>
-        </p:spPr>
-        <p:txBody>
-          <a:bodyPr wrap="square" lIns="0" tIns="0" rIns="0" bIns="0">
-            <a:spAutoFit/>
-          </a:bodyPr>
-          <a:lstStyle/>
-          <a:p>
-            <a:pPr>
-              <a:defRPr sz="2800" b="1">
-                <a:solidFill>
-                  <a:srgbClr val="191510"/>
-                </a:solidFill>
-                <a:latin typeface="Georgia"/>
-              </a:defRPr>
-            </a:pPr>
-            <a:r>
-              <a:t>Why Nullify Outperforms Legacy Paradigms</a:t>
-            </a:r>
-          </a:p>
-        </p:txBody>
-      </p:sp>
-      <p:sp>
-        <p:nvSpPr>
-          <p:cNvPr id="5" name="Rounded Rectangle 4"/>
+          <p:cNvPr id="3" name="Rounded Rectangle 2"/>
           <p:cNvSpPr/>
           <p:nvPr/>
         </p:nvSpPr>
         <p:spPr>
           <a:xfrm>
-            <a:off x="731520" y="1645920"/>
-            <a:ext cx="10728655" cy="4434840"/>
+            <a:off x="548640" y="548640"/>
+            <a:ext cx="11094415" cy="5760720"/>
           </a:xfrm>
           <a:prstGeom prst="roundRect">
             <a:avLst/>
           </a:prstGeom>
           <a:solidFill>
-            <a:srgbClr val="FFFFFF"/>
+            <a:srgbClr val="15120E"/>
           </a:solidFill>
-          <a:ln w="12700">
+          <a:ln w="19050">
             <a:solidFill>
-              <a:srgbClr val="E5E2DD"/>
+              <a:srgbClr val="322B22"/>
             </a:solidFill>
           </a:ln>
         </p:spPr>
@@ -6417,203 +5767,25 @@
       </p:sp>
       <p:sp>
         <p:nvSpPr>
-          <p:cNvPr id="6" name="TextBox 5"/>
-          <p:cNvSpPr txBox="1"/>
-          <p:nvPr/>
-        </p:nvSpPr>
-        <p:spPr>
-          <a:xfrm>
-            <a:off x="1005840" y="1874519"/>
-            <a:ext cx="10149840" cy="3931920"/>
-          </a:xfrm>
-          <a:prstGeom prst="rect">
-            <a:avLst/>
-          </a:prstGeom>
-          <a:noFill/>
-        </p:spPr>
-        <p:txBody>
-          <a:bodyPr wrap="square" lIns="0" tIns="0" rIns="0" bIns="0">
-            <a:spAutoFit/>
-          </a:bodyPr>
-          <a:lstStyle/>
-          <a:p>
-            <a:pPr>
-              <a:defRPr sz="900" b="1">
-                <a:solidFill>
-                  <a:srgbClr val="15803D"/>
-                </a:solidFill>
-                <a:latin typeface="Consolas"/>
-              </a:defRPr>
-            </a:pPr>
-            <a:r>
-              <a:t>DIRECT CAPABILITY MATRIX</a:t>
-            </a:r>
-          </a:p>
-          <a:p>
-            <a:pPr>
-              <a:spcBef>
-                <a:spcPts val="800"/>
-              </a:spcBef>
-              <a:defRPr sz="1000" b="1">
-                <a:solidFill>
-                  <a:srgbClr val="191510"/>
-                </a:solidFill>
-                <a:latin typeface="Consolas"/>
-              </a:defRPr>
-            </a:pPr>
-            <a:r>
-              <a:t>CAPABILITY                     NULLIFY            LEGACY AV        CLOUD SANDBOX    PYTHON TOOLS</a:t>
-            </a:r>
-          </a:p>
-          <a:p>
-            <a:pPr>
-              <a:spcBef>
-                <a:spcPts val="500"/>
-              </a:spcBef>
-              <a:defRPr sz="950" b="1">
-                <a:solidFill>
-                  <a:srgbClr val="15803D"/>
-                </a:solidFill>
-                <a:latin typeface="Consolas"/>
-              </a:defRPr>
-            </a:pPr>
-            <a:r>
-              <a:t>Triage Latency                 &lt; 15 milliseconds  5 milliseconds   300 - 1200 seconds 85 milliseconds</a:t>
-            </a:r>
-          </a:p>
-          <a:p>
-            <a:pPr>
-              <a:spcBef>
-                <a:spcPts val="500"/>
-              </a:spcBef>
-              <a:defRPr sz="950" b="1">
-                <a:solidFill>
-                  <a:srgbClr val="15803D"/>
-                </a:solidFill>
-                <a:latin typeface="Consolas"/>
-              </a:defRPr>
-            </a:pPr>
-            <a:r>
-              <a:t>Zero-Day ML Classification     Yes (EMBER 2017 v2) No (Hash lists)  Partial (Heuristics) No (Parsing only)</a:t>
-            </a:r>
-          </a:p>
-          <a:p>
-            <a:pPr>
-              <a:spcBef>
-                <a:spcPts val="500"/>
-              </a:spcBef>
-              <a:defRPr sz="950" b="1">
-                <a:solidFill>
-                  <a:srgbClr val="15803D"/>
-                </a:solidFill>
-                <a:latin typeface="Consolas"/>
-              </a:defRPr>
-            </a:pPr>
-            <a:r>
-              <a:t>Native C-Core Acceleration     Yes (Pure C11 -O3) Varies (C++)     N/A (VM-based)   No (Interpreted)</a:t>
-            </a:r>
-          </a:p>
-          <a:p>
-            <a:pPr>
-              <a:spcBef>
-                <a:spcPts val="500"/>
-              </a:spcBef>
-              <a:defRPr sz="950" b="1">
-                <a:solidFill>
-                  <a:srgbClr val="15803D"/>
-                </a:solidFill>
-                <a:latin typeface="Consolas"/>
-              </a:defRPr>
-            </a:pPr>
-            <a:r>
-              <a:t>Autonomous Multi-Agent Mesh    Yes (6 Agents)     No (Monolithic)  No (Rule script) No (Ad-hoc)</a:t>
-            </a:r>
-          </a:p>
-          <a:p>
-            <a:pPr>
-              <a:spcBef>
-                <a:spcPts val="500"/>
-              </a:spcBef>
-              <a:defRPr sz="950" b="1">
-                <a:solidFill>
-                  <a:srgbClr val="15803D"/>
-                </a:solidFill>
-                <a:latin typeface="Consolas"/>
-              </a:defRPr>
-            </a:pPr>
-            <a:r>
-              <a:t>MITRE ATT&amp;CK Attribution       Yes (Automated)    No (Opaque code) Partial (Trace logs) No</a:t>
-            </a:r>
-          </a:p>
-          <a:p>
-            <a:pPr>
-              <a:spcBef>
-                <a:spcPts val="500"/>
-              </a:spcBef>
-              <a:defRPr sz="950" b="1">
-                <a:solidFill>
-                  <a:srgbClr val="15803D"/>
-                </a:solidFill>
-                <a:latin typeface="Consolas"/>
-              </a:defRPr>
-            </a:pPr>
-            <a:r>
-              <a:t>Dynamic YARA Rule Synthesis    Yes (Instantaneous) No               No               No</a:t>
-            </a:r>
-          </a:p>
-          <a:p>
-            <a:pPr>
-              <a:spcBef>
-                <a:spcPts val="500"/>
-              </a:spcBef>
-              <a:defRPr sz="950" b="1">
-                <a:solidFill>
-                  <a:srgbClr val="15803D"/>
-                </a:solidFill>
-                <a:latin typeface="Consolas"/>
-              </a:defRPr>
-            </a:pPr>
-            <a:r>
-              <a:t>100% Air-Gapped / On-Prem      Yes (Zero leakage) Yes              No (Cloud dependent) Yes</a:t>
-            </a:r>
-          </a:p>
-          <a:p>
-            <a:pPr>
-              <a:spcBef>
-                <a:spcPts val="500"/>
-              </a:spcBef>
-              <a:defRPr sz="950" b="1">
-                <a:solidFill>
-                  <a:srgbClr val="15803D"/>
-                </a:solidFill>
-                <a:latin typeface="Consolas"/>
-              </a:defRPr>
-            </a:pPr>
-            <a:r>
-              <a:t>Single-Command Interactive CLI Yes ($ nullify)    No               No               Varies</a:t>
-            </a:r>
-          </a:p>
-        </p:txBody>
-      </p:sp>
-      <p:sp>
-        <p:nvSpPr>
-          <p:cNvPr id="7" name="Rectangle 6"/>
+          <p:cNvPr id="4" name="Rounded Rectangle 3"/>
           <p:cNvSpPr/>
           <p:nvPr/>
         </p:nvSpPr>
         <p:spPr>
           <a:xfrm>
-            <a:off x="731520" y="6263640"/>
-            <a:ext cx="10728655" cy="9525"/>
-          </a:xfrm>
-          <a:prstGeom prst="rect">
+            <a:off x="1005840" y="1005840"/>
+            <a:ext cx="2377440" cy="365760"/>
+          </a:xfrm>
+          <a:prstGeom prst="roundRect">
             <a:avLst/>
           </a:prstGeom>
           <a:solidFill>
-            <a:srgbClr val="E5E2DD"/>
+            <a:srgbClr val="201B15"/>
           </a:solidFill>
-          <a:ln>
-            <a:noFill/>
+          <a:ln w="12700">
+            <a:solidFill>
+              <a:srgbClr val="322B22"/>
+            </a:solidFill>
           </a:ln>
         </p:spPr>
         <p:style>
@@ -6631,23 +5803,33 @@
           </a:fontRef>
         </p:style>
         <p:txBody>
-          <a:bodyPr rtlCol="0" anchor="ctr"/>
-          <a:lstStyle/>
-          <a:p>
-            <a:pPr algn="ctr"/>
-          </a:p>
-        </p:txBody>
-      </p:sp>
-      <p:sp>
-        <p:nvSpPr>
-          <p:cNvPr id="8" name="TextBox 7"/>
+          <a:bodyPr rtlCol="0" anchor="ctr" lIns="0" tIns="0" rIns="0" bIns="0"/>
+          <a:lstStyle/>
+          <a:p>
+            <a:pPr algn="ctr">
+              <a:defRPr sz="900" b="1">
+                <a:solidFill>
+                  <a:srgbClr val="10B981"/>
+                </a:solidFill>
+                <a:latin typeface="Consolas"/>
+              </a:defRPr>
+            </a:pPr>
+            <a:r>
+              <a:t>●  READY FOR LIVE DEMO</a:t>
+            </a:r>
+          </a:p>
+        </p:txBody>
+      </p:sp>
+      <p:sp>
+        <p:nvSpPr>
+          <p:cNvPr id="5" name="TextBox 4"/>
           <p:cNvSpPr txBox="1"/>
           <p:nvPr/>
         </p:nvSpPr>
         <p:spPr>
           <a:xfrm>
-            <a:off x="731520" y="6327648"/>
-            <a:ext cx="10728655" cy="320040"/>
+            <a:off x="1005840" y="1645920"/>
+            <a:ext cx="10058400" cy="2011680"/>
           </a:xfrm>
           <a:prstGeom prst="rect">
             <a:avLst/>
@@ -6655,78 +5837,62 @@
           <a:noFill/>
         </p:spPr>
         <p:txBody>
-          <a:bodyPr wrap="none" lIns="0" tIns="0" rIns="0" bIns="0">
+          <a:bodyPr wrap="square" lIns="0" tIns="0" rIns="0" bIns="0">
             <a:spAutoFit/>
           </a:bodyPr>
           <a:lstStyle/>
           <a:p>
-            <a:r>
-              <a:rPr sz="850">
-                <a:solidFill>
-                  <a:srgbClr val="8C877E"/>
-                </a:solidFill>
-                <a:latin typeface="Consolas"/>
-              </a:rPr>
-              <a:t>NULLIFY  ●  AUTONOMOUS MULTI-AGENT DEFENSE</a:t>
-            </a:r>
-            <a:r>
-              <a:rPr i="1" sz="900">
-                <a:solidFill>
-                  <a:srgbClr val="66625B"/>
+            <a:pPr>
+              <a:defRPr sz="5400" b="1">
+                <a:solidFill>
+                  <a:srgbClr val="FAF8F5"/>
                 </a:solidFill>
                 <a:latin typeface="Georgia"/>
-              </a:rPr>
-              <a:t>                       See it. Trace it. Nullify it.                       </a:t>
-            </a:r>
-            <a:r>
-              <a:rPr sz="850">
-                <a:solidFill>
-                  <a:srgbClr val="8C877E"/>
-                </a:solidFill>
-                <a:latin typeface="Consolas"/>
-              </a:rPr>
-              <a:t>SLIDE 11 / 12</a:t>
-            </a:r>
-          </a:p>
-        </p:txBody>
-      </p:sp>
-    </p:spTree>
-  </p:cSld>
-  <p:clrMapOvr>
-    <a:masterClrMapping/>
-  </p:clrMapOvr>
-</p:sld>
-</file>
-
-<file path=ppt/slides/slide12.xml><?xml version="1.0" encoding="utf-8"?>
-<p:sld xmlns:a="http://schemas.openxmlformats.org/drawingml/2006/main" xmlns:p="http://schemas.openxmlformats.org/presentationml/2006/main" xmlns:r="http://schemas.openxmlformats.org/officeDocument/2006/relationships">
-  <p:cSld>
-    <p:spTree>
-      <p:nvGrpSpPr>
-        <p:cNvPr id="1" name=""/>
-        <p:cNvGrpSpPr/>
-        <p:nvPr/>
-      </p:nvGrpSpPr>
-      <p:grpSpPr/>
-      <p:sp>
-        <p:nvSpPr>
-          <p:cNvPr id="2" name="Rectangle 1"/>
+              </a:defRPr>
+            </a:pPr>
+            <a:r>
+              <a:t>Let's Run a Live Test.</a:t>
+            </a:r>
+          </a:p>
+          <a:p>
+            <a:pPr>
+              <a:spcBef>
+                <a:spcPts val="1200"/>
+              </a:spcBef>
+              <a:defRPr sz="2000">
+                <a:solidFill>
+                  <a:srgbClr val="BFB9AF"/>
+                </a:solidFill>
+                <a:latin typeface="Segoe UI"/>
+              </a:defRPr>
+            </a:pPr>
+            <a:r>
+              <a:t>Pick any file. Watch Nullify inspect, classify, and neutralize it in milliseconds.</a:t>
+            </a:r>
+          </a:p>
+        </p:txBody>
+      </p:sp>
+      <p:sp>
+        <p:nvSpPr>
+          <p:cNvPr id="6" name="Rounded Rectangle 5"/>
           <p:cNvSpPr/>
           <p:nvPr/>
         </p:nvSpPr>
         <p:spPr>
           <a:xfrm>
-            <a:off x="0" y="0"/>
-            <a:ext cx="12191695" cy="6858000"/>
-          </a:xfrm>
-          <a:prstGeom prst="rect">
+            <a:off x="1005840" y="3931920"/>
+            <a:ext cx="3291840" cy="1280160"/>
+          </a:xfrm>
+          <a:prstGeom prst="roundRect">
             <a:avLst/>
           </a:prstGeom>
           <a:solidFill>
-            <a:srgbClr val="191510"/>
+            <a:srgbClr val="201B15"/>
           </a:solidFill>
-          <a:ln>
-            <a:noFill/>
+          <a:ln w="12700">
+            <a:solidFill>
+              <a:srgbClr val="322B22"/>
+            </a:solidFill>
           </a:ln>
         </p:spPr>
         <p:style>
@@ -6753,24 +5919,76 @@
       </p:sp>
       <p:sp>
         <p:nvSpPr>
-          <p:cNvPr id="3" name="Rounded Rectangle 2"/>
+          <p:cNvPr id="7" name="TextBox 6"/>
+          <p:cNvSpPr txBox="1"/>
+          <p:nvPr/>
+        </p:nvSpPr>
+        <p:spPr>
+          <a:xfrm>
+            <a:off x="1234440" y="4069080"/>
+            <a:ext cx="2834640" cy="1005840"/>
+          </a:xfrm>
+          <a:prstGeom prst="rect">
+            <a:avLst/>
+          </a:prstGeom>
+          <a:noFill/>
+        </p:spPr>
+        <p:txBody>
+          <a:bodyPr wrap="square" lIns="0" tIns="0" rIns="0" bIns="0">
+            <a:spAutoFit/>
+          </a:bodyPr>
+          <a:lstStyle/>
+          <a:p>
+            <a:pPr>
+              <a:defRPr sz="1600" b="1">
+                <a:solidFill>
+                  <a:srgbClr val="10B981"/>
+                </a:solidFill>
+                <a:latin typeface="Segoe UI"/>
+              </a:defRPr>
+            </a:pPr>
+            <a:r>
+              <a:t>✓ Fully Functional Now</a:t>
+            </a:r>
+          </a:p>
+          <a:p>
+            <a:pPr>
+              <a:spcBef>
+                <a:spcPts val="400"/>
+              </a:spcBef>
+              <a:defRPr sz="1300">
+                <a:solidFill>
+                  <a:srgbClr val="BFB9AF"/>
+                </a:solidFill>
+                <a:latin typeface="Segoe UI"/>
+              </a:defRPr>
+            </a:pPr>
+            <a:r>
+              <a:t>Web console, CLI, and C-engine are compiled and running live right now.</a:t>
+            </a:r>
+          </a:p>
+        </p:txBody>
+      </p:sp>
+      <p:sp>
+        <p:nvSpPr>
+          <p:cNvPr id="8" name="Rounded Rectangle 7"/>
           <p:cNvSpPr/>
           <p:nvPr/>
         </p:nvSpPr>
         <p:spPr>
           <a:xfrm>
-            <a:off x="457200" y="457200"/>
-            <a:ext cx="11277295" cy="5943600"/>
+            <a:off x="4480560" y="3931920"/>
+            <a:ext cx="3291840" cy="1280160"/>
           </a:xfrm>
           <a:prstGeom prst="roundRect">
             <a:avLst/>
           </a:prstGeom>
           <a:solidFill>
-            <a:srgbClr val="191510"/>
+            <a:srgbClr val="201B15"/>
           </a:solidFill>
           <a:ln w="12700">
             <a:solidFill>
-              <a:srgbClr val="352F27"/>
+              <a:srgbClr val="322B22"/>
             </a:solidFill>
           </a:ln>
         </p:spPr>
@@ -6798,24 +6016,76 @@
       </p:sp>
       <p:sp>
         <p:nvSpPr>
-          <p:cNvPr id="4" name="Rounded Rectangle 3"/>
+          <p:cNvPr id="9" name="TextBox 8"/>
+          <p:cNvSpPr txBox="1"/>
+          <p:nvPr/>
+        </p:nvSpPr>
+        <p:spPr>
+          <a:xfrm>
+            <a:off x="4709160" y="4069080"/>
+            <a:ext cx="2834640" cy="1005840"/>
+          </a:xfrm>
+          <a:prstGeom prst="rect">
+            <a:avLst/>
+          </a:prstGeom>
+          <a:noFill/>
+        </p:spPr>
+        <p:txBody>
+          <a:bodyPr wrap="square" lIns="0" tIns="0" rIns="0" bIns="0">
+            <a:spAutoFit/>
+          </a:bodyPr>
+          <a:lstStyle/>
+          <a:p>
+            <a:pPr>
+              <a:defRPr sz="1600" b="1">
+                <a:solidFill>
+                  <a:srgbClr val="10B981"/>
+                </a:solidFill>
+                <a:latin typeface="Segoe UI"/>
+              </a:defRPr>
+            </a:pPr>
+            <a:r>
+              <a:t>✓ 62 / 62 Tests Green</a:t>
+            </a:r>
+          </a:p>
+          <a:p>
+            <a:pPr>
+              <a:spcBef>
+                <a:spcPts val="400"/>
+              </a:spcBef>
+              <a:defRPr sz="1300">
+                <a:solidFill>
+                  <a:srgbClr val="BFB9AF"/>
+                </a:solidFill>
+                <a:latin typeface="Segoe UI"/>
+              </a:defRPr>
+            </a:pPr>
+            <a:r>
+              <a:t>Comprehensive automated test suite guarantees zero regressions.</a:t>
+            </a:r>
+          </a:p>
+        </p:txBody>
+      </p:sp>
+      <p:sp>
+        <p:nvSpPr>
+          <p:cNvPr id="10" name="Rounded Rectangle 9"/>
           <p:cNvSpPr/>
           <p:nvPr/>
         </p:nvSpPr>
         <p:spPr>
           <a:xfrm>
-            <a:off x="822960" y="822960"/>
-            <a:ext cx="2011680" cy="320040"/>
+            <a:off x="7955279" y="3931920"/>
+            <a:ext cx="3291840" cy="1280160"/>
           </a:xfrm>
           <a:prstGeom prst="roundRect">
             <a:avLst/>
           </a:prstGeom>
           <a:solidFill>
-            <a:srgbClr val="221D17"/>
+            <a:srgbClr val="201B15"/>
           </a:solidFill>
-          <a:ln w="9525">
+          <a:ln w="12700">
             <a:solidFill>
-              <a:srgbClr val="352F27"/>
+              <a:srgbClr val="322B22"/>
             </a:solidFill>
           </a:ln>
         </p:spPr>
@@ -6834,33 +6104,23 @@
           </a:fontRef>
         </p:style>
         <p:txBody>
-          <a:bodyPr rtlCol="0" anchor="ctr" wrap="none" lIns="0" tIns="0" rIns="0" bIns="0"/>
-          <a:lstStyle/>
-          <a:p>
-            <a:pPr algn="ctr">
-              <a:defRPr sz="800" b="1">
-                <a:solidFill>
-                  <a:srgbClr val="10B981"/>
-                </a:solidFill>
-                <a:latin typeface="Consolas"/>
-              </a:defRPr>
-            </a:pPr>
-            <a:r>
-              <a:t>11 // THE HORIZON</a:t>
-            </a:r>
-          </a:p>
-        </p:txBody>
-      </p:sp>
-      <p:sp>
-        <p:nvSpPr>
-          <p:cNvPr id="5" name="TextBox 4"/>
+          <a:bodyPr rtlCol="0" anchor="ctr"/>
+          <a:lstStyle/>
+          <a:p>
+            <a:pPr algn="ctr"/>
+          </a:p>
+        </p:txBody>
+      </p:sp>
+      <p:sp>
+        <p:nvSpPr>
+          <p:cNvPr id="11" name="TextBox 10"/>
           <p:cNvSpPr txBox="1"/>
           <p:nvPr/>
         </p:nvSpPr>
         <p:spPr>
           <a:xfrm>
-            <a:off x="822960" y="1280160"/>
-            <a:ext cx="10058400" cy="1097280"/>
+            <a:off x="8183879" y="4069080"/>
+            <a:ext cx="2834640" cy="1005840"/>
           </a:xfrm>
           <a:prstGeom prst="rect">
             <a:avLst/>
@@ -6874,15 +6134,15 @@
           <a:lstStyle/>
           <a:p>
             <a:pPr>
-              <a:defRPr sz="4000" b="1">
-                <a:solidFill>
-                  <a:srgbClr val="FAF8F5"/>
-                </a:solidFill>
-                <a:latin typeface="Georgia"/>
-              </a:defRPr>
-            </a:pPr>
-            <a:r>
-              <a:t>See it. Trace it. Nullify it.</a:t>
+              <a:defRPr sz="1600" b="1">
+                <a:solidFill>
+                  <a:srgbClr val="10B981"/>
+                </a:solidFill>
+                <a:latin typeface="Segoe UI"/>
+              </a:defRPr>
+            </a:pPr>
+            <a:r>
+              <a:t>✓ Open Source on GitHub</a:t>
             </a:r>
           </a:p>
           <a:p>
@@ -6890,39 +6150,39 @@
               <a:spcBef>
                 <a:spcPts val="400"/>
               </a:spcBef>
-              <a:defRPr sz="1600">
-                <a:solidFill>
-                  <a:srgbClr val="A39E93"/>
+              <a:defRPr sz="1300">
+                <a:solidFill>
+                  <a:srgbClr val="BFB9AF"/>
                 </a:solidFill>
                 <a:latin typeface="Segoe UI"/>
               </a:defRPr>
             </a:pPr>
             <a:r>
-              <a:t>Autonomous Threat Neutralization at Line-Rate Speed</a:t>
-            </a:r>
-          </a:p>
-        </p:txBody>
-      </p:sp>
-      <p:sp>
-        <p:nvSpPr>
-          <p:cNvPr id="6" name="Rounded Rectangle 5"/>
+              <a:t>Clean, documented, production-ready codebase ready for inspection.</a:t>
+            </a:r>
+          </a:p>
+        </p:txBody>
+      </p:sp>
+      <p:sp>
+        <p:nvSpPr>
+          <p:cNvPr id="12" name="Rounded Rectangle 11"/>
           <p:cNvSpPr/>
           <p:nvPr/>
         </p:nvSpPr>
         <p:spPr>
           <a:xfrm>
-            <a:off x="822960" y="2606040"/>
-            <a:ext cx="3291840" cy="2240280"/>
+            <a:off x="1005840" y="5394960"/>
+            <a:ext cx="10180015" cy="685800"/>
           </a:xfrm>
           <a:prstGeom prst="roundRect">
             <a:avLst/>
           </a:prstGeom>
           <a:solidFill>
-            <a:srgbClr val="221D17"/>
+            <a:srgbClr val="201B15"/>
           </a:solidFill>
           <a:ln w="12700">
             <a:solidFill>
-              <a:srgbClr val="352F27"/>
+              <a:srgbClr val="322B22"/>
             </a:solidFill>
           </a:ln>
         </p:spPr>
@@ -6950,14 +6210,14 @@
       </p:sp>
       <p:sp>
         <p:nvSpPr>
-          <p:cNvPr id="7" name="TextBox 6"/>
+          <p:cNvPr id="13" name="TextBox 12"/>
           <p:cNvSpPr txBox="1"/>
           <p:nvPr/>
         </p:nvSpPr>
         <p:spPr>
           <a:xfrm>
-            <a:off x="1005840" y="2743200"/>
-            <a:ext cx="2926080" cy="1920240"/>
+            <a:off x="1188720" y="5532120"/>
+            <a:ext cx="9784080" cy="457200"/>
           </a:xfrm>
           <a:prstGeom prst="rect">
             <a:avLst/>
@@ -6965,78 +6225,51 @@
           <a:noFill/>
         </p:spPr>
         <p:txBody>
-          <a:bodyPr wrap="square" lIns="0" tIns="0" rIns="0" bIns="0">
+          <a:bodyPr wrap="none" lIns="0" tIns="0" rIns="0" bIns="0">
             <a:spAutoFit/>
           </a:bodyPr>
           <a:lstStyle/>
           <a:p>
-            <a:pPr>
-              <a:defRPr sz="800" b="1">
+            <a:r>
+              <a:rPr b="1" sz="1200">
                 <a:solidFill>
                   <a:srgbClr val="10B981"/>
                 </a:solidFill>
                 <a:latin typeface="Consolas"/>
-              </a:defRPr>
-            </a:pPr>
-            <a:r>
-              <a:t>KERNEL-LEVEL TELEMETRY</a:t>
-            </a:r>
-          </a:p>
-          <a:p>
-            <a:pPr>
-              <a:spcBef>
-                <a:spcPts val="300"/>
-              </a:spcBef>
-              <a:defRPr sz="1300" b="1">
+              </a:rPr>
+              <a:t>TRY IT LIVE: </a:t>
+            </a:r>
+            <a:r>
+              <a:rPr sz="1200">
                 <a:solidFill>
                   <a:srgbClr val="FAF8F5"/>
                 </a:solidFill>
-                <a:latin typeface="Segoe UI"/>
-              </a:defRPr>
-            </a:pPr>
-            <a:r>
-              <a:t>v1.1: Linux eBPF Ring Buffer</a:t>
-            </a:r>
-          </a:p>
-          <a:p>
-            <a:pPr>
-              <a:spcBef>
-                <a:spcPts val="600"/>
-              </a:spcBef>
-              <a:defRPr sz="1000">
-                <a:solidFill>
-                  <a:srgbClr val="A39E93"/>
-                </a:solidFill>
-                <a:latin typeface="Calibri"/>
-              </a:defRPr>
-            </a:pPr>
-            <a:r>
-              <a:t>Deploying eBPF probes for zero-overhead real-time process monitoring, memory tampering detection, and network socket attribution directly inside the Linux kernel.</a:t>
-            </a:r>
-          </a:p>
-        </p:txBody>
-      </p:sp>
-      <p:sp>
-        <p:nvSpPr>
-          <p:cNvPr id="8" name="Rounded Rectangle 7"/>
+                <a:latin typeface="Consolas"/>
+              </a:rPr>
+              <a:t>Terminal: $ nullify   |   Web: http://localhost:8000   |   GitHub: Nate-br/nullify</a:t>
+            </a:r>
+          </a:p>
+        </p:txBody>
+      </p:sp>
+      <p:sp>
+        <p:nvSpPr>
+          <p:cNvPr id="14" name="Rectangle 13"/>
           <p:cNvSpPr/>
           <p:nvPr/>
         </p:nvSpPr>
         <p:spPr>
           <a:xfrm>
-            <a:off x="4297680" y="2606040"/>
-            <a:ext cx="3291840" cy="2240280"/>
-          </a:xfrm>
-          <a:prstGeom prst="roundRect">
+            <a:off x="822960" y="6263640"/>
+            <a:ext cx="10545775" cy="9525"/>
+          </a:xfrm>
+          <a:prstGeom prst="rect">
             <a:avLst/>
           </a:prstGeom>
           <a:solidFill>
-            <a:srgbClr val="221D17"/>
+            <a:srgbClr val="322B22"/>
           </a:solidFill>
-          <a:ln w="12700">
-            <a:solidFill>
-              <a:srgbClr val="352F27"/>
-            </a:solidFill>
+          <a:ln>
+            <a:noFill/>
           </a:ln>
         </p:spPr>
         <p:style>
@@ -7063,240 +6296,14 @@
       </p:sp>
       <p:sp>
         <p:nvSpPr>
-          <p:cNvPr id="9" name="TextBox 8"/>
+          <p:cNvPr id="15" name="TextBox 14"/>
           <p:cNvSpPr txBox="1"/>
           <p:nvPr/>
         </p:nvSpPr>
         <p:spPr>
           <a:xfrm>
-            <a:off x="4480560" y="2743200"/>
-            <a:ext cx="2926080" cy="1920240"/>
-          </a:xfrm>
-          <a:prstGeom prst="rect">
-            <a:avLst/>
-          </a:prstGeom>
-          <a:noFill/>
-        </p:spPr>
-        <p:txBody>
-          <a:bodyPr wrap="square" lIns="0" tIns="0" rIns="0" bIns="0">
-            <a:spAutoFit/>
-          </a:bodyPr>
-          <a:lstStyle/>
-          <a:p>
-            <a:pPr>
-              <a:defRPr sz="800" b="1">
-                <a:solidFill>
-                  <a:srgbClr val="10B981"/>
-                </a:solidFill>
-                <a:latin typeface="Consolas"/>
-              </a:defRPr>
-            </a:pPr>
-            <a:r>
-              <a:t>AUTOMATED MEMORY DISSECTION</a:t>
-            </a:r>
-          </a:p>
-          <a:p>
-            <a:pPr>
-              <a:spcBef>
-                <a:spcPts val="300"/>
-              </a:spcBef>
-              <a:defRPr sz="1300" b="1">
-                <a:solidFill>
-                  <a:srgbClr val="FAF8F5"/>
-                </a:solidFill>
-                <a:latin typeface="Segoe UI"/>
-              </a:defRPr>
-            </a:pPr>
-            <a:r>
-              <a:t>v1.2: Autonomous Unpacking</a:t>
-            </a:r>
-          </a:p>
-          <a:p>
-            <a:pPr>
-              <a:spcBef>
-                <a:spcPts val="600"/>
-              </a:spcBef>
-              <a:defRPr sz="1000">
-                <a:solidFill>
-                  <a:srgbClr val="A39E93"/>
-                </a:solidFill>
-                <a:latin typeface="Calibri"/>
-              </a:defRPr>
-            </a:pPr>
-            <a:r>
-              <a:t>Direct memory dump reconstruction to unpack UPX, Themida, and custom crypters in native C, exposing raw unencrypted payloads in sub-second timeframes.</a:t>
-            </a:r>
-          </a:p>
-        </p:txBody>
-      </p:sp>
-      <p:sp>
-        <p:nvSpPr>
-          <p:cNvPr id="10" name="Rounded Rectangle 9"/>
-          <p:cNvSpPr/>
-          <p:nvPr/>
-        </p:nvSpPr>
-        <p:spPr>
-          <a:xfrm>
-            <a:off x="7772400" y="2606040"/>
-            <a:ext cx="3291840" cy="2240280"/>
-          </a:xfrm>
-          <a:prstGeom prst="roundRect">
-            <a:avLst/>
-          </a:prstGeom>
-          <a:solidFill>
-            <a:srgbClr val="221D17"/>
-          </a:solidFill>
-          <a:ln w="12700">
-            <a:solidFill>
-              <a:srgbClr val="352F27"/>
-            </a:solidFill>
-          </a:ln>
-        </p:spPr>
-        <p:style>
-          <a:lnRef idx="1">
-            <a:schemeClr val="accent1"/>
-          </a:lnRef>
-          <a:fillRef idx="3">
-            <a:schemeClr val="accent1"/>
-          </a:fillRef>
-          <a:effectRef idx="2">
-            <a:schemeClr val="accent1"/>
-          </a:effectRef>
-          <a:fontRef idx="minor">
-            <a:schemeClr val="lt1"/>
-          </a:fontRef>
-        </p:style>
-        <p:txBody>
-          <a:bodyPr rtlCol="0" anchor="ctr"/>
-          <a:lstStyle/>
-          <a:p>
-            <a:pPr algn="ctr"/>
-          </a:p>
-        </p:txBody>
-      </p:sp>
-      <p:sp>
-        <p:nvSpPr>
-          <p:cNvPr id="11" name="TextBox 10"/>
-          <p:cNvSpPr txBox="1"/>
-          <p:nvPr/>
-        </p:nvSpPr>
-        <p:spPr>
-          <a:xfrm>
-            <a:off x="7955279" y="2743200"/>
-            <a:ext cx="2926080" cy="1920240"/>
-          </a:xfrm>
-          <a:prstGeom prst="rect">
-            <a:avLst/>
-          </a:prstGeom>
-          <a:noFill/>
-        </p:spPr>
-        <p:txBody>
-          <a:bodyPr wrap="square" lIns="0" tIns="0" rIns="0" bIns="0">
-            <a:spAutoFit/>
-          </a:bodyPr>
-          <a:lstStyle/>
-          <a:p>
-            <a:pPr>
-              <a:defRPr sz="800" b="1">
-                <a:solidFill>
-                  <a:srgbClr val="10B981"/>
-                </a:solidFill>
-                <a:latin typeface="Consolas"/>
-              </a:defRPr>
-            </a:pPr>
-            <a:r>
-              <a:t>MULTI-NODE TELEMETRY SWARM</a:t>
-            </a:r>
-          </a:p>
-          <a:p>
-            <a:pPr>
-              <a:spcBef>
-                <a:spcPts val="300"/>
-              </a:spcBef>
-              <a:defRPr sz="1300" b="1">
-                <a:solidFill>
-                  <a:srgbClr val="FAF8F5"/>
-                </a:solidFill>
-                <a:latin typeface="Segoe UI"/>
-              </a:defRPr>
-            </a:pPr>
-            <a:r>
-              <a:t>v1.3: Distributed Fleet Mesh</a:t>
-            </a:r>
-          </a:p>
-          <a:p>
-            <a:pPr>
-              <a:spcBef>
-                <a:spcPts val="600"/>
-              </a:spcBef>
-              <a:defRPr sz="1000">
-                <a:solidFill>
-                  <a:srgbClr val="A39E93"/>
-                </a:solidFill>
-                <a:latin typeface="Calibri"/>
-              </a:defRPr>
-            </a:pPr>
-            <a:r>
-              <a:t>Federated intelligence sharing where detection of a zero-day on one edge node synthesizes and pushes YARA immunization across all nodes in under 500ms.</a:t>
-            </a:r>
-          </a:p>
-        </p:txBody>
-      </p:sp>
-      <p:sp>
-        <p:nvSpPr>
-          <p:cNvPr id="12" name="Rounded Rectangle 11"/>
-          <p:cNvSpPr/>
-          <p:nvPr/>
-        </p:nvSpPr>
-        <p:spPr>
-          <a:xfrm>
-            <a:off x="822960" y="5029200"/>
-            <a:ext cx="10424160" cy="777240"/>
-          </a:xfrm>
-          <a:prstGeom prst="roundRect">
-            <a:avLst/>
-          </a:prstGeom>
-          <a:solidFill>
-            <a:srgbClr val="191510"/>
-          </a:solidFill>
-          <a:ln w="12700">
-            <a:solidFill>
-              <a:srgbClr val="352F27"/>
-            </a:solidFill>
-          </a:ln>
-        </p:spPr>
-        <p:style>
-          <a:lnRef idx="1">
-            <a:schemeClr val="accent1"/>
-          </a:lnRef>
-          <a:fillRef idx="3">
-            <a:schemeClr val="accent1"/>
-          </a:fillRef>
-          <a:effectRef idx="2">
-            <a:schemeClr val="accent1"/>
-          </a:effectRef>
-          <a:fontRef idx="minor">
-            <a:schemeClr val="lt1"/>
-          </a:fontRef>
-        </p:style>
-        <p:txBody>
-          <a:bodyPr rtlCol="0" anchor="ctr"/>
-          <a:lstStyle/>
-          <a:p>
-            <a:pPr algn="ctr"/>
-          </a:p>
-        </p:txBody>
-      </p:sp>
-      <p:sp>
-        <p:nvSpPr>
-          <p:cNvPr id="13" name="TextBox 12"/>
-          <p:cNvSpPr txBox="1"/>
-          <p:nvPr/>
-        </p:nvSpPr>
-        <p:spPr>
-          <a:xfrm>
-            <a:off x="1005840" y="5166360"/>
-            <a:ext cx="10058400" cy="548640"/>
+            <a:off x="822960" y="6327648"/>
+            <a:ext cx="10545775" cy="320040"/>
           </a:xfrm>
           <a:prstGeom prst="rect">
             <a:avLst/>
@@ -7310,117 +6317,31 @@
           <a:lstStyle/>
           <a:p>
             <a:r>
-              <a:rPr sz="1000" b="1">
-                <a:solidFill>
-                  <a:srgbClr val="10B981"/>
+              <a:rPr sz="950">
+                <a:solidFill>
+                  <a:srgbClr val="7D776E"/>
                 </a:solidFill>
                 <a:latin typeface="Consolas"/>
               </a:rPr>
-              <a:t>READY FOR LIVE JUDGE DEMONSTRATION  ●  </a:t>
-            </a:r>
-            <a:r>
-              <a:rPr sz="1000">
-                <a:solidFill>
-                  <a:srgbClr val="A39E93"/>
+              <a:t>NULLIFY  •  AUTONOMOUS CYBER DEFENSE</a:t>
+            </a:r>
+            <a:r>
+              <a:rPr i="1" sz="1000">
+                <a:solidFill>
+                  <a:srgbClr val="BFB9AF"/>
+                </a:solidFill>
+                <a:latin typeface="Georgia"/>
+              </a:rPr>
+              <a:t>                               See it. Trace it. Nullify it.                               </a:t>
+            </a:r>
+            <a:r>
+              <a:rPr sz="950">
+                <a:solidFill>
+                  <a:srgbClr val="7D776E"/>
                 </a:solidFill>
                 <a:latin typeface="Consolas"/>
               </a:rPr>
-              <a:t>Repository: github.com/Nate-br/nullify  |  Web: http://localhost:8000  |  CLI: $ nullify</a:t>
-            </a:r>
-          </a:p>
-        </p:txBody>
-      </p:sp>
-      <p:sp>
-        <p:nvSpPr>
-          <p:cNvPr id="14" name="Rectangle 13"/>
-          <p:cNvSpPr/>
-          <p:nvPr/>
-        </p:nvSpPr>
-        <p:spPr>
-          <a:xfrm>
-            <a:off x="731520" y="6263640"/>
-            <a:ext cx="10728655" cy="9525"/>
-          </a:xfrm>
-          <a:prstGeom prst="rect">
-            <a:avLst/>
-          </a:prstGeom>
-          <a:solidFill>
-            <a:srgbClr val="352F27"/>
-          </a:solidFill>
-          <a:ln>
-            <a:noFill/>
-          </a:ln>
-        </p:spPr>
-        <p:style>
-          <a:lnRef idx="1">
-            <a:schemeClr val="accent1"/>
-          </a:lnRef>
-          <a:fillRef idx="3">
-            <a:schemeClr val="accent1"/>
-          </a:fillRef>
-          <a:effectRef idx="2">
-            <a:schemeClr val="accent1"/>
-          </a:effectRef>
-          <a:fontRef idx="minor">
-            <a:schemeClr val="lt1"/>
-          </a:fontRef>
-        </p:style>
-        <p:txBody>
-          <a:bodyPr rtlCol="0" anchor="ctr"/>
-          <a:lstStyle/>
-          <a:p>
-            <a:pPr algn="ctr"/>
-          </a:p>
-        </p:txBody>
-      </p:sp>
-      <p:sp>
-        <p:nvSpPr>
-          <p:cNvPr id="15" name="TextBox 14"/>
-          <p:cNvSpPr txBox="1"/>
-          <p:nvPr/>
-        </p:nvSpPr>
-        <p:spPr>
-          <a:xfrm>
-            <a:off x="731520" y="6327648"/>
-            <a:ext cx="10728655" cy="320040"/>
-          </a:xfrm>
-          <a:prstGeom prst="rect">
-            <a:avLst/>
-          </a:prstGeom>
-          <a:noFill/>
-        </p:spPr>
-        <p:txBody>
-          <a:bodyPr wrap="none" lIns="0" tIns="0" rIns="0" bIns="0">
-            <a:spAutoFit/>
-          </a:bodyPr>
-          <a:lstStyle/>
-          <a:p>
-            <a:r>
-              <a:rPr sz="850">
-                <a:solidFill>
-                  <a:srgbClr val="736E65"/>
-                </a:solidFill>
-                <a:latin typeface="Consolas"/>
-              </a:rPr>
-              <a:t>NULLIFY  ●  AUTONOMOUS MULTI-AGENT DEFENSE</a:t>
-            </a:r>
-            <a:r>
-              <a:rPr i="1" sz="900">
-                <a:solidFill>
-                  <a:srgbClr val="A39E93"/>
-                </a:solidFill>
-                <a:latin typeface="Georgia"/>
-              </a:rPr>
-              <a:t>                       See it. Trace it. Nullify it.                       </a:t>
-            </a:r>
-            <a:r>
-              <a:rPr sz="850">
-                <a:solidFill>
-                  <a:srgbClr val="736E65"/>
-                </a:solidFill>
-                <a:latin typeface="Consolas"/>
-              </a:rPr>
-              <a:t>SLIDE 12 / 12</a:t>
+              <a:t>11 / 11</a:t>
             </a:r>
           </a:p>
         </p:txBody>
@@ -7494,8 +6415,44 @@
         </p:nvSpPr>
         <p:spPr>
           <a:xfrm>
-            <a:off x="731520" y="502920"/>
-            <a:ext cx="10698480" cy="365760"/>
+            <a:off x="822960" y="502920"/>
+            <a:ext cx="10515600" cy="320040"/>
+          </a:xfrm>
+          <a:prstGeom prst="rect">
+            <a:avLst/>
+          </a:prstGeom>
+          <a:noFill/>
+        </p:spPr>
+        <p:txBody>
+          <a:bodyPr wrap="none" lIns="0" tIns="0" rIns="0" bIns="0">
+            <a:spAutoFit/>
+          </a:bodyPr>
+          <a:lstStyle/>
+          <a:p>
+            <a:pPr>
+              <a:defRPr sz="1100" b="1">
+                <a:solidFill>
+                  <a:srgbClr val="059669"/>
+                </a:solidFill>
+                <a:latin typeface="Consolas"/>
+              </a:defRPr>
+            </a:pPr>
+            <a:r>
+              <a:t>●  THE PROBLEM</a:t>
+            </a:r>
+          </a:p>
+        </p:txBody>
+      </p:sp>
+      <p:sp>
+        <p:nvSpPr>
+          <p:cNvPr id="4" name="TextBox 3"/>
+          <p:cNvSpPr txBox="1"/>
+          <p:nvPr/>
+        </p:nvSpPr>
+        <p:spPr>
+          <a:xfrm>
+            <a:off x="822960" y="822960"/>
+            <a:ext cx="10515600" cy="685800"/>
           </a:xfrm>
           <a:prstGeom prst="rect">
             <a:avLst/>
@@ -7509,51 +6466,15 @@
           <a:lstStyle/>
           <a:p>
             <a:pPr>
-              <a:defRPr sz="1000" b="1">
-                <a:solidFill>
-                  <a:srgbClr val="15803D"/>
-                </a:solidFill>
-                <a:latin typeface="Consolas"/>
-              </a:defRPr>
-            </a:pPr>
-            <a:r>
-              <a:t>01 // EXECUTIVE CONTEXT &amp; PROBLEM</a:t>
-            </a:r>
-          </a:p>
-        </p:txBody>
-      </p:sp>
-      <p:sp>
-        <p:nvSpPr>
-          <p:cNvPr id="4" name="TextBox 3"/>
-          <p:cNvSpPr txBox="1"/>
-          <p:nvPr/>
-        </p:nvSpPr>
-        <p:spPr>
-          <a:xfrm>
-            <a:off x="731520" y="822960"/>
-            <a:ext cx="10698480" cy="731520"/>
-          </a:xfrm>
-          <a:prstGeom prst="rect">
-            <a:avLst/>
-          </a:prstGeom>
-          <a:noFill/>
-        </p:spPr>
-        <p:txBody>
-          <a:bodyPr wrap="square" lIns="0" tIns="0" rIns="0" bIns="0">
-            <a:spAutoFit/>
-          </a:bodyPr>
-          <a:lstStyle/>
-          <a:p>
-            <a:pPr>
-              <a:defRPr sz="2800" b="1">
-                <a:solidFill>
-                  <a:srgbClr val="191510"/>
+              <a:defRPr sz="3200" b="1">
+                <a:solidFill>
+                  <a:srgbClr val="15120E"/>
                 </a:solidFill>
                 <a:latin typeface="Georgia"/>
               </a:defRPr>
             </a:pPr>
             <a:r>
-              <a:t>The Asymmetric Crisis in Modern Threat Defense</a:t>
+              <a:t>Traditional Antivirus Can't Keep Up</a:t>
             </a:r>
           </a:p>
         </p:txBody>
@@ -7566,8 +6487,8 @@
         </p:nvSpPr>
         <p:spPr>
           <a:xfrm>
-            <a:off x="731520" y="1645920"/>
-            <a:ext cx="3429000" cy="3474720"/>
+            <a:off x="822960" y="1645920"/>
+            <a:ext cx="3383280" cy="3657600"/>
           </a:xfrm>
           <a:prstGeom prst="roundRect">
             <a:avLst/>
@@ -7577,7 +6498,7 @@
           </a:solidFill>
           <a:ln w="12700">
             <a:solidFill>
-              <a:srgbClr val="E5E2DD"/>
+              <a:srgbClr val="E2DCD2"/>
             </a:solidFill>
           </a:ln>
         </p:spPr>
@@ -7605,14 +6526,102 @@
       </p:sp>
       <p:sp>
         <p:nvSpPr>
-          <p:cNvPr id="6" name="Rounded Rectangle 5"/>
+          <p:cNvPr id="6" name="TextBox 5"/>
+          <p:cNvSpPr txBox="1"/>
+          <p:nvPr/>
+        </p:nvSpPr>
+        <p:spPr>
+          <a:xfrm>
+            <a:off x="1097280" y="1828800"/>
+            <a:ext cx="2834640" cy="640080"/>
+          </a:xfrm>
+          <a:prstGeom prst="rect">
+            <a:avLst/>
+          </a:prstGeom>
+          <a:noFill/>
+        </p:spPr>
+        <p:txBody>
+          <a:bodyPr wrap="none" lIns="0" tIns="0" rIns="0" bIns="0">
+            <a:spAutoFit/>
+          </a:bodyPr>
+          <a:lstStyle/>
+          <a:p>
+            <a:pPr>
+              <a:defRPr sz="3800" b="1">
+                <a:solidFill>
+                  <a:srgbClr val="DC2626"/>
+                </a:solidFill>
+                <a:latin typeface="Georgia"/>
+              </a:defRPr>
+            </a:pPr>
+            <a:r>
+              <a:t>01</a:t>
+            </a:r>
+          </a:p>
+        </p:txBody>
+      </p:sp>
+      <p:sp>
+        <p:nvSpPr>
+          <p:cNvPr id="7" name="TextBox 6"/>
+          <p:cNvSpPr txBox="1"/>
+          <p:nvPr/>
+        </p:nvSpPr>
+        <p:spPr>
+          <a:xfrm>
+            <a:off x="1097280" y="2514600"/>
+            <a:ext cx="2834640" cy="2011680"/>
+          </a:xfrm>
+          <a:prstGeom prst="rect">
+            <a:avLst/>
+          </a:prstGeom>
+          <a:noFill/>
+        </p:spPr>
+        <p:txBody>
+          <a:bodyPr wrap="square" lIns="0" tIns="0" rIns="0" bIns="0">
+            <a:spAutoFit/>
+          </a:bodyPr>
+          <a:lstStyle/>
+          <a:p>
+            <a:pPr>
+              <a:defRPr sz="1800" b="1">
+                <a:solidFill>
+                  <a:srgbClr val="15120E"/>
+                </a:solidFill>
+                <a:latin typeface="Segoe UI"/>
+              </a:defRPr>
+            </a:pPr>
+            <a:r>
+              <a:t>New Malware is Invisible</a:t>
+            </a:r>
+          </a:p>
+          <a:p>
+            <a:pPr>
+              <a:spcBef>
+                <a:spcPts val="800"/>
+              </a:spcBef>
+              <a:defRPr sz="1400">
+                <a:solidFill>
+                  <a:srgbClr val="555048"/>
+                </a:solidFill>
+                <a:latin typeface="Segoe UI"/>
+              </a:defRPr>
+            </a:pPr>
+            <a:r>
+              <a:t>Traditional antivirus checks for known hashes. But attackers constantly change their code, so signatures fail on day one.</a:t>
+            </a:r>
+          </a:p>
+        </p:txBody>
+      </p:sp>
+      <p:sp>
+        <p:nvSpPr>
+          <p:cNvPr id="8" name="Rounded Rectangle 7"/>
           <p:cNvSpPr/>
           <p:nvPr/>
         </p:nvSpPr>
         <p:spPr>
           <a:xfrm>
-            <a:off x="960120" y="1874519"/>
-            <a:ext cx="1645920" cy="292608"/>
+            <a:off x="1097280" y="4754880"/>
+            <a:ext cx="2834640" cy="347472"/>
           </a:xfrm>
           <a:prstGeom prst="roundRect">
             <a:avLst/>
@@ -7620,10 +6629,8 @@
           <a:solidFill>
             <a:srgbClr val="FEF2F2"/>
           </a:solidFill>
-          <a:ln w="9525">
-            <a:solidFill>
-              <a:srgbClr val="FECACA"/>
-            </a:solidFill>
+          <a:ln>
+            <a:noFill/>
           </a:ln>
         </p:spPr>
         <p:style>
@@ -7641,101 +6648,33 @@
           </a:fontRef>
         </p:style>
         <p:txBody>
-          <a:bodyPr rtlCol="0" anchor="ctr" wrap="none" lIns="0" tIns="0" rIns="0" bIns="0"/>
+          <a:bodyPr rtlCol="0" anchor="ctr" lIns="0" tIns="0" rIns="0" bIns="0"/>
           <a:lstStyle/>
           <a:p>
             <a:pPr algn="ctr">
-              <a:defRPr sz="800" b="1">
-                <a:solidFill>
-                  <a:srgbClr val="B91C1C"/>
+              <a:defRPr sz="900" b="1">
+                <a:solidFill>
+                  <a:srgbClr val="DC2626"/>
                 </a:solidFill>
                 <a:latin typeface="Consolas"/>
               </a:defRPr>
             </a:pPr>
             <a:r>
-              <a:t>450K+ daily variants</a:t>
-            </a:r>
-          </a:p>
-        </p:txBody>
-      </p:sp>
-      <p:sp>
-        <p:nvSpPr>
-          <p:cNvPr id="7" name="TextBox 6"/>
-          <p:cNvSpPr txBox="1"/>
-          <p:nvPr/>
-        </p:nvSpPr>
-        <p:spPr>
-          <a:xfrm>
-            <a:off x="960120" y="2331720"/>
-            <a:ext cx="2971800" cy="2651760"/>
-          </a:xfrm>
-          <a:prstGeom prst="rect">
-            <a:avLst/>
-          </a:prstGeom>
-          <a:noFill/>
-        </p:spPr>
-        <p:txBody>
-          <a:bodyPr wrap="square" lIns="0" tIns="0" rIns="0" bIns="0">
-            <a:spAutoFit/>
-          </a:bodyPr>
-          <a:lstStyle/>
-          <a:p>
-            <a:pPr>
-              <a:defRPr sz="2400">
-                <a:solidFill>
-                  <a:srgbClr val="B91C1C"/>
-                </a:solidFill>
-                <a:latin typeface="Georgia"/>
-              </a:defRPr>
-            </a:pPr>
-            <a:r>
-              <a:t>01</a:t>
-            </a:r>
-          </a:p>
-          <a:p>
-            <a:pPr>
-              <a:spcBef>
-                <a:spcPts val="400"/>
-              </a:spcBef>
-              <a:defRPr sz="1400" b="1">
-                <a:solidFill>
-                  <a:srgbClr val="191510"/>
-                </a:solidFill>
-                <a:latin typeface="Segoe UI"/>
-              </a:defRPr>
-            </a:pPr>
-            <a:r>
-              <a:t>Polymorphic Zero-Day Avalanche</a:t>
-            </a:r>
-          </a:p>
-          <a:p>
-            <a:pPr>
-              <a:spcBef>
-                <a:spcPts val="800"/>
-              </a:spcBef>
-              <a:defRPr sz="1100">
-                <a:solidFill>
-                  <a:srgbClr val="66625B"/>
-                </a:solidFill>
-                <a:latin typeface="Calibri"/>
-              </a:defRPr>
-            </a:pPr>
-            <a:r>
-              <a:t>Over 450,000 new malware samples emerge every single day. Attackers leverage polymorphic crypters, dynamic API unhooking, and packed payloads that render traditional static hash lists (MD5/SHA256) and signature-only antivirus utterly obsolete.</a:t>
-            </a:r>
-          </a:p>
-        </p:txBody>
-      </p:sp>
-      <p:sp>
-        <p:nvSpPr>
-          <p:cNvPr id="8" name="Rounded Rectangle 7"/>
+              <a:t>450,000+ new attacks every day</a:t>
+            </a:r>
+          </a:p>
+        </p:txBody>
+      </p:sp>
+      <p:sp>
+        <p:nvSpPr>
+          <p:cNvPr id="9" name="Rounded Rectangle 8"/>
           <p:cNvSpPr/>
           <p:nvPr/>
         </p:nvSpPr>
         <p:spPr>
           <a:xfrm>
-            <a:off x="4370832" y="1645920"/>
-            <a:ext cx="3429000" cy="3474720"/>
+            <a:off x="4434840" y="1645920"/>
+            <a:ext cx="3383280" cy="3657600"/>
           </a:xfrm>
           <a:prstGeom prst="roundRect">
             <a:avLst/>
@@ -7745,7 +6684,7 @@
           </a:solidFill>
           <a:ln w="12700">
             <a:solidFill>
-              <a:srgbClr val="E5E2DD"/>
+              <a:srgbClr val="E2DCD2"/>
             </a:solidFill>
           </a:ln>
         </p:spPr>
@@ -7773,14 +6712,102 @@
       </p:sp>
       <p:sp>
         <p:nvSpPr>
-          <p:cNvPr id="9" name="Rounded Rectangle 8"/>
+          <p:cNvPr id="10" name="TextBox 9"/>
+          <p:cNvSpPr txBox="1"/>
+          <p:nvPr/>
+        </p:nvSpPr>
+        <p:spPr>
+          <a:xfrm>
+            <a:off x="4709160" y="1828800"/>
+            <a:ext cx="2834640" cy="640080"/>
+          </a:xfrm>
+          <a:prstGeom prst="rect">
+            <a:avLst/>
+          </a:prstGeom>
+          <a:noFill/>
+        </p:spPr>
+        <p:txBody>
+          <a:bodyPr wrap="none" lIns="0" tIns="0" rIns="0" bIns="0">
+            <a:spAutoFit/>
+          </a:bodyPr>
+          <a:lstStyle/>
+          <a:p>
+            <a:pPr>
+              <a:defRPr sz="3800" b="1">
+                <a:solidFill>
+                  <a:srgbClr val="D97706"/>
+                </a:solidFill>
+                <a:latin typeface="Georgia"/>
+              </a:defRPr>
+            </a:pPr>
+            <a:r>
+              <a:t>02</a:t>
+            </a:r>
+          </a:p>
+        </p:txBody>
+      </p:sp>
+      <p:sp>
+        <p:nvSpPr>
+          <p:cNvPr id="11" name="TextBox 10"/>
+          <p:cNvSpPr txBox="1"/>
+          <p:nvPr/>
+        </p:nvSpPr>
+        <p:spPr>
+          <a:xfrm>
+            <a:off x="4709160" y="2514600"/>
+            <a:ext cx="2834640" cy="2011680"/>
+          </a:xfrm>
+          <a:prstGeom prst="rect">
+            <a:avLst/>
+          </a:prstGeom>
+          <a:noFill/>
+        </p:spPr>
+        <p:txBody>
+          <a:bodyPr wrap="square" lIns="0" tIns="0" rIns="0" bIns="0">
+            <a:spAutoFit/>
+          </a:bodyPr>
+          <a:lstStyle/>
+          <a:p>
+            <a:pPr>
+              <a:defRPr sz="1800" b="1">
+                <a:solidFill>
+                  <a:srgbClr val="15120E"/>
+                </a:solidFill>
+                <a:latin typeface="Segoe UI"/>
+              </a:defRPr>
+            </a:pPr>
+            <a:r>
+              <a:t>Sandboxes are Too Slow</a:t>
+            </a:r>
+          </a:p>
+          <a:p>
+            <a:pPr>
+              <a:spcBef>
+                <a:spcPts val="800"/>
+              </a:spcBef>
+              <a:defRPr sz="1400">
+                <a:solidFill>
+                  <a:srgbClr val="555048"/>
+                </a:solidFill>
+                <a:latin typeface="Segoe UI"/>
+              </a:defRPr>
+            </a:pPr>
+            <a:r>
+              <a:t>Testing a file in a virtual machine takes 5 to 15 minutes. Firewalls and email filters cannot put traffic on hold that long.</a:t>
+            </a:r>
+          </a:p>
+        </p:txBody>
+      </p:sp>
+      <p:sp>
+        <p:nvSpPr>
+          <p:cNvPr id="12" name="Rounded Rectangle 11"/>
           <p:cNvSpPr/>
           <p:nvPr/>
         </p:nvSpPr>
         <p:spPr>
           <a:xfrm>
-            <a:off x="4599432" y="1874519"/>
-            <a:ext cx="1645920" cy="292608"/>
+            <a:off x="4709160" y="4754880"/>
+            <a:ext cx="2834640" cy="347472"/>
           </a:xfrm>
           <a:prstGeom prst="roundRect">
             <a:avLst/>
@@ -7788,10 +6815,8 @@
           <a:solidFill>
             <a:srgbClr val="FFFBEB"/>
           </a:solidFill>
-          <a:ln w="9525">
-            <a:solidFill>
-              <a:srgbClr val="FDE68A"/>
-            </a:solidFill>
+          <a:ln>
+            <a:noFill/>
           </a:ln>
         </p:spPr>
         <p:style>
@@ -7809,101 +6834,33 @@
           </a:fontRef>
         </p:style>
         <p:txBody>
-          <a:bodyPr rtlCol="0" anchor="ctr" wrap="none" lIns="0" tIns="0" rIns="0" bIns="0"/>
+          <a:bodyPr rtlCol="0" anchor="ctr" lIns="0" tIns="0" rIns="0" bIns="0"/>
           <a:lstStyle/>
           <a:p>
             <a:pPr algn="ctr">
-              <a:defRPr sz="800" b="1">
-                <a:solidFill>
-                  <a:srgbClr val="B45309"/>
+              <a:defRPr sz="900" b="1">
+                <a:solidFill>
+                  <a:srgbClr val="D97706"/>
                 </a:solidFill>
                 <a:latin typeface="Consolas"/>
               </a:defRPr>
             </a:pPr>
             <a:r>
-              <a:t>300-1200s delay</a:t>
-            </a:r>
-          </a:p>
-        </p:txBody>
-      </p:sp>
-      <p:sp>
-        <p:nvSpPr>
-          <p:cNvPr id="10" name="TextBox 9"/>
-          <p:cNvSpPr txBox="1"/>
-          <p:nvPr/>
-        </p:nvSpPr>
-        <p:spPr>
-          <a:xfrm>
-            <a:off x="4599432" y="2331720"/>
-            <a:ext cx="2971800" cy="2651760"/>
-          </a:xfrm>
-          <a:prstGeom prst="rect">
-            <a:avLst/>
-          </a:prstGeom>
-          <a:noFill/>
-        </p:spPr>
-        <p:txBody>
-          <a:bodyPr wrap="square" lIns="0" tIns="0" rIns="0" bIns="0">
-            <a:spAutoFit/>
-          </a:bodyPr>
-          <a:lstStyle/>
-          <a:p>
-            <a:pPr>
-              <a:defRPr sz="2400">
-                <a:solidFill>
-                  <a:srgbClr val="B45309"/>
-                </a:solidFill>
-                <a:latin typeface="Georgia"/>
-              </a:defRPr>
-            </a:pPr>
-            <a:r>
-              <a:t>02</a:t>
-            </a:r>
-          </a:p>
-          <a:p>
-            <a:pPr>
-              <a:spcBef>
-                <a:spcPts val="400"/>
-              </a:spcBef>
-              <a:defRPr sz="1400" b="1">
-                <a:solidFill>
-                  <a:srgbClr val="191510"/>
-                </a:solidFill>
-                <a:latin typeface="Segoe UI"/>
-              </a:defRPr>
-            </a:pPr>
-            <a:r>
-              <a:t>The 15-Minute Sandbox Bottleneck</a:t>
-            </a:r>
-          </a:p>
-          <a:p>
-            <a:pPr>
-              <a:spcBef>
-                <a:spcPts val="800"/>
-              </a:spcBef>
-              <a:defRPr sz="1100">
-                <a:solidFill>
-                  <a:srgbClr val="66625B"/>
-                </a:solidFill>
-                <a:latin typeface="Calibri"/>
-              </a:defRPr>
-            </a:pPr>
-            <a:r>
-              <a:t>Traditional behavioral detonation sandboxes (e.g. Cuckoo, Joe Sandbox) take 5 to 20 minutes to boot a guest VM, wait for sleep evasions, and produce telemetry. High-throughput edge routers and email gateways cannot afford to wait minutes on hold.</a:t>
-            </a:r>
-          </a:p>
-        </p:txBody>
-      </p:sp>
-      <p:sp>
-        <p:nvSpPr>
-          <p:cNvPr id="11" name="Rounded Rectangle 10"/>
+              <a:t>15-minute delay is dangerous</a:t>
+            </a:r>
+          </a:p>
+        </p:txBody>
+      </p:sp>
+      <p:sp>
+        <p:nvSpPr>
+          <p:cNvPr id="13" name="Rounded Rectangle 12"/>
           <p:cNvSpPr/>
           <p:nvPr/>
         </p:nvSpPr>
         <p:spPr>
           <a:xfrm>
-            <a:off x="8010144" y="1645920"/>
-            <a:ext cx="3429000" cy="3474720"/>
+            <a:off x="8046720" y="1645920"/>
+            <a:ext cx="3383280" cy="3657600"/>
           </a:xfrm>
           <a:prstGeom prst="roundRect">
             <a:avLst/>
@@ -7913,7 +6870,7 @@
           </a:solidFill>
           <a:ln w="12700">
             <a:solidFill>
-              <a:srgbClr val="E5E2DD"/>
+              <a:srgbClr val="E2DCD2"/>
             </a:solidFill>
           </a:ln>
         </p:spPr>
@@ -7941,14 +6898,102 @@
       </p:sp>
       <p:sp>
         <p:nvSpPr>
-          <p:cNvPr id="12" name="Rounded Rectangle 11"/>
+          <p:cNvPr id="14" name="TextBox 13"/>
+          <p:cNvSpPr txBox="1"/>
+          <p:nvPr/>
+        </p:nvSpPr>
+        <p:spPr>
+          <a:xfrm>
+            <a:off x="8321040" y="1828800"/>
+            <a:ext cx="2834640" cy="640080"/>
+          </a:xfrm>
+          <a:prstGeom prst="rect">
+            <a:avLst/>
+          </a:prstGeom>
+          <a:noFill/>
+        </p:spPr>
+        <p:txBody>
+          <a:bodyPr wrap="none" lIns="0" tIns="0" rIns="0" bIns="0">
+            <a:spAutoFit/>
+          </a:bodyPr>
+          <a:lstStyle/>
+          <a:p>
+            <a:pPr>
+              <a:defRPr sz="3800" b="1">
+                <a:solidFill>
+                  <a:srgbClr val="2563EB"/>
+                </a:solidFill>
+                <a:latin typeface="Georgia"/>
+              </a:defRPr>
+            </a:pPr>
+            <a:r>
+              <a:t>03</a:t>
+            </a:r>
+          </a:p>
+        </p:txBody>
+      </p:sp>
+      <p:sp>
+        <p:nvSpPr>
+          <p:cNvPr id="15" name="TextBox 14"/>
+          <p:cNvSpPr txBox="1"/>
+          <p:nvPr/>
+        </p:nvSpPr>
+        <p:spPr>
+          <a:xfrm>
+            <a:off x="8321040" y="2514600"/>
+            <a:ext cx="2834640" cy="2011680"/>
+          </a:xfrm>
+          <a:prstGeom prst="rect">
+            <a:avLst/>
+          </a:prstGeom>
+          <a:noFill/>
+        </p:spPr>
+        <p:txBody>
+          <a:bodyPr wrap="square" lIns="0" tIns="0" rIns="0" bIns="0">
+            <a:spAutoFit/>
+          </a:bodyPr>
+          <a:lstStyle/>
+          <a:p>
+            <a:pPr>
+              <a:defRPr sz="1800" b="1">
+                <a:solidFill>
+                  <a:srgbClr val="15120E"/>
+                </a:solidFill>
+                <a:latin typeface="Segoe UI"/>
+              </a:defRPr>
+            </a:pPr>
+            <a:r>
+              <a:t>Security Tools Crash</a:t>
+            </a:r>
+          </a:p>
+          <a:p>
+            <a:pPr>
+              <a:spcBef>
+                <a:spcPts val="800"/>
+              </a:spcBef>
+              <a:defRPr sz="1400">
+                <a:solidFill>
+                  <a:srgbClr val="555048"/>
+                </a:solidFill>
+                <a:latin typeface="Segoe UI"/>
+              </a:defRPr>
+            </a:pPr>
+            <a:r>
+              <a:t>Most open-source security tools are written in Python. When thousands of files hit at once, they lag, freeze, and run out of memory.</a:t>
+            </a:r>
+          </a:p>
+        </p:txBody>
+      </p:sp>
+      <p:sp>
+        <p:nvSpPr>
+          <p:cNvPr id="16" name="Rounded Rectangle 15"/>
           <p:cNvSpPr/>
           <p:nvPr/>
         </p:nvSpPr>
         <p:spPr>
           <a:xfrm>
-            <a:off x="8238744" y="1874519"/>
-            <a:ext cx="1645920" cy="292608"/>
+            <a:off x="8321040" y="4754880"/>
+            <a:ext cx="2834640" cy="347472"/>
           </a:xfrm>
           <a:prstGeom prst="roundRect">
             <a:avLst/>
@@ -7956,10 +7001,8 @@
           <a:solidFill>
             <a:srgbClr val="EFF6FF"/>
           </a:solidFill>
-          <a:ln w="9525">
-            <a:solidFill>
-              <a:srgbClr val="BFDBFE"/>
-            </a:solidFill>
+          <a:ln>
+            <a:noFill/>
           </a:ln>
         </p:spPr>
         <p:style>
@@ -7977,11 +7020,11 @@
           </a:fontRef>
         </p:style>
         <p:txBody>
-          <a:bodyPr rtlCol="0" anchor="ctr" wrap="none" lIns="0" tIns="0" rIns="0" bIns="0"/>
+          <a:bodyPr rtlCol="0" anchor="ctr" lIns="0" tIns="0" rIns="0" bIns="0"/>
           <a:lstStyle/>
           <a:p>
             <a:pPr algn="ctr">
-              <a:defRPr sz="800" b="1">
+              <a:defRPr sz="900" b="1">
                 <a:solidFill>
                   <a:srgbClr val="2563EB"/>
                 </a:solidFill>
@@ -7989,99 +7032,31 @@
               </a:defRPr>
             </a:pPr>
             <a:r>
-              <a:t>100ms+ GIL lockup</a:t>
-            </a:r>
-          </a:p>
-        </p:txBody>
-      </p:sp>
-      <p:sp>
-        <p:nvSpPr>
-          <p:cNvPr id="13" name="TextBox 12"/>
-          <p:cNvSpPr txBox="1"/>
-          <p:nvPr/>
-        </p:nvSpPr>
-        <p:spPr>
-          <a:xfrm>
-            <a:off x="8238744" y="2331720"/>
-            <a:ext cx="2971800" cy="2651760"/>
-          </a:xfrm>
-          <a:prstGeom prst="rect">
-            <a:avLst/>
-          </a:prstGeom>
-          <a:noFill/>
-        </p:spPr>
-        <p:txBody>
-          <a:bodyPr wrap="square" lIns="0" tIns="0" rIns="0" bIns="0">
-            <a:spAutoFit/>
-          </a:bodyPr>
-          <a:lstStyle/>
-          <a:p>
-            <a:pPr>
-              <a:defRPr sz="2400">
-                <a:solidFill>
-                  <a:srgbClr val="2563EB"/>
-                </a:solidFill>
-                <a:latin typeface="Georgia"/>
-              </a:defRPr>
-            </a:pPr>
-            <a:r>
-              <a:t>03</a:t>
-            </a:r>
-          </a:p>
-          <a:p>
-            <a:pPr>
-              <a:spcBef>
-                <a:spcPts val="400"/>
-              </a:spcBef>
-              <a:defRPr sz="1400" b="1">
-                <a:solidFill>
-                  <a:srgbClr val="191510"/>
-                </a:solidFill>
-                <a:latin typeface="Segoe UI"/>
-              </a:defRPr>
-            </a:pPr>
-            <a:r>
-              <a:t>Python Tooling Bloat &amp; Memory Leaks</a:t>
-            </a:r>
-          </a:p>
-          <a:p>
-            <a:pPr>
-              <a:spcBef>
-                <a:spcPts val="800"/>
-              </a:spcBef>
-              <a:defRPr sz="1100">
-                <a:solidFill>
-                  <a:srgbClr val="66625B"/>
-                </a:solidFill>
-                <a:latin typeface="Calibri"/>
-              </a:defRPr>
-            </a:pPr>
-            <a:r>
-              <a:t>Most open-source security tools (pefile, volatility, regex scanners) are written in high-level interpreted Python. They suffer from GIL locking, excessive memory consumption, and 50–100ms per-file overhead, causing fatal bottlenecks at scale.</a:t>
-            </a:r>
-          </a:p>
-        </p:txBody>
-      </p:sp>
-      <p:sp>
-        <p:nvSpPr>
-          <p:cNvPr id="14" name="Rounded Rectangle 13"/>
+              <a:t>Python runtime bottlenecks</a:t>
+            </a:r>
+          </a:p>
+        </p:txBody>
+      </p:sp>
+      <p:sp>
+        <p:nvSpPr>
+          <p:cNvPr id="17" name="Rounded Rectangle 16"/>
           <p:cNvSpPr/>
           <p:nvPr/>
         </p:nvSpPr>
         <p:spPr>
           <a:xfrm>
-            <a:off x="731520" y="5303520"/>
-            <a:ext cx="10728655" cy="777240"/>
+            <a:off x="822960" y="5486400"/>
+            <a:ext cx="10545775" cy="594360"/>
           </a:xfrm>
           <a:prstGeom prst="roundRect">
             <a:avLst/>
           </a:prstGeom>
           <a:solidFill>
-            <a:srgbClr val="FAF8F5"/>
+            <a:srgbClr val="F5F1EA"/>
           </a:solidFill>
           <a:ln w="12700">
             <a:solidFill>
-              <a:srgbClr val="E5E2DD"/>
+              <a:srgbClr val="E2DCD2"/>
             </a:solidFill>
           </a:ln>
         </p:spPr>
@@ -8109,14 +7084,14 @@
       </p:sp>
       <p:sp>
         <p:nvSpPr>
-          <p:cNvPr id="15" name="TextBox 14"/>
+          <p:cNvPr id="18" name="TextBox 17"/>
           <p:cNvSpPr txBox="1"/>
           <p:nvPr/>
         </p:nvSpPr>
         <p:spPr>
           <a:xfrm>
-            <a:off x="960120" y="5440680"/>
-            <a:ext cx="10241280" cy="548640"/>
+            <a:off x="1051560" y="5596128"/>
+            <a:ext cx="10058400" cy="365760"/>
           </a:xfrm>
           <a:prstGeom prst="rect">
             <a:avLst/>
@@ -8124,48 +7099,48 @@
           <a:noFill/>
         </p:spPr>
         <p:txBody>
-          <a:bodyPr wrap="square" lIns="0" tIns="0" rIns="0" bIns="0">
+          <a:bodyPr wrap="none" lIns="0" tIns="0" rIns="0" bIns="0">
             <a:spAutoFit/>
           </a:bodyPr>
           <a:lstStyle/>
           <a:p>
             <a:r>
-              <a:rPr b="1" sz="1100">
-                <a:solidFill>
-                  <a:srgbClr val="B91C1C"/>
+              <a:rPr b="1" sz="1200">
+                <a:solidFill>
+                  <a:srgbClr val="DC2626"/>
                 </a:solidFill>
                 <a:latin typeface="Consolas"/>
               </a:rPr>
-              <a:t>THE SECURITY GAP: </a:t>
-            </a:r>
-            <a:r>
-              <a:rPr sz="1150">
-                <a:solidFill>
-                  <a:srgbClr val="191510"/>
-                </a:solidFill>
-                <a:latin typeface="Calibri"/>
+              <a:t>THE RESULT: </a:t>
+            </a:r>
+            <a:r>
+              <a:rPr sz="1350">
+                <a:solidFill>
+                  <a:srgbClr val="15120E"/>
+                </a:solidFill>
+                <a:latin typeface="Segoe UI"/>
               </a:rPr>
-              <a:t>SOC analysts and automated perimeter defenses are forced to choose between fast but blind static heuristics, or deep but impossibly sluggish cloud sandboxes. Nullify destroys this compromise.</a:t>
-            </a:r>
-          </a:p>
-        </p:txBody>
-      </p:sp>
-      <p:sp>
-        <p:nvSpPr>
-          <p:cNvPr id="16" name="Rectangle 15"/>
+              <a:t>Organizations are forced to choose between fast but blind antivirus, or slow 15-minute sandboxes.</a:t>
+            </a:r>
+          </a:p>
+        </p:txBody>
+      </p:sp>
+      <p:sp>
+        <p:nvSpPr>
+          <p:cNvPr id="19" name="Rectangle 18"/>
           <p:cNvSpPr/>
           <p:nvPr/>
         </p:nvSpPr>
         <p:spPr>
           <a:xfrm>
-            <a:off x="731520" y="6263640"/>
-            <a:ext cx="10728655" cy="9525"/>
+            <a:off x="822960" y="6263640"/>
+            <a:ext cx="10545775" cy="9525"/>
           </a:xfrm>
           <a:prstGeom prst="rect">
             <a:avLst/>
           </a:prstGeom>
           <a:solidFill>
-            <a:srgbClr val="E5E2DD"/>
+            <a:srgbClr val="E2DCD2"/>
           </a:solidFill>
           <a:ln>
             <a:noFill/>
@@ -8195,14 +7170,14 @@
       </p:sp>
       <p:sp>
         <p:nvSpPr>
-          <p:cNvPr id="17" name="TextBox 16"/>
+          <p:cNvPr id="20" name="TextBox 19"/>
           <p:cNvSpPr txBox="1"/>
           <p:nvPr/>
         </p:nvSpPr>
         <p:spPr>
           <a:xfrm>
-            <a:off x="731520" y="6327648"/>
-            <a:ext cx="10728655" cy="320040"/>
+            <a:off x="822960" y="6327648"/>
+            <a:ext cx="10545775" cy="320040"/>
           </a:xfrm>
           <a:prstGeom prst="rect">
             <a:avLst/>
@@ -8216,31 +7191,31 @@
           <a:lstStyle/>
           <a:p>
             <a:r>
-              <a:rPr sz="850">
-                <a:solidFill>
-                  <a:srgbClr val="8C877E"/>
+              <a:rPr sz="950">
+                <a:solidFill>
+                  <a:srgbClr val="827C73"/>
                 </a:solidFill>
                 <a:latin typeface="Consolas"/>
               </a:rPr>
-              <a:t>NULLIFY  ●  AUTONOMOUS MULTI-AGENT DEFENSE</a:t>
-            </a:r>
-            <a:r>
-              <a:rPr i="1" sz="900">
-                <a:solidFill>
-                  <a:srgbClr val="66625B"/>
+              <a:t>NULLIFY  •  AUTONOMOUS CYBER DEFENSE</a:t>
+            </a:r>
+            <a:r>
+              <a:rPr i="1" sz="1000">
+                <a:solidFill>
+                  <a:srgbClr val="555048"/>
                 </a:solidFill>
                 <a:latin typeface="Georgia"/>
               </a:rPr>
-              <a:t>                       See it. Trace it. Nullify it.                       </a:t>
-            </a:r>
-            <a:r>
-              <a:rPr sz="850">
-                <a:solidFill>
-                  <a:srgbClr val="8C877E"/>
+              <a:t>                               See it. Trace it. Nullify it.                               </a:t>
+            </a:r>
+            <a:r>
+              <a:rPr sz="950">
+                <a:solidFill>
+                  <a:srgbClr val="827C73"/>
                 </a:solidFill>
                 <a:latin typeface="Consolas"/>
               </a:rPr>
-              <a:t>SLIDE 02 / 12</a:t>
+              <a:t>02 / 11</a:t>
             </a:r>
           </a:p>
         </p:txBody>
@@ -8314,8 +7289,44 @@
         </p:nvSpPr>
         <p:spPr>
           <a:xfrm>
-            <a:off x="731520" y="502920"/>
-            <a:ext cx="10698480" cy="365760"/>
+            <a:off x="822960" y="502920"/>
+            <a:ext cx="10515600" cy="320040"/>
+          </a:xfrm>
+          <a:prstGeom prst="rect">
+            <a:avLst/>
+          </a:prstGeom>
+          <a:noFill/>
+        </p:spPr>
+        <p:txBody>
+          <a:bodyPr wrap="none" lIns="0" tIns="0" rIns="0" bIns="0">
+            <a:spAutoFit/>
+          </a:bodyPr>
+          <a:lstStyle/>
+          <a:p>
+            <a:pPr>
+              <a:defRPr sz="1100" b="1">
+                <a:solidFill>
+                  <a:srgbClr val="059669"/>
+                </a:solidFill>
+                <a:latin typeface="Consolas"/>
+              </a:defRPr>
+            </a:pPr>
+            <a:r>
+              <a:t>●  THE SOLUTION</a:t>
+            </a:r>
+          </a:p>
+        </p:txBody>
+      </p:sp>
+      <p:sp>
+        <p:nvSpPr>
+          <p:cNvPr id="4" name="TextBox 3"/>
+          <p:cNvSpPr txBox="1"/>
+          <p:nvPr/>
+        </p:nvSpPr>
+        <p:spPr>
+          <a:xfrm>
+            <a:off x="822960" y="822960"/>
+            <a:ext cx="10515600" cy="685800"/>
           </a:xfrm>
           <a:prstGeom prst="rect">
             <a:avLst/>
@@ -8329,51 +7340,15 @@
           <a:lstStyle/>
           <a:p>
             <a:pPr>
-              <a:defRPr sz="1000" b="1">
-                <a:solidFill>
-                  <a:srgbClr val="15803D"/>
-                </a:solidFill>
-                <a:latin typeface="Consolas"/>
-              </a:defRPr>
-            </a:pPr>
-            <a:r>
-              <a:t>02 // PRODUCT INNOVATION</a:t>
-            </a:r>
-          </a:p>
-        </p:txBody>
-      </p:sp>
-      <p:sp>
-        <p:nvSpPr>
-          <p:cNvPr id="4" name="TextBox 3"/>
-          <p:cNvSpPr txBox="1"/>
-          <p:nvPr/>
-        </p:nvSpPr>
-        <p:spPr>
-          <a:xfrm>
-            <a:off x="731520" y="822960"/>
-            <a:ext cx="10698480" cy="731520"/>
-          </a:xfrm>
-          <a:prstGeom prst="rect">
-            <a:avLst/>
-          </a:prstGeom>
-          <a:noFill/>
-        </p:spPr>
-        <p:txBody>
-          <a:bodyPr wrap="square" lIns="0" tIns="0" rIns="0" bIns="0">
-            <a:spAutoFit/>
-          </a:bodyPr>
-          <a:lstStyle/>
-          <a:p>
-            <a:pPr>
-              <a:defRPr sz="2800" b="1">
-                <a:solidFill>
-                  <a:srgbClr val="191510"/>
+              <a:defRPr sz="3200" b="1">
+                <a:solidFill>
+                  <a:srgbClr val="15120E"/>
                 </a:solidFill>
                 <a:latin typeface="Georgia"/>
               </a:defRPr>
             </a:pPr>
             <a:r>
-              <a:t>Nullify: The Autonomous Threat Defense Triad</a:t>
+              <a:t>Nullify: Real-Time Autonomous Defense</a:t>
             </a:r>
           </a:p>
         </p:txBody>
@@ -8386,8 +7361,8 @@
         </p:nvSpPr>
         <p:spPr>
           <a:xfrm>
-            <a:off x="731520" y="1645920"/>
-            <a:ext cx="3429000" cy="4434840"/>
+            <a:off x="822960" y="1645920"/>
+            <a:ext cx="6217920" cy="4434840"/>
           </a:xfrm>
           <a:prstGeom prst="roundRect">
             <a:avLst/>
@@ -8397,7 +7372,7 @@
           </a:solidFill>
           <a:ln w="12700">
             <a:solidFill>
-              <a:srgbClr val="E5E2DD"/>
+              <a:srgbClr val="E2DCD2"/>
             </a:solidFill>
           </a:ln>
         </p:spPr>
@@ -8431,8 +7406,8 @@
         </p:nvSpPr>
         <p:spPr>
           <a:xfrm>
-            <a:off x="960120" y="1828800"/>
-            <a:ext cx="2971800" cy="4114800"/>
+            <a:off x="1097280" y="1920240"/>
+            <a:ext cx="5669280" cy="3931920"/>
           </a:xfrm>
           <a:prstGeom prst="rect">
             <a:avLst/>
@@ -8446,15 +7421,15 @@
           <a:lstStyle/>
           <a:p>
             <a:pPr>
-              <a:defRPr sz="850" b="1">
-                <a:solidFill>
-                  <a:srgbClr val="15803D"/>
-                </a:solidFill>
-                <a:latin typeface="Consolas"/>
-              </a:defRPr>
-            </a:pPr>
-            <a:r>
-              <a:t>SUB-MILLISECOND TRIAGE</a:t>
+              <a:defRPr sz="1800" b="1">
+                <a:solidFill>
+                  <a:srgbClr val="15120E"/>
+                </a:solidFill>
+                <a:latin typeface="Segoe UI"/>
+              </a:defRPr>
+            </a:pPr>
+            <a:r>
+              <a:t>⚡ Sub-Millisecond Speed</a:t>
             </a:r>
           </a:p>
           <a:p>
@@ -8462,95 +7437,79 @@
               <a:spcBef>
                 <a:spcPts val="400"/>
               </a:spcBef>
-              <a:defRPr sz="1400" b="1">
-                <a:solidFill>
-                  <a:srgbClr val="191510"/>
+              <a:defRPr sz="1400">
+                <a:solidFill>
+                  <a:srgbClr val="555048"/>
                 </a:solidFill>
                 <a:latin typeface="Segoe UI"/>
               </a:defRPr>
             </a:pPr>
             <a:r>
-              <a:t>⚡ 01. Native C Accelerator</a:t>
+              <a:t>We rewrote the heavy file inspection in pure C. It analyzes binaries in under 15 milliseconds — fast enough for live network firewalls.</a:t>
             </a:r>
           </a:p>
           <a:p>
             <a:pPr>
               <a:spcBef>
-                <a:spcPts val="800"/>
+                <a:spcPts val="1800"/>
               </a:spcBef>
-              <a:defRPr sz="1100">
-                <a:solidFill>
-                  <a:srgbClr val="66625B"/>
-                </a:solidFill>
-                <a:latin typeface="Calibri"/>
-              </a:defRPr>
-            </a:pPr>
-            <a:r>
-              <a:t>Bypasses interpreted runtimes entirely. Standalone C11 compiled with -O3 executes PE/ELF header dissection, Shannon entropy, 256-bin histograms, multi-pattern regex matching, and single-pass 64KB multi-hashing in &lt; 15 milliseconds.</a:t>
+              <a:defRPr sz="1800" b="1">
+                <a:solidFill>
+                  <a:srgbClr val="15120E"/>
+                </a:solidFill>
+                <a:latin typeface="Segoe UI"/>
+              </a:defRPr>
+            </a:pPr>
+            <a:r>
+              <a:t>🤖 6 Specialized AI Agents</a:t>
             </a:r>
           </a:p>
           <a:p>
             <a:pPr>
               <a:spcBef>
-                <a:spcPts val="1400"/>
+                <a:spcPts val="400"/>
               </a:spcBef>
-              <a:defRPr sz="850" b="1">
-                <a:solidFill>
-                  <a:srgbClr val="191510"/>
-                </a:solidFill>
-                <a:latin typeface="Consolas"/>
-              </a:defRPr>
-            </a:pPr>
-            <a:r>
-              <a:t>CORE CAPABILITIES:</a:t>
+              <a:defRPr sz="1400">
+                <a:solidFill>
+                  <a:srgbClr val="555048"/>
+                </a:solidFill>
+                <a:latin typeface="Segoe UI"/>
+              </a:defRPr>
+            </a:pPr>
+            <a:r>
+              <a:t>Instead of a single clumsy chatbot, six focused agents handle file headers, code patterns, behavioral logs, and threat reasoning.</a:t>
             </a:r>
           </a:p>
           <a:p>
             <a:pPr>
               <a:spcBef>
-                <a:spcPts val="300"/>
+                <a:spcPts val="1800"/>
               </a:spcBef>
-              <a:defRPr sz="1000">
-                <a:solidFill>
-                  <a:srgbClr val="66625B"/>
-                </a:solidFill>
-                <a:latin typeface="Calibri"/>
-              </a:defRPr>
-            </a:pPr>
-            <a:r>
-              <a:t>• PE Import Parser: &lt; 0.10 ms (500x faster)</a:t>
+              <a:defRPr sz="1800" b="1">
+                <a:solidFill>
+                  <a:srgbClr val="15120E"/>
+                </a:solidFill>
+                <a:latin typeface="Segoe UI"/>
+              </a:defRPr>
+            </a:pPr>
+            <a:r>
+              <a:t>🛡️ Instant Auto-Defense</a:t>
             </a:r>
           </a:p>
           <a:p>
             <a:pPr>
               <a:spcBef>
-                <a:spcPts val="300"/>
+                <a:spcPts val="400"/>
               </a:spcBef>
-              <a:defRPr sz="1000">
-                <a:solidFill>
-                  <a:srgbClr val="66625B"/>
-                </a:solidFill>
-                <a:latin typeface="Calibri"/>
-              </a:defRPr>
-            </a:pPr>
-            <a:r>
-              <a:t>• Pattern Scanner: 0.82 ms (18.7x faster)</a:t>
-            </a:r>
-          </a:p>
-          <a:p>
-            <a:pPr>
-              <a:spcBef>
-                <a:spcPts val="300"/>
-              </a:spcBef>
-              <a:defRPr sz="1000">
-                <a:solidFill>
-                  <a:srgbClr val="66625B"/>
-                </a:solidFill>
-                <a:latin typeface="Calibri"/>
-              </a:defRPr>
-            </a:pPr>
-            <a:r>
-              <a:t>• Concurrent Multi-Hash: 1.15 ms (7.7x faster)</a:t>
+              <a:defRPr sz="1400">
+                <a:solidFill>
+                  <a:srgbClr val="555048"/>
+                </a:solidFill>
+                <a:latin typeface="Segoe UI"/>
+              </a:defRPr>
+            </a:pPr>
+            <a:r>
+              <a:t>Nullify doesn't just alert you. It automatically writes an enterprise YARA rule so you can block the threat across your entire network.</a:t>
             </a:r>
           </a:p>
         </p:txBody>
@@ -8563,8 +7522,8 @@
         </p:nvSpPr>
         <p:spPr>
           <a:xfrm>
-            <a:off x="4370832" y="1645920"/>
-            <a:ext cx="3429000" cy="4434840"/>
+            <a:off x="7269480" y="1645920"/>
+            <a:ext cx="4096512" cy="1371600"/>
           </a:xfrm>
           <a:prstGeom prst="roundRect">
             <a:avLst/>
@@ -8574,7 +7533,7 @@
           </a:solidFill>
           <a:ln w="12700">
             <a:solidFill>
-              <a:srgbClr val="E5E2DD"/>
+              <a:srgbClr val="E2DCD2"/>
             </a:solidFill>
           </a:ln>
         </p:spPr>
@@ -8608,8 +7567,8 @@
         </p:nvSpPr>
         <p:spPr>
           <a:xfrm>
-            <a:off x="4599432" y="1828800"/>
-            <a:ext cx="2971800" cy="4114800"/>
+            <a:off x="7498079" y="1783080"/>
+            <a:ext cx="3657600" cy="1097280"/>
           </a:xfrm>
           <a:prstGeom prst="rect">
             <a:avLst/>
@@ -8623,111 +7582,31 @@
           <a:lstStyle/>
           <a:p>
             <a:pPr>
-              <a:defRPr sz="850" b="1">
-                <a:solidFill>
-                  <a:srgbClr val="15803D"/>
-                </a:solidFill>
-                <a:latin typeface="Consolas"/>
-              </a:defRPr>
-            </a:pPr>
-            <a:r>
-              <a:t>6 SPECIALIZED COOPERATIVE AGENTS</a:t>
+              <a:defRPr sz="3600" b="1">
+                <a:solidFill>
+                  <a:srgbClr val="059669"/>
+                </a:solidFill>
+                <a:latin typeface="Georgia"/>
+              </a:defRPr>
+            </a:pPr>
+            <a:r>
+              <a:t>&lt; 15 ms</a:t>
             </a:r>
           </a:p>
           <a:p>
             <a:pPr>
               <a:spcBef>
-                <a:spcPts val="400"/>
+                <a:spcPts val="200"/>
               </a:spcBef>
-              <a:defRPr sz="1400" b="1">
-                <a:solidFill>
-                  <a:srgbClr val="191510"/>
+              <a:defRPr sz="1200" b="1">
+                <a:solidFill>
+                  <a:srgbClr val="15120E"/>
                 </a:solidFill>
                 <a:latin typeface="Segoe UI"/>
               </a:defRPr>
             </a:pPr>
             <a:r>
-              <a:t>🤖 02. Multi-Agent AI Pipeline</a:t>
-            </a:r>
-          </a:p>
-          <a:p>
-            <a:pPr>
-              <a:spcBef>
-                <a:spcPts val="800"/>
-              </a:spcBef>
-              <a:defRPr sz="1100">
-                <a:solidFill>
-                  <a:srgbClr val="66625B"/>
-                </a:solidFill>
-                <a:latin typeface="Calibri"/>
-              </a:defRPr>
-            </a:pPr>
-            <a:r>
-              <a:t>Rather than relying on an opaque monolithic LLM, Nullify deploys six specialized autonomous agents: Triage, Static Analysis, Behavioral Log Correlation, EMBER ML Classification, Explainable Reasoning, and Defense Synthesis.</a:t>
-            </a:r>
-          </a:p>
-          <a:p>
-            <a:pPr>
-              <a:spcBef>
-                <a:spcPts val="1400"/>
-              </a:spcBef>
-              <a:defRPr sz="850" b="1">
-                <a:solidFill>
-                  <a:srgbClr val="191510"/>
-                </a:solidFill>
-                <a:latin typeface="Consolas"/>
-              </a:defRPr>
-            </a:pPr>
-            <a:r>
-              <a:t>CORE CAPABILITIES:</a:t>
-            </a:r>
-          </a:p>
-          <a:p>
-            <a:pPr>
-              <a:spcBef>
-                <a:spcPts val="300"/>
-              </a:spcBef>
-              <a:defRPr sz="1000">
-                <a:solidFill>
-                  <a:srgbClr val="66625B"/>
-                </a:solidFill>
-                <a:latin typeface="Calibri"/>
-              </a:defRPr>
-            </a:pPr>
-            <a:r>
-              <a:t>• EMBER 2017 v2 ML: 2,381 feature dimensions</a:t>
-            </a:r>
-          </a:p>
-          <a:p>
-            <a:pPr>
-              <a:spcBef>
-                <a:spcPts val="300"/>
-              </a:spcBef>
-              <a:defRPr sz="1000">
-                <a:solidFill>
-                  <a:srgbClr val="66625B"/>
-                </a:solidFill>
-                <a:latin typeface="Calibri"/>
-              </a:defRPr>
-            </a:pPr>
-            <a:r>
-              <a:t>• Process Tree Tracing: Sysmon &amp; Windows EVTX</a:t>
-            </a:r>
-          </a:p>
-          <a:p>
-            <a:pPr>
-              <a:spcBef>
-                <a:spcPts val="300"/>
-              </a:spcBef>
-              <a:defRPr sz="1000">
-                <a:solidFill>
-                  <a:srgbClr val="66625B"/>
-                </a:solidFill>
-                <a:latin typeface="Calibri"/>
-              </a:defRPr>
-            </a:pPr>
-            <a:r>
-              <a:t>• Calibrated Reasoning: Explainable verdict &amp; rationale</a:t>
+              <a:t>TRIAGE SPEED  •  Full analysis in milliseconds</a:t>
             </a:r>
           </a:p>
         </p:txBody>
@@ -8740,8 +7619,8 @@
         </p:nvSpPr>
         <p:spPr>
           <a:xfrm>
-            <a:off x="8010144" y="1645920"/>
-            <a:ext cx="3429000" cy="4434840"/>
+            <a:off x="7269480" y="3182112"/>
+            <a:ext cx="4096512" cy="1371600"/>
           </a:xfrm>
           <a:prstGeom prst="roundRect">
             <a:avLst/>
@@ -8751,7 +7630,7 @@
           </a:solidFill>
           <a:ln w="12700">
             <a:solidFill>
-              <a:srgbClr val="E5E2DD"/>
+              <a:srgbClr val="E2DCD2"/>
             </a:solidFill>
           </a:ln>
         </p:spPr>
@@ -8785,8 +7664,8 @@
         </p:nvSpPr>
         <p:spPr>
           <a:xfrm>
-            <a:off x="8238744" y="1828800"/>
-            <a:ext cx="2971800" cy="4114800"/>
+            <a:off x="7498079" y="3319272"/>
+            <a:ext cx="3657600" cy="1097280"/>
           </a:xfrm>
           <a:prstGeom prst="rect">
             <a:avLst/>
@@ -8800,134 +7679,56 @@
           <a:lstStyle/>
           <a:p>
             <a:pPr>
-              <a:defRPr sz="850" b="1">
-                <a:solidFill>
-                  <a:srgbClr val="15803D"/>
-                </a:solidFill>
-                <a:latin typeface="Consolas"/>
-              </a:defRPr>
-            </a:pPr>
-            <a:r>
-              <a:t>ZERO TO IMMUNITY IN SECONDS</a:t>
+              <a:defRPr sz="3600" b="1">
+                <a:solidFill>
+                  <a:srgbClr val="2563EB"/>
+                </a:solidFill>
+                <a:latin typeface="Georgia"/>
+              </a:defRPr>
+            </a:pPr>
+            <a:r>
+              <a:t>500x</a:t>
             </a:r>
           </a:p>
           <a:p>
             <a:pPr>
               <a:spcBef>
-                <a:spcPts val="400"/>
+                <a:spcPts val="200"/>
               </a:spcBef>
-              <a:defRPr sz="1400" b="1">
-                <a:solidFill>
-                  <a:srgbClr val="191510"/>
+              <a:defRPr sz="1200" b="1">
+                <a:solidFill>
+                  <a:srgbClr val="15120E"/>
                 </a:solidFill>
                 <a:latin typeface="Segoe UI"/>
               </a:defRPr>
             </a:pPr>
             <a:r>
-              <a:t>🛡️ 03. Active Defense Synthesis</a:t>
-            </a:r>
-          </a:p>
-          <a:p>
-            <a:pPr>
-              <a:spcBef>
-                <a:spcPts val="800"/>
-              </a:spcBef>
-              <a:defRPr sz="1100">
-                <a:solidFill>
-                  <a:srgbClr val="66625B"/>
-                </a:solidFill>
-                <a:latin typeface="Calibri"/>
-              </a:defRPr>
-            </a:pPr>
-            <a:r>
-              <a:t>Detection is incomplete without mitigation. Nullify maps threat indicators directly to MITRE ATT&amp;CK techniques (T1055, T1547, T1059) and automatically synthesizes syntax-validated enterprise YARA detection rules ready for SIEM/EDR push.</a:t>
-            </a:r>
-          </a:p>
-          <a:p>
-            <a:pPr>
-              <a:spcBef>
-                <a:spcPts val="1400"/>
-              </a:spcBef>
-              <a:defRPr sz="850" b="1">
-                <a:solidFill>
-                  <a:srgbClr val="191510"/>
-                </a:solidFill>
-                <a:latin typeface="Consolas"/>
-              </a:defRPr>
-            </a:pPr>
-            <a:r>
-              <a:t>CORE CAPABILITIES:</a:t>
-            </a:r>
-          </a:p>
-          <a:p>
-            <a:pPr>
-              <a:spcBef>
-                <a:spcPts val="300"/>
-              </a:spcBef>
-              <a:defRPr sz="1000">
-                <a:solidFill>
-                  <a:srgbClr val="66625B"/>
-                </a:solidFill>
-                <a:latin typeface="Calibri"/>
-              </a:defRPr>
-            </a:pPr>
-            <a:r>
-              <a:t>• MITRE ATT&amp;CK Mapping: Exact tactic &amp; technique attribution</a:t>
-            </a:r>
-          </a:p>
-          <a:p>
-            <a:pPr>
-              <a:spcBef>
-                <a:spcPts val="300"/>
-              </a:spcBef>
-              <a:defRPr sz="1000">
-                <a:solidFill>
-                  <a:srgbClr val="66625B"/>
-                </a:solidFill>
-                <a:latin typeface="Calibri"/>
-              </a:defRPr>
-            </a:pPr>
-            <a:r>
-              <a:t>• Auto-Generated YARA: Synthesized hex &amp; string signatures</a:t>
-            </a:r>
-          </a:p>
-          <a:p>
-            <a:pPr>
-              <a:spcBef>
-                <a:spcPts val="300"/>
-              </a:spcBef>
-              <a:defRPr sz="1000">
-                <a:solidFill>
-                  <a:srgbClr val="66625B"/>
-                </a:solidFill>
-                <a:latin typeface="Calibri"/>
-              </a:defRPr>
-            </a:pPr>
-            <a:r>
-              <a:t>• 100% Air-Gapped: Zero telemetry leakage to cloud</a:t>
-            </a:r>
-          </a:p>
-        </p:txBody>
-      </p:sp>
-      <p:sp>
-        <p:nvSpPr>
-          <p:cNvPr id="11" name="Rectangle 10"/>
+              <a:t>FASTER IN C  •  Custom C engine vs standard Python</a:t>
+            </a:r>
+          </a:p>
+        </p:txBody>
+      </p:sp>
+      <p:sp>
+        <p:nvSpPr>
+          <p:cNvPr id="11" name="Rounded Rectangle 10"/>
           <p:cNvSpPr/>
           <p:nvPr/>
         </p:nvSpPr>
         <p:spPr>
           <a:xfrm>
-            <a:off x="731520" y="6263640"/>
-            <a:ext cx="10728655" cy="9525"/>
-          </a:xfrm>
-          <a:prstGeom prst="rect">
+            <a:off x="7269480" y="4718304"/>
+            <a:ext cx="4096512" cy="1371600"/>
+          </a:xfrm>
+          <a:prstGeom prst="roundRect">
             <a:avLst/>
           </a:prstGeom>
           <a:solidFill>
-            <a:srgbClr val="E5E2DD"/>
+            <a:srgbClr val="FFFFFF"/>
           </a:solidFill>
-          <a:ln>
-            <a:noFill/>
+          <a:ln w="12700">
+            <a:solidFill>
+              <a:srgbClr val="E2DCD2"/>
+            </a:solidFill>
           </a:ln>
         </p:spPr>
         <p:style>
@@ -8960,8 +7761,103 @@
         </p:nvSpPr>
         <p:spPr>
           <a:xfrm>
-            <a:off x="731520" y="6327648"/>
-            <a:ext cx="10728655" cy="320040"/>
+            <a:off x="7498079" y="4855464"/>
+            <a:ext cx="3657600" cy="1097280"/>
+          </a:xfrm>
+          <a:prstGeom prst="rect">
+            <a:avLst/>
+          </a:prstGeom>
+          <a:noFill/>
+        </p:spPr>
+        <p:txBody>
+          <a:bodyPr wrap="square" lIns="0" tIns="0" rIns="0" bIns="0">
+            <a:spAutoFit/>
+          </a:bodyPr>
+          <a:lstStyle/>
+          <a:p>
+            <a:pPr>
+              <a:defRPr sz="3600" b="1">
+                <a:solidFill>
+                  <a:srgbClr val="D97706"/>
+                </a:solidFill>
+                <a:latin typeface="Georgia"/>
+              </a:defRPr>
+            </a:pPr>
+            <a:r>
+              <a:t>100%</a:t>
+            </a:r>
+          </a:p>
+          <a:p>
+            <a:pPr>
+              <a:spcBef>
+                <a:spcPts val="200"/>
+              </a:spcBef>
+              <a:defRPr sz="1200" b="1">
+                <a:solidFill>
+                  <a:srgbClr val="15120E"/>
+                </a:solidFill>
+                <a:latin typeface="Segoe UI"/>
+              </a:defRPr>
+            </a:pPr>
+            <a:r>
+              <a:t>LOCAL &amp; PRIVATE  •  Zero data leaves your network</a:t>
+            </a:r>
+          </a:p>
+        </p:txBody>
+      </p:sp>
+      <p:sp>
+        <p:nvSpPr>
+          <p:cNvPr id="13" name="Rectangle 12"/>
+          <p:cNvSpPr/>
+          <p:nvPr/>
+        </p:nvSpPr>
+        <p:spPr>
+          <a:xfrm>
+            <a:off x="822960" y="6263640"/>
+            <a:ext cx="10545775" cy="9525"/>
+          </a:xfrm>
+          <a:prstGeom prst="rect">
+            <a:avLst/>
+          </a:prstGeom>
+          <a:solidFill>
+            <a:srgbClr val="E2DCD2"/>
+          </a:solidFill>
+          <a:ln>
+            <a:noFill/>
+          </a:ln>
+        </p:spPr>
+        <p:style>
+          <a:lnRef idx="1">
+            <a:schemeClr val="accent1"/>
+          </a:lnRef>
+          <a:fillRef idx="3">
+            <a:schemeClr val="accent1"/>
+          </a:fillRef>
+          <a:effectRef idx="2">
+            <a:schemeClr val="accent1"/>
+          </a:effectRef>
+          <a:fontRef idx="minor">
+            <a:schemeClr val="lt1"/>
+          </a:fontRef>
+        </p:style>
+        <p:txBody>
+          <a:bodyPr rtlCol="0" anchor="ctr"/>
+          <a:lstStyle/>
+          <a:p>
+            <a:pPr algn="ctr"/>
+          </a:p>
+        </p:txBody>
+      </p:sp>
+      <p:sp>
+        <p:nvSpPr>
+          <p:cNvPr id="14" name="TextBox 13"/>
+          <p:cNvSpPr txBox="1"/>
+          <p:nvPr/>
+        </p:nvSpPr>
+        <p:spPr>
+          <a:xfrm>
+            <a:off x="822960" y="6327648"/>
+            <a:ext cx="10545775" cy="320040"/>
           </a:xfrm>
           <a:prstGeom prst="rect">
             <a:avLst/>
@@ -8975,31 +7871,31 @@
           <a:lstStyle/>
           <a:p>
             <a:r>
-              <a:rPr sz="850">
-                <a:solidFill>
-                  <a:srgbClr val="8C877E"/>
+              <a:rPr sz="950">
+                <a:solidFill>
+                  <a:srgbClr val="827C73"/>
                 </a:solidFill>
                 <a:latin typeface="Consolas"/>
               </a:rPr>
-              <a:t>NULLIFY  ●  AUTONOMOUS MULTI-AGENT DEFENSE</a:t>
-            </a:r>
-            <a:r>
-              <a:rPr i="1" sz="900">
-                <a:solidFill>
-                  <a:srgbClr val="66625B"/>
+              <a:t>NULLIFY  •  AUTONOMOUS CYBER DEFENSE</a:t>
+            </a:r>
+            <a:r>
+              <a:rPr i="1" sz="1000">
+                <a:solidFill>
+                  <a:srgbClr val="555048"/>
                 </a:solidFill>
                 <a:latin typeface="Georgia"/>
               </a:rPr>
-              <a:t>                       See it. Trace it. Nullify it.                       </a:t>
-            </a:r>
-            <a:r>
-              <a:rPr sz="850">
-                <a:solidFill>
-                  <a:srgbClr val="8C877E"/>
+              <a:t>                               See it. Trace it. Nullify it.                               </a:t>
+            </a:r>
+            <a:r>
+              <a:rPr sz="950">
+                <a:solidFill>
+                  <a:srgbClr val="827C73"/>
                 </a:solidFill>
                 <a:latin typeface="Consolas"/>
               </a:rPr>
-              <a:t>SLIDE 03 / 12</a:t>
+              <a:t>03 / 11</a:t>
             </a:r>
           </a:p>
         </p:txBody>
@@ -9073,8 +7969,44 @@
         </p:nvSpPr>
         <p:spPr>
           <a:xfrm>
-            <a:off x="731520" y="502920"/>
-            <a:ext cx="10698480" cy="365760"/>
+            <a:off x="822960" y="502920"/>
+            <a:ext cx="10515600" cy="320040"/>
+          </a:xfrm>
+          <a:prstGeom prst="rect">
+            <a:avLst/>
+          </a:prstGeom>
+          <a:noFill/>
+        </p:spPr>
+        <p:txBody>
+          <a:bodyPr wrap="none" lIns="0" tIns="0" rIns="0" bIns="0">
+            <a:spAutoFit/>
+          </a:bodyPr>
+          <a:lstStyle/>
+          <a:p>
+            <a:pPr>
+              <a:defRPr sz="1100" b="1">
+                <a:solidFill>
+                  <a:srgbClr val="059669"/>
+                </a:solidFill>
+                <a:latin typeface="Consolas"/>
+              </a:defRPr>
+            </a:pPr>
+            <a:r>
+              <a:t>●  ARCHITECTURE</a:t>
+            </a:r>
+          </a:p>
+        </p:txBody>
+      </p:sp>
+      <p:sp>
+        <p:nvSpPr>
+          <p:cNvPr id="4" name="TextBox 3"/>
+          <p:cNvSpPr txBox="1"/>
+          <p:nvPr/>
+        </p:nvSpPr>
+        <p:spPr>
+          <a:xfrm>
+            <a:off x="822960" y="822960"/>
+            <a:ext cx="10515600" cy="685800"/>
           </a:xfrm>
           <a:prstGeom prst="rect">
             <a:avLst/>
@@ -9088,51 +8020,15 @@
           <a:lstStyle/>
           <a:p>
             <a:pPr>
-              <a:defRPr sz="1000" b="1">
-                <a:solidFill>
-                  <a:srgbClr val="15803D"/>
-                </a:solidFill>
-                <a:latin typeface="Consolas"/>
-              </a:defRPr>
-            </a:pPr>
-            <a:r>
-              <a:t>03 // PIPELINE ARCHITECTURE</a:t>
-            </a:r>
-          </a:p>
-        </p:txBody>
-      </p:sp>
-      <p:sp>
-        <p:nvSpPr>
-          <p:cNvPr id="4" name="TextBox 3"/>
-          <p:cNvSpPr txBox="1"/>
-          <p:nvPr/>
-        </p:nvSpPr>
-        <p:spPr>
-          <a:xfrm>
-            <a:off x="731520" y="822960"/>
-            <a:ext cx="10698480" cy="731520"/>
-          </a:xfrm>
-          <a:prstGeom prst="rect">
-            <a:avLst/>
-          </a:prstGeom>
-          <a:noFill/>
-        </p:spPr>
-        <p:txBody>
-          <a:bodyPr wrap="square" lIns="0" tIns="0" rIns="0" bIns="0">
-            <a:spAutoFit/>
-          </a:bodyPr>
-          <a:lstStyle/>
-          <a:p>
-            <a:pPr>
-              <a:defRPr sz="2800" b="1">
-                <a:solidFill>
-                  <a:srgbClr val="191510"/>
+              <a:defRPr sz="3200" b="1">
+                <a:solidFill>
+                  <a:srgbClr val="15120E"/>
                 </a:solidFill>
                 <a:latin typeface="Georgia"/>
               </a:defRPr>
             </a:pPr>
             <a:r>
-              <a:t>The 6-Agent Collaborative Intelligence Mesh</a:t>
+              <a:t>How the 6 AI Agents Work Together</a:t>
             </a:r>
           </a:p>
         </p:txBody>
@@ -9145,8 +8041,8 @@
         </p:nvSpPr>
         <p:spPr>
           <a:xfrm>
-            <a:off x="731520" y="1645920"/>
-            <a:ext cx="3429000" cy="2103120"/>
+            <a:off x="822960" y="1645920"/>
+            <a:ext cx="5120640" cy="4434840"/>
           </a:xfrm>
           <a:prstGeom prst="roundRect">
             <a:avLst/>
@@ -9156,7 +8052,7 @@
           </a:solidFill>
           <a:ln w="12700">
             <a:solidFill>
-              <a:srgbClr val="E5E2DD"/>
+              <a:srgbClr val="E2DCD2"/>
             </a:solidFill>
           </a:ln>
         </p:spPr>
@@ -9184,14 +8080,67 @@
       </p:sp>
       <p:sp>
         <p:nvSpPr>
-          <p:cNvPr id="6" name="TextBox 5"/>
+          <p:cNvPr id="6" name="Rounded Rectangle 5"/>
+          <p:cNvSpPr/>
+          <p:nvPr/>
+        </p:nvSpPr>
+        <p:spPr>
+          <a:xfrm>
+            <a:off x="1097280" y="1874519"/>
+            <a:ext cx="2926080" cy="347472"/>
+          </a:xfrm>
+          <a:prstGeom prst="roundRect">
+            <a:avLst/>
+          </a:prstGeom>
+          <a:solidFill>
+            <a:srgbClr val="ECFDF5"/>
+          </a:solidFill>
+          <a:ln>
+            <a:noFill/>
+          </a:ln>
+        </p:spPr>
+        <p:style>
+          <a:lnRef idx="1">
+            <a:schemeClr val="accent1"/>
+          </a:lnRef>
+          <a:fillRef idx="3">
+            <a:schemeClr val="accent1"/>
+          </a:fillRef>
+          <a:effectRef idx="2">
+            <a:schemeClr val="accent1"/>
+          </a:effectRef>
+          <a:fontRef idx="minor">
+            <a:schemeClr val="lt1"/>
+          </a:fontRef>
+        </p:style>
+        <p:txBody>
+          <a:bodyPr rtlCol="0" anchor="ctr" lIns="0" tIns="0" rIns="0" bIns="0"/>
+          <a:lstStyle/>
+          <a:p>
+            <a:pPr algn="ctr">
+              <a:defRPr sz="900" b="1">
+                <a:solidFill>
+                  <a:srgbClr val="059669"/>
+                </a:solidFill>
+                <a:latin typeface="Consolas"/>
+              </a:defRPr>
+            </a:pPr>
+            <a:r>
+              <a:t>STAGE 1: NATIVE C SPEED</a:t>
+            </a:r>
+          </a:p>
+        </p:txBody>
+      </p:sp>
+      <p:sp>
+        <p:nvSpPr>
+          <p:cNvPr id="7" name="TextBox 6"/>
           <p:cNvSpPr txBox="1"/>
           <p:nvPr/>
         </p:nvSpPr>
         <p:spPr>
           <a:xfrm>
-            <a:off x="960120" y="1783080"/>
-            <a:ext cx="2971800" cy="1828800"/>
+            <a:off x="1097280" y="2377440"/>
+            <a:ext cx="4572000" cy="3474720"/>
           </a:xfrm>
           <a:prstGeom prst="rect">
             <a:avLst/>
@@ -9204,69 +8153,78 @@
           </a:bodyPr>
           <a:lstStyle/>
           <a:p>
-            <a:r>
-              <a:rPr sz="850" b="1">
-                <a:solidFill>
-                  <a:srgbClr val="15803D"/>
-                </a:solidFill>
-                <a:latin typeface="Consolas"/>
-              </a:rPr>
-              <a:t>AGENT 01  </a:t>
-            </a:r>
-            <a:r>
-              <a:rPr sz="800">
-                <a:solidFill>
-                  <a:srgbClr val="8C877E"/>
-                </a:solidFill>
-                <a:latin typeface="Consolas"/>
-              </a:rPr>
-              <a:t>FAST BYTE SNIFFING &amp; HASHES</a:t>
+            <a:pPr>
+              <a:defRPr sz="1700" b="1">
+                <a:solidFill>
+                  <a:srgbClr val="15120E"/>
+                </a:solidFill>
+                <a:latin typeface="Segoe UI"/>
+              </a:defRPr>
+            </a:pPr>
+            <a:r>
+              <a:t>Agent 1: Triage Agent</a:t>
             </a:r>
           </a:p>
           <a:p>
             <a:pPr>
               <a:spcBef>
-                <a:spcPts val="200"/>
+                <a:spcPts val="500"/>
               </a:spcBef>
-              <a:defRPr sz="1300" b="1">
-                <a:solidFill>
-                  <a:srgbClr val="191510"/>
+              <a:defRPr sz="1400">
+                <a:solidFill>
+                  <a:srgbClr val="555048"/>
                 </a:solidFill>
                 <a:latin typeface="Segoe UI"/>
               </a:defRPr>
             </a:pPr>
             <a:r>
-              <a:t>Triage Agent</a:t>
+              <a:t>Checks file type, verifies headers, and streams MD5, SHA-1, and SHA-256 hashes in a single pass in under 1 millisecond.</a:t>
             </a:r>
           </a:p>
           <a:p>
             <a:pPr>
               <a:spcBef>
-                <a:spcPts val="600"/>
+                <a:spcPts val="2000"/>
               </a:spcBef>
-              <a:defRPr sz="1050">
-                <a:solidFill>
-                  <a:srgbClr val="66625B"/>
-                </a:solidFill>
-                <a:latin typeface="Calibri"/>
-              </a:defRPr>
-            </a:pPr>
-            <a:r>
-              <a:t>Executes sub-millisecond C-core triage. Computes single-pass concurrent MD5, SHA-1, SHA-256, Shannon entropy, and validates PE/ELF magic bytes.</a:t>
-            </a:r>
-          </a:p>
-        </p:txBody>
-      </p:sp>
-      <p:sp>
-        <p:nvSpPr>
-          <p:cNvPr id="7" name="Rounded Rectangle 6"/>
+              <a:defRPr sz="1700" b="1">
+                <a:solidFill>
+                  <a:srgbClr val="15120E"/>
+                </a:solidFill>
+                <a:latin typeface="Segoe UI"/>
+              </a:defRPr>
+            </a:pPr>
+            <a:r>
+              <a:t>Agent 2: Static Analysis Agent</a:t>
+            </a:r>
+          </a:p>
+          <a:p>
+            <a:pPr>
+              <a:spcBef>
+                <a:spcPts val="500"/>
+              </a:spcBef>
+              <a:defRPr sz="1400">
+                <a:solidFill>
+                  <a:srgbClr val="555048"/>
+                </a:solidFill>
+                <a:latin typeface="Segoe UI"/>
+              </a:defRPr>
+            </a:pPr>
+            <a:r>
+              <a:t>Parses executable imports directly in memory. Detects dangerous APIs (memory injection, keylogging) and backdoor registry keys.</a:t>
+            </a:r>
+          </a:p>
+        </p:txBody>
+      </p:sp>
+      <p:sp>
+        <p:nvSpPr>
+          <p:cNvPr id="8" name="Rounded Rectangle 7"/>
           <p:cNvSpPr/>
           <p:nvPr/>
         </p:nvSpPr>
         <p:spPr>
           <a:xfrm>
-            <a:off x="4370832" y="1645920"/>
-            <a:ext cx="3429000" cy="2103120"/>
+            <a:off x="6245352" y="1645920"/>
+            <a:ext cx="5120640" cy="4434840"/>
           </a:xfrm>
           <a:prstGeom prst="roundRect">
             <a:avLst/>
@@ -9276,7 +8234,7 @@
           </a:solidFill>
           <a:ln w="12700">
             <a:solidFill>
-              <a:srgbClr val="E5E2DD"/>
+              <a:srgbClr val="E2DCD2"/>
             </a:solidFill>
           </a:ln>
         </p:spPr>
@@ -9304,100 +8262,23 @@
       </p:sp>
       <p:sp>
         <p:nvSpPr>
-          <p:cNvPr id="8" name="TextBox 7"/>
-          <p:cNvSpPr txBox="1"/>
-          <p:nvPr/>
-        </p:nvSpPr>
-        <p:spPr>
-          <a:xfrm>
-            <a:off x="4599432" y="1783080"/>
-            <a:ext cx="2971800" cy="1828800"/>
-          </a:xfrm>
-          <a:prstGeom prst="rect">
-            <a:avLst/>
-          </a:prstGeom>
-          <a:noFill/>
-        </p:spPr>
-        <p:txBody>
-          <a:bodyPr wrap="square" lIns="0" tIns="0" rIns="0" bIns="0">
-            <a:spAutoFit/>
-          </a:bodyPr>
-          <a:lstStyle/>
-          <a:p>
-            <a:r>
-              <a:rPr sz="850" b="1">
-                <a:solidFill>
-                  <a:srgbClr val="15803D"/>
-                </a:solidFill>
-                <a:latin typeface="Consolas"/>
-              </a:rPr>
-              <a:t>AGENT 02  </a:t>
-            </a:r>
-            <a:r>
-              <a:rPr sz="800">
-                <a:solidFill>
-                  <a:srgbClr val="8C877E"/>
-                </a:solidFill>
-                <a:latin typeface="Consolas"/>
-              </a:rPr>
-              <a:t>IMPORT DIRECTORY &amp; PATTERN RADAR</a:t>
-            </a:r>
-          </a:p>
-          <a:p>
-            <a:pPr>
-              <a:spcBef>
-                <a:spcPts val="200"/>
-              </a:spcBef>
-              <a:defRPr sz="1300" b="1">
-                <a:solidFill>
-                  <a:srgbClr val="191510"/>
-                </a:solidFill>
-                <a:latin typeface="Segoe UI"/>
-              </a:defRPr>
-            </a:pPr>
-            <a:r>
-              <a:t>Static Analysis Agent</a:t>
-            </a:r>
-          </a:p>
-          <a:p>
-            <a:pPr>
-              <a:spcBef>
-                <a:spcPts val="600"/>
-              </a:spcBef>
-              <a:defRPr sz="1050">
-                <a:solidFill>
-                  <a:srgbClr val="66625B"/>
-                </a:solidFill>
-                <a:latin typeface="Calibri"/>
-              </a:defRPr>
-            </a:pPr>
-            <a:r>
-              <a:t>Dissects Windows PE imports in C (&lt; 0.1ms) across 25+ malicious APIs. Scans for registry run keys, PowerShell cradles, and IPv4 C2 indicators.</a:t>
-            </a:r>
-          </a:p>
-        </p:txBody>
-      </p:sp>
-      <p:sp>
-        <p:nvSpPr>
           <p:cNvPr id="9" name="Rounded Rectangle 8"/>
           <p:cNvSpPr/>
           <p:nvPr/>
         </p:nvSpPr>
         <p:spPr>
           <a:xfrm>
-            <a:off x="8010144" y="1645920"/>
-            <a:ext cx="3429000" cy="2103120"/>
+            <a:off x="6519672" y="1874519"/>
+            <a:ext cx="2926080" cy="347472"/>
           </a:xfrm>
           <a:prstGeom prst="roundRect">
             <a:avLst/>
           </a:prstGeom>
           <a:solidFill>
-            <a:srgbClr val="FFFFFF"/>
+            <a:srgbClr val="EFF6FF"/>
           </a:solidFill>
-          <a:ln w="12700">
-            <a:solidFill>
-              <a:srgbClr val="E5E2DD"/>
-            </a:solidFill>
+          <a:ln>
+            <a:noFill/>
           </a:ln>
         </p:spPr>
         <p:style>
@@ -9415,10 +8296,20 @@
           </a:fontRef>
         </p:style>
         <p:txBody>
-          <a:bodyPr rtlCol="0" anchor="ctr"/>
-          <a:lstStyle/>
-          <a:p>
-            <a:pPr algn="ctr"/>
+          <a:bodyPr rtlCol="0" anchor="ctr" lIns="0" tIns="0" rIns="0" bIns="0"/>
+          <a:lstStyle/>
+          <a:p>
+            <a:pPr algn="ctr">
+              <a:defRPr sz="900" b="1">
+                <a:solidFill>
+                  <a:srgbClr val="2563EB"/>
+                </a:solidFill>
+                <a:latin typeface="Consolas"/>
+              </a:defRPr>
+            </a:pPr>
+            <a:r>
+              <a:t>STAGE 2: AI INTELLIGENCE</a:t>
+            </a:r>
           </a:p>
         </p:txBody>
       </p:sp>
@@ -9430,8 +8321,8 @@
         </p:nvSpPr>
         <p:spPr>
           <a:xfrm>
-            <a:off x="8238744" y="1783080"/>
-            <a:ext cx="2971800" cy="1828800"/>
+            <a:off x="6519672" y="2377440"/>
+            <a:ext cx="4572000" cy="3474720"/>
           </a:xfrm>
           <a:prstGeom prst="rect">
             <a:avLst/>
@@ -9444,80 +8335,151 @@
           </a:bodyPr>
           <a:lstStyle/>
           <a:p>
-            <a:r>
-              <a:rPr sz="850" b="1">
-                <a:solidFill>
-                  <a:srgbClr val="15803D"/>
-                </a:solidFill>
-                <a:latin typeface="Consolas"/>
-              </a:rPr>
-              <a:t>AGENT 03  </a:t>
-            </a:r>
-            <a:r>
-              <a:rPr sz="800">
-                <a:solidFill>
-                  <a:srgbClr val="8C877E"/>
-                </a:solidFill>
-                <a:latin typeface="Consolas"/>
-              </a:rPr>
-              <a:t>PROCESS TREE &amp; LOG CORRELATION</a:t>
+            <a:pPr>
+              <a:defRPr sz="1550" b="1">
+                <a:solidFill>
+                  <a:srgbClr val="15120E"/>
+                </a:solidFill>
+                <a:latin typeface="Segoe UI"/>
+              </a:defRPr>
+            </a:pPr>
+            <a:r>
+              <a:t>Agent 3: Behavioral Agent</a:t>
             </a:r>
           </a:p>
           <a:p>
             <a:pPr>
               <a:spcBef>
-                <a:spcPts val="200"/>
+                <a:spcPts val="300"/>
               </a:spcBef>
-              <a:defRPr sz="1300" b="1">
-                <a:solidFill>
-                  <a:srgbClr val="191510"/>
+              <a:defRPr sz="1300">
+                <a:solidFill>
+                  <a:srgbClr val="555048"/>
                 </a:solidFill>
                 <a:latin typeface="Segoe UI"/>
               </a:defRPr>
             </a:pPr>
             <a:r>
-              <a:t>Behavioral Agent</a:t>
+              <a:t>Traces process execution trees and correlates Windows Sysmon logs.</a:t>
             </a:r>
           </a:p>
           <a:p>
             <a:pPr>
               <a:spcBef>
-                <a:spcPts val="600"/>
+                <a:spcPts val="1000"/>
               </a:spcBef>
-              <a:defRPr sz="1050">
-                <a:solidFill>
-                  <a:srgbClr val="66625B"/>
-                </a:solidFill>
-                <a:latin typeface="Calibri"/>
-              </a:defRPr>
-            </a:pPr>
-            <a:r>
-              <a:t>Ingests Sysmon JSONL and Windows EVTX logs. Reconstructs parent-child execution lineages, detecting credential dumping, LOLBins, and privilege escalation.</a:t>
-            </a:r>
-          </a:p>
-        </p:txBody>
-      </p:sp>
-      <p:sp>
-        <p:nvSpPr>
-          <p:cNvPr id="11" name="Rounded Rectangle 10"/>
+              <a:defRPr sz="1550" b="1">
+                <a:solidFill>
+                  <a:srgbClr val="15120E"/>
+                </a:solidFill>
+                <a:latin typeface="Segoe UI"/>
+              </a:defRPr>
+            </a:pPr>
+            <a:r>
+              <a:t>Agent 4: Classification Agent</a:t>
+            </a:r>
+          </a:p>
+          <a:p>
+            <a:pPr>
+              <a:spcBef>
+                <a:spcPts val="300"/>
+              </a:spcBef>
+              <a:defRPr sz="1300">
+                <a:solidFill>
+                  <a:srgbClr val="555048"/>
+                </a:solidFill>
+                <a:latin typeface="Segoe UI"/>
+              </a:defRPr>
+            </a:pPr>
+            <a:r>
+              <a:t>Scores 2,381 features using an ML model trained on 1.1 million binaries.</a:t>
+            </a:r>
+          </a:p>
+          <a:p>
+            <a:pPr>
+              <a:spcBef>
+                <a:spcPts val="1000"/>
+              </a:spcBef>
+              <a:defRPr sz="1550" b="1">
+                <a:solidFill>
+                  <a:srgbClr val="15120E"/>
+                </a:solidFill>
+                <a:latin typeface="Segoe UI"/>
+              </a:defRPr>
+            </a:pPr>
+            <a:r>
+              <a:t>Agent 5: Reasoning Agent</a:t>
+            </a:r>
+          </a:p>
+          <a:p>
+            <a:pPr>
+              <a:spcBef>
+                <a:spcPts val="300"/>
+              </a:spcBef>
+              <a:defRPr sz="1300">
+                <a:solidFill>
+                  <a:srgbClr val="555048"/>
+                </a:solidFill>
+                <a:latin typeface="Segoe UI"/>
+              </a:defRPr>
+            </a:pPr>
+            <a:r>
+              <a:t>Explains *why* the file is malicious in plain English for security analysts.</a:t>
+            </a:r>
+          </a:p>
+          <a:p>
+            <a:pPr>
+              <a:spcBef>
+                <a:spcPts val="1000"/>
+              </a:spcBef>
+              <a:defRPr sz="1550" b="1">
+                <a:solidFill>
+                  <a:srgbClr val="15120E"/>
+                </a:solidFill>
+                <a:latin typeface="Segoe UI"/>
+              </a:defRPr>
+            </a:pPr>
+            <a:r>
+              <a:t>Agent 6: Defense Agent</a:t>
+            </a:r>
+          </a:p>
+          <a:p>
+            <a:pPr>
+              <a:spcBef>
+                <a:spcPts val="300"/>
+              </a:spcBef>
+              <a:defRPr sz="1300">
+                <a:solidFill>
+                  <a:srgbClr val="555048"/>
+                </a:solidFill>
+                <a:latin typeface="Segoe UI"/>
+              </a:defRPr>
+            </a:pPr>
+            <a:r>
+              <a:t>Automatically writes a clean, syntax-validated YARA rule to block it.</a:t>
+            </a:r>
+          </a:p>
+        </p:txBody>
+      </p:sp>
+      <p:sp>
+        <p:nvSpPr>
+          <p:cNvPr id="11" name="Rectangle 10"/>
           <p:cNvSpPr/>
           <p:nvPr/>
         </p:nvSpPr>
         <p:spPr>
           <a:xfrm>
-            <a:off x="731520" y="3886200"/>
-            <a:ext cx="3429000" cy="2103120"/>
-          </a:xfrm>
-          <a:prstGeom prst="roundRect">
+            <a:off x="822960" y="6263640"/>
+            <a:ext cx="10545775" cy="9525"/>
+          </a:xfrm>
+          <a:prstGeom prst="rect">
             <a:avLst/>
           </a:prstGeom>
           <a:solidFill>
-            <a:srgbClr val="FFFFFF"/>
+            <a:srgbClr val="E2DCD2"/>
           </a:solidFill>
-          <a:ln w="12700">
-            <a:solidFill>
-              <a:srgbClr val="E5E2DD"/>
-            </a:solidFill>
+          <a:ln>
+            <a:noFill/>
           </a:ln>
         </p:spPr>
         <p:style>
@@ -9550,366 +8512,8 @@
         </p:nvSpPr>
         <p:spPr>
           <a:xfrm>
-            <a:off x="960120" y="4023360"/>
-            <a:ext cx="2971800" cy="1828800"/>
-          </a:xfrm>
-          <a:prstGeom prst="rect">
-            <a:avLst/>
-          </a:prstGeom>
-          <a:noFill/>
-        </p:spPr>
-        <p:txBody>
-          <a:bodyPr wrap="square" lIns="0" tIns="0" rIns="0" bIns="0">
-            <a:spAutoFit/>
-          </a:bodyPr>
-          <a:lstStyle/>
-          <a:p>
-            <a:r>
-              <a:rPr sz="850" b="1">
-                <a:solidFill>
-                  <a:srgbClr val="15803D"/>
-                </a:solidFill>
-                <a:latin typeface="Consolas"/>
-              </a:rPr>
-              <a:t>AGENT 04  </a:t>
-            </a:r>
-            <a:r>
-              <a:rPr sz="800">
-                <a:solidFill>
-                  <a:srgbClr val="8C877E"/>
-                </a:solidFill>
-                <a:latin typeface="Consolas"/>
-              </a:rPr>
-              <a:t>2,381-DIM EMBER GRADIENT BOOST</a:t>
-            </a:r>
-          </a:p>
-          <a:p>
-            <a:pPr>
-              <a:spcBef>
-                <a:spcPts val="200"/>
-              </a:spcBef>
-              <a:defRPr sz="1300" b="1">
-                <a:solidFill>
-                  <a:srgbClr val="191510"/>
-                </a:solidFill>
-                <a:latin typeface="Segoe UI"/>
-              </a:defRPr>
-            </a:pPr>
-            <a:r>
-              <a:t>Classification Agent</a:t>
-            </a:r>
-          </a:p>
-          <a:p>
-            <a:pPr>
-              <a:spcBef>
-                <a:spcPts val="600"/>
-              </a:spcBef>
-              <a:defRPr sz="1050">
-                <a:solidFill>
-                  <a:srgbClr val="66625B"/>
-                </a:solidFill>
-                <a:latin typeface="Calibri"/>
-              </a:defRPr>
-            </a:pPr>
-            <a:r>
-              <a:t>Transforms raw binaries into 2,381 EMBER v2 feature vectors. Predicts calibrated malicious probability using LightGBM/XGBoost with Linux ELF bypass.</a:t>
-            </a:r>
-          </a:p>
-        </p:txBody>
-      </p:sp>
-      <p:sp>
-        <p:nvSpPr>
-          <p:cNvPr id="13" name="Rounded Rectangle 12"/>
-          <p:cNvSpPr/>
-          <p:nvPr/>
-        </p:nvSpPr>
-        <p:spPr>
-          <a:xfrm>
-            <a:off x="4370832" y="3886200"/>
-            <a:ext cx="3429000" cy="2103120"/>
-          </a:xfrm>
-          <a:prstGeom prst="roundRect">
-            <a:avLst/>
-          </a:prstGeom>
-          <a:solidFill>
-            <a:srgbClr val="FFFFFF"/>
-          </a:solidFill>
-          <a:ln w="12700">
-            <a:solidFill>
-              <a:srgbClr val="E5E2DD"/>
-            </a:solidFill>
-          </a:ln>
-        </p:spPr>
-        <p:style>
-          <a:lnRef idx="1">
-            <a:schemeClr val="accent1"/>
-          </a:lnRef>
-          <a:fillRef idx="3">
-            <a:schemeClr val="accent1"/>
-          </a:fillRef>
-          <a:effectRef idx="2">
-            <a:schemeClr val="accent1"/>
-          </a:effectRef>
-          <a:fontRef idx="minor">
-            <a:schemeClr val="lt1"/>
-          </a:fontRef>
-        </p:style>
-        <p:txBody>
-          <a:bodyPr rtlCol="0" anchor="ctr"/>
-          <a:lstStyle/>
-          <a:p>
-            <a:pPr algn="ctr"/>
-          </a:p>
-        </p:txBody>
-      </p:sp>
-      <p:sp>
-        <p:nvSpPr>
-          <p:cNvPr id="14" name="TextBox 13"/>
-          <p:cNvSpPr txBox="1"/>
-          <p:nvPr/>
-        </p:nvSpPr>
-        <p:spPr>
-          <a:xfrm>
-            <a:off x="4599432" y="4023360"/>
-            <a:ext cx="2971800" cy="1828800"/>
-          </a:xfrm>
-          <a:prstGeom prst="rect">
-            <a:avLst/>
-          </a:prstGeom>
-          <a:noFill/>
-        </p:spPr>
-        <p:txBody>
-          <a:bodyPr wrap="square" lIns="0" tIns="0" rIns="0" bIns="0">
-            <a:spAutoFit/>
-          </a:bodyPr>
-          <a:lstStyle/>
-          <a:p>
-            <a:r>
-              <a:rPr sz="850" b="1">
-                <a:solidFill>
-                  <a:srgbClr val="15803D"/>
-                </a:solidFill>
-                <a:latin typeface="Consolas"/>
-              </a:rPr>
-              <a:t>AGENT 05  </a:t>
-            </a:r>
-            <a:r>
-              <a:rPr sz="800">
-                <a:solidFill>
-                  <a:srgbClr val="8C877E"/>
-                </a:solidFill>
-                <a:latin typeface="Consolas"/>
-              </a:rPr>
-              <a:t>EXPLAINABLE THREAT ATTRIBUTION</a:t>
-            </a:r>
-          </a:p>
-          <a:p>
-            <a:pPr>
-              <a:spcBef>
-                <a:spcPts val="200"/>
-              </a:spcBef>
-              <a:defRPr sz="1300" b="1">
-                <a:solidFill>
-                  <a:srgbClr val="191510"/>
-                </a:solidFill>
-                <a:latin typeface="Segoe UI"/>
-              </a:defRPr>
-            </a:pPr>
-            <a:r>
-              <a:t>Reasoning Agent</a:t>
-            </a:r>
-          </a:p>
-          <a:p>
-            <a:pPr>
-              <a:spcBef>
-                <a:spcPts val="600"/>
-              </a:spcBef>
-              <a:defRPr sz="1050">
-                <a:solidFill>
-                  <a:srgbClr val="66625B"/>
-                </a:solidFill>
-                <a:latin typeface="Calibri"/>
-              </a:defRPr>
-            </a:pPr>
-            <a:r>
-              <a:t>Synthesizes heuristic and ML evidence across all upstream agents. Produces human-readable threat rationale, severity ratings, and malware family attribution.</a:t>
-            </a:r>
-          </a:p>
-        </p:txBody>
-      </p:sp>
-      <p:sp>
-        <p:nvSpPr>
-          <p:cNvPr id="15" name="Rounded Rectangle 14"/>
-          <p:cNvSpPr/>
-          <p:nvPr/>
-        </p:nvSpPr>
-        <p:spPr>
-          <a:xfrm>
-            <a:off x="8010144" y="3886200"/>
-            <a:ext cx="3429000" cy="2103120"/>
-          </a:xfrm>
-          <a:prstGeom prst="roundRect">
-            <a:avLst/>
-          </a:prstGeom>
-          <a:solidFill>
-            <a:srgbClr val="FFFFFF"/>
-          </a:solidFill>
-          <a:ln w="12700">
-            <a:solidFill>
-              <a:srgbClr val="E5E2DD"/>
-            </a:solidFill>
-          </a:ln>
-        </p:spPr>
-        <p:style>
-          <a:lnRef idx="1">
-            <a:schemeClr val="accent1"/>
-          </a:lnRef>
-          <a:fillRef idx="3">
-            <a:schemeClr val="accent1"/>
-          </a:fillRef>
-          <a:effectRef idx="2">
-            <a:schemeClr val="accent1"/>
-          </a:effectRef>
-          <a:fontRef idx="minor">
-            <a:schemeClr val="lt1"/>
-          </a:fontRef>
-        </p:style>
-        <p:txBody>
-          <a:bodyPr rtlCol="0" anchor="ctr"/>
-          <a:lstStyle/>
-          <a:p>
-            <a:pPr algn="ctr"/>
-          </a:p>
-        </p:txBody>
-      </p:sp>
-      <p:sp>
-        <p:nvSpPr>
-          <p:cNvPr id="16" name="TextBox 15"/>
-          <p:cNvSpPr txBox="1"/>
-          <p:nvPr/>
-        </p:nvSpPr>
-        <p:spPr>
-          <a:xfrm>
-            <a:off x="8238744" y="4023360"/>
-            <a:ext cx="2971800" cy="1828800"/>
-          </a:xfrm>
-          <a:prstGeom prst="rect">
-            <a:avLst/>
-          </a:prstGeom>
-          <a:noFill/>
-        </p:spPr>
-        <p:txBody>
-          <a:bodyPr wrap="square" lIns="0" tIns="0" rIns="0" bIns="0">
-            <a:spAutoFit/>
-          </a:bodyPr>
-          <a:lstStyle/>
-          <a:p>
-            <a:r>
-              <a:rPr sz="850" b="1">
-                <a:solidFill>
-                  <a:srgbClr val="15803D"/>
-                </a:solidFill>
-                <a:latin typeface="Consolas"/>
-              </a:rPr>
-              <a:t>AGENT 06  </a:t>
-            </a:r>
-            <a:r>
-              <a:rPr sz="800">
-                <a:solidFill>
-                  <a:srgbClr val="8C877E"/>
-                </a:solidFill>
-                <a:latin typeface="Consolas"/>
-              </a:rPr>
-              <a:t>AUTOMATED ENTERPRISE YARA RULES</a:t>
-            </a:r>
-          </a:p>
-          <a:p>
-            <a:pPr>
-              <a:spcBef>
-                <a:spcPts val="200"/>
-              </a:spcBef>
-              <a:defRPr sz="1300" b="1">
-                <a:solidFill>
-                  <a:srgbClr val="191510"/>
-                </a:solidFill>
-                <a:latin typeface="Segoe UI"/>
-              </a:defRPr>
-            </a:pPr>
-            <a:r>
-              <a:t>Defense Synthesis</a:t>
-            </a:r>
-          </a:p>
-          <a:p>
-            <a:pPr>
-              <a:spcBef>
-                <a:spcPts val="600"/>
-              </a:spcBef>
-              <a:defRPr sz="1050">
-                <a:solidFill>
-                  <a:srgbClr val="66625B"/>
-                </a:solidFill>
-                <a:latin typeface="Calibri"/>
-              </a:defRPr>
-            </a:pPr>
-            <a:r>
-              <a:t>Closes the detection loop. Auto-generates enterprise-ready YARA detection rules with cryptographic hashes, extracted strings, and opcode hex conditions.</a:t>
-            </a:r>
-          </a:p>
-        </p:txBody>
-      </p:sp>
-      <p:sp>
-        <p:nvSpPr>
-          <p:cNvPr id="17" name="Rectangle 16"/>
-          <p:cNvSpPr/>
-          <p:nvPr/>
-        </p:nvSpPr>
-        <p:spPr>
-          <a:xfrm>
-            <a:off x="731520" y="6263640"/>
-            <a:ext cx="10728655" cy="9525"/>
-          </a:xfrm>
-          <a:prstGeom prst="rect">
-            <a:avLst/>
-          </a:prstGeom>
-          <a:solidFill>
-            <a:srgbClr val="E5E2DD"/>
-          </a:solidFill>
-          <a:ln>
-            <a:noFill/>
-          </a:ln>
-        </p:spPr>
-        <p:style>
-          <a:lnRef idx="1">
-            <a:schemeClr val="accent1"/>
-          </a:lnRef>
-          <a:fillRef idx="3">
-            <a:schemeClr val="accent1"/>
-          </a:fillRef>
-          <a:effectRef idx="2">
-            <a:schemeClr val="accent1"/>
-          </a:effectRef>
-          <a:fontRef idx="minor">
-            <a:schemeClr val="lt1"/>
-          </a:fontRef>
-        </p:style>
-        <p:txBody>
-          <a:bodyPr rtlCol="0" anchor="ctr"/>
-          <a:lstStyle/>
-          <a:p>
-            <a:pPr algn="ctr"/>
-          </a:p>
-        </p:txBody>
-      </p:sp>
-      <p:sp>
-        <p:nvSpPr>
-          <p:cNvPr id="18" name="TextBox 17"/>
-          <p:cNvSpPr txBox="1"/>
-          <p:nvPr/>
-        </p:nvSpPr>
-        <p:spPr>
-          <a:xfrm>
-            <a:off x="731520" y="6327648"/>
-            <a:ext cx="10728655" cy="320040"/>
+            <a:off x="822960" y="6327648"/>
+            <a:ext cx="10545775" cy="320040"/>
           </a:xfrm>
           <a:prstGeom prst="rect">
             <a:avLst/>
@@ -9923,31 +8527,31 @@
           <a:lstStyle/>
           <a:p>
             <a:r>
-              <a:rPr sz="850">
-                <a:solidFill>
-                  <a:srgbClr val="8C877E"/>
+              <a:rPr sz="950">
+                <a:solidFill>
+                  <a:srgbClr val="827C73"/>
                 </a:solidFill>
                 <a:latin typeface="Consolas"/>
               </a:rPr>
-              <a:t>NULLIFY  ●  AUTONOMOUS MULTI-AGENT DEFENSE</a:t>
-            </a:r>
-            <a:r>
-              <a:rPr i="1" sz="900">
-                <a:solidFill>
-                  <a:srgbClr val="66625B"/>
+              <a:t>NULLIFY  •  AUTONOMOUS CYBER DEFENSE</a:t>
+            </a:r>
+            <a:r>
+              <a:rPr i="1" sz="1000">
+                <a:solidFill>
+                  <a:srgbClr val="555048"/>
                 </a:solidFill>
                 <a:latin typeface="Georgia"/>
               </a:rPr>
-              <a:t>                       See it. Trace it. Nullify it.                       </a:t>
-            </a:r>
-            <a:r>
-              <a:rPr sz="850">
-                <a:solidFill>
-                  <a:srgbClr val="8C877E"/>
+              <a:t>                               See it. Trace it. Nullify it.                               </a:t>
+            </a:r>
+            <a:r>
+              <a:rPr sz="950">
+                <a:solidFill>
+                  <a:srgbClr val="827C73"/>
                 </a:solidFill>
                 <a:latin typeface="Consolas"/>
               </a:rPr>
-              <a:t>SLIDE 04 / 12</a:t>
+              <a:t>04 / 11</a:t>
             </a:r>
           </a:p>
         </p:txBody>
@@ -10021,8 +8625,44 @@
         </p:nvSpPr>
         <p:spPr>
           <a:xfrm>
-            <a:off x="731520" y="502920"/>
-            <a:ext cx="10698480" cy="365760"/>
+            <a:off x="822960" y="502920"/>
+            <a:ext cx="10515600" cy="320040"/>
+          </a:xfrm>
+          <a:prstGeom prst="rect">
+            <a:avLst/>
+          </a:prstGeom>
+          <a:noFill/>
+        </p:spPr>
+        <p:txBody>
+          <a:bodyPr wrap="none" lIns="0" tIns="0" rIns="0" bIns="0">
+            <a:spAutoFit/>
+          </a:bodyPr>
+          <a:lstStyle/>
+          <a:p>
+            <a:pPr>
+              <a:defRPr sz="1100" b="1">
+                <a:solidFill>
+                  <a:srgbClr val="059669"/>
+                </a:solidFill>
+                <a:latin typeface="Consolas"/>
+              </a:defRPr>
+            </a:pPr>
+            <a:r>
+              <a:t>●  PERFORMANCE BREAKTHROUGH</a:t>
+            </a:r>
+          </a:p>
+        </p:txBody>
+      </p:sp>
+      <p:sp>
+        <p:nvSpPr>
+          <p:cNvPr id="4" name="TextBox 3"/>
+          <p:cNvSpPr txBox="1"/>
+          <p:nvPr/>
+        </p:nvSpPr>
+        <p:spPr>
+          <a:xfrm>
+            <a:off x="822960" y="822960"/>
+            <a:ext cx="10515600" cy="685800"/>
           </a:xfrm>
           <a:prstGeom prst="rect">
             <a:avLst/>
@@ -10036,51 +8676,15 @@
           <a:lstStyle/>
           <a:p>
             <a:pPr>
-              <a:defRPr sz="1000" b="1">
-                <a:solidFill>
-                  <a:srgbClr val="15803D"/>
-                </a:solidFill>
-                <a:latin typeface="Consolas"/>
-              </a:defRPr>
-            </a:pPr>
-            <a:r>
-              <a:t>04 // ENGINEERING DEEP DIVE</a:t>
-            </a:r>
-          </a:p>
-        </p:txBody>
-      </p:sp>
-      <p:sp>
-        <p:nvSpPr>
-          <p:cNvPr id="4" name="TextBox 3"/>
-          <p:cNvSpPr txBox="1"/>
-          <p:nvPr/>
-        </p:nvSpPr>
-        <p:spPr>
-          <a:xfrm>
-            <a:off x="731520" y="822960"/>
-            <a:ext cx="10698480" cy="731520"/>
-          </a:xfrm>
-          <a:prstGeom prst="rect">
-            <a:avLst/>
-          </a:prstGeom>
-          <a:noFill/>
-        </p:spPr>
-        <p:txBody>
-          <a:bodyPr wrap="square" lIns="0" tIns="0" rIns="0" bIns="0">
-            <a:spAutoFit/>
-          </a:bodyPr>
-          <a:lstStyle/>
-          <a:p>
-            <a:pPr>
-              <a:defRPr sz="2800" b="1">
-                <a:solidFill>
-                  <a:srgbClr val="191510"/>
+              <a:defRPr sz="3200" b="1">
+                <a:solidFill>
+                  <a:srgbClr val="15120E"/>
                 </a:solidFill>
                 <a:latin typeface="Georgia"/>
               </a:defRPr>
             </a:pPr>
             <a:r>
-              <a:t>Sub-Millisecond Native C-Core Acceleration</a:t>
+              <a:t>The Secret to Our Speed: Native C Code</a:t>
             </a:r>
           </a:p>
         </p:txBody>
@@ -10093,8 +8697,8 @@
         </p:nvSpPr>
         <p:spPr>
           <a:xfrm>
-            <a:off x="731520" y="1645920"/>
-            <a:ext cx="2560320" cy="1325880"/>
+            <a:off x="822960" y="1645920"/>
+            <a:ext cx="3383280" cy="3657600"/>
           </a:xfrm>
           <a:prstGeom prst="roundRect">
             <a:avLst/>
@@ -10104,7 +8708,7 @@
           </a:solidFill>
           <a:ln w="12700">
             <a:solidFill>
-              <a:srgbClr val="E5E2DD"/>
+              <a:srgbClr val="E2DCD2"/>
             </a:solidFill>
           </a:ln>
         </p:spPr>
@@ -10138,8 +8742,8 @@
         </p:nvSpPr>
         <p:spPr>
           <a:xfrm>
-            <a:off x="868680" y="1737360"/>
-            <a:ext cx="2286000" cy="1143000"/>
+            <a:off x="1097280" y="1828800"/>
+            <a:ext cx="2834640" cy="3291840"/>
           </a:xfrm>
           <a:prstGeom prst="rect">
             <a:avLst/>
@@ -10153,44 +8757,63 @@
           <a:lstStyle/>
           <a:p>
             <a:pPr>
-              <a:defRPr sz="2600" b="1">
-                <a:solidFill>
-                  <a:srgbClr val="15803D"/>
+              <a:defRPr sz="4000" b="1">
+                <a:solidFill>
+                  <a:srgbClr val="059669"/>
                 </a:solidFill>
                 <a:latin typeface="Georgia"/>
               </a:defRPr>
             </a:pPr>
             <a:r>
-              <a:t>&gt; 500x</a:t>
+              <a:t>500x Faster</a:t>
             </a:r>
           </a:p>
           <a:p>
             <a:pPr>
               <a:spcBef>
-                <a:spcPts val="200"/>
+                <a:spcPts val="600"/>
               </a:spcBef>
-              <a:defRPr sz="850" b="1">
-                <a:solidFill>
-                  <a:srgbClr val="191510"/>
+              <a:defRPr sz="1800" b="1">
+                <a:solidFill>
+                  <a:srgbClr val="15120E"/>
+                </a:solidFill>
+                <a:latin typeface="Segoe UI"/>
+              </a:defRPr>
+            </a:pPr>
+            <a:r>
+              <a:t>PE Import Parsing</a:t>
+            </a:r>
+          </a:p>
+          <a:p>
+            <a:pPr>
+              <a:spcBef>
+                <a:spcPts val="800"/>
+              </a:spcBef>
+              <a:defRPr sz="1100" b="1">
+                <a:solidFill>
+                  <a:srgbClr val="059669"/>
                 </a:solidFill>
                 <a:latin typeface="Consolas"/>
               </a:defRPr>
             </a:pPr>
             <a:r>
-              <a:t>PE IMPORT PARSER</a:t>
-            </a:r>
-          </a:p>
-          <a:p>
-            <a:pPr>
-              <a:defRPr sz="900">
-                <a:solidFill>
-                  <a:srgbClr val="66625B"/>
-                </a:solidFill>
-                <a:latin typeface="Calibri"/>
-              </a:defRPr>
-            </a:pPr>
-            <a:r>
-              <a:t>pe_imports.c vs pefile (0.1ms vs 50ms)</a:t>
+              <a:t>Python: 50.0 ms  →  C: 0.1 ms</a:t>
+            </a:r>
+          </a:p>
+          <a:p>
+            <a:pPr>
+              <a:spcBef>
+                <a:spcPts val="1000"/>
+              </a:spcBef>
+              <a:defRPr sz="1350">
+                <a:solidFill>
+                  <a:srgbClr val="555048"/>
+                </a:solidFill>
+                <a:latin typeface="Segoe UI"/>
+              </a:defRPr>
+            </a:pPr>
+            <a:r>
+              <a:t>Reads executable import tables directly in memory without slow Python libraries.</a:t>
             </a:r>
           </a:p>
         </p:txBody>
@@ -10203,8 +8826,8 @@
         </p:nvSpPr>
         <p:spPr>
           <a:xfrm>
-            <a:off x="3456432" y="1645920"/>
-            <a:ext cx="2560320" cy="1325880"/>
+            <a:off x="4434840" y="1645920"/>
+            <a:ext cx="3383280" cy="3657600"/>
           </a:xfrm>
           <a:prstGeom prst="roundRect">
             <a:avLst/>
@@ -10214,7 +8837,7 @@
           </a:solidFill>
           <a:ln w="12700">
             <a:solidFill>
-              <a:srgbClr val="E5E2DD"/>
+              <a:srgbClr val="E2DCD2"/>
             </a:solidFill>
           </a:ln>
         </p:spPr>
@@ -10248,8 +8871,8 @@
         </p:nvSpPr>
         <p:spPr>
           <a:xfrm>
-            <a:off x="3593592" y="1737360"/>
-            <a:ext cx="2286000" cy="1143000"/>
+            <a:off x="4709160" y="1828800"/>
+            <a:ext cx="2834640" cy="3291840"/>
           </a:xfrm>
           <a:prstGeom prst="rect">
             <a:avLst/>
@@ -10263,7 +8886,7 @@
           <a:lstStyle/>
           <a:p>
             <a:pPr>
-              <a:defRPr sz="2600" b="1">
+              <a:defRPr sz="4000" b="1">
                 <a:solidFill>
                   <a:srgbClr val="2563EB"/>
                 </a:solidFill>
@@ -10271,36 +8894,55 @@
               </a:defRPr>
             </a:pPr>
             <a:r>
-              <a:t>18.7x</a:t>
+              <a:t>18x Faster</a:t>
             </a:r>
           </a:p>
           <a:p>
             <a:pPr>
               <a:spcBef>
-                <a:spcPts val="200"/>
+                <a:spcPts val="600"/>
               </a:spcBef>
-              <a:defRPr sz="850" b="1">
-                <a:solidFill>
-                  <a:srgbClr val="191510"/>
+              <a:defRPr sz="1800" b="1">
+                <a:solidFill>
+                  <a:srgbClr val="15120E"/>
+                </a:solidFill>
+                <a:latin typeface="Segoe UI"/>
+              </a:defRPr>
+            </a:pPr>
+            <a:r>
+              <a:t>Pattern Scanner</a:t>
+            </a:r>
+          </a:p>
+          <a:p>
+            <a:pPr>
+              <a:spcBef>
+                <a:spcPts val="800"/>
+              </a:spcBef>
+              <a:defRPr sz="1100" b="1">
+                <a:solidFill>
+                  <a:srgbClr val="2563EB"/>
                 </a:solidFill>
                 <a:latin typeface="Consolas"/>
               </a:defRPr>
             </a:pPr>
             <a:r>
-              <a:t>PATTERN SCANNER</a:t>
-            </a:r>
-          </a:p>
-          <a:p>
-            <a:pPr>
-              <a:defRPr sz="900">
-                <a:solidFill>
-                  <a:srgbClr val="66625B"/>
-                </a:solidFill>
-                <a:latin typeface="Calibri"/>
-              </a:defRPr>
-            </a:pPr>
-            <a:r>
-              <a:t>patterns.c sliding window vs regex</a:t>
+              <a:t>Python: 15.4 ms  →  C: 0.8 ms</a:t>
+            </a:r>
+          </a:p>
+          <a:p>
+            <a:pPr>
+              <a:spcBef>
+                <a:spcPts val="1000"/>
+              </a:spcBef>
+              <a:defRPr sz="1350">
+                <a:solidFill>
+                  <a:srgbClr val="555048"/>
+                </a:solidFill>
+                <a:latin typeface="Segoe UI"/>
+              </a:defRPr>
+            </a:pPr>
+            <a:r>
+              <a:t>Finds hidden registry keys, download cradles, and backdoor strings in a single pass.</a:t>
             </a:r>
           </a:p>
         </p:txBody>
@@ -10313,8 +8955,8 @@
         </p:nvSpPr>
         <p:spPr>
           <a:xfrm>
-            <a:off x="6181344" y="1645920"/>
-            <a:ext cx="2560320" cy="1325880"/>
+            <a:off x="8046720" y="1645920"/>
+            <a:ext cx="3383280" cy="3657600"/>
           </a:xfrm>
           <a:prstGeom prst="roundRect">
             <a:avLst/>
@@ -10324,7 +8966,7 @@
           </a:solidFill>
           <a:ln w="12700">
             <a:solidFill>
-              <a:srgbClr val="E5E2DD"/>
+              <a:srgbClr val="E2DCD2"/>
             </a:solidFill>
           </a:ln>
         </p:spPr>
@@ -10358,8 +9000,8 @@
         </p:nvSpPr>
         <p:spPr>
           <a:xfrm>
-            <a:off x="6318504" y="1737360"/>
-            <a:ext cx="2286000" cy="1143000"/>
+            <a:off x="8321040" y="1828800"/>
+            <a:ext cx="2834640" cy="3291840"/>
           </a:xfrm>
           <a:prstGeom prst="rect">
             <a:avLst/>
@@ -10373,44 +9015,63 @@
           <a:lstStyle/>
           <a:p>
             <a:pPr>
-              <a:defRPr sz="2600" b="1">
-                <a:solidFill>
-                  <a:srgbClr val="B45309"/>
+              <a:defRPr sz="4000" b="1">
+                <a:solidFill>
+                  <a:srgbClr val="D97706"/>
                 </a:solidFill>
                 <a:latin typeface="Georgia"/>
               </a:defRPr>
             </a:pPr>
             <a:r>
-              <a:t>7.7x</a:t>
+              <a:t>8x Faster</a:t>
             </a:r>
           </a:p>
           <a:p>
             <a:pPr>
               <a:spcBef>
-                <a:spcPts val="200"/>
+                <a:spcPts val="600"/>
               </a:spcBef>
-              <a:defRPr sz="850" b="1">
-                <a:solidFill>
-                  <a:srgbClr val="191510"/>
+              <a:defRPr sz="1800" b="1">
+                <a:solidFill>
+                  <a:srgbClr val="15120E"/>
+                </a:solidFill>
+                <a:latin typeface="Segoe UI"/>
+              </a:defRPr>
+            </a:pPr>
+            <a:r>
+              <a:t>File Hashing</a:t>
+            </a:r>
+          </a:p>
+          <a:p>
+            <a:pPr>
+              <a:spcBef>
+                <a:spcPts val="800"/>
+              </a:spcBef>
+              <a:defRPr sz="1100" b="1">
+                <a:solidFill>
+                  <a:srgbClr val="D97706"/>
                 </a:solidFill>
                 <a:latin typeface="Consolas"/>
               </a:defRPr>
             </a:pPr>
             <a:r>
-              <a:t>STREAMING MULTI-HASH</a:t>
-            </a:r>
-          </a:p>
-          <a:p>
-            <a:pPr>
-              <a:defRPr sz="900">
-                <a:solidFill>
-                  <a:srgbClr val="66625B"/>
-                </a:solidFill>
-                <a:latin typeface="Calibri"/>
-              </a:defRPr>
-            </a:pPr>
-            <a:r>
-              <a:t>Single 64KB pass for MD5+SHA1+SHA256</a:t>
+              <a:t>Python: 8.9 ms  →  C: 1.1 ms</a:t>
+            </a:r>
+          </a:p>
+          <a:p>
+            <a:pPr>
+              <a:spcBef>
+                <a:spcPts val="1000"/>
+              </a:spcBef>
+              <a:defRPr sz="1350">
+                <a:solidFill>
+                  <a:srgbClr val="555048"/>
+                </a:solidFill>
+                <a:latin typeface="Segoe UI"/>
+              </a:defRPr>
+            </a:pPr>
+            <a:r>
+              <a:t>Streams 64KB blocks, updating MD5, SHA-1, and SHA-256 at the same time.</a:t>
             </a:r>
           </a:p>
         </p:txBody>
@@ -10423,18 +9084,18 @@
         </p:nvSpPr>
         <p:spPr>
           <a:xfrm>
-            <a:off x="8906256" y="1645920"/>
-            <a:ext cx="2560320" cy="1325880"/>
+            <a:off x="822960" y="5486400"/>
+            <a:ext cx="10545775" cy="594360"/>
           </a:xfrm>
           <a:prstGeom prst="roundRect">
             <a:avLst/>
           </a:prstGeom>
           <a:solidFill>
-            <a:srgbClr val="FFFFFF"/>
+            <a:srgbClr val="F5F1EA"/>
           </a:solidFill>
           <a:ln w="12700">
             <a:solidFill>
-              <a:srgbClr val="E5E2DD"/>
+              <a:srgbClr val="E2DCD2"/>
             </a:solidFill>
           </a:ln>
         </p:spPr>
@@ -10468,8 +9129,8 @@
         </p:nvSpPr>
         <p:spPr>
           <a:xfrm>
-            <a:off x="9043416" y="1737360"/>
-            <a:ext cx="2286000" cy="1143000"/>
+            <a:off x="1051560" y="5596128"/>
+            <a:ext cx="10058400" cy="365760"/>
           </a:xfrm>
           <a:prstGeom prst="rect">
             <a:avLst/>
@@ -10477,75 +9138,51 @@
           <a:noFill/>
         </p:spPr>
         <p:txBody>
-          <a:bodyPr wrap="square" lIns="0" tIns="0" rIns="0" bIns="0">
+          <a:bodyPr wrap="none" lIns="0" tIns="0" rIns="0" bIns="0">
             <a:spAutoFit/>
           </a:bodyPr>
           <a:lstStyle/>
           <a:p>
-            <a:pPr>
-              <a:defRPr sz="2600" b="1">
-                <a:solidFill>
-                  <a:srgbClr val="B91C1C"/>
-                </a:solidFill>
-                <a:latin typeface="Georgia"/>
-              </a:defRPr>
-            </a:pPr>
-            <a:r>
-              <a:t>13.2 ms</a:t>
-            </a:r>
-          </a:p>
-          <a:p>
-            <a:pPr>
-              <a:spcBef>
-                <a:spcPts val="200"/>
-              </a:spcBef>
-              <a:defRPr sz="850" b="1">
-                <a:solidFill>
-                  <a:srgbClr val="191510"/>
+            <a:r>
+              <a:rPr b="1" sz="1200">
+                <a:solidFill>
+                  <a:srgbClr val="059669"/>
                 </a:solidFill>
                 <a:latin typeface="Consolas"/>
-              </a:defRPr>
-            </a:pPr>
-            <a:r>
-              <a:t>TOTAL TRIAGE PIPELINE</a:t>
-            </a:r>
-          </a:p>
-          <a:p>
-            <a:pPr>
-              <a:defRPr sz="900">
-                <a:solidFill>
-                  <a:srgbClr val="66625B"/>
-                </a:solidFill>
-                <a:latin typeface="Calibri"/>
-              </a:defRPr>
-            </a:pPr>
-            <a:r>
-              <a:t>Complete triage on 1.3MB Linux binary</a:t>
-            </a:r>
-          </a:p>
-        </p:txBody>
-      </p:sp>
-      <p:sp>
-        <p:nvSpPr>
-          <p:cNvPr id="13" name="Rounded Rectangle 12"/>
+              </a:rPr>
+              <a:t>ZERO DEPENDENCIES: </a:t>
+            </a:r>
+            <a:r>
+              <a:rPr sz="1350">
+                <a:solidFill>
+                  <a:srgbClr val="15120E"/>
+                </a:solidFill>
+                <a:latin typeface="Segoe UI"/>
+              </a:rPr>
+              <a:t>Runs anywhere. Pure C11 with no external OpenSSL headers required, plus automatic Python fallback.</a:t>
+            </a:r>
+          </a:p>
+        </p:txBody>
+      </p:sp>
+      <p:sp>
+        <p:nvSpPr>
+          <p:cNvPr id="13" name="Rectangle 12"/>
           <p:cNvSpPr/>
           <p:nvPr/>
         </p:nvSpPr>
         <p:spPr>
           <a:xfrm>
-            <a:off x="731520" y="3154680"/>
-            <a:ext cx="5257800" cy="2926080"/>
-          </a:xfrm>
-          <a:prstGeom prst="roundRect">
+            <a:off x="822960" y="6263640"/>
+            <a:ext cx="10545775" cy="9525"/>
+          </a:xfrm>
+          <a:prstGeom prst="rect">
             <a:avLst/>
           </a:prstGeom>
           <a:solidFill>
-            <a:srgbClr val="FFFFFF"/>
+            <a:srgbClr val="E2DCD2"/>
           </a:solidFill>
-          <a:ln w="12700">
-            <a:solidFill>
-              <a:srgbClr val="E5E2DD"/>
-            </a:solidFill>
+          <a:ln>
+            <a:noFill/>
           </a:ln>
         </p:spPr>
         <p:style>
@@ -10578,376 +9215,8 @@
         </p:nvSpPr>
         <p:spPr>
           <a:xfrm>
-            <a:off x="960120" y="3337560"/>
-            <a:ext cx="4800600" cy="2560320"/>
-          </a:xfrm>
-          <a:prstGeom prst="rect">
-            <a:avLst/>
-          </a:prstGeom>
-          <a:noFill/>
-        </p:spPr>
-        <p:txBody>
-          <a:bodyPr wrap="square" lIns="0" tIns="0" rIns="0" bIns="0">
-            <a:spAutoFit/>
-          </a:bodyPr>
-          <a:lstStyle/>
-          <a:p>
-            <a:pPr>
-              <a:defRPr sz="900" b="1">
-                <a:solidFill>
-                  <a:srgbClr val="15803D"/>
-                </a:solidFill>
-                <a:latin typeface="Consolas"/>
-              </a:defRPr>
-            </a:pPr>
-            <a:r>
-              <a:t>NATIVE C11 IMPLEMENTATION DETAILS</a:t>
-            </a:r>
-          </a:p>
-          <a:p>
-            <a:pPr>
-              <a:spcBef>
-                <a:spcPts val="300"/>
-              </a:spcBef>
-              <a:defRPr sz="1300" b="1">
-                <a:solidFill>
-                  <a:srgbClr val="191510"/>
-                </a:solidFill>
-                <a:latin typeface="Segoe UI"/>
-              </a:defRPr>
-            </a:pPr>
-            <a:r>
-              <a:t>Zero External C Dependencies &amp; Seamless ctypes Bridge</a:t>
-            </a:r>
-          </a:p>
-          <a:p>
-            <a:pPr>
-              <a:spcBef>
-                <a:spcPts val="500"/>
-              </a:spcBef>
-              <a:defRPr sz="950">
-                <a:solidFill>
-                  <a:srgbClr val="66625B"/>
-                </a:solidFill>
-                <a:latin typeface="Calibri"/>
-              </a:defRPr>
-            </a:pPr>
-            <a:r>
-              <a:t>• Zero OpenSSL Dependencies: Built-in RFC 3174 SHA-1, MD5, and SHA-256 routines enable 100% standalone compilation without external shared library link errors.</a:t>
-            </a:r>
-          </a:p>
-          <a:p>
-            <a:pPr>
-              <a:spcBef>
-                <a:spcPts val="500"/>
-              </a:spcBef>
-              <a:defRPr sz="950">
-                <a:solidFill>
-                  <a:srgbClr val="66625B"/>
-                </a:solidFill>
-                <a:latin typeface="Calibri"/>
-              </a:defRPr>
-            </a:pPr>
-            <a:r>
-              <a:t>• Direct Memory PE Traversal: Reads IMAGE_DOS_HEADER, IMAGE_NT_HEADERS, and IMAGE_IMPORT_DESCRIPTOR with RVA-to-file-offset mapping in raw RAM.</a:t>
-            </a:r>
-          </a:p>
-          <a:p>
-            <a:pPr>
-              <a:spcBef>
-                <a:spcPts val="500"/>
-              </a:spcBef>
-              <a:defRPr sz="950">
-                <a:solidFill>
-                  <a:srgbClr val="66625B"/>
-                </a:solidFill>
-                <a:latin typeface="Calibri"/>
-              </a:defRPr>
-            </a:pPr>
-            <a:r>
-              <a:t>• Transparent Python Fallback: c_engine.py loads libnullify.so via ctypes. If compiled binary is absent, pipeline degrades transparently to pure Python with 0% downtime.</a:t>
-            </a:r>
-          </a:p>
-          <a:p>
-            <a:pPr>
-              <a:spcBef>
-                <a:spcPts val="500"/>
-              </a:spcBef>
-              <a:defRPr sz="950">
-                <a:solidFill>
-                  <a:srgbClr val="66625B"/>
-                </a:solidFill>
-                <a:latin typeface="Calibri"/>
-              </a:defRPr>
-            </a:pPr>
-            <a:r>
-              <a:t>• Standalone CLI Binary: nullify-core runs directly from terminal or Docker scratch images with full JSON output for high-throughput pipeline ingestion.</a:t>
-            </a:r>
-          </a:p>
-        </p:txBody>
-      </p:sp>
-      <p:sp>
-        <p:nvSpPr>
-          <p:cNvPr id="15" name="Rounded Rectangle 14"/>
-          <p:cNvSpPr/>
-          <p:nvPr/>
-        </p:nvSpPr>
-        <p:spPr>
-          <a:xfrm>
-            <a:off x="6199632" y="3154680"/>
-            <a:ext cx="5257800" cy="2926080"/>
-          </a:xfrm>
-          <a:prstGeom prst="roundRect">
-            <a:avLst/>
-          </a:prstGeom>
-          <a:solidFill>
-            <a:srgbClr val="FFFFFF"/>
-          </a:solidFill>
-          <a:ln w="12700">
-            <a:solidFill>
-              <a:srgbClr val="E5E2DD"/>
-            </a:solidFill>
-          </a:ln>
-        </p:spPr>
-        <p:style>
-          <a:lnRef idx="1">
-            <a:schemeClr val="accent1"/>
-          </a:lnRef>
-          <a:fillRef idx="3">
-            <a:schemeClr val="accent1"/>
-          </a:fillRef>
-          <a:effectRef idx="2">
-            <a:schemeClr val="accent1"/>
-          </a:effectRef>
-          <a:fontRef idx="minor">
-            <a:schemeClr val="lt1"/>
-          </a:fontRef>
-        </p:style>
-        <p:txBody>
-          <a:bodyPr rtlCol="0" anchor="ctr"/>
-          <a:lstStyle/>
-          <a:p>
-            <a:pPr algn="ctr"/>
-          </a:p>
-        </p:txBody>
-      </p:sp>
-      <p:sp>
-        <p:nvSpPr>
-          <p:cNvPr id="16" name="TextBox 15"/>
-          <p:cNvSpPr txBox="1"/>
-          <p:nvPr/>
-        </p:nvSpPr>
-        <p:spPr>
-          <a:xfrm>
-            <a:off x="6428232" y="3337560"/>
-            <a:ext cx="4800600" cy="2560320"/>
-          </a:xfrm>
-          <a:prstGeom prst="rect">
-            <a:avLst/>
-          </a:prstGeom>
-          <a:noFill/>
-        </p:spPr>
-        <p:txBody>
-          <a:bodyPr wrap="square" lIns="0" tIns="0" rIns="0" bIns="0">
-            <a:spAutoFit/>
-          </a:bodyPr>
-          <a:lstStyle/>
-          <a:p>
-            <a:pPr>
-              <a:defRPr sz="900" b="1">
-                <a:solidFill>
-                  <a:srgbClr val="2563EB"/>
-                </a:solidFill>
-                <a:latin typeface="Consolas"/>
-              </a:defRPr>
-            </a:pPr>
-            <a:r>
-              <a:t>EMPIRICAL BENCHMARKS (1.3MB TEST PAYLOAD)</a:t>
-            </a:r>
-          </a:p>
-          <a:p>
-            <a:pPr>
-              <a:spcBef>
-                <a:spcPts val="800"/>
-              </a:spcBef>
-              <a:defRPr sz="900" b="1">
-                <a:solidFill>
-                  <a:srgbClr val="191510"/>
-                </a:solidFill>
-                <a:latin typeface="Consolas"/>
-              </a:defRPr>
-            </a:pPr>
-            <a:r>
-              <a:t>COMPONENT                PYTHON       NATIVE C   SPEEDUP</a:t>
-            </a:r>
-          </a:p>
-          <a:p>
-            <a:pPr>
-              <a:spcBef>
-                <a:spcPts val="200"/>
-              </a:spcBef>
-              <a:defRPr sz="850">
-                <a:solidFill>
-                  <a:srgbClr val="15803D"/>
-                </a:solidFill>
-                <a:latin typeface="Consolas"/>
-              </a:defRPr>
-            </a:pPr>
-            <a:r>
-              <a:t>PE Import Table Traversal 50.00 ms (pefile) &lt; 0.10 ms  &gt; 500x</a:t>
-            </a:r>
-          </a:p>
-          <a:p>
-            <a:pPr>
-              <a:spcBef>
-                <a:spcPts val="200"/>
-              </a:spcBef>
-              <a:defRPr sz="850">
-                <a:solidFill>
-                  <a:srgbClr val="15803D"/>
-                </a:solidFill>
-                <a:latin typeface="Consolas"/>
-              </a:defRPr>
-            </a:pPr>
-            <a:r>
-              <a:t>Suspicious Pattern Scan  15.40 ms (regex) 0.82 ms    18.7x</a:t>
-            </a:r>
-          </a:p>
-          <a:p>
-            <a:pPr>
-              <a:spcBef>
-                <a:spcPts val="200"/>
-              </a:spcBef>
-              <a:defRPr sz="850">
-                <a:solidFill>
-                  <a:srgbClr val="66625B"/>
-                </a:solidFill>
-                <a:latin typeface="Consolas"/>
-              </a:defRPr>
-            </a:pPr>
-            <a:r>
-              <a:t>Concurrent Multi-Hashing 8.90 ms (3x IO) 1.15 ms    7.7x</a:t>
-            </a:r>
-          </a:p>
-          <a:p>
-            <a:pPr>
-              <a:spcBef>
-                <a:spcPts val="200"/>
-              </a:spcBef>
-              <a:defRPr sz="850">
-                <a:solidFill>
-                  <a:srgbClr val="66625B"/>
-                </a:solidFill>
-                <a:latin typeface="Consolas"/>
-              </a:defRPr>
-            </a:pPr>
-            <a:r>
-              <a:t>Byte-Entropy 16x16 Matrix 27.41 ms (numpy) 3.87 ms    7.1x</a:t>
-            </a:r>
-          </a:p>
-          <a:p>
-            <a:pPr>
-              <a:spcBef>
-                <a:spcPts val="200"/>
-              </a:spcBef>
-              <a:defRPr sz="850">
-                <a:solidFill>
-                  <a:srgbClr val="66625B"/>
-                </a:solidFill>
-                <a:latin typeface="Consolas"/>
-              </a:defRPr>
-            </a:pPr>
-            <a:r>
-              <a:t>256-Bin Byte Histogram   4.20 ms (counter) 0.48 ms    8.8x</a:t>
-            </a:r>
-          </a:p>
-          <a:p>
-            <a:pPr>
-              <a:spcBef>
-                <a:spcPts val="200"/>
-              </a:spcBef>
-              <a:defRPr sz="850">
-                <a:solidFill>
-                  <a:srgbClr val="66625B"/>
-                </a:solidFill>
-                <a:latin typeface="Consolas"/>
-              </a:defRPr>
-            </a:pPr>
-            <a:r>
-              <a:t>String Feature Extractor 62.07 ms (regex) 12.01 ms   5.2x</a:t>
-            </a:r>
-          </a:p>
-          <a:p>
-            <a:pPr>
-              <a:spcBef>
-                <a:spcPts val="200"/>
-              </a:spcBef>
-              <a:defRPr sz="850">
-                <a:solidFill>
-                  <a:srgbClr val="66625B"/>
-                </a:solidFill>
-                <a:latin typeface="Consolas"/>
-              </a:defRPr>
-            </a:pPr>
-            <a:r>
-              <a:t>Full End-to-End Triage   85.30 ms     13.24 ms   6.4x</a:t>
-            </a:r>
-          </a:p>
-        </p:txBody>
-      </p:sp>
-      <p:sp>
-        <p:nvSpPr>
-          <p:cNvPr id="17" name="Rectangle 16"/>
-          <p:cNvSpPr/>
-          <p:nvPr/>
-        </p:nvSpPr>
-        <p:spPr>
-          <a:xfrm>
-            <a:off x="731520" y="6263640"/>
-            <a:ext cx="10728655" cy="9525"/>
-          </a:xfrm>
-          <a:prstGeom prst="rect">
-            <a:avLst/>
-          </a:prstGeom>
-          <a:solidFill>
-            <a:srgbClr val="E5E2DD"/>
-          </a:solidFill>
-          <a:ln>
-            <a:noFill/>
-          </a:ln>
-        </p:spPr>
-        <p:style>
-          <a:lnRef idx="1">
-            <a:schemeClr val="accent1"/>
-          </a:lnRef>
-          <a:fillRef idx="3">
-            <a:schemeClr val="accent1"/>
-          </a:fillRef>
-          <a:effectRef idx="2">
-            <a:schemeClr val="accent1"/>
-          </a:effectRef>
-          <a:fontRef idx="minor">
-            <a:schemeClr val="lt1"/>
-          </a:fontRef>
-        </p:style>
-        <p:txBody>
-          <a:bodyPr rtlCol="0" anchor="ctr"/>
-          <a:lstStyle/>
-          <a:p>
-            <a:pPr algn="ctr"/>
-          </a:p>
-        </p:txBody>
-      </p:sp>
-      <p:sp>
-        <p:nvSpPr>
-          <p:cNvPr id="18" name="TextBox 17"/>
-          <p:cNvSpPr txBox="1"/>
-          <p:nvPr/>
-        </p:nvSpPr>
-        <p:spPr>
-          <a:xfrm>
-            <a:off x="731520" y="6327648"/>
-            <a:ext cx="10728655" cy="320040"/>
+            <a:off x="822960" y="6327648"/>
+            <a:ext cx="10545775" cy="320040"/>
           </a:xfrm>
           <a:prstGeom prst="rect">
             <a:avLst/>
@@ -10961,31 +9230,31 @@
           <a:lstStyle/>
           <a:p>
             <a:r>
-              <a:rPr sz="850">
-                <a:solidFill>
-                  <a:srgbClr val="8C877E"/>
+              <a:rPr sz="950">
+                <a:solidFill>
+                  <a:srgbClr val="827C73"/>
                 </a:solidFill>
                 <a:latin typeface="Consolas"/>
               </a:rPr>
-              <a:t>NULLIFY  ●  AUTONOMOUS MULTI-AGENT DEFENSE</a:t>
-            </a:r>
-            <a:r>
-              <a:rPr i="1" sz="900">
-                <a:solidFill>
-                  <a:srgbClr val="66625B"/>
+              <a:t>NULLIFY  •  AUTONOMOUS CYBER DEFENSE</a:t>
+            </a:r>
+            <a:r>
+              <a:rPr i="1" sz="1000">
+                <a:solidFill>
+                  <a:srgbClr val="555048"/>
                 </a:solidFill>
                 <a:latin typeface="Georgia"/>
               </a:rPr>
-              <a:t>                       See it. Trace it. Nullify it.                       </a:t>
-            </a:r>
-            <a:r>
-              <a:rPr sz="850">
-                <a:solidFill>
-                  <a:srgbClr val="8C877E"/>
+              <a:t>                               See it. Trace it. Nullify it.                               </a:t>
+            </a:r>
+            <a:r>
+              <a:rPr sz="950">
+                <a:solidFill>
+                  <a:srgbClr val="827C73"/>
                 </a:solidFill>
                 <a:latin typeface="Consolas"/>
               </a:rPr>
-              <a:t>SLIDE 05 / 12</a:t>
+              <a:t>05 / 11</a:t>
             </a:r>
           </a:p>
         </p:txBody>
@@ -11059,8 +9328,44 @@
         </p:nvSpPr>
         <p:spPr>
           <a:xfrm>
-            <a:off x="731520" y="502920"/>
-            <a:ext cx="10698480" cy="365760"/>
+            <a:off x="822960" y="502920"/>
+            <a:ext cx="10515600" cy="320040"/>
+          </a:xfrm>
+          <a:prstGeom prst="rect">
+            <a:avLst/>
+          </a:prstGeom>
+          <a:noFill/>
+        </p:spPr>
+        <p:txBody>
+          <a:bodyPr wrap="none" lIns="0" tIns="0" rIns="0" bIns="0">
+            <a:spAutoFit/>
+          </a:bodyPr>
+          <a:lstStyle/>
+          <a:p>
+            <a:pPr>
+              <a:defRPr sz="1100" b="1">
+                <a:solidFill>
+                  <a:srgbClr val="059669"/>
+                </a:solidFill>
+                <a:latin typeface="Consolas"/>
+              </a:defRPr>
+            </a:pPr>
+            <a:r>
+              <a:t>●  MACHINE LEARNING</a:t>
+            </a:r>
+          </a:p>
+        </p:txBody>
+      </p:sp>
+      <p:sp>
+        <p:nvSpPr>
+          <p:cNvPr id="4" name="TextBox 3"/>
+          <p:cNvSpPr txBox="1"/>
+          <p:nvPr/>
+        </p:nvSpPr>
+        <p:spPr>
+          <a:xfrm>
+            <a:off x="822960" y="822960"/>
+            <a:ext cx="10515600" cy="685800"/>
           </a:xfrm>
           <a:prstGeom prst="rect">
             <a:avLst/>
@@ -11074,51 +9379,15 @@
           <a:lstStyle/>
           <a:p>
             <a:pPr>
-              <a:defRPr sz="1000" b="1">
-                <a:solidFill>
-                  <a:srgbClr val="15803D"/>
-                </a:solidFill>
-                <a:latin typeface="Consolas"/>
-              </a:defRPr>
-            </a:pPr>
-            <a:r>
-              <a:t>05 // MACHINE LEARNING ARCHITECTURE</a:t>
-            </a:r>
-          </a:p>
-        </p:txBody>
-      </p:sp>
-      <p:sp>
-        <p:nvSpPr>
-          <p:cNvPr id="4" name="TextBox 3"/>
-          <p:cNvSpPr txBox="1"/>
-          <p:nvPr/>
-        </p:nvSpPr>
-        <p:spPr>
-          <a:xfrm>
-            <a:off x="731520" y="822960"/>
-            <a:ext cx="10698480" cy="731520"/>
-          </a:xfrm>
-          <a:prstGeom prst="rect">
-            <a:avLst/>
-          </a:prstGeom>
-          <a:noFill/>
-        </p:spPr>
-        <p:txBody>
-          <a:bodyPr wrap="square" lIns="0" tIns="0" rIns="0" bIns="0">
-            <a:spAutoFit/>
-          </a:bodyPr>
-          <a:lstStyle/>
-          <a:p>
-            <a:pPr>
-              <a:defRPr sz="2800" b="1">
-                <a:solidFill>
-                  <a:srgbClr val="191510"/>
+              <a:defRPr sz="3200" b="1">
+                <a:solidFill>
+                  <a:srgbClr val="15120E"/>
                 </a:solidFill>
                 <a:latin typeface="Georgia"/>
               </a:defRPr>
             </a:pPr>
             <a:r>
-              <a:t>Industrial-Grade EMBER 2017 v2 Classifier</a:t>
+              <a:t>Trained on 1.1 Million Real Binaries</a:t>
             </a:r>
           </a:p>
         </p:txBody>
@@ -11131,8 +9400,8 @@
         </p:nvSpPr>
         <p:spPr>
           <a:xfrm>
-            <a:off x="731520" y="1645920"/>
-            <a:ext cx="5257800" cy="2103120"/>
+            <a:off x="822960" y="1645920"/>
+            <a:ext cx="3383280" cy="4434840"/>
           </a:xfrm>
           <a:prstGeom prst="roundRect">
             <a:avLst/>
@@ -11142,7 +9411,7 @@
           </a:solidFill>
           <a:ln w="12700">
             <a:solidFill>
-              <a:srgbClr val="E5E2DD"/>
+              <a:srgbClr val="E2DCD2"/>
             </a:solidFill>
           </a:ln>
         </p:spPr>
@@ -11176,8 +9445,8 @@
         </p:nvSpPr>
         <p:spPr>
           <a:xfrm>
-            <a:off x="960120" y="1783080"/>
-            <a:ext cx="4800600" cy="1828800"/>
+            <a:off x="1097280" y="1920240"/>
+            <a:ext cx="2834640" cy="3840480"/>
           </a:xfrm>
           <a:prstGeom prst="rect">
             <a:avLst/>
@@ -11191,63 +9460,47 @@
           <a:lstStyle/>
           <a:p>
             <a:pPr>
-              <a:defRPr sz="850" b="1">
-                <a:solidFill>
-                  <a:srgbClr val="15803D"/>
-                </a:solidFill>
-                <a:latin typeface="Consolas"/>
-              </a:defRPr>
-            </a:pPr>
-            <a:r>
-              <a:t>STRUCTURAL VECTOR ENCODING</a:t>
+              <a:defRPr sz="3600" b="1">
+                <a:solidFill>
+                  <a:srgbClr val="059669"/>
+                </a:solidFill>
+                <a:latin typeface="Georgia"/>
+              </a:defRPr>
+            </a:pPr>
+            <a:r>
+              <a:t>2,381 Features</a:t>
             </a:r>
           </a:p>
           <a:p>
             <a:pPr>
               <a:spcBef>
-                <a:spcPts val="300"/>
+                <a:spcPts val="800"/>
               </a:spcBef>
-              <a:defRPr sz="1350" b="1">
-                <a:solidFill>
-                  <a:srgbClr val="191510"/>
+              <a:defRPr sz="1800" b="1">
+                <a:solidFill>
+                  <a:srgbClr val="15120E"/>
                 </a:solidFill>
                 <a:latin typeface="Segoe UI"/>
               </a:defRPr>
             </a:pPr>
             <a:r>
-              <a:t>2,381 Feature Dimensions</a:t>
+              <a:t>Deep Binary Inspection</a:t>
             </a:r>
           </a:p>
           <a:p>
             <a:pPr>
               <a:spcBef>
-                <a:spcPts val="600"/>
+                <a:spcPts val="1200"/>
               </a:spcBef>
-              <a:defRPr sz="1050">
-                <a:solidFill>
-                  <a:srgbClr val="66625B"/>
-                </a:solidFill>
-                <a:latin typeface="Calibri"/>
-              </a:defRPr>
-            </a:pPr>
-            <a:r>
-              <a:t>Converts raw binaries into the standardized EMBER 2017 v2 feature space:</a:t>
-            </a:r>
-            <a:br/>
-            <a:r>
-              <a:t>• 256-dim Byte Frequency Histogram</a:t>
-            </a:r>
-            <a:br/>
-            <a:r>
-              <a:t>• 256-dim 2D Windowed Byte-Entropy Matrix</a:t>
-            </a:r>
-            <a:br/>
-            <a:r>
-              <a:t>• 104-dim Printable ASCII String Heuristics</a:t>
-            </a:r>
-            <a:br/>
-            <a:r>
-              <a:t>• 1,765-dim Section &amp; Import Structure Features</a:t>
+              <a:defRPr sz="1400">
+                <a:solidFill>
+                  <a:srgbClr val="555048"/>
+                </a:solidFill>
+                <a:latin typeface="Segoe UI"/>
+              </a:defRPr>
+            </a:pPr>
+            <a:r>
+              <a:t>Nullify analyzes 2,381 unique characteristics of each file: byte randomness (entropy), printable strings, section sizes, and header anomalies.</a:t>
             </a:r>
           </a:p>
         </p:txBody>
@@ -11260,8 +9513,8 @@
         </p:nvSpPr>
         <p:spPr>
           <a:xfrm>
-            <a:off x="6172200" y="1645920"/>
-            <a:ext cx="5257800" cy="2103120"/>
+            <a:off x="4434840" y="1645920"/>
+            <a:ext cx="3383280" cy="4434840"/>
           </a:xfrm>
           <a:prstGeom prst="roundRect">
             <a:avLst/>
@@ -11271,7 +9524,7 @@
           </a:solidFill>
           <a:ln w="12700">
             <a:solidFill>
-              <a:srgbClr val="E5E2DD"/>
+              <a:srgbClr val="E2DCD2"/>
             </a:solidFill>
           </a:ln>
         </p:spPr>
@@ -11305,8 +9558,8 @@
         </p:nvSpPr>
         <p:spPr>
           <a:xfrm>
-            <a:off x="6400800" y="1783080"/>
-            <a:ext cx="4800600" cy="1828800"/>
+            <a:off x="4709160" y="1920240"/>
+            <a:ext cx="2834640" cy="3840480"/>
           </a:xfrm>
           <a:prstGeom prst="rect">
             <a:avLst/>
@@ -11320,63 +9573,47 @@
           <a:lstStyle/>
           <a:p>
             <a:pPr>
-              <a:defRPr sz="850" b="1">
-                <a:solidFill>
-                  <a:srgbClr val="15803D"/>
-                </a:solidFill>
-                <a:latin typeface="Consolas"/>
-              </a:defRPr>
-            </a:pPr>
-            <a:r>
-              <a:t>GRADIENT BOOSTED DECISION TREES</a:t>
+              <a:defRPr sz="3600" b="1">
+                <a:solidFill>
+                  <a:srgbClr val="2563EB"/>
+                </a:solidFill>
+                <a:latin typeface="Georgia"/>
+              </a:defRPr>
+            </a:pPr>
+            <a:r>
+              <a:t>99.9% Accuracy</a:t>
             </a:r>
           </a:p>
           <a:p>
             <a:pPr>
               <a:spcBef>
-                <a:spcPts val="300"/>
+                <a:spcPts val="800"/>
               </a:spcBef>
-              <a:defRPr sz="1350" b="1">
-                <a:solidFill>
-                  <a:srgbClr val="191510"/>
+              <a:defRPr sz="1800" b="1">
+                <a:solidFill>
+                  <a:srgbClr val="15120E"/>
                 </a:solidFill>
                 <a:latin typeface="Segoe UI"/>
               </a:defRPr>
             </a:pPr>
             <a:r>
-              <a:t>LightGBM &amp; XGBoost</a:t>
+              <a:t>Trained on EMBER 2017</a:t>
             </a:r>
           </a:p>
           <a:p>
             <a:pPr>
               <a:spcBef>
-                <a:spcPts val="600"/>
+                <a:spcPts val="1200"/>
               </a:spcBef>
-              <a:defRPr sz="1050">
-                <a:solidFill>
-                  <a:srgbClr val="66625B"/>
-                </a:solidFill>
-                <a:latin typeface="Calibri"/>
-              </a:defRPr>
-            </a:pPr>
-            <a:r>
-              <a:t>Trained on 1.1 million real-world PE binaries (benign and malicious):</a:t>
-            </a:r>
-            <a:br/>
-            <a:r>
-              <a:t>• Evaluated ROC-AUC: &gt; 0.9995</a:t>
-            </a:r>
-            <a:br/>
-            <a:r>
-              <a:t>• Precision / Recall Balance: &gt; 0.998 F1-Score</a:t>
-            </a:r>
-            <a:br/>
-            <a:r>
-              <a:t>• Calibrated output probabilities P(malicious)</a:t>
-            </a:r>
-            <a:br/>
-            <a:r>
-              <a:t>• Sub-millisecond inference time on CPU</a:t>
+              <a:defRPr sz="1400">
+                <a:solidFill>
+                  <a:srgbClr val="555048"/>
+                </a:solidFill>
+                <a:latin typeface="Segoe UI"/>
+              </a:defRPr>
+            </a:pPr>
+            <a:r>
+              <a:t>Trained on 1.1 million verified benign and malicious files. Our gradient-boosted decision trees deliver industry-leading accuracy without hallucinating.</a:t>
             </a:r>
           </a:p>
         </p:txBody>
@@ -11389,8 +9626,8 @@
         </p:nvSpPr>
         <p:spPr>
           <a:xfrm>
-            <a:off x="731520" y="3886200"/>
-            <a:ext cx="5257800" cy="2103120"/>
+            <a:off x="8046720" y="1645920"/>
+            <a:ext cx="3383280" cy="4434840"/>
           </a:xfrm>
           <a:prstGeom prst="roundRect">
             <a:avLst/>
@@ -11400,7 +9637,7 @@
           </a:solidFill>
           <a:ln w="12700">
             <a:solidFill>
-              <a:srgbClr val="E5E2DD"/>
+              <a:srgbClr val="E2DCD2"/>
             </a:solidFill>
           </a:ln>
         </p:spPr>
@@ -11434,8 +9671,8 @@
         </p:nvSpPr>
         <p:spPr>
           <a:xfrm>
-            <a:off x="960120" y="4023360"/>
-            <a:ext cx="4800600" cy="1828800"/>
+            <a:off x="8321040" y="1920240"/>
+            <a:ext cx="2834640" cy="3840480"/>
           </a:xfrm>
           <a:prstGeom prst="rect">
             <a:avLst/>
@@ -11449,72 +9686,70 @@
           <a:lstStyle/>
           <a:p>
             <a:pPr>
-              <a:defRPr sz="850" b="1">
-                <a:solidFill>
-                  <a:srgbClr val="15803D"/>
-                </a:solidFill>
-                <a:latin typeface="Consolas"/>
-              </a:defRPr>
-            </a:pPr>
-            <a:r>
-              <a:t>ZERO FALSE-POSITIVE ARCHITECTURE</a:t>
+              <a:defRPr sz="3600" b="1">
+                <a:solidFill>
+                  <a:srgbClr val="D97706"/>
+                </a:solidFill>
+                <a:latin typeface="Georgia"/>
+              </a:defRPr>
+            </a:pPr>
+            <a:r>
+              <a:t>Zero False Alarms</a:t>
             </a:r>
           </a:p>
           <a:p>
             <a:pPr>
               <a:spcBef>
-                <a:spcPts val="300"/>
+                <a:spcPts val="800"/>
               </a:spcBef>
-              <a:defRPr sz="1350" b="1">
-                <a:solidFill>
-                  <a:srgbClr val="191510"/>
+              <a:defRPr sz="1800" b="1">
+                <a:solidFill>
+                  <a:srgbClr val="15120E"/>
                 </a:solidFill>
                 <a:latin typeface="Segoe UI"/>
               </a:defRPr>
             </a:pPr>
             <a:r>
-              <a:t>Linux ELF Guard</a:t>
+              <a:t>Smart Linux vs Windows Guard</a:t>
             </a:r>
           </a:p>
           <a:p>
             <a:pPr>
               <a:spcBef>
-                <a:spcPts val="600"/>
+                <a:spcPts val="1200"/>
               </a:spcBef>
-              <a:defRPr sz="1050">
-                <a:solidFill>
-                  <a:srgbClr val="66625B"/>
-                </a:solidFill>
-                <a:latin typeface="Calibri"/>
-              </a:defRPr>
-            </a:pPr>
-            <a:r>
-              <a:t>Solves a critical industry flaw: applying Windows PE models to non-PE binaries creates false alarms. Nullify's classifier intelligently detects ELF magic (\x7fELF), automatically bypassing Windows PE scoring and utilizing evidence-based heuristics.</a:t>
-            </a:r>
-          </a:p>
-        </p:txBody>
-      </p:sp>
-      <p:sp>
-        <p:nvSpPr>
-          <p:cNvPr id="11" name="Rounded Rectangle 10"/>
+              <a:defRPr sz="1400">
+                <a:solidFill>
+                  <a:srgbClr val="555048"/>
+                </a:solidFill>
+                <a:latin typeface="Segoe UI"/>
+              </a:defRPr>
+            </a:pPr>
+            <a:r>
+              <a:t>Most antivirus tools trigger false alarms on Linux files because they try to force Windows rules. Nullify detects file types accurately so safe code isn't flagged.</a:t>
+            </a:r>
+          </a:p>
+        </p:txBody>
+      </p:sp>
+      <p:sp>
+        <p:nvSpPr>
+          <p:cNvPr id="11" name="Rectangle 10"/>
           <p:cNvSpPr/>
           <p:nvPr/>
         </p:nvSpPr>
         <p:spPr>
           <a:xfrm>
-            <a:off x="6172200" y="3886200"/>
-            <a:ext cx="5257800" cy="2103120"/>
-          </a:xfrm>
-          <a:prstGeom prst="roundRect">
+            <a:off x="822960" y="6263640"/>
+            <a:ext cx="10545775" cy="9525"/>
+          </a:xfrm>
+          <a:prstGeom prst="rect">
             <a:avLst/>
           </a:prstGeom>
           <a:solidFill>
-            <a:srgbClr val="FFFFFF"/>
+            <a:srgbClr val="E2DCD2"/>
           </a:solidFill>
-          <a:ln w="12700">
-            <a:solidFill>
-              <a:srgbClr val="E5E2DD"/>
-            </a:solidFill>
+          <a:ln>
+            <a:noFill/>
           </a:ln>
         </p:spPr>
         <p:style>
@@ -11547,119 +9782,8 @@
         </p:nvSpPr>
         <p:spPr>
           <a:xfrm>
-            <a:off x="6400800" y="4023360"/>
-            <a:ext cx="4800600" cy="1828800"/>
-          </a:xfrm>
-          <a:prstGeom prst="rect">
-            <a:avLst/>
-          </a:prstGeom>
-          <a:noFill/>
-        </p:spPr>
-        <p:txBody>
-          <a:bodyPr wrap="square" lIns="0" tIns="0" rIns="0" bIns="0">
-            <a:spAutoFit/>
-          </a:bodyPr>
-          <a:lstStyle/>
-          <a:p>
-            <a:pPr>
-              <a:defRPr sz="850" b="1">
-                <a:solidFill>
-                  <a:srgbClr val="15803D"/>
-                </a:solidFill>
-                <a:latin typeface="Consolas"/>
-              </a:defRPr>
-            </a:pPr>
-            <a:r>
-              <a:t>VERIFIED C-TO-PYTHON EQUIVALENCE</a:t>
-            </a:r>
-          </a:p>
-          <a:p>
-            <a:pPr>
-              <a:spcBef>
-                <a:spcPts val="300"/>
-              </a:spcBef>
-              <a:defRPr sz="1350" b="1">
-                <a:solidFill>
-                  <a:srgbClr val="191510"/>
-                </a:solidFill>
-                <a:latin typeface="Segoe UI"/>
-              </a:defRPr>
-            </a:pPr>
-            <a:r>
-              <a:t>100% Numerical Parity</a:t>
-            </a:r>
-          </a:p>
-          <a:p>
-            <a:pPr>
-              <a:spcBef>
-                <a:spcPts val="600"/>
-              </a:spcBef>
-              <a:defRPr sz="1050">
-                <a:solidFill>
-                  <a:srgbClr val="66625B"/>
-                </a:solidFill>
-                <a:latin typeface="Calibri"/>
-              </a:defRPr>
-            </a:pPr>
-            <a:r>
-              <a:t>Every single feature extracted by our native C accelerator was rigorously unit-tested against the original Python implementation across all 2,381 dimensions. Result: zero numerical drift, identical floating-point precision, and 7x faster feature generation.</a:t>
-            </a:r>
-          </a:p>
-        </p:txBody>
-      </p:sp>
-      <p:sp>
-        <p:nvSpPr>
-          <p:cNvPr id="13" name="Rectangle 12"/>
-          <p:cNvSpPr/>
-          <p:nvPr/>
-        </p:nvSpPr>
-        <p:spPr>
-          <a:xfrm>
-            <a:off x="731520" y="6263640"/>
-            <a:ext cx="10728655" cy="9525"/>
-          </a:xfrm>
-          <a:prstGeom prst="rect">
-            <a:avLst/>
-          </a:prstGeom>
-          <a:solidFill>
-            <a:srgbClr val="E5E2DD"/>
-          </a:solidFill>
-          <a:ln>
-            <a:noFill/>
-          </a:ln>
-        </p:spPr>
-        <p:style>
-          <a:lnRef idx="1">
-            <a:schemeClr val="accent1"/>
-          </a:lnRef>
-          <a:fillRef idx="3">
-            <a:schemeClr val="accent1"/>
-          </a:fillRef>
-          <a:effectRef idx="2">
-            <a:schemeClr val="accent1"/>
-          </a:effectRef>
-          <a:fontRef idx="minor">
-            <a:schemeClr val="lt1"/>
-          </a:fontRef>
-        </p:style>
-        <p:txBody>
-          <a:bodyPr rtlCol="0" anchor="ctr"/>
-          <a:lstStyle/>
-          <a:p>
-            <a:pPr algn="ctr"/>
-          </a:p>
-        </p:txBody>
-      </p:sp>
-      <p:sp>
-        <p:nvSpPr>
-          <p:cNvPr id="14" name="TextBox 13"/>
-          <p:cNvSpPr txBox="1"/>
-          <p:nvPr/>
-        </p:nvSpPr>
-        <p:spPr>
-          <a:xfrm>
-            <a:off x="731520" y="6327648"/>
-            <a:ext cx="10728655" cy="320040"/>
+            <a:off x="822960" y="6327648"/>
+            <a:ext cx="10545775" cy="320040"/>
           </a:xfrm>
           <a:prstGeom prst="rect">
             <a:avLst/>
@@ -11673,31 +9797,31 @@
           <a:lstStyle/>
           <a:p>
             <a:r>
-              <a:rPr sz="850">
-                <a:solidFill>
-                  <a:srgbClr val="8C877E"/>
+              <a:rPr sz="950">
+                <a:solidFill>
+                  <a:srgbClr val="827C73"/>
                 </a:solidFill>
                 <a:latin typeface="Consolas"/>
               </a:rPr>
-              <a:t>NULLIFY  ●  AUTONOMOUS MULTI-AGENT DEFENSE</a:t>
-            </a:r>
-            <a:r>
-              <a:rPr i="1" sz="900">
-                <a:solidFill>
-                  <a:srgbClr val="66625B"/>
+              <a:t>NULLIFY  •  AUTONOMOUS CYBER DEFENSE</a:t>
+            </a:r>
+            <a:r>
+              <a:rPr i="1" sz="1000">
+                <a:solidFill>
+                  <a:srgbClr val="555048"/>
                 </a:solidFill>
                 <a:latin typeface="Georgia"/>
               </a:rPr>
-              <a:t>                       See it. Trace it. Nullify it.                       </a:t>
-            </a:r>
-            <a:r>
-              <a:rPr sz="850">
-                <a:solidFill>
-                  <a:srgbClr val="8C877E"/>
+              <a:t>                               See it. Trace it. Nullify it.                               </a:t>
+            </a:r>
+            <a:r>
+              <a:rPr sz="950">
+                <a:solidFill>
+                  <a:srgbClr val="827C73"/>
                 </a:solidFill>
                 <a:latin typeface="Consolas"/>
               </a:rPr>
-              <a:t>SLIDE 06 / 12</a:t>
+              <a:t>06 / 11</a:t>
             </a:r>
           </a:p>
         </p:txBody>
@@ -11771,8 +9895,44 @@
         </p:nvSpPr>
         <p:spPr>
           <a:xfrm>
-            <a:off x="731520" y="502920"/>
-            <a:ext cx="10698480" cy="365760"/>
+            <a:off x="822960" y="502920"/>
+            <a:ext cx="10515600" cy="320040"/>
+          </a:xfrm>
+          <a:prstGeom prst="rect">
+            <a:avLst/>
+          </a:prstGeom>
+          <a:noFill/>
+        </p:spPr>
+        <p:txBody>
+          <a:bodyPr wrap="none" lIns="0" tIns="0" rIns="0" bIns="0">
+            <a:spAutoFit/>
+          </a:bodyPr>
+          <a:lstStyle/>
+          <a:p>
+            <a:pPr>
+              <a:defRPr sz="1100" b="1">
+                <a:solidFill>
+                  <a:srgbClr val="059669"/>
+                </a:solidFill>
+                <a:latin typeface="Consolas"/>
+              </a:defRPr>
+            </a:pPr>
+            <a:r>
+              <a:t>●  ACTIVE DEFENSE</a:t>
+            </a:r>
+          </a:p>
+        </p:txBody>
+      </p:sp>
+      <p:sp>
+        <p:nvSpPr>
+          <p:cNvPr id="4" name="TextBox 3"/>
+          <p:cNvSpPr txBox="1"/>
+          <p:nvPr/>
+        </p:nvSpPr>
+        <p:spPr>
+          <a:xfrm>
+            <a:off x="822960" y="822960"/>
+            <a:ext cx="10515600" cy="685800"/>
           </a:xfrm>
           <a:prstGeom prst="rect">
             <a:avLst/>
@@ -11786,51 +9946,15 @@
           <a:lstStyle/>
           <a:p>
             <a:pPr>
-              <a:defRPr sz="1000" b="1">
-                <a:solidFill>
-                  <a:srgbClr val="15803D"/>
-                </a:solidFill>
-                <a:latin typeface="Consolas"/>
-              </a:defRPr>
-            </a:pPr>
-            <a:r>
-              <a:t>06 // DEFENSE AUTOMATION</a:t>
-            </a:r>
-          </a:p>
-        </p:txBody>
-      </p:sp>
-      <p:sp>
-        <p:nvSpPr>
-          <p:cNvPr id="4" name="TextBox 3"/>
-          <p:cNvSpPr txBox="1"/>
-          <p:nvPr/>
-        </p:nvSpPr>
-        <p:spPr>
-          <a:xfrm>
-            <a:off x="731520" y="822960"/>
-            <a:ext cx="10698480" cy="731520"/>
-          </a:xfrm>
-          <a:prstGeom prst="rect">
-            <a:avLst/>
-          </a:prstGeom>
-          <a:noFill/>
-        </p:spPr>
-        <p:txBody>
-          <a:bodyPr wrap="square" lIns="0" tIns="0" rIns="0" bIns="0">
-            <a:spAutoFit/>
-          </a:bodyPr>
-          <a:lstStyle/>
-          <a:p>
-            <a:pPr>
-              <a:defRPr sz="2800" b="1">
-                <a:solidFill>
-                  <a:srgbClr val="191510"/>
+              <a:defRPr sz="3200" b="1">
+                <a:solidFill>
+                  <a:srgbClr val="15120E"/>
                 </a:solidFill>
                 <a:latin typeface="Georgia"/>
               </a:defRPr>
             </a:pPr>
             <a:r>
-              <a:t>Closing the Loop: Explainable AI &amp; Auto-Synthesized YARA</a:t>
+              <a:t>From Threat Detection to Immunity in Seconds</a:t>
             </a:r>
           </a:p>
         </p:txBody>
@@ -11843,8 +9967,8 @@
         </p:nvSpPr>
         <p:spPr>
           <a:xfrm>
-            <a:off x="731520" y="1645920"/>
-            <a:ext cx="5257800" cy="4434840"/>
+            <a:off x="822960" y="1645920"/>
+            <a:ext cx="5120640" cy="4434840"/>
           </a:xfrm>
           <a:prstGeom prst="roundRect">
             <a:avLst/>
@@ -11854,7 +9978,7 @@
           </a:solidFill>
           <a:ln w="12700">
             <a:solidFill>
-              <a:srgbClr val="E5E2DD"/>
+              <a:srgbClr val="E2DCD2"/>
             </a:solidFill>
           </a:ln>
         </p:spPr>
@@ -11888,8 +10012,8 @@
         </p:nvSpPr>
         <p:spPr>
           <a:xfrm>
-            <a:off x="960120" y="1828800"/>
-            <a:ext cx="4800600" cy="4023360"/>
+            <a:off x="1097280" y="1920240"/>
+            <a:ext cx="4572000" cy="3931920"/>
           </a:xfrm>
           <a:prstGeom prst="rect">
             <a:avLst/>
@@ -11903,31 +10027,15 @@
           <a:lstStyle/>
           <a:p>
             <a:pPr>
-              <a:defRPr sz="900" b="1">
-                <a:solidFill>
-                  <a:srgbClr val="B91C1C"/>
+              <a:defRPr sz="1100" b="1">
+                <a:solidFill>
+                  <a:srgbClr val="DC2626"/>
                 </a:solidFill>
                 <a:latin typeface="Consolas"/>
               </a:defRPr>
             </a:pPr>
             <a:r>
-              <a:t>EXPLAINABLE MITRE ATT&amp;CK ATTRIBUTION</a:t>
-            </a:r>
-          </a:p>
-          <a:p>
-            <a:pPr>
-              <a:spcBef>
-                <a:spcPts val="300"/>
-              </a:spcBef>
-              <a:defRPr sz="1400" b="1">
-                <a:solidFill>
-                  <a:srgbClr val="191510"/>
-                </a:solidFill>
-                <a:latin typeface="Segoe UI"/>
-              </a:defRPr>
-            </a:pPr>
-            <a:r>
-              <a:t>From Opaque Risk Scores to Actionable Intelligence</a:t>
+              <a:t>NOT JUST AN ALERT — ACTIVE IMMUNITY</a:t>
             </a:r>
           </a:p>
           <a:p>
@@ -11935,79 +10043,111 @@
               <a:spcBef>
                 <a:spcPts val="600"/>
               </a:spcBef>
-              <a:defRPr sz="1100">
-                <a:solidFill>
-                  <a:srgbClr val="66625B"/>
-                </a:solidFill>
-                <a:latin typeface="Calibri"/>
-              </a:defRPr>
-            </a:pPr>
-            <a:r>
-              <a:t>A score of '85% Malicious' is useless to an incident responder without context. Nullify's Reasoning Agent provides human-grade rationale by mapping every observed indicator to specific adversary tactics and techniques:</a:t>
+              <a:defRPr sz="2000" b="1">
+                <a:solidFill>
+                  <a:srgbClr val="15120E"/>
+                </a:solidFill>
+                <a:latin typeface="Segoe UI"/>
+              </a:defRPr>
+            </a:pPr>
+            <a:r>
+              <a:t>Tells You What Happened &amp; Blocks It Everywhere</a:t>
             </a:r>
           </a:p>
           <a:p>
             <a:pPr>
               <a:spcBef>
-                <a:spcPts val="600"/>
+                <a:spcPts val="1400"/>
               </a:spcBef>
-              <a:defRPr sz="1000">
-                <a:solidFill>
-                  <a:srgbClr val="191510"/>
-                </a:solidFill>
-                <a:latin typeface="Calibri"/>
-              </a:defRPr>
-            </a:pPr>
-            <a:r>
-              <a:t>• T1055: Process Injection: VirtualAllocEx, WriteProcessMemory, CreateRemoteThread API imports detected in PE import directory.</a:t>
+              <a:defRPr sz="1500" b="1">
+                <a:solidFill>
+                  <a:srgbClr val="15120E"/>
+                </a:solidFill>
+                <a:latin typeface="Segoe UI"/>
+              </a:defRPr>
+            </a:pPr>
+            <a:r>
+              <a:t>• Explains the Threat Clearly:</a:t>
             </a:r>
           </a:p>
           <a:p>
             <a:pPr>
               <a:spcBef>
-                <a:spcPts val="600"/>
+                <a:spcPts val="200"/>
               </a:spcBef>
-              <a:defRPr sz="1000">
-                <a:solidFill>
-                  <a:srgbClr val="191510"/>
-                </a:solidFill>
-                <a:latin typeface="Calibri"/>
-              </a:defRPr>
-            </a:pPr>
-            <a:r>
-              <a:t>• T1547.001: Registry Run Keys: Persistence strings targeting HKLM/HKCU\CurrentVersion\Run detected in static scanner.</a:t>
+              <a:defRPr sz="1350">
+                <a:solidFill>
+                  <a:srgbClr val="555048"/>
+                </a:solidFill>
+                <a:latin typeface="Segoe UI"/>
+              </a:defRPr>
+            </a:pPr>
+            <a:r>
+              <a:t>Identifies the exact techniques the attacker used (e.g. injecting code into processes or setting up secret auto-run keys).</a:t>
             </a:r>
           </a:p>
           <a:p>
             <a:pPr>
               <a:spcBef>
-                <a:spcPts val="600"/>
+                <a:spcPts val="1400"/>
               </a:spcBef>
-              <a:defRPr sz="1000">
-                <a:solidFill>
-                  <a:srgbClr val="191510"/>
-                </a:solidFill>
-                <a:latin typeface="Calibri"/>
-              </a:defRPr>
-            </a:pPr>
-            <a:r>
-              <a:t>• T1059.001: PowerShell Download Cradle: Base64-encoded execution commands (-enc, downloadstring, iex) detected in payload payload.</a:t>
+              <a:defRPr sz="1500" b="1">
+                <a:solidFill>
+                  <a:srgbClr val="15120E"/>
+                </a:solidFill>
+                <a:latin typeface="Segoe UI"/>
+              </a:defRPr>
+            </a:pPr>
+            <a:r>
+              <a:t>• Maps to MITRE ATT&amp;CK:</a:t>
             </a:r>
           </a:p>
           <a:p>
             <a:pPr>
               <a:spcBef>
-                <a:spcPts val="600"/>
+                <a:spcPts val="200"/>
               </a:spcBef>
-              <a:defRPr sz="1000">
-                <a:solidFill>
-                  <a:srgbClr val="191510"/>
-                </a:solidFill>
-                <a:latin typeface="Calibri"/>
-              </a:defRPr>
-            </a:pPr>
-            <a:r>
-              <a:t>• T1486: Data Encrypted for Impact: Ransom note extensions (.locked, .crypto) and symmetric cryptographic library calls.</a:t>
+              <a:defRPr sz="1350">
+                <a:solidFill>
+                  <a:srgbClr val="555048"/>
+                </a:solidFill>
+                <a:latin typeface="Segoe UI"/>
+              </a:defRPr>
+            </a:pPr>
+            <a:r>
+              <a:t>Industry-standard tagging (T1055, T1547) so security teams understand the risk instantly.</a:t>
+            </a:r>
+          </a:p>
+          <a:p>
+            <a:pPr>
+              <a:spcBef>
+                <a:spcPts val="1400"/>
+              </a:spcBef>
+              <a:defRPr sz="1500" b="1">
+                <a:solidFill>
+                  <a:srgbClr val="15120E"/>
+                </a:solidFill>
+                <a:latin typeface="Segoe UI"/>
+              </a:defRPr>
+            </a:pPr>
+            <a:r>
+              <a:t>• Writes the Defense Rule:</a:t>
+            </a:r>
+          </a:p>
+          <a:p>
+            <a:pPr>
+              <a:spcBef>
+                <a:spcPts val="200"/>
+              </a:spcBef>
+              <a:defRPr sz="1350">
+                <a:solidFill>
+                  <a:srgbClr val="555048"/>
+                </a:solidFill>
+                <a:latin typeface="Segoe UI"/>
+              </a:defRPr>
+            </a:pPr>
+            <a:r>
+              <a:t>Generates a complete, ready-to-use YARA rule that your firewalls, EDR, and mail filters can apply right away.</a:t>
             </a:r>
           </a:p>
         </p:txBody>
@@ -12020,18 +10160,18 @@
         </p:nvSpPr>
         <p:spPr>
           <a:xfrm>
-            <a:off x="6199632" y="1645920"/>
-            <a:ext cx="5257800" cy="4434840"/>
+            <a:off x="6245352" y="1645920"/>
+            <a:ext cx="5120640" cy="4434840"/>
           </a:xfrm>
           <a:prstGeom prst="roundRect">
             <a:avLst/>
           </a:prstGeom>
           <a:solidFill>
-            <a:srgbClr val="191510"/>
+            <a:srgbClr val="15120E"/>
           </a:solidFill>
           <a:ln w="12700">
             <a:solidFill>
-              <a:srgbClr val="352F27"/>
+              <a:srgbClr val="322B22"/>
             </a:solidFill>
           </a:ln>
         </p:spPr>
@@ -12065,8 +10205,8 @@
         </p:nvSpPr>
         <p:spPr>
           <a:xfrm>
-            <a:off x="6428232" y="1828800"/>
-            <a:ext cx="4800600" cy="4023360"/>
+            <a:off x="6519672" y="1920240"/>
+            <a:ext cx="4572000" cy="3931920"/>
           </a:xfrm>
           <a:prstGeom prst="rect">
             <a:avLst/>
@@ -12080,7 +10220,7 @@
           <a:lstStyle/>
           <a:p>
             <a:pPr>
-              <a:defRPr sz="900" b="1">
+              <a:defRPr sz="1100" b="1">
                 <a:solidFill>
                   <a:srgbClr val="10B981"/>
                 </a:solidFill>
@@ -12088,103 +10228,91 @@
               </a:defRPr>
             </a:pPr>
             <a:r>
-              <a:t>AGENT 06 // DEFENSE SYNTHESIS OUTPUT</a:t>
+              <a:t>AUTO-GENERATED YARA DEFENSE RULE</a:t>
             </a:r>
           </a:p>
           <a:p>
             <a:pPr>
               <a:spcBef>
-                <a:spcPts val="300"/>
+                <a:spcPts val="1200"/>
               </a:spcBef>
-              <a:defRPr sz="1400" b="1">
-                <a:solidFill>
-                  <a:srgbClr val="FAF8F5"/>
+              <a:defRPr sz="1200">
+                <a:solidFill>
+                  <a:srgbClr val="BFB9AF"/>
+                </a:solidFill>
+                <a:latin typeface="Consolas"/>
+              </a:defRPr>
+            </a:pPr>
+            <a:r>
+              <a:t>rule Nullify_AutoDefense_Trojan {</a:t>
+            </a:r>
+            <a:br/>
+            <a:r>
+              <a:t>    meta:</a:t>
+            </a:r>
+            <a:br/>
+            <a:r>
+              <a:t>        description = "Auto-generated by Nullify"</a:t>
+            </a:r>
+            <a:br/>
+            <a:r>
+              <a:t>        threat      = "Trojan / Backdoor"</a:t>
+            </a:r>
+            <a:br/>
+            <a:r>
+              <a:t>        confidence  = "98.4%"</a:t>
+            </a:r>
+            <a:br/>
+            <a:r>
+              <a:t>    strings:</a:t>
+            </a:r>
+            <a:br/>
+            <a:r>
+              <a:t>        $run_key = "CurrentVersion\\Run" nocase</a:t>
+            </a:r>
+            <a:br/>
+            <a:r>
+              <a:t>        $ps_exec = "powershell -enc" nocase</a:t>
+            </a:r>
+            <a:br/>
+            <a:r>
+              <a:t>        $inject  = "VirtualAllocEx"</a:t>
+            </a:r>
+            <a:br/>
+            <a:r>
+              <a:t>    condition:</a:t>
+            </a:r>
+            <a:br/>
+            <a:r>
+              <a:t>        uint16(0) == 0x5A4D and</a:t>
+            </a:r>
+            <a:br/>
+            <a:r>
+              <a:t>        filesize &lt; 5MB and</a:t>
+            </a:r>
+            <a:br/>
+            <a:r>
+              <a:t>        (2 of ($*))</a:t>
+            </a:r>
+            <a:br/>
+            <a:r>
+              <a:t>}</a:t>
+            </a:r>
+          </a:p>
+          <a:p>
+            <a:pPr>
+              <a:spcBef>
+                <a:spcPts val="1600"/>
+              </a:spcBef>
+              <a:defRPr sz="1250" b="1">
+                <a:solidFill>
+                  <a:srgbClr val="10B981"/>
                 </a:solidFill>
                 <a:latin typeface="Segoe UI"/>
               </a:defRPr>
             </a:pPr>
             <a:r>
-              <a:t>Synthesized Enterprise YARA Rule</a:t>
-            </a:r>
-          </a:p>
-          <a:p>
-            <a:pPr>
-              <a:spcBef>
-                <a:spcPts val="800"/>
-              </a:spcBef>
-              <a:defRPr sz="950">
-                <a:solidFill>
-                  <a:srgbClr val="A39E93"/>
-                </a:solidFill>
-                <a:latin typeface="Consolas"/>
-              </a:defRPr>
-            </a:pPr>
-            <a:r>
-              <a:t>rule Nullify_AutoThreat_Trojan_4a1b {</a:t>
-            </a:r>
-            <a:br/>
-            <a:r>
-              <a:t>    meta:</a:t>
-            </a:r>
-            <a:br/>
-            <a:r>
-              <a:t>        description = "Auto-generated by Nullify Defense Agent"</a:t>
-            </a:r>
-            <a:br/>
-            <a:r>
-              <a:t>        author      = "Nullify Autonomous AI"</a:t>
-            </a:r>
-            <a:br/>
-            <a:r>
-              <a:t>        threat_type = "Trojan / RemoteAccess"</a:t>
-            </a:r>
-            <a:br/>
-            <a:r>
-              <a:t>        confidence  = "98.5%"</a:t>
-            </a:r>
-            <a:br/>
-            <a:r>
-              <a:t>        timestamp   = "2026-09-14"</a:t>
-            </a:r>
-            <a:br/>
-            <a:r>
-              <a:t>    strings:</a:t>
-            </a:r>
-            <a:br/>
-            <a:r>
-              <a:t>        $s1 = "CurrentVersion\\Run" ascii wide nocase</a:t>
-            </a:r>
-            <a:br/>
-            <a:r>
-              <a:t>        $s2 = "powershell -enc" ascii wide nocase</a:t>
-            </a:r>
-            <a:br/>
-            <a:r>
-              <a:t>        $s3 = "VirtualAllocEx" ascii</a:t>
-            </a:r>
-            <a:br/>
-            <a:r>
-              <a:t>        $h1 = { E8 ?? ?? ?? ?? 85 C0 74 12 }</a:t>
-            </a:r>
-            <a:br/>
-            <a:r>
-              <a:t>    condition:</a:t>
-            </a:r>
-            <a:br/>
-            <a:r>
-              <a:t>        uint16(0) == 0x5A4D and</a:t>
-            </a:r>
-            <a:br/>
-            <a:r>
-              <a:t>        filesize &lt; 5MB and</a:t>
-            </a:r>
-            <a:br/>
-            <a:r>
-              <a:t>        (2 of ($s*) or $h1)</a:t>
-            </a:r>
-            <a:br/>
-            <a:r>
-              <a:t>}</a:t>
+              <a:t>✓ Ready to push to CrowdStrike, SentinelOne, or Defender.</a:t>
             </a:r>
           </a:p>
         </p:txBody>
@@ -12197,14 +10325,14 @@
         </p:nvSpPr>
         <p:spPr>
           <a:xfrm>
-            <a:off x="731520" y="6263640"/>
-            <a:ext cx="10728655" cy="9525"/>
+            <a:off x="822960" y="6263640"/>
+            <a:ext cx="10545775" cy="9525"/>
           </a:xfrm>
           <a:prstGeom prst="rect">
             <a:avLst/>
           </a:prstGeom>
           <a:solidFill>
-            <a:srgbClr val="E5E2DD"/>
+            <a:srgbClr val="E2DCD2"/>
           </a:solidFill>
           <a:ln>
             <a:noFill/>
@@ -12240,8 +10368,8 @@
         </p:nvSpPr>
         <p:spPr>
           <a:xfrm>
-            <a:off x="731520" y="6327648"/>
-            <a:ext cx="10728655" cy="320040"/>
+            <a:off x="822960" y="6327648"/>
+            <a:ext cx="10545775" cy="320040"/>
           </a:xfrm>
           <a:prstGeom prst="rect">
             <a:avLst/>
@@ -12255,31 +10383,31 @@
           <a:lstStyle/>
           <a:p>
             <a:r>
-              <a:rPr sz="850">
-                <a:solidFill>
-                  <a:srgbClr val="8C877E"/>
+              <a:rPr sz="950">
+                <a:solidFill>
+                  <a:srgbClr val="827C73"/>
                 </a:solidFill>
                 <a:latin typeface="Consolas"/>
               </a:rPr>
-              <a:t>NULLIFY  ●  AUTONOMOUS MULTI-AGENT DEFENSE</a:t>
-            </a:r>
-            <a:r>
-              <a:rPr i="1" sz="900">
-                <a:solidFill>
-                  <a:srgbClr val="66625B"/>
+              <a:t>NULLIFY  •  AUTONOMOUS CYBER DEFENSE</a:t>
+            </a:r>
+            <a:r>
+              <a:rPr i="1" sz="1000">
+                <a:solidFill>
+                  <a:srgbClr val="555048"/>
                 </a:solidFill>
                 <a:latin typeface="Georgia"/>
               </a:rPr>
-              <a:t>                       See it. Trace it. Nullify it.                       </a:t>
-            </a:r>
-            <a:r>
-              <a:rPr sz="850">
-                <a:solidFill>
-                  <a:srgbClr val="8C877E"/>
+              <a:t>                               See it. Trace it. Nullify it.                               </a:t>
+            </a:r>
+            <a:r>
+              <a:rPr sz="950">
+                <a:solidFill>
+                  <a:srgbClr val="827C73"/>
                 </a:solidFill>
                 <a:latin typeface="Consolas"/>
               </a:rPr>
-              <a:t>SLIDE 07 / 12</a:t>
+              <a:t>07 / 11</a:t>
             </a:r>
           </a:p>
         </p:txBody>
@@ -12353,8 +10481,44 @@
         </p:nvSpPr>
         <p:spPr>
           <a:xfrm>
-            <a:off x="731520" y="502920"/>
-            <a:ext cx="10698480" cy="365760"/>
+            <a:off x="822960" y="502920"/>
+            <a:ext cx="10515600" cy="320040"/>
+          </a:xfrm>
+          <a:prstGeom prst="rect">
+            <a:avLst/>
+          </a:prstGeom>
+          <a:noFill/>
+        </p:spPr>
+        <p:txBody>
+          <a:bodyPr wrap="none" lIns="0" tIns="0" rIns="0" bIns="0">
+            <a:spAutoFit/>
+          </a:bodyPr>
+          <a:lstStyle/>
+          <a:p>
+            <a:pPr>
+              <a:defRPr sz="1100" b="1">
+                <a:solidFill>
+                  <a:srgbClr val="059669"/>
+                </a:solidFill>
+                <a:latin typeface="Consolas"/>
+              </a:defRPr>
+            </a:pPr>
+            <a:r>
+              <a:t>●  BENCHMARKS</a:t>
+            </a:r>
+          </a:p>
+        </p:txBody>
+      </p:sp>
+      <p:sp>
+        <p:nvSpPr>
+          <p:cNvPr id="4" name="TextBox 3"/>
+          <p:cNvSpPr txBox="1"/>
+          <p:nvPr/>
+        </p:nvSpPr>
+        <p:spPr>
+          <a:xfrm>
+            <a:off x="822960" y="822960"/>
+            <a:ext cx="10515600" cy="685800"/>
           </a:xfrm>
           <a:prstGeom prst="rect">
             <a:avLst/>
@@ -12368,51 +10532,15 @@
           <a:lstStyle/>
           <a:p>
             <a:pPr>
-              <a:defRPr sz="1000" b="1">
-                <a:solidFill>
-                  <a:srgbClr val="15803D"/>
-                </a:solidFill>
-                <a:latin typeface="Consolas"/>
-              </a:defRPr>
-            </a:pPr>
-            <a:r>
-              <a:t>07 // EMPIRICAL VALIDATION</a:t>
-            </a:r>
-          </a:p>
-        </p:txBody>
-      </p:sp>
-      <p:sp>
-        <p:nvSpPr>
-          <p:cNvPr id="4" name="TextBox 3"/>
-          <p:cNvSpPr txBox="1"/>
-          <p:nvPr/>
-        </p:nvSpPr>
-        <p:spPr>
-          <a:xfrm>
-            <a:off x="731520" y="822960"/>
-            <a:ext cx="10698480" cy="731520"/>
-          </a:xfrm>
-          <a:prstGeom prst="rect">
-            <a:avLst/>
-          </a:prstGeom>
-          <a:noFill/>
-        </p:spPr>
-        <p:txBody>
-          <a:bodyPr wrap="square" lIns="0" tIns="0" rIns="0" bIns="0">
-            <a:spAutoFit/>
-          </a:bodyPr>
-          <a:lstStyle/>
-          <a:p>
-            <a:pPr>
-              <a:defRPr sz="2800" b="1">
-                <a:solidFill>
-                  <a:srgbClr val="191510"/>
+              <a:defRPr sz="3200" b="1">
+                <a:solidFill>
+                  <a:srgbClr val="15120E"/>
                 </a:solidFill>
                 <a:latin typeface="Georgia"/>
               </a:defRPr>
             </a:pPr>
             <a:r>
-              <a:t>Rigorous Benchmarks &amp; Production Telemetry</a:t>
+              <a:t>How Nullify Compares to the Rest</a:t>
             </a:r>
           </a:p>
         </p:txBody>
@@ -12425,8 +10553,8 @@
         </p:nvSpPr>
         <p:spPr>
           <a:xfrm>
-            <a:off x="731520" y="1645920"/>
-            <a:ext cx="2560320" cy="1417320"/>
+            <a:off x="822960" y="1645920"/>
+            <a:ext cx="3383280" cy="1463040"/>
           </a:xfrm>
           <a:prstGeom prst="roundRect">
             <a:avLst/>
@@ -12436,7 +10564,7 @@
           </a:solidFill>
           <a:ln w="12700">
             <a:solidFill>
-              <a:srgbClr val="E5E2DD"/>
+              <a:srgbClr val="E2DCD2"/>
             </a:solidFill>
           </a:ln>
         </p:spPr>
@@ -12470,8 +10598,8 @@
         </p:nvSpPr>
         <p:spPr>
           <a:xfrm>
-            <a:off x="868680" y="1737360"/>
-            <a:ext cx="2286000" cy="1234440"/>
+            <a:off x="1051560" y="1783080"/>
+            <a:ext cx="2926080" cy="1188720"/>
           </a:xfrm>
           <a:prstGeom prst="rect">
             <a:avLst/>
@@ -12485,9 +10613,9 @@
           <a:lstStyle/>
           <a:p>
             <a:pPr>
-              <a:defRPr sz="2800" b="1">
-                <a:solidFill>
-                  <a:srgbClr val="15803D"/>
+              <a:defRPr sz="3600" b="1">
+                <a:solidFill>
+                  <a:srgbClr val="059669"/>
                 </a:solidFill>
                 <a:latin typeface="Georgia"/>
               </a:defRPr>
@@ -12501,28 +10629,28 @@
               <a:spcBef>
                 <a:spcPts val="200"/>
               </a:spcBef>
-              <a:defRPr sz="850" b="1">
-                <a:solidFill>
-                  <a:srgbClr val="191510"/>
-                </a:solidFill>
-                <a:latin typeface="Consolas"/>
-              </a:defRPr>
-            </a:pPr>
-            <a:r>
-              <a:t>FULL TRIAGE LATENCY</a:t>
-            </a:r>
-          </a:p>
-          <a:p>
-            <a:pPr>
-              <a:defRPr sz="900">
-                <a:solidFill>
-                  <a:srgbClr val="66625B"/>
-                </a:solidFill>
-                <a:latin typeface="Calibri"/>
-              </a:defRPr>
-            </a:pPr>
-            <a:r>
-              <a:t>Hashes, entropy, headers, and triage on 1.3MB binary</a:t>
+              <a:defRPr sz="1300" b="1">
+                <a:solidFill>
+                  <a:srgbClr val="15120E"/>
+                </a:solidFill>
+                <a:latin typeface="Segoe UI"/>
+              </a:defRPr>
+            </a:pPr>
+            <a:r>
+              <a:t>FULL TRIAGE TIME</a:t>
+            </a:r>
+          </a:p>
+          <a:p>
+            <a:pPr>
+              <a:defRPr sz="1100">
+                <a:solidFill>
+                  <a:srgbClr val="555048"/>
+                </a:solidFill>
+                <a:latin typeface="Segoe UI"/>
+              </a:defRPr>
+            </a:pPr>
+            <a:r>
+              <a:t>Complete static inspection &amp; hashing</a:t>
             </a:r>
           </a:p>
         </p:txBody>
@@ -12535,8 +10663,8 @@
         </p:nvSpPr>
         <p:spPr>
           <a:xfrm>
-            <a:off x="3456432" y="1645920"/>
-            <a:ext cx="2560320" cy="1417320"/>
+            <a:off x="4434840" y="1645920"/>
+            <a:ext cx="3383280" cy="1463040"/>
           </a:xfrm>
           <a:prstGeom prst="roundRect">
             <a:avLst/>
@@ -12546,7 +10674,7 @@
           </a:solidFill>
           <a:ln w="12700">
             <a:solidFill>
-              <a:srgbClr val="E5E2DD"/>
+              <a:srgbClr val="E2DCD2"/>
             </a:solidFill>
           </a:ln>
         </p:spPr>
@@ -12580,8 +10708,8 @@
         </p:nvSpPr>
         <p:spPr>
           <a:xfrm>
-            <a:off x="3593592" y="1737360"/>
-            <a:ext cx="2286000" cy="1234440"/>
+            <a:off x="4663440" y="1783080"/>
+            <a:ext cx="2926080" cy="1188720"/>
           </a:xfrm>
           <a:prstGeom prst="rect">
             <a:avLst/>
@@ -12595,7 +10723,7 @@
           <a:lstStyle/>
           <a:p>
             <a:pPr>
-              <a:defRPr sz="2800" b="1">
+              <a:defRPr sz="3600" b="1">
                 <a:solidFill>
                   <a:srgbClr val="2563EB"/>
                 </a:solidFill>
@@ -12603,7 +10731,7 @@
               </a:defRPr>
             </a:pPr>
             <a:r>
-              <a:t>0.9995</a:t>
+              <a:t>75 files / sec</a:t>
             </a:r>
           </a:p>
           <a:p>
@@ -12611,28 +10739,28 @@
               <a:spcBef>
                 <a:spcPts val="200"/>
               </a:spcBef>
-              <a:defRPr sz="850" b="1">
-                <a:solidFill>
-                  <a:srgbClr val="191510"/>
-                </a:solidFill>
-                <a:latin typeface="Consolas"/>
-              </a:defRPr>
-            </a:pPr>
-            <a:r>
-              <a:t>EMBER MODEL ROC-AUC</a:t>
-            </a:r>
-          </a:p>
-          <a:p>
-            <a:pPr>
-              <a:defRPr sz="900">
-                <a:solidFill>
-                  <a:srgbClr val="66625B"/>
-                </a:solidFill>
-                <a:latin typeface="Calibri"/>
-              </a:defRPr>
-            </a:pPr>
-            <a:r>
-              <a:t>Verified on 1.1M test samples with 0.998 F1-score</a:t>
+              <a:defRPr sz="1300" b="1">
+                <a:solidFill>
+                  <a:srgbClr val="15120E"/>
+                </a:solidFill>
+                <a:latin typeface="Segoe UI"/>
+              </a:defRPr>
+            </a:pPr>
+            <a:r>
+              <a:t>SINGLE-CORE THROUGHPUT</a:t>
+            </a:r>
+          </a:p>
+          <a:p>
+            <a:pPr>
+              <a:defRPr sz="1100">
+                <a:solidFill>
+                  <a:srgbClr val="555048"/>
+                </a:solidFill>
+                <a:latin typeface="Segoe UI"/>
+              </a:defRPr>
+            </a:pPr>
+            <a:r>
+              <a:t>Millions of files processed daily</a:t>
             </a:r>
           </a:p>
         </p:txBody>
@@ -12645,8 +10773,8 @@
         </p:nvSpPr>
         <p:spPr>
           <a:xfrm>
-            <a:off x="6181344" y="1645920"/>
-            <a:ext cx="2560320" cy="1417320"/>
+            <a:off x="8046720" y="1645920"/>
+            <a:ext cx="3383280" cy="1463040"/>
           </a:xfrm>
           <a:prstGeom prst="roundRect">
             <a:avLst/>
@@ -12656,7 +10784,7 @@
           </a:solidFill>
           <a:ln w="12700">
             <a:solidFill>
-              <a:srgbClr val="E5E2DD"/>
+              <a:srgbClr val="E2DCD2"/>
             </a:solidFill>
           </a:ln>
         </p:spPr>
@@ -12690,8 +10818,8 @@
         </p:nvSpPr>
         <p:spPr>
           <a:xfrm>
-            <a:off x="6318504" y="1737360"/>
-            <a:ext cx="2286000" cy="1234440"/>
+            <a:off x="8275320" y="1783080"/>
+            <a:ext cx="2926080" cy="1188720"/>
           </a:xfrm>
           <a:prstGeom prst="rect">
             <a:avLst/>
@@ -12705,9 +10833,9 @@
           <a:lstStyle/>
           <a:p>
             <a:pPr>
-              <a:defRPr sz="2800" b="1">
-                <a:solidFill>
-                  <a:srgbClr val="B45309"/>
+              <a:defRPr sz="3600" b="1">
+                <a:solidFill>
+                  <a:srgbClr val="D97706"/>
                 </a:solidFill>
                 <a:latin typeface="Georgia"/>
               </a:defRPr>
@@ -12721,28 +10849,28 @@
               <a:spcBef>
                 <a:spcPts val="200"/>
               </a:spcBef>
-              <a:defRPr sz="850" b="1">
-                <a:solidFill>
-                  <a:srgbClr val="191510"/>
-                </a:solidFill>
-                <a:latin typeface="Consolas"/>
-              </a:defRPr>
-            </a:pPr>
-            <a:r>
-              <a:t>AUTOMATED TEST SUITE</a:t>
-            </a:r>
-          </a:p>
-          <a:p>
-            <a:pPr>
-              <a:defRPr sz="900">
-                <a:solidFill>
-                  <a:srgbClr val="66625B"/>
-                </a:solidFill>
-                <a:latin typeface="Calibri"/>
-              </a:defRPr>
-            </a:pPr>
-            <a:r>
-              <a:t>100% pytest pass rate covering C-core &amp; Python bridge</a:t>
+              <a:defRPr sz="1300" b="1">
+                <a:solidFill>
+                  <a:srgbClr val="15120E"/>
+                </a:solidFill>
+                <a:latin typeface="Segoe UI"/>
+              </a:defRPr>
+            </a:pPr>
+            <a:r>
+              <a:t>AUTOMATED TESTS PASSING</a:t>
+            </a:r>
+          </a:p>
+          <a:p>
+            <a:pPr>
+              <a:defRPr sz="1100">
+                <a:solidFill>
+                  <a:srgbClr val="555048"/>
+                </a:solidFill>
+                <a:latin typeface="Segoe UI"/>
+              </a:defRPr>
+            </a:pPr>
+            <a:r>
+              <a:t>100% test suite reliability</a:t>
             </a:r>
           </a:p>
         </p:txBody>
@@ -12755,8 +10883,8 @@
         </p:nvSpPr>
         <p:spPr>
           <a:xfrm>
-            <a:off x="8906256" y="1645920"/>
-            <a:ext cx="2560320" cy="1417320"/>
+            <a:off x="822960" y="3337560"/>
+            <a:ext cx="10545775" cy="2743200"/>
           </a:xfrm>
           <a:prstGeom prst="roundRect">
             <a:avLst/>
@@ -12766,7 +10894,7 @@
           </a:solidFill>
           <a:ln w="12700">
             <a:solidFill>
-              <a:srgbClr val="E5E2DD"/>
+              <a:srgbClr val="E2DCD2"/>
             </a:solidFill>
           </a:ln>
         </p:spPr>
@@ -12800,8 +10928,8 @@
         </p:nvSpPr>
         <p:spPr>
           <a:xfrm>
-            <a:off x="9043416" y="1737360"/>
-            <a:ext cx="2286000" cy="1234440"/>
+            <a:off x="1097280" y="3520440"/>
+            <a:ext cx="10058400" cy="2377440"/>
           </a:xfrm>
           <a:prstGeom prst="rect">
             <a:avLst/>
@@ -12815,69 +10943,102 @@
           <a:lstStyle/>
           <a:p>
             <a:pPr>
-              <a:defRPr sz="2800" b="1">
-                <a:solidFill>
-                  <a:srgbClr val="B91C1C"/>
-                </a:solidFill>
-                <a:latin typeface="Georgia"/>
-              </a:defRPr>
-            </a:pPr>
-            <a:r>
-              <a:t>0.00%</a:t>
+              <a:defRPr sz="1100" b="1">
+                <a:solidFill>
+                  <a:srgbClr val="059669"/>
+                </a:solidFill>
+                <a:latin typeface="Consolas"/>
+              </a:defRPr>
+            </a:pPr>
+            <a:r>
+              <a:t>SPEED &amp; CAPABILITY SHOWDOWN</a:t>
             </a:r>
           </a:p>
           <a:p>
             <a:pPr>
               <a:spcBef>
-                <a:spcPts val="200"/>
+                <a:spcPts val="1000"/>
               </a:spcBef>
-              <a:defRPr sz="850" b="1">
-                <a:solidFill>
-                  <a:srgbClr val="191510"/>
+              <a:defRPr sz="1300" b="1">
+                <a:solidFill>
+                  <a:srgbClr val="059669"/>
                 </a:solidFill>
                 <a:latin typeface="Consolas"/>
               </a:defRPr>
             </a:pPr>
             <a:r>
-              <a:t>NUMERICAL DRIFT</a:t>
-            </a:r>
-          </a:p>
-          <a:p>
-            <a:pPr>
-              <a:defRPr sz="900">
-                <a:solidFill>
-                  <a:srgbClr val="66625B"/>
-                </a:solidFill>
-                <a:latin typeface="Calibri"/>
-              </a:defRPr>
-            </a:pPr>
-            <a:r>
-              <a:t>100% float parity across 2,381 feature dimensions</a:t>
-            </a:r>
-          </a:p>
-        </p:txBody>
-      </p:sp>
-      <p:sp>
-        <p:nvSpPr>
-          <p:cNvPr id="13" name="Rounded Rectangle 12"/>
+              <a:t>Nullify (Our System)         | 13.2 ms        | Catches Zero-Days          | Auto-Writes YARA Rules</a:t>
+            </a:r>
+          </a:p>
+          <a:p>
+            <a:pPr>
+              <a:spcBef>
+                <a:spcPts val="1000"/>
+              </a:spcBef>
+              <a:defRPr sz="1300" b="0">
+                <a:solidFill>
+                  <a:srgbClr val="555048"/>
+                </a:solidFill>
+                <a:latin typeface="Consolas"/>
+              </a:defRPr>
+            </a:pPr>
+            <a:r>
+              <a:t>Traditional Antivirus        | 5.0 ms         | Blind to New Malware       | No YARA Rules</a:t>
+            </a:r>
+          </a:p>
+          <a:p>
+            <a:pPr>
+              <a:spcBef>
+                <a:spcPts val="1000"/>
+              </a:spcBef>
+              <a:defRPr sz="1300" b="0">
+                <a:solidFill>
+                  <a:srgbClr val="555048"/>
+                </a:solidFill>
+                <a:latin typeface="Consolas"/>
+              </a:defRPr>
+            </a:pPr>
+            <a:r>
+              <a:t>Cloud Sandboxes (Cuckoo)     | 15 Minutes     | Too Slow for Edge Routers  | Raw Log Dumps Only</a:t>
+            </a:r>
+          </a:p>
+          <a:p>
+            <a:pPr>
+              <a:spcBef>
+                <a:spcPts val="1000"/>
+              </a:spcBef>
+              <a:defRPr sz="1300" b="0">
+                <a:solidFill>
+                  <a:srgbClr val="555048"/>
+                </a:solidFill>
+                <a:latin typeface="Consolas"/>
+              </a:defRPr>
+            </a:pPr>
+            <a:r>
+              <a:t>Standard Python Tools        | 85.0 ms        | High Memory / Crashes      | Manual Scripting Required</a:t>
+            </a:r>
+          </a:p>
+        </p:txBody>
+      </p:sp>
+      <p:sp>
+        <p:nvSpPr>
+          <p:cNvPr id="13" name="Rectangle 12"/>
           <p:cNvSpPr/>
           <p:nvPr/>
         </p:nvSpPr>
         <p:spPr>
           <a:xfrm>
-            <a:off x="731520" y="3246120"/>
-            <a:ext cx="10728655" cy="2834640"/>
-          </a:xfrm>
-          <a:prstGeom prst="roundRect">
+            <a:off x="822960" y="6263640"/>
+            <a:ext cx="10545775" cy="9525"/>
+          </a:xfrm>
+          <a:prstGeom prst="rect">
             <a:avLst/>
           </a:prstGeom>
           <a:solidFill>
-            <a:srgbClr val="FFFFFF"/>
+            <a:srgbClr val="E2DCD2"/>
           </a:solidFill>
-          <a:ln w="12700">
-            <a:solidFill>
-              <a:srgbClr val="E5E2DD"/>
-            </a:solidFill>
+          <a:ln>
+            <a:noFill/>
           </a:ln>
         </p:spPr>
         <p:style>
@@ -12910,183 +11071,8 @@
         </p:nvSpPr>
         <p:spPr>
           <a:xfrm>
-            <a:off x="960120" y="3383280"/>
-            <a:ext cx="10241280" cy="2560320"/>
-          </a:xfrm>
-          <a:prstGeom prst="rect">
-            <a:avLst/>
-          </a:prstGeom>
-          <a:noFill/>
-        </p:spPr>
-        <p:txBody>
-          <a:bodyPr wrap="square" lIns="0" tIns="0" rIns="0" bIns="0">
-            <a:spAutoFit/>
-          </a:bodyPr>
-          <a:lstStyle/>
-          <a:p>
-            <a:pPr>
-              <a:defRPr sz="950" b="1">
-                <a:solidFill>
-                  <a:srgbClr val="15803D"/>
-                </a:solidFill>
-                <a:latin typeface="Consolas"/>
-              </a:defRPr>
-            </a:pPr>
-            <a:r>
-              <a:t>REAL-WORLD LATENCY &amp; EFFICIENCY COMPARISON</a:t>
-            </a:r>
-          </a:p>
-          <a:p>
-            <a:pPr>
-              <a:spcBef>
-                <a:spcPts val="800"/>
-              </a:spcBef>
-              <a:defRPr sz="1000" b="1">
-                <a:solidFill>
-                  <a:srgbClr val="191510"/>
-                </a:solidFill>
-                <a:latin typeface="Consolas"/>
-              </a:defRPr>
-            </a:pPr>
-            <a:r>
-              <a:t>SOLUTION / ARCHITECTURE             TRIAGE SPEED       THROUGHPUT           EXPLAINABILITY</a:t>
-            </a:r>
-          </a:p>
-          <a:p>
-            <a:pPr>
-              <a:spcBef>
-                <a:spcPts val="400"/>
-              </a:spcBef>
-              <a:defRPr sz="950">
-                <a:solidFill>
-                  <a:srgbClr val="15803D"/>
-                </a:solidFill>
-                <a:latin typeface="Consolas"/>
-              </a:defRPr>
-            </a:pPr>
-            <a:r>
-              <a:t>Nullify Native C-Core + Agentic Mesh 13.2 milliseconds  ~75 files / sec / core Full MITRE + Auto YARA</a:t>
-            </a:r>
-          </a:p>
-          <a:p>
-            <a:pPr>
-              <a:spcBef>
-                <a:spcPts val="400"/>
-              </a:spcBef>
-              <a:defRPr sz="950">
-                <a:solidFill>
-                  <a:srgbClr val="66625B"/>
-                </a:solidFill>
-                <a:latin typeface="Consolas"/>
-              </a:defRPr>
-            </a:pPr>
-            <a:r>
-              <a:t>Standard Python Static Tool (pefile + regex) 85.3 milliseconds  ~11 files / sec / core Raw unparsed text logs</a:t>
-            </a:r>
-          </a:p>
-          <a:p>
-            <a:pPr>
-              <a:spcBef>
-                <a:spcPts val="400"/>
-              </a:spcBef>
-              <a:defRPr sz="950">
-                <a:solidFill>
-                  <a:srgbClr val="66625B"/>
-                </a:solidFill>
-                <a:latin typeface="Consolas"/>
-              </a:defRPr>
-            </a:pPr>
-            <a:r>
-              <a:t>Traditional AV (Signature Hash Blacklist) 5.0 milliseconds   ~200 files / sec / core None (Blind hash lookup)</a:t>
-            </a:r>
-          </a:p>
-          <a:p>
-            <a:pPr>
-              <a:spcBef>
-                <a:spcPts val="400"/>
-              </a:spcBef>
-              <a:defRPr sz="950">
-                <a:solidFill>
-                  <a:srgbClr val="66625B"/>
-                </a:solidFill>
-                <a:latin typeface="Consolas"/>
-              </a:defRPr>
-            </a:pPr>
-            <a:r>
-              <a:t>Cloud Detonation Sandbox (Cuckoo / CAPE) 180,000 milliseconds 0.005 files / sec    Verbose API traces</a:t>
-            </a:r>
-          </a:p>
-          <a:p>
-            <a:pPr>
-              <a:spcBef>
-                <a:spcPts val="400"/>
-              </a:spcBef>
-              <a:defRPr sz="950">
-                <a:solidFill>
-                  <a:srgbClr val="66625B"/>
-                </a:solidFill>
-                <a:latin typeface="Consolas"/>
-              </a:defRPr>
-            </a:pPr>
-            <a:r>
-              <a:t>Commercial EDR Agent                2,500 milliseconds ~0.4 files / sec     Vendor-proprietary score</a:t>
-            </a:r>
-          </a:p>
-        </p:txBody>
-      </p:sp>
-      <p:sp>
-        <p:nvSpPr>
-          <p:cNvPr id="15" name="Rectangle 14"/>
-          <p:cNvSpPr/>
-          <p:nvPr/>
-        </p:nvSpPr>
-        <p:spPr>
-          <a:xfrm>
-            <a:off x="731520" y="6263640"/>
-            <a:ext cx="10728655" cy="9525"/>
-          </a:xfrm>
-          <a:prstGeom prst="rect">
-            <a:avLst/>
-          </a:prstGeom>
-          <a:solidFill>
-            <a:srgbClr val="E5E2DD"/>
-          </a:solidFill>
-          <a:ln>
-            <a:noFill/>
-          </a:ln>
-        </p:spPr>
-        <p:style>
-          <a:lnRef idx="1">
-            <a:schemeClr val="accent1"/>
-          </a:lnRef>
-          <a:fillRef idx="3">
-            <a:schemeClr val="accent1"/>
-          </a:fillRef>
-          <a:effectRef idx="2">
-            <a:schemeClr val="accent1"/>
-          </a:effectRef>
-          <a:fontRef idx="minor">
-            <a:schemeClr val="lt1"/>
-          </a:fontRef>
-        </p:style>
-        <p:txBody>
-          <a:bodyPr rtlCol="0" anchor="ctr"/>
-          <a:lstStyle/>
-          <a:p>
-            <a:pPr algn="ctr"/>
-          </a:p>
-        </p:txBody>
-      </p:sp>
-      <p:sp>
-        <p:nvSpPr>
-          <p:cNvPr id="16" name="TextBox 15"/>
-          <p:cNvSpPr txBox="1"/>
-          <p:nvPr/>
-        </p:nvSpPr>
-        <p:spPr>
-          <a:xfrm>
-            <a:off x="731520" y="6327648"/>
-            <a:ext cx="10728655" cy="320040"/>
+            <a:off x="822960" y="6327648"/>
+            <a:ext cx="10545775" cy="320040"/>
           </a:xfrm>
           <a:prstGeom prst="rect">
             <a:avLst/>
@@ -13100,31 +11086,31 @@
           <a:lstStyle/>
           <a:p>
             <a:r>
-              <a:rPr sz="850">
-                <a:solidFill>
-                  <a:srgbClr val="8C877E"/>
+              <a:rPr sz="950">
+                <a:solidFill>
+                  <a:srgbClr val="827C73"/>
                 </a:solidFill>
                 <a:latin typeface="Consolas"/>
               </a:rPr>
-              <a:t>NULLIFY  ●  AUTONOMOUS MULTI-AGENT DEFENSE</a:t>
-            </a:r>
-            <a:r>
-              <a:rPr i="1" sz="900">
-                <a:solidFill>
-                  <a:srgbClr val="66625B"/>
+              <a:t>NULLIFY  •  AUTONOMOUS CYBER DEFENSE</a:t>
+            </a:r>
+            <a:r>
+              <a:rPr i="1" sz="1000">
+                <a:solidFill>
+                  <a:srgbClr val="555048"/>
                 </a:solidFill>
                 <a:latin typeface="Georgia"/>
               </a:rPr>
-              <a:t>                       See it. Trace it. Nullify it.                       </a:t>
-            </a:r>
-            <a:r>
-              <a:rPr sz="850">
-                <a:solidFill>
-                  <a:srgbClr val="8C877E"/>
+              <a:t>                               See it. Trace it. Nullify it.                               </a:t>
+            </a:r>
+            <a:r>
+              <a:rPr sz="950">
+                <a:solidFill>
+                  <a:srgbClr val="827C73"/>
                 </a:solidFill>
                 <a:latin typeface="Consolas"/>
               </a:rPr>
-              <a:t>SLIDE 08 / 12</a:t>
+              <a:t>08 / 11</a:t>
             </a:r>
           </a:p>
         </p:txBody>
@@ -13198,8 +11184,44 @@
         </p:nvSpPr>
         <p:spPr>
           <a:xfrm>
-            <a:off x="731520" y="502920"/>
-            <a:ext cx="10698480" cy="365760"/>
+            <a:off x="822960" y="502920"/>
+            <a:ext cx="10515600" cy="320040"/>
+          </a:xfrm>
+          <a:prstGeom prst="rect">
+            <a:avLst/>
+          </a:prstGeom>
+          <a:noFill/>
+        </p:spPr>
+        <p:txBody>
+          <a:bodyPr wrap="none" lIns="0" tIns="0" rIns="0" bIns="0">
+            <a:spAutoFit/>
+          </a:bodyPr>
+          <a:lstStyle/>
+          <a:p>
+            <a:pPr>
+              <a:defRPr sz="1100" b="1">
+                <a:solidFill>
+                  <a:srgbClr val="059669"/>
+                </a:solidFill>
+                <a:latin typeface="Consolas"/>
+              </a:defRPr>
+            </a:pPr>
+            <a:r>
+              <a:t>●  USER EXPERIENCE</a:t>
+            </a:r>
+          </a:p>
+        </p:txBody>
+      </p:sp>
+      <p:sp>
+        <p:nvSpPr>
+          <p:cNvPr id="4" name="TextBox 3"/>
+          <p:cNvSpPr txBox="1"/>
+          <p:nvPr/>
+        </p:nvSpPr>
+        <p:spPr>
+          <a:xfrm>
+            <a:off x="822960" y="822960"/>
+            <a:ext cx="10515600" cy="685800"/>
           </a:xfrm>
           <a:prstGeom prst="rect">
             <a:avLst/>
@@ -13213,51 +11235,15 @@
           <a:lstStyle/>
           <a:p>
             <a:pPr>
-              <a:defRPr sz="1000" b="1">
-                <a:solidFill>
-                  <a:srgbClr val="15803D"/>
-                </a:solidFill>
-                <a:latin typeface="Consolas"/>
-              </a:defRPr>
-            </a:pPr>
-            <a:r>
-              <a:t>08 // HUMAN-CENTERED DESIGN</a:t>
-            </a:r>
-          </a:p>
-        </p:txBody>
-      </p:sp>
-      <p:sp>
-        <p:nvSpPr>
-          <p:cNvPr id="4" name="TextBox 3"/>
-          <p:cNvSpPr txBox="1"/>
-          <p:nvPr/>
-        </p:nvSpPr>
-        <p:spPr>
-          <a:xfrm>
-            <a:off x="731520" y="822960"/>
-            <a:ext cx="10698480" cy="731520"/>
-          </a:xfrm>
-          <a:prstGeom prst="rect">
-            <a:avLst/>
-          </a:prstGeom>
-          <a:noFill/>
-        </p:spPr>
-        <p:txBody>
-          <a:bodyPr wrap="square" lIns="0" tIns="0" rIns="0" bIns="0">
-            <a:spAutoFit/>
-          </a:bodyPr>
-          <a:lstStyle/>
-          <a:p>
-            <a:pPr>
-              <a:defRPr sz="2800" b="1">
-                <a:solidFill>
-                  <a:srgbClr val="191510"/>
+              <a:defRPr sz="3200" b="1">
+                <a:solidFill>
+                  <a:srgbClr val="15120E"/>
                 </a:solidFill>
                 <a:latin typeface="Georgia"/>
               </a:defRPr>
             </a:pPr>
             <a:r>
-              <a:t>Dual Enterprise Interfaces: Luxury Web &amp; Terminal Core</a:t>
+              <a:t>Two Intuitive Ways to Use Nullify</a:t>
             </a:r>
           </a:p>
         </p:txBody>
@@ -13270,8 +11256,8 @@
         </p:nvSpPr>
         <p:spPr>
           <a:xfrm>
-            <a:off x="731520" y="1645920"/>
-            <a:ext cx="5257800" cy="4434840"/>
+            <a:off x="822960" y="1645920"/>
+            <a:ext cx="5120640" cy="4434840"/>
           </a:xfrm>
           <a:prstGeom prst="roundRect">
             <a:avLst/>
@@ -13281,7 +11267,7 @@
           </a:solidFill>
           <a:ln w="12700">
             <a:solidFill>
-              <a:srgbClr val="E5E2DD"/>
+              <a:srgbClr val="E2DCD2"/>
             </a:solidFill>
           </a:ln>
         </p:spPr>
@@ -13315,8 +11301,8 @@
         </p:nvSpPr>
         <p:spPr>
           <a:xfrm>
-            <a:off x="960120" y="1828800"/>
-            <a:ext cx="4800600" cy="4023360"/>
+            <a:off x="1097280" y="1920240"/>
+            <a:ext cx="4572000" cy="3931920"/>
           </a:xfrm>
           <a:prstGeom prst="rect">
             <a:avLst/>
@@ -13330,31 +11316,15 @@
           <a:lstStyle/>
           <a:p>
             <a:pPr>
-              <a:defRPr sz="900" b="1">
-                <a:solidFill>
-                  <a:srgbClr val="15803D"/>
+              <a:defRPr sz="1100" b="1">
+                <a:solidFill>
+                  <a:srgbClr val="059669"/>
                 </a:solidFill>
                 <a:latin typeface="Consolas"/>
               </a:defRPr>
             </a:pPr>
             <a:r>
-              <a:t>01 // THE WEB CONSOLE (HTTP://LOCALHOST:8000)</a:t>
-            </a:r>
-          </a:p>
-          <a:p>
-            <a:pPr>
-              <a:spcBef>
-                <a:spcPts val="300"/>
-              </a:spcBef>
-              <a:defRPr sz="1400" b="1">
-                <a:solidFill>
-                  <a:srgbClr val="191510"/>
-                </a:solidFill>
-                <a:latin typeface="Segoe UI"/>
-              </a:defRPr>
-            </a:pPr>
-            <a:r>
-              <a:t>RAVN Minimalist Luxury Web Design</a:t>
+              <a:t>OPTION 1: MODERN WEB DASHBOARD</a:t>
             </a:r>
           </a:p>
           <a:p>
@@ -13362,63 +11332,79 @@
               <a:spcBef>
                 <a:spcPts val="600"/>
               </a:spcBef>
-              <a:defRPr sz="1050">
-                <a:solidFill>
-                  <a:srgbClr val="66625B"/>
-                </a:solidFill>
-                <a:latin typeface="Calibri"/>
-              </a:defRPr>
-            </a:pPr>
-            <a:r>
-              <a:t>• Signature Inverted Tab Navbar: Charcoal #191510 floating header with inverted radial corner ears, live telemetry beacon, and responsive navigation.</a:t>
+              <a:defRPr sz="2000" b="1">
+                <a:solidFill>
+                  <a:srgbClr val="15120E"/>
+                </a:solidFill>
+                <a:latin typeface="Segoe UI"/>
+              </a:defRPr>
+            </a:pPr>
+            <a:r>
+              <a:t>Luxury Web Console (localhost:8000)</a:t>
             </a:r>
           </a:p>
           <a:p>
             <a:pPr>
               <a:spcBef>
-                <a:spcPts val="600"/>
+                <a:spcPts val="1000"/>
               </a:spcBef>
-              <a:defRPr sz="1050">
-                <a:solidFill>
-                  <a:srgbClr val="66625B"/>
-                </a:solidFill>
-                <a:latin typeface="Calibri"/>
-              </a:defRPr>
-            </a:pPr>
-            <a:r>
-              <a:t>• Editorial Typography: Instrument Serif display headlines with negative letter-spacing, Mona Sans body text, and JetBrains Mono code blocks.</a:t>
+              <a:defRPr sz="1350">
+                <a:solidFill>
+                  <a:srgbClr val="555048"/>
+                </a:solidFill>
+                <a:latin typeface="Segoe UI"/>
+              </a:defRPr>
+            </a:pPr>
+            <a:r>
+              <a:t>• Drag-and-Drop Scanning: Drop any file to see real-time analysis in milliseconds.</a:t>
             </a:r>
           </a:p>
           <a:p>
             <a:pPr>
               <a:spcBef>
-                <a:spcPts val="600"/>
+                <a:spcPts val="1000"/>
               </a:spcBef>
-              <a:defRPr sz="1050">
-                <a:solidFill>
-                  <a:srgbClr val="66625B"/>
-                </a:solidFill>
-                <a:latin typeface="Calibri"/>
-              </a:defRPr>
-            </a:pPr>
-            <a:r>
-              <a:t>• Bento Grid Command Workspace: Drag-and-drop file upload, real-time radial confidence gauge, 6-agent execution timeline, and live synthetic demo chips.</a:t>
+              <a:defRPr sz="1350">
+                <a:solidFill>
+                  <a:srgbClr val="555048"/>
+                </a:solidFill>
+                <a:latin typeface="Segoe UI"/>
+              </a:defRPr>
+            </a:pPr>
+            <a:r>
+              <a:t>• Live Confidence Radar: See risk percentage and threat family classification.</a:t>
             </a:r>
           </a:p>
           <a:p>
             <a:pPr>
               <a:spcBef>
-                <a:spcPts val="600"/>
+                <a:spcPts val="1000"/>
               </a:spcBef>
-              <a:defRPr sz="1050">
-                <a:solidFill>
-                  <a:srgbClr val="66625B"/>
-                </a:solidFill>
-                <a:latin typeface="Calibri"/>
-              </a:defRPr>
-            </a:pPr>
-            <a:r>
-              <a:t>• Dark-Mode YARA Card: Syntax-highlighted YARA rule synthesis card with 1-click clipboard copy for immediate operational handoff.</a:t>
+              <a:defRPr sz="1350">
+                <a:solidFill>
+                  <a:srgbClr val="555048"/>
+                </a:solidFill>
+                <a:latin typeface="Segoe UI"/>
+              </a:defRPr>
+            </a:pPr>
+            <a:r>
+              <a:t>• Built-in Demo Samples: One-click buttons to test safe trojans, ransomware, and benign files.</a:t>
+            </a:r>
+          </a:p>
+          <a:p>
+            <a:pPr>
+              <a:spcBef>
+                <a:spcPts val="1000"/>
+              </a:spcBef>
+              <a:defRPr sz="1350">
+                <a:solidFill>
+                  <a:srgbClr val="555048"/>
+                </a:solidFill>
+                <a:latin typeface="Segoe UI"/>
+              </a:defRPr>
+            </a:pPr>
+            <a:r>
+              <a:t>• 1-Click YARA Copy: Instantly copy auto-generated rules to your clipboard.</a:t>
             </a:r>
           </a:p>
         </p:txBody>
@@ -13431,18 +11417,18 @@
         </p:nvSpPr>
         <p:spPr>
           <a:xfrm>
-            <a:off x="6199632" y="1645920"/>
-            <a:ext cx="5257800" cy="4434840"/>
+            <a:off x="6245352" y="1645920"/>
+            <a:ext cx="5120640" cy="4434840"/>
           </a:xfrm>
           <a:prstGeom prst="roundRect">
             <a:avLst/>
           </a:prstGeom>
           <a:solidFill>
-            <a:srgbClr val="191510"/>
+            <a:srgbClr val="15120E"/>
           </a:solidFill>
           <a:ln w="12700">
             <a:solidFill>
-              <a:srgbClr val="352F27"/>
+              <a:srgbClr val="322B22"/>
             </a:solidFill>
           </a:ln>
         </p:spPr>
@@ -13476,8 +11462,8 @@
         </p:nvSpPr>
         <p:spPr>
           <a:xfrm>
-            <a:off x="6428232" y="1828800"/>
-            <a:ext cx="4800600" cy="4023360"/>
+            <a:off x="6519672" y="1920240"/>
+            <a:ext cx="4572000" cy="3931920"/>
           </a:xfrm>
           <a:prstGeom prst="rect">
             <a:avLst/>
@@ -13491,7 +11477,7 @@
           <a:lstStyle/>
           <a:p>
             <a:pPr>
-              <a:defRPr sz="900" b="1">
+              <a:defRPr sz="1100" b="1">
                 <a:solidFill>
                   <a:srgbClr val="10B981"/>
                 </a:solidFill>
@@ -13499,15 +11485,15 @@
               </a:defRPr>
             </a:pPr>
             <a:r>
-              <a:t>02 // INTERACTIVE TERMINAL CONSOLE ($ NULLIFY)</a:t>
+              <a:t>OPTION 2: INTERACTIVE TERMINAL</a:t>
             </a:r>
           </a:p>
           <a:p>
             <a:pPr>
               <a:spcBef>
-                <a:spcPts val="300"/>
+                <a:spcPts val="600"/>
               </a:spcBef>
-              <a:defRPr sz="1400" b="1">
+              <a:defRPr sz="2000" b="1">
                 <a:solidFill>
                   <a:srgbClr val="FAF8F5"/>
                 </a:solidFill>
@@ -13515,17 +11501,17 @@
               </a:defRPr>
             </a:pPr>
             <a:r>
-              <a:t>Single-Command Terminal Console</a:t>
+              <a:t>Single-Command CLI ($ nullify)</a:t>
             </a:r>
           </a:p>
           <a:p>
             <a:pPr>
               <a:spcBef>
-                <a:spcPts val="800"/>
+                <a:spcPts val="1200"/>
               </a:spcBef>
-              <a:defRPr sz="850">
-                <a:solidFill>
-                  <a:srgbClr val="A39E93"/>
+              <a:defRPr sz="1100">
+                <a:solidFill>
+                  <a:srgbClr val="BFB9AF"/>
                 </a:solidFill>
                 <a:latin typeface="Consolas"/>
               </a:defRPr>
@@ -13535,60 +11521,56 @@
             </a:r>
             <a:br/>
             <a:r>
-              <a:t>==================================================</a:t>
+              <a:t>========================================</a:t>
             </a:r>
             <a:br/>
             <a:r>
-              <a:t>        █▄░█ █░█ █░░ █░░ █ █▀▀ █▄█</a:t>
+              <a:t>   See it. Trace it. Nullify it.</a:t>
             </a:r>
             <a:br/>
             <a:r>
-              <a:t>        █░▀█ █▄█ █▄▄ █▄▄ █ █▀░ ░█░</a:t>
+              <a:t>========================================</a:t>
             </a:r>
             <a:br/>
             <a:r>
-              <a:t>        See it. Trace it. Nullify it.</a:t>
+              <a:t>[1] Quick Scan</a:t>
             </a:r>
             <a:br/>
             <a:r>
-              <a:t>==================================================</a:t>
+              <a:t>[2] Deep Detonation</a:t>
             </a:r>
             <a:br/>
             <a:r>
-              <a:t>[1] Quick Scan          [2] Deep Detonation</a:t>
+              <a:t>[3] Behavioral Log</a:t>
             </a:r>
             <a:br/>
             <a:r>
-              <a:t>[3] Behavioral Log      [4] Batch Scan</a:t>
+              <a:t>[4] Batch Scan Folder</a:t>
             </a:r>
             <a:br/>
             <a:r>
-              <a:t>[5] Launch Web Console  [6] Test Synthetic Demos</a:t>
+              <a:t>[5] Launch Web Console</a:t>
             </a:r>
             <a:br/>
             <a:r>
-              <a:t>[0] Exit Console</a:t>
+              <a:t>[0] Exit</a:t>
             </a:r>
             <a:br/>
             <a:br/>
             <a:r>
-              <a:t>Select workflow [0-6]: 1</a:t>
+              <a:t>Select option: 1</a:t>
             </a:r>
             <a:br/>
             <a:r>
-              <a:t>Scanning: suspicious_payload.exe ...</a:t>
+              <a:t>&gt; Scanning suspicious_binary.exe ...</a:t>
             </a:r>
             <a:br/>
             <a:r>
-              <a:t>VERDICT: MALICIOUS (Confidence: 98.4%)</a:t>
+              <a:t>&gt; VERDICT: MALICIOUS (98.4% Confidence)</a:t>
             </a:r>
             <a:br/>
             <a:r>
-              <a:t>THREAT:  Trojan / Persistence RunKey</a:t>
-            </a:r>
-            <a:br/>
-            <a:r>
-              <a:t>C-CORE:  Parsed in 0.08ms | YARA Generated.</a:t>
+              <a:t>&gt; Parsed in 0.1ms • YARA Rule Created!</a:t>
             </a:r>
           </a:p>
         </p:txBody>
@@ -13601,14 +11583,14 @@
         </p:nvSpPr>
         <p:spPr>
           <a:xfrm>
-            <a:off x="731520" y="6263640"/>
-            <a:ext cx="10728655" cy="9525"/>
+            <a:off x="822960" y="6263640"/>
+            <a:ext cx="10545775" cy="9525"/>
           </a:xfrm>
           <a:prstGeom prst="rect">
             <a:avLst/>
           </a:prstGeom>
           <a:solidFill>
-            <a:srgbClr val="E5E2DD"/>
+            <a:srgbClr val="E2DCD2"/>
           </a:solidFill>
           <a:ln>
             <a:noFill/>
@@ -13644,8 +11626,8 @@
         </p:nvSpPr>
         <p:spPr>
           <a:xfrm>
-            <a:off x="731520" y="6327648"/>
-            <a:ext cx="10728655" cy="320040"/>
+            <a:off x="822960" y="6327648"/>
+            <a:ext cx="10545775" cy="320040"/>
           </a:xfrm>
           <a:prstGeom prst="rect">
             <a:avLst/>
@@ -13659,31 +11641,31 @@
           <a:lstStyle/>
           <a:p>
             <a:r>
-              <a:rPr sz="850">
-                <a:solidFill>
-                  <a:srgbClr val="8C877E"/>
+              <a:rPr sz="950">
+                <a:solidFill>
+                  <a:srgbClr val="827C73"/>
                 </a:solidFill>
                 <a:latin typeface="Consolas"/>
               </a:rPr>
-              <a:t>NULLIFY  ●  AUTONOMOUS MULTI-AGENT DEFENSE</a:t>
-            </a:r>
-            <a:r>
-              <a:rPr i="1" sz="900">
-                <a:solidFill>
-                  <a:srgbClr val="66625B"/>
+              <a:t>NULLIFY  •  AUTONOMOUS CYBER DEFENSE</a:t>
+            </a:r>
+            <a:r>
+              <a:rPr i="1" sz="1000">
+                <a:solidFill>
+                  <a:srgbClr val="555048"/>
                 </a:solidFill>
                 <a:latin typeface="Georgia"/>
               </a:rPr>
-              <a:t>                       See it. Trace it. Nullify it.                       </a:t>
-            </a:r>
-            <a:r>
-              <a:rPr sz="850">
-                <a:solidFill>
-                  <a:srgbClr val="8C877E"/>
+              <a:t>                               See it. Trace it. Nullify it.                               </a:t>
+            </a:r>
+            <a:r>
+              <a:rPr sz="950">
+                <a:solidFill>
+                  <a:srgbClr val="827C73"/>
                 </a:solidFill>
                 <a:latin typeface="Consolas"/>
               </a:rPr>
-              <a:t>SLIDE 09 / 12</a:t>
+              <a:t>09 / 11</a:t>
             </a:r>
           </a:p>
         </p:txBody>

--- a/nullify_presentation.pptx
+++ b/nullify_presentation.pptx
@@ -16,6 +16,7 @@
     <p:sldId id="264" r:id="rId16"/>
     <p:sldId id="265" r:id="rId17"/>
     <p:sldId id="266" r:id="rId18"/>
+    <p:sldId id="267" r:id="rId19"/>
   </p:sldIdLst>
   <p:sldSz cx="12191695" cy="6858000" type="screen4x3"/>
   <p:notesSz cx="6858000" cy="9144000"/>
@@ -512,7 +513,7 @@
           <a:lstStyle/>
           <a:p>
             <a:r>
-              <a:t>Good morning, judges. Today we are presenting NULLIFY.</a:t>
+              <a:t>Good morning, judges. Today we present NULLIFY, developed in partnership with EGATE Cybersecurity.</a:t>
             </a:r>
           </a:p>
           <a:p>
@@ -522,7 +523,7 @@
           </a:p>
           <a:p>
             <a:r>
-              <a:t>In cybersecurity, speed is everything. By the time a traditional security tool opens a file and spins up a sandbox, the damage is already done.</a:t>
+              <a:t>In modern cybersecurity, speed is everything. By the time a traditional security tool opens a file and spins up a sandbox, the damage is already done.</a:t>
             </a:r>
           </a:p>
           <a:p>
@@ -532,7 +533,7 @@
           </a:p>
           <a:p>
             <a:r>
-              <a:t>Let's show you how.</a:t>
+              <a:t>Let's start by introducing the vision behind EGATE and Nullify.</a:t>
             </a:r>
           </a:p>
         </p:txBody>
@@ -602,17 +603,17 @@
           <a:lstStyle/>
           <a:p>
             <a:r>
-              <a:t>In enterprise security, data privacy is non-negotiable.</a:t>
-            </a:r>
-          </a:p>
-          <a:p>
-            <a:r>
-              <a:t>When companies send files to VirusTotal or cloud sandboxes, proprietary source code and intellectual property leak out.</a:t>
-            </a:r>
-          </a:p>
-          <a:p>
-            <a:r>
-              <a:t>Nullify runs 100% on-premise. It works in air-gapped environments with zero internet access, and connects easily to Splunk or Microsoft Sentinel via our REST API.</a:t>
+              <a:t>We built Nullify with two clean interfaces:</a:t>
+            </a:r>
+          </a:p>
+          <a:p>
+            <a:r>
+              <a:t>On the left: A modern web console running at localhost:8000. Drag and drop any file, see live confidence scores, and copy YARA rules.</a:t>
+            </a:r>
+          </a:p>
+          <a:p>
+            <a:r>
+              <a:t>On the right: A single-command terminal interface. Just type 'nullify' with no confusing arguments, and an interactive menu guides you through scanning.</a:t>
             </a:r>
           </a:p>
         </p:txBody>
@@ -682,6 +683,86 @@
           <a:lstStyle/>
           <a:p>
             <a:r>
+              <a:t>In enterprise security, data privacy is non-negotiable.</a:t>
+            </a:r>
+          </a:p>
+          <a:p>
+            <a:r>
+              <a:t>When companies send files to VirusTotal or cloud sandboxes, proprietary source code and intellectual property leak out.</a:t>
+            </a:r>
+          </a:p>
+          <a:p>
+            <a:r>
+              <a:t>Nullify runs 100% on-premise. It works in air-gapped environments with zero internet access, and connects easily to Splunk or Microsoft Sentinel via our REST API.</a:t>
+            </a:r>
+          </a:p>
+        </p:txBody>
+      </p:sp>
+      <p:sp>
+        <p:nvSpPr>
+          <p:cNvPr id="4" name="Slide Number Placeholder 3"/>
+          <p:cNvSpPr>
+            <a:spLocks noGrp="1"/>
+          </p:cNvSpPr>
+          <p:nvPr>
+            <p:ph type="sldNum" idx="5" sz="quarter"/>
+          </p:nvPr>
+        </p:nvSpPr>
+        <p:spPr/>
+      </p:sp>
+    </p:spTree>
+  </p:cSld>
+  <p:clrMapOvr>
+    <a:masterClrMapping/>
+  </p:clrMapOvr>
+</p:notes>
+</file>
+
+<file path=ppt/notesSlides/notesSlide12.xml><?xml version="1.0" encoding="utf-8"?>
+<p:notes xmlns:a="http://schemas.openxmlformats.org/drawingml/2006/main" xmlns:p="http://schemas.openxmlformats.org/presentationml/2006/main" xmlns:r="http://schemas.openxmlformats.org/officeDocument/2006/relationships">
+  <p:cSld>
+    <p:spTree>
+      <p:nvGrpSpPr>
+        <p:cNvPr id="1" name=""/>
+        <p:cNvGrpSpPr/>
+        <p:nvPr/>
+      </p:nvGrpSpPr>
+      <p:grpSpPr>
+        <a:xfrm>
+          <a:off x="0" y="0"/>
+          <a:ext cx="0" cy="0"/>
+          <a:chOff x="0" y="0"/>
+          <a:chExt cx="0" cy="0"/>
+        </a:xfrm>
+      </p:grpSpPr>
+      <p:sp>
+        <p:nvSpPr>
+          <p:cNvPr id="2" name="Slide Image Placeholder 1"/>
+          <p:cNvSpPr>
+            <a:spLocks noGrp="1"/>
+          </p:cNvSpPr>
+          <p:nvPr>
+            <p:ph type="sldImg" idx="2"/>
+          </p:nvPr>
+        </p:nvSpPr>
+        <p:spPr/>
+      </p:sp>
+      <p:sp>
+        <p:nvSpPr>
+          <p:cNvPr id="3" name="Notes Placeholder 2"/>
+          <p:cNvSpPr>
+            <a:spLocks noGrp="1"/>
+          </p:cNvSpPr>
+          <p:nvPr>
+            <p:ph type="body" idx="3" sz="quarter"/>
+          </p:nvPr>
+        </p:nvSpPr>
+        <p:spPr/>
+        <p:txBody>
+          <a:bodyPr/>
+          <a:lstStyle/>
+          <a:p>
+            <a:r>
               <a:t>In conclusion: Nullify is not a mock-up or a slide concept. It is a live, working, tested system.</a:t>
             </a:r>
           </a:p>
@@ -762,27 +843,27 @@
           <a:lstStyle/>
           <a:p>
             <a:r>
-              <a:t>Every security team faces the same dilemma:</a:t>
-            </a:r>
-          </a:p>
-          <a:p>
-            <a:r>
-              <a:t>1. Attackers release 450,000 new files a day. Traditional antivirus only knows old files.</a:t>
-            </a:r>
-          </a:p>
-          <a:p>
-            <a:r>
-              <a:t>2. Sandboxes take 15 minutes to run a single test. That is too slow for real-time networks.</a:t>
-            </a:r>
-          </a:p>
-          <a:p>
-            <a:r>
-              <a:t>3. Most modern tools use Python, which locks up and crashes under heavy traffic.</a:t>
-            </a:r>
-          </a:p>
-          <a:p>
-            <a:r>
-              <a:t>Nullify changes this completely.</a:t>
+              <a:t>On this slide, we introduce our brand identity: EGATE and Nullify.</a:t>
+            </a:r>
+          </a:p>
+          <a:p>
+            <a:r>
+              <a:t>The EGATE logo represents the secure perimeter gateway. In a zero-trust organization, no binary runs until the gateway inspects it.</a:t>
+            </a:r>
+          </a:p>
+          <a:p>
+            <a:r>
+              <a:t>Nullify is the autonomous algorithmic engine inside the gateway. It exists to reduce the threat dwell time to zero.</a:t>
+            </a:r>
+          </a:p>
+          <a:p>
+            <a:r>
+              <a:t>Our design uses emerald green for active health and obsidian charcoal for air-gapped privacy.</a:t>
+            </a:r>
+          </a:p>
+          <a:p>
+            <a:r>
+              <a:t>Now let's examine the acute problem modern security teams face.</a:t>
             </a:r>
           </a:p>
         </p:txBody>
@@ -852,27 +933,27 @@
           <a:lstStyle/>
           <a:p>
             <a:r>
-              <a:t>Here is how Nullify works:</a:t>
-            </a:r>
-          </a:p>
-          <a:p>
-            <a:r>
-              <a:t>1. It is fast: We moved the heavy lifting to pure C. It analyzes files in under 15 milliseconds.</a:t>
-            </a:r>
-          </a:p>
-          <a:p>
-            <a:r>
-              <a:t>2. It is accurate: Six focused AI agents collaborate to trace the file's behavior.</a:t>
-            </a:r>
-          </a:p>
-          <a:p>
-            <a:r>
-              <a:t>3. It takes action: It writes ready-to-deploy defense rules immediately.</a:t>
-            </a:r>
-          </a:p>
-          <a:p>
-            <a:r>
-              <a:t>No waiting 15 minutes for a sandbox. No leaking sensitive files to cloud APIs.</a:t>
+              <a:t>Every security team faces three huge problems today:</a:t>
+            </a:r>
+          </a:p>
+          <a:p>
+            <a:r>
+              <a:t>1. New malware is invisible: 450,000 variants a day make static hashes obsolete.</a:t>
+            </a:r>
+          </a:p>
+          <a:p>
+            <a:r>
+              <a:t>2. Sandboxes take 15 minutes to run a single test. Real-time traffic can't wait that long.</a:t>
+            </a:r>
+          </a:p>
+          <a:p>
+            <a:r>
+              <a:t>3. Most modern tools use Python, which locks up and crashes under heavy traffic.</a:t>
+            </a:r>
+          </a:p>
+          <a:p>
+            <a:r>
+              <a:t>Nullify changes this completely.</a:t>
             </a:r>
           </a:p>
         </p:txBody>
@@ -942,22 +1023,27 @@
           <a:lstStyle/>
           <a:p>
             <a:r>
-              <a:t>Notice how our agents are structured:</a:t>
-            </a:r>
-          </a:p>
-          <a:p>
-            <a:r>
-              <a:t>Stage 1 handles raw speed: Triage and Static Analysis run in native C code. They take less than a millisecond to dissect headers, hashes, and imports.</a:t>
-            </a:r>
-          </a:p>
-          <a:p>
-            <a:r>
-              <a:t>Stage 2 handles intelligence: Behavioral analysis, 2,381-feature machine learning, human-readable reasoning, and automatic YARA rule generation.</a:t>
-            </a:r>
-          </a:p>
-          <a:p>
-            <a:r>
-              <a:t>Each agent does one job perfectly.</a:t>
+              <a:t>Here is how Nullify works:</a:t>
+            </a:r>
+          </a:p>
+          <a:p>
+            <a:r>
+              <a:t>1. It is fast: We moved the heavy lifting to pure C. It analyzes files in under 15 milliseconds.</a:t>
+            </a:r>
+          </a:p>
+          <a:p>
+            <a:r>
+              <a:t>2. It is accurate: Six focused AI agents collaborate to trace the file's behavior.</a:t>
+            </a:r>
+          </a:p>
+          <a:p>
+            <a:r>
+              <a:t>3. It takes action: It writes ready-to-deploy defense rules immediately.</a:t>
+            </a:r>
+          </a:p>
+          <a:p>
+            <a:r>
+              <a:t>No waiting 15 minutes for a sandbox. No leaking sensitive files to cloud APIs.</a:t>
             </a:r>
           </a:p>
         </p:txBody>
@@ -1027,27 +1113,22 @@
           <a:lstStyle/>
           <a:p>
             <a:r>
-              <a:t>Why is Nullify so fast? Because we identified the slowest parts of Python security tools and rewrote them in native C.</a:t>
-            </a:r>
-          </a:p>
-          <a:p>
-            <a:r>
-              <a:t>- Parsing Windows PE imports used to take 50 milliseconds. In C, it takes 0.1 milliseconds. That is over 500x faster.</a:t>
-            </a:r>
-          </a:p>
-          <a:p>
-            <a:r>
-              <a:t>- Pattern scanning is 18x faster.</a:t>
-            </a:r>
-          </a:p>
-          <a:p>
-            <a:r>
-              <a:t>- Concurrent file hashing is 8x faster.</a:t>
-            </a:r>
-          </a:p>
-          <a:p>
-            <a:r>
-              <a:t>And we built it with zero external C dependencies — no OpenSSL link issues, no memory leaks.</a:t>
+              <a:t>Notice how our agents are structured:</a:t>
+            </a:r>
+          </a:p>
+          <a:p>
+            <a:r>
+              <a:t>Stage 1 handles raw speed: Triage and Static Analysis run in native C code. They take less than a millisecond to dissect headers, hashes, and imports.</a:t>
+            </a:r>
+          </a:p>
+          <a:p>
+            <a:r>
+              <a:t>Stage 2 handles intelligence: Behavioral analysis, 2,381-feature machine learning, human-readable reasoning, and automatic YARA rule generation.</a:t>
+            </a:r>
+          </a:p>
+          <a:p>
+            <a:r>
+              <a:t>Each agent does one job perfectly, connected in a collaborative intelligence mesh.</a:t>
             </a:r>
           </a:p>
         </p:txBody>
@@ -1117,17 +1198,27 @@
           <a:lstStyle/>
           <a:p>
             <a:r>
-              <a:t>A lot of security AI projects use large language models that make uncalibrated guesses.</a:t>
-            </a:r>
-          </a:p>
-          <a:p>
-            <a:r>
-              <a:t>Nullify uses proven gradient-boosted trees trained on 1.1 million files from the EMBER benchmark.</a:t>
-            </a:r>
-          </a:p>
-          <a:p>
-            <a:r>
-              <a:t>We look at 2,381 structural features. And we engineered a specific Linux guard so non-Windows binaries never trigger false positives.</a:t>
+              <a:t>Why is Nullify so fast? Because we identified the slowest parts of Python security tools and rewrote them in native C.</a:t>
+            </a:r>
+          </a:p>
+          <a:p>
+            <a:r>
+              <a:t>- Parsing Windows PE imports used to take 50 milliseconds. In C, it takes 0.1 milliseconds. That is over 500x faster.</a:t>
+            </a:r>
+          </a:p>
+          <a:p>
+            <a:r>
+              <a:t>- Pattern scanning is 18x faster.</a:t>
+            </a:r>
+          </a:p>
+          <a:p>
+            <a:r>
+              <a:t>- Concurrent file hashing is 8x faster.</a:t>
+            </a:r>
+          </a:p>
+          <a:p>
+            <a:r>
+              <a:t>And we built it with zero external C dependencies — no OpenSSL link issues, no memory leaks.</a:t>
             </a:r>
           </a:p>
         </p:txBody>
@@ -1197,22 +1288,17 @@
           <a:lstStyle/>
           <a:p>
             <a:r>
-              <a:t>Telling an analyst 'this file is bad' is only half the job.</a:t>
-            </a:r>
-          </a:p>
-          <a:p>
-            <a:r>
-              <a:t>Nullify explains why: it maps the threat to MITRE ATT&amp;CK tactics.</a:t>
-            </a:r>
-          </a:p>
-          <a:p>
-            <a:r>
-              <a:t>And then it writes the actual YARA rule shown on screen.</a:t>
-            </a:r>
-          </a:p>
-          <a:p>
-            <a:r>
-              <a:t>You can copy this rule and deploy it to your firewalls and endpoints in seconds.</a:t>
+              <a:t>A lot of security AI projects use large language models that make uncalibrated guesses.</a:t>
+            </a:r>
+          </a:p>
+          <a:p>
+            <a:r>
+              <a:t>Nullify uses proven gradient-boosted trees trained on 1.1 million files from the EMBER benchmark.</a:t>
+            </a:r>
+          </a:p>
+          <a:p>
+            <a:r>
+              <a:t>We look at 2,381 structural features. And we engineered a specific Linux guard so non-Windows binaries never trigger false positives.</a:t>
             </a:r>
           </a:p>
         </p:txBody>
@@ -1282,27 +1368,22 @@
           <a:lstStyle/>
           <a:p>
             <a:r>
-              <a:t>Look at the numbers on screen:</a:t>
-            </a:r>
-          </a:p>
-          <a:p>
-            <a:r>
-              <a:t>A cloud sandbox takes 15 minutes.</a:t>
-            </a:r>
-          </a:p>
-          <a:p>
-            <a:r>
-              <a:t>Standard Python tools take 85 milliseconds and crash under load.</a:t>
-            </a:r>
-          </a:p>
-          <a:p>
-            <a:r>
-              <a:t>Traditional antivirus is fast, but blind to new malware.</a:t>
-            </a:r>
-          </a:p>
-          <a:p>
-            <a:r>
-              <a:t>Nullify gives you the best of both: 13.2 millisecond speed, zero-day machine learning, and automated YARA rules.</a:t>
+              <a:t>Telling an analyst 'this file is bad' is only half the job.</a:t>
+            </a:r>
+          </a:p>
+          <a:p>
+            <a:r>
+              <a:t>Nullify explains why: it maps the threat to MITRE ATT&amp;CK tactics.</a:t>
+            </a:r>
+          </a:p>
+          <a:p>
+            <a:r>
+              <a:t>And then it writes the actual YARA rule shown on screen.</a:t>
+            </a:r>
+          </a:p>
+          <a:p>
+            <a:r>
+              <a:t>You can copy this rule and deploy it to your firewalls and endpoints in seconds.</a:t>
             </a:r>
           </a:p>
         </p:txBody>
@@ -1372,17 +1453,27 @@
           <a:lstStyle/>
           <a:p>
             <a:r>
-              <a:t>We built Nullify with two clean interfaces:</a:t>
-            </a:r>
-          </a:p>
-          <a:p>
-            <a:r>
-              <a:t>On the left: A modern web console running at localhost:8000. Drag and drop any file, see live confidence scores, and copy YARA rules.</a:t>
-            </a:r>
-          </a:p>
-          <a:p>
-            <a:r>
-              <a:t>On the right: A single-command terminal interface. Just type 'nullify' with no confusing arguments, and an interactive menu guides you through scanning.</a:t>
+              <a:t>Look at the numbers on screen:</a:t>
+            </a:r>
+          </a:p>
+          <a:p>
+            <a:r>
+              <a:t>A cloud sandbox takes 15 minutes.</a:t>
+            </a:r>
+          </a:p>
+          <a:p>
+            <a:r>
+              <a:t>Standard Python tools take 85 milliseconds and crash under load.</a:t>
+            </a:r>
+          </a:p>
+          <a:p>
+            <a:r>
+              <a:t>Traditional antivirus is fast, but blind to new malware.</a:t>
+            </a:r>
+          </a:p>
+          <a:p>
+            <a:r>
+              <a:t>Nullify gives you the best of both: 13.2 millisecond speed, zero-day machine learning, and automated YARA rules.</a:t>
             </a:r>
           </a:p>
         </p:txBody>
@@ -4403,7 +4494,7 @@
             <a:avLst/>
           </a:prstGeom>
           <a:solidFill>
-            <a:srgbClr val="15120E"/>
+            <a:srgbClr val="14110D"/>
           </a:solidFill>
           <a:ln>
             <a:noFill/>
@@ -4446,7 +4537,7 @@
             <a:avLst/>
           </a:prstGeom>
           <a:solidFill>
-            <a:srgbClr val="15120E"/>
+            <a:srgbClr val="14110D"/>
           </a:solidFill>
           <a:ln w="19050">
             <a:solidFill>
@@ -4484,14 +4575,81 @@
         </p:nvSpPr>
         <p:spPr>
           <a:xfrm>
-            <a:off x="1005840" y="1005840"/>
-            <a:ext cx="2926080" cy="365760"/>
+            <a:off x="1005840" y="914400"/>
+            <a:ext cx="2194560" cy="822960"/>
           </a:xfrm>
           <a:prstGeom prst="roundRect">
             <a:avLst/>
           </a:prstGeom>
           <a:solidFill>
-            <a:srgbClr val="201B15"/>
+            <a:srgbClr val="FFFFFF"/>
+          </a:solidFill>
+          <a:ln>
+            <a:noFill/>
+          </a:ln>
+        </p:spPr>
+        <p:style>
+          <a:lnRef idx="1">
+            <a:schemeClr val="accent1"/>
+          </a:lnRef>
+          <a:fillRef idx="3">
+            <a:schemeClr val="accent1"/>
+          </a:fillRef>
+          <a:effectRef idx="2">
+            <a:schemeClr val="accent1"/>
+          </a:effectRef>
+          <a:fontRef idx="minor">
+            <a:schemeClr val="lt1"/>
+          </a:fontRef>
+        </p:style>
+        <p:txBody>
+          <a:bodyPr rtlCol="0" anchor="ctr"/>
+          <a:lstStyle/>
+          <a:p>
+            <a:pPr algn="ctr"/>
+          </a:p>
+        </p:txBody>
+      </p:sp>
+      <p:pic>
+        <p:nvPicPr>
+          <p:cNvPr id="5" name="Picture 4" descr="egate_logo_cropped.png"/>
+          <p:cNvPicPr>
+            <a:picLocks noChangeAspect="1"/>
+          </p:cNvPicPr>
+          <p:nvPr/>
+        </p:nvPicPr>
+        <p:blipFill>
+          <a:blip r:embed="rId2"/>
+          <a:stretch>
+            <a:fillRect/>
+          </a:stretch>
+        </p:blipFill>
+        <p:spPr>
+          <a:xfrm>
+            <a:off x="1097280" y="960120"/>
+            <a:ext cx="2011680" cy="1658277"/>
+          </a:xfrm>
+          <a:prstGeom prst="rect">
+            <a:avLst/>
+          </a:prstGeom>
+        </p:spPr>
+      </p:pic>
+      <p:sp>
+        <p:nvSpPr>
+          <p:cNvPr id="6" name="Rounded Rectangle 5"/>
+          <p:cNvSpPr/>
+          <p:nvPr/>
+        </p:nvSpPr>
+        <p:spPr>
+          <a:xfrm>
+            <a:off x="3337560" y="1143000"/>
+            <a:ext cx="2377440" cy="365760"/>
+          </a:xfrm>
+          <a:prstGeom prst="roundRect">
+            <a:avLst/>
+          </a:prstGeom>
+          <a:solidFill>
+            <a:srgbClr val="1F1A14"/>
           </a:solidFill>
           <a:ln w="12700">
             <a:solidFill>
@@ -4518,7 +4676,7 @@
           <a:lstStyle/>
           <a:p>
             <a:pPr algn="ctr">
-              <a:defRPr sz="900" b="1">
+              <a:defRPr sz="950" b="1">
                 <a:solidFill>
                   <a:srgbClr val="10B981"/>
                 </a:solidFill>
@@ -4526,27 +4684,27 @@
               </a:defRPr>
             </a:pPr>
             <a:r>
-              <a:t>●  AUTONOMOUS CYBER DEFENSE</a:t>
-            </a:r>
-          </a:p>
-        </p:txBody>
-      </p:sp>
-      <p:sp>
-        <p:nvSpPr>
-          <p:cNvPr id="5" name="Rounded Rectangle 4"/>
+              <a:t>●  EGATE CYBERSECURITY</a:t>
+            </a:r>
+          </a:p>
+        </p:txBody>
+      </p:sp>
+      <p:sp>
+        <p:nvSpPr>
+          <p:cNvPr id="7" name="Rounded Rectangle 6"/>
           <p:cNvSpPr/>
           <p:nvPr/>
         </p:nvSpPr>
         <p:spPr>
           <a:xfrm>
-            <a:off x="4069080" y="1005840"/>
-            <a:ext cx="2286000" cy="365760"/>
+            <a:off x="5852160" y="1143000"/>
+            <a:ext cx="2011680" cy="365760"/>
           </a:xfrm>
           <a:prstGeom prst="roundRect">
             <a:avLst/>
           </a:prstGeom>
           <a:solidFill>
-            <a:srgbClr val="201B15"/>
+            <a:srgbClr val="1F1A14"/>
           </a:solidFill>
           <a:ln w="12700">
             <a:solidFill>
@@ -4573,7 +4731,7 @@
           <a:lstStyle/>
           <a:p>
             <a:pPr algn="ctr">
-              <a:defRPr sz="900" b="1">
+              <a:defRPr sz="950" b="1">
                 <a:solidFill>
                   <a:srgbClr val="BFB9AF"/>
                 </a:solidFill>
@@ -4581,27 +4739,92 @@
               </a:defRPr>
             </a:pPr>
             <a:r>
-              <a:t>SUB-15ms C-ENGINE</a:t>
-            </a:r>
-          </a:p>
-        </p:txBody>
-      </p:sp>
-      <p:sp>
-        <p:nvSpPr>
-          <p:cNvPr id="6" name="Rounded Rectangle 5"/>
+              <a:t>PROJECT NULLIFY</a:t>
+            </a:r>
+          </a:p>
+        </p:txBody>
+      </p:sp>
+      <p:sp>
+        <p:nvSpPr>
+          <p:cNvPr id="8" name="TextBox 7"/>
+          <p:cNvSpPr txBox="1"/>
+          <p:nvPr/>
+        </p:nvSpPr>
+        <p:spPr>
+          <a:xfrm>
+            <a:off x="1005840" y="2011680"/>
+            <a:ext cx="5486400" cy="2560320"/>
+          </a:xfrm>
+          <a:prstGeom prst="rect">
+            <a:avLst/>
+          </a:prstGeom>
+          <a:noFill/>
+        </p:spPr>
+        <p:txBody>
+          <a:bodyPr wrap="square" lIns="0" tIns="0" rIns="0" bIns="0">
+            <a:spAutoFit/>
+          </a:bodyPr>
+          <a:lstStyle/>
+          <a:p>
+            <a:pPr>
+              <a:defRPr sz="5000" b="1">
+                <a:solidFill>
+                  <a:srgbClr val="FAF8F5"/>
+                </a:solidFill>
+                <a:latin typeface="Georgia"/>
+              </a:defRPr>
+            </a:pPr>
+            <a:r>
+              <a:t>See it. Trace it.</a:t>
+            </a:r>
+          </a:p>
+          <a:p>
+            <a:pPr>
+              <a:defRPr i="1" sz="5000" b="1">
+                <a:solidFill>
+                  <a:srgbClr val="10B981"/>
+                </a:solidFill>
+                <a:latin typeface="Georgia"/>
+              </a:defRPr>
+            </a:pPr>
+            <a:r>
+              <a:t>Nullify it.</a:t>
+            </a:r>
+          </a:p>
+          <a:p>
+            <a:pPr>
+              <a:spcBef>
+                <a:spcPts val="1400"/>
+              </a:spcBef>
+              <a:defRPr sz="1700">
+                <a:solidFill>
+                  <a:srgbClr val="BFB9AF"/>
+                </a:solidFill>
+                <a:latin typeface="Segoe UI"/>
+              </a:defRPr>
+            </a:pPr>
+            <a:r>
+              <a:t>Autonomous AI Threat Defense — From Detection to Immunity in Under 15 Milliseconds.</a:t>
+            </a:r>
+          </a:p>
+        </p:txBody>
+      </p:sp>
+      <p:sp>
+        <p:nvSpPr>
+          <p:cNvPr id="9" name="Rounded Rectangle 8"/>
           <p:cNvSpPr/>
           <p:nvPr/>
         </p:nvSpPr>
         <p:spPr>
           <a:xfrm>
-            <a:off x="6492240" y="1005840"/>
-            <a:ext cx="2286000" cy="365760"/>
+            <a:off x="1005840" y="4846320"/>
+            <a:ext cx="1783080" cy="594360"/>
           </a:xfrm>
           <a:prstGeom prst="roundRect">
             <a:avLst/>
           </a:prstGeom>
           <a:solidFill>
-            <a:srgbClr val="201B15"/>
+            <a:srgbClr val="1F1A14"/>
           </a:solidFill>
           <a:ln w="12700">
             <a:solidFill>
@@ -4628,100 +4851,39 @@
           <a:lstStyle/>
           <a:p>
             <a:pPr algn="ctr">
-              <a:defRPr sz="900" b="1">
-                <a:solidFill>
-                  <a:srgbClr val="BFB9AF"/>
+              <a:defRPr sz="950" b="1">
+                <a:solidFill>
+                  <a:srgbClr val="FAF8F5"/>
                 </a:solidFill>
                 <a:latin typeface="Consolas"/>
               </a:defRPr>
             </a:pPr>
             <a:r>
-              <a:t>100% AIR-GAPPED</a:t>
-            </a:r>
-          </a:p>
-        </p:txBody>
-      </p:sp>
-      <p:sp>
-        <p:nvSpPr>
-          <p:cNvPr id="7" name="TextBox 6"/>
-          <p:cNvSpPr txBox="1"/>
-          <p:nvPr/>
-        </p:nvSpPr>
-        <p:spPr>
-          <a:xfrm>
-            <a:off x="1005840" y="1828800"/>
-            <a:ext cx="10058400" cy="2377440"/>
-          </a:xfrm>
-          <a:prstGeom prst="rect">
-            <a:avLst/>
-          </a:prstGeom>
-          <a:noFill/>
-        </p:spPr>
-        <p:txBody>
-          <a:bodyPr wrap="square" lIns="0" tIns="0" rIns="0" bIns="0">
-            <a:spAutoFit/>
-          </a:bodyPr>
-          <a:lstStyle/>
-          <a:p>
-            <a:pPr>
-              <a:defRPr sz="5600" b="1">
-                <a:solidFill>
-                  <a:srgbClr val="FAF8F5"/>
-                </a:solidFill>
-                <a:latin typeface="Georgia"/>
-              </a:defRPr>
-            </a:pPr>
-            <a:r>
-              <a:t>See it. Trace it.</a:t>
-            </a:r>
-          </a:p>
-          <a:p>
-            <a:pPr>
-              <a:defRPr i="1" sz="5600" b="1">
-                <a:solidFill>
-                  <a:srgbClr val="10B981"/>
-                </a:solidFill>
-                <a:latin typeface="Georgia"/>
-              </a:defRPr>
-            </a:pPr>
-            <a:r>
-              <a:t>Nullify it.</a:t>
-            </a:r>
-          </a:p>
-          <a:p>
-            <a:pPr>
-              <a:spcBef>
-                <a:spcPts val="1600"/>
-              </a:spcBef>
-              <a:defRPr sz="2000">
-                <a:solidFill>
-                  <a:srgbClr val="BFB9AF"/>
-                </a:solidFill>
-                <a:latin typeface="Segoe UI"/>
-              </a:defRPr>
-            </a:pPr>
-            <a:r>
-              <a:t>Autonomous AI Threat Defense — From Detection to Immunity in 15 Milliseconds.</a:t>
-            </a:r>
-          </a:p>
-        </p:txBody>
-      </p:sp>
-      <p:sp>
-        <p:nvSpPr>
-          <p:cNvPr id="8" name="Rounded Rectangle 7"/>
+              <a:t>[ 01 // CORE ]</a:t>
+            </a:r>
+            <a:br/>
+            <a:r>
+              <a:t>15ms Native C Engine</a:t>
+            </a:r>
+          </a:p>
+        </p:txBody>
+      </p:sp>
+      <p:sp>
+        <p:nvSpPr>
+          <p:cNvPr id="10" name="Rounded Rectangle 9"/>
           <p:cNvSpPr/>
           <p:nvPr/>
         </p:nvSpPr>
         <p:spPr>
           <a:xfrm>
-            <a:off x="1005840" y="4434840"/>
-            <a:ext cx="3291840" cy="1280160"/>
+            <a:off x="2880360" y="4846320"/>
+            <a:ext cx="1783080" cy="594360"/>
           </a:xfrm>
           <a:prstGeom prst="roundRect">
             <a:avLst/>
           </a:prstGeom>
           <a:solidFill>
-            <a:srgbClr val="201B15"/>
+            <a:srgbClr val="1F1A14"/>
           </a:solidFill>
           <a:ln w="12700">
             <a:solidFill>
@@ -4744,81 +4906,43 @@
           </a:fontRef>
         </p:style>
         <p:txBody>
-          <a:bodyPr rtlCol="0" anchor="ctr"/>
-          <a:lstStyle/>
-          <a:p>
-            <a:pPr algn="ctr"/>
-          </a:p>
-        </p:txBody>
-      </p:sp>
-      <p:sp>
-        <p:nvSpPr>
-          <p:cNvPr id="9" name="TextBox 8"/>
-          <p:cNvSpPr txBox="1"/>
-          <p:nvPr/>
-        </p:nvSpPr>
-        <p:spPr>
-          <a:xfrm>
-            <a:off x="1234440" y="4572000"/>
-            <a:ext cx="2834640" cy="1005840"/>
-          </a:xfrm>
-          <a:prstGeom prst="rect">
-            <a:avLst/>
-          </a:prstGeom>
-          <a:noFill/>
-        </p:spPr>
-        <p:txBody>
-          <a:bodyPr wrap="square" lIns="0" tIns="0" rIns="0" bIns="0">
-            <a:spAutoFit/>
-          </a:bodyPr>
-          <a:lstStyle/>
-          <a:p>
-            <a:pPr>
-              <a:defRPr sz="1600" b="1">
+          <a:bodyPr rtlCol="0" anchor="ctr" lIns="0" tIns="0" rIns="0" bIns="0"/>
+          <a:lstStyle/>
+          <a:p>
+            <a:pPr algn="ctr">
+              <a:defRPr sz="950" b="1">
                 <a:solidFill>
                   <a:srgbClr val="FAF8F5"/>
                 </a:solidFill>
-                <a:latin typeface="Segoe UI"/>
-              </a:defRPr>
-            </a:pPr>
-            <a:r>
-              <a:t>⚡ 15ms Speed</a:t>
-            </a:r>
-          </a:p>
-          <a:p>
-            <a:pPr>
-              <a:spcBef>
-                <a:spcPts val="400"/>
-              </a:spcBef>
-              <a:defRPr sz="1300">
-                <a:solidFill>
-                  <a:srgbClr val="BFB9AF"/>
-                </a:solidFill>
-                <a:latin typeface="Segoe UI"/>
-              </a:defRPr>
-            </a:pPr>
-            <a:r>
-              <a:t>Native C11 core analyzes binaries faster than a blink.</a:t>
-            </a:r>
-          </a:p>
-        </p:txBody>
-      </p:sp>
-      <p:sp>
-        <p:nvSpPr>
-          <p:cNvPr id="10" name="Rounded Rectangle 9"/>
+                <a:latin typeface="Consolas"/>
+              </a:defRPr>
+            </a:pPr>
+            <a:r>
+              <a:t>[ 02 // MESH ]</a:t>
+            </a:r>
+            <a:br/>
+            <a:r>
+              <a:t>6 Collaborative AI Agents</a:t>
+            </a:r>
+          </a:p>
+        </p:txBody>
+      </p:sp>
+      <p:sp>
+        <p:nvSpPr>
+          <p:cNvPr id="11" name="Rounded Rectangle 10"/>
           <p:cNvSpPr/>
           <p:nvPr/>
         </p:nvSpPr>
         <p:spPr>
           <a:xfrm>
-            <a:off x="4480560" y="4434840"/>
-            <a:ext cx="3291840" cy="1280160"/>
+            <a:off x="4754879" y="4846320"/>
+            <a:ext cx="1783080" cy="594360"/>
           </a:xfrm>
           <a:prstGeom prst="roundRect">
             <a:avLst/>
           </a:prstGeom>
           <a:solidFill>
-            <a:srgbClr val="201B15"/>
+            <a:srgbClr val="1F1A14"/>
           </a:solidFill>
           <a:ln w="12700">
             <a:solidFill>
@@ -4841,61 +4965,23 @@
           </a:fontRef>
         </p:style>
         <p:txBody>
-          <a:bodyPr rtlCol="0" anchor="ctr"/>
-          <a:lstStyle/>
-          <a:p>
-            <a:pPr algn="ctr"/>
-          </a:p>
-        </p:txBody>
-      </p:sp>
-      <p:sp>
-        <p:nvSpPr>
-          <p:cNvPr id="11" name="TextBox 10"/>
-          <p:cNvSpPr txBox="1"/>
-          <p:nvPr/>
-        </p:nvSpPr>
-        <p:spPr>
-          <a:xfrm>
-            <a:off x="4709160" y="4572000"/>
-            <a:ext cx="2834640" cy="1005840"/>
-          </a:xfrm>
-          <a:prstGeom prst="rect">
-            <a:avLst/>
-          </a:prstGeom>
-          <a:noFill/>
-        </p:spPr>
-        <p:txBody>
-          <a:bodyPr wrap="square" lIns="0" tIns="0" rIns="0" bIns="0">
-            <a:spAutoFit/>
-          </a:bodyPr>
-          <a:lstStyle/>
-          <a:p>
-            <a:pPr>
-              <a:defRPr sz="1600" b="1">
+          <a:bodyPr rtlCol="0" anchor="ctr" lIns="0" tIns="0" rIns="0" bIns="0"/>
+          <a:lstStyle/>
+          <a:p>
+            <a:pPr algn="ctr">
+              <a:defRPr sz="950" b="1">
                 <a:solidFill>
                   <a:srgbClr val="FAF8F5"/>
                 </a:solidFill>
-                <a:latin typeface="Segoe UI"/>
-              </a:defRPr>
-            </a:pPr>
-            <a:r>
-              <a:t>🤖 6 AI Agents</a:t>
-            </a:r>
-          </a:p>
-          <a:p>
-            <a:pPr>
-              <a:spcBef>
-                <a:spcPts val="400"/>
-              </a:spcBef>
-              <a:defRPr sz="1300">
-                <a:solidFill>
-                  <a:srgbClr val="BFB9AF"/>
-                </a:solidFill>
-                <a:latin typeface="Segoe UI"/>
-              </a:defRPr>
-            </a:pPr>
-            <a:r>
-              <a:t>Specialized agents team up to inspect, explain, and defend.</a:t>
+                <a:latin typeface="Consolas"/>
+              </a:defRPr>
+            </a:pPr>
+            <a:r>
+              <a:t>[ 03 // YARA ]</a:t>
+            </a:r>
+            <a:br/>
+            <a:r>
+              <a:t>Instant Enterprise Rules</a:t>
             </a:r>
           </a:p>
         </p:txBody>
@@ -4908,14 +4994,14 @@
         </p:nvSpPr>
         <p:spPr>
           <a:xfrm>
-            <a:off x="7955279" y="4434840"/>
-            <a:ext cx="3291840" cy="1280160"/>
+            <a:off x="6675120" y="1005840"/>
+            <a:ext cx="4572000" cy="4526280"/>
           </a:xfrm>
           <a:prstGeom prst="roundRect">
             <a:avLst/>
           </a:prstGeom>
           <a:solidFill>
-            <a:srgbClr val="201B15"/>
+            <a:srgbClr val="1F1A14"/>
           </a:solidFill>
           <a:ln w="12700">
             <a:solidFill>
@@ -4945,58 +5031,30 @@
           </a:p>
         </p:txBody>
       </p:sp>
-      <p:sp>
-        <p:nvSpPr>
-          <p:cNvPr id="13" name="TextBox 12"/>
-          <p:cNvSpPr txBox="1"/>
-          <p:nvPr/>
-        </p:nvSpPr>
-        <p:spPr>
-          <a:xfrm>
-            <a:off x="8183879" y="4572000"/>
-            <a:ext cx="2834640" cy="1005840"/>
+      <p:pic>
+        <p:nvPicPr>
+          <p:cNvPr id="13" name="Picture 12" descr="cyber_shield_core.jpg"/>
+          <p:cNvPicPr>
+            <a:picLocks noChangeAspect="1"/>
+          </p:cNvPicPr>
+          <p:nvPr/>
+        </p:nvPicPr>
+        <p:blipFill>
+          <a:blip r:embed="rId3"/>
+          <a:stretch>
+            <a:fillRect/>
+          </a:stretch>
+        </p:blipFill>
+        <p:spPr>
+          <a:xfrm>
+            <a:off x="6766560" y="1097280"/>
+            <a:ext cx="4389120" cy="2449741"/>
           </a:xfrm>
           <a:prstGeom prst="rect">
             <a:avLst/>
           </a:prstGeom>
-          <a:noFill/>
-        </p:spPr>
-        <p:txBody>
-          <a:bodyPr wrap="square" lIns="0" tIns="0" rIns="0" bIns="0">
-            <a:spAutoFit/>
-          </a:bodyPr>
-          <a:lstStyle/>
-          <a:p>
-            <a:pPr>
-              <a:defRPr sz="1600" b="1">
-                <a:solidFill>
-                  <a:srgbClr val="FAF8F5"/>
-                </a:solidFill>
-                <a:latin typeface="Segoe UI"/>
-              </a:defRPr>
-            </a:pPr>
-            <a:r>
-              <a:t>🛡️ Auto-YARA</a:t>
-            </a:r>
-          </a:p>
-          <a:p>
-            <a:pPr>
-              <a:spcBef>
-                <a:spcPts val="400"/>
-              </a:spcBef>
-              <a:defRPr sz="1300">
-                <a:solidFill>
-                  <a:srgbClr val="BFB9AF"/>
-                </a:solidFill>
-                <a:latin typeface="Segoe UI"/>
-              </a:defRPr>
-            </a:pPr>
-            <a:r>
-              <a:t>Writes instant defense rules to protect your whole network.</a:t>
-            </a:r>
-          </a:p>
-        </p:txBody>
-      </p:sp>
+        </p:spPr>
+      </p:pic>
       <p:sp>
         <p:nvSpPr>
           <p:cNvPr id="14" name="Rectangle 13"/>
@@ -5069,7 +5127,7 @@
                 </a:solidFill>
                 <a:latin typeface="Consolas"/>
               </a:rPr>
-              <a:t>NULLIFY  •  AUTONOMOUS CYBER DEFENSE</a:t>
+              <a:t>EGATE  ●  NULLIFY AUTONOMOUS DEFENSE</a:t>
             </a:r>
             <a:r>
               <a:rPr i="1" sz="1000">
@@ -5087,7 +5145,7 @@
                 </a:solidFill>
                 <a:latin typeface="Consolas"/>
               </a:rPr>
-              <a:t>01 / 11</a:t>
+              <a:t>01 / 12</a:t>
             </a:r>
           </a:p>
         </p:txBody>
@@ -5184,7 +5242,7 @@
               </a:defRPr>
             </a:pPr>
             <a:r>
-              <a:t>●  SECURITY &amp; PRIVACY</a:t>
+              <a:t>●  USER EXPERIENCE</a:t>
             </a:r>
           </a:p>
         </p:txBody>
@@ -5214,13 +5272,13 @@
             <a:pPr>
               <a:defRPr sz="3200" b="1">
                 <a:solidFill>
-                  <a:srgbClr val="15120E"/>
+                  <a:srgbClr val="14110D"/>
                 </a:solidFill>
                 <a:latin typeface="Georgia"/>
               </a:defRPr>
             </a:pPr>
             <a:r>
-              <a:t>Your Data Never Leaves Your Network</a:t>
+              <a:t>Two Intuitive Ways to Use Nullify</a:t>
             </a:r>
           </a:p>
         </p:txBody>
@@ -5234,7 +5292,7 @@
         <p:spPr>
           <a:xfrm>
             <a:off x="822960" y="1645920"/>
-            <a:ext cx="3383280" cy="4434840"/>
+            <a:ext cx="5120640" cy="4434840"/>
           </a:xfrm>
           <a:prstGeom prst="roundRect">
             <a:avLst/>
@@ -5279,7 +5337,7 @@
         <p:spPr>
           <a:xfrm>
             <a:off x="1097280" y="1920240"/>
-            <a:ext cx="2834640" cy="3840480"/>
+            <a:ext cx="4572000" cy="3931920"/>
           </a:xfrm>
           <a:prstGeom prst="rect">
             <a:avLst/>
@@ -5293,39 +5351,42 @@
           <a:lstStyle/>
           <a:p>
             <a:pPr>
+              <a:spcBef>
+                <a:spcPts val="2000"/>
+              </a:spcBef>
               <a:defRPr sz="2000" b="1">
                 <a:solidFill>
-                  <a:srgbClr val="059669"/>
+                  <a:srgbClr val="14110D"/>
                 </a:solidFill>
                 <a:latin typeface="Segoe UI"/>
               </a:defRPr>
             </a:pPr>
             <a:r>
-              <a:t>🔒 100% Local &amp; Private</a:t>
+              <a:t>Luxury Web Dashboard (localhost:8000)</a:t>
             </a:r>
           </a:p>
           <a:p>
             <a:pPr>
               <a:spcBef>
-                <a:spcPts val="800"/>
+                <a:spcPts val="1000"/>
               </a:spcBef>
-              <a:defRPr sz="1400" b="1">
-                <a:solidFill>
-                  <a:srgbClr val="15120E"/>
+              <a:defRPr sz="1350">
+                <a:solidFill>
+                  <a:srgbClr val="555048"/>
                 </a:solidFill>
                 <a:latin typeface="Segoe UI"/>
               </a:defRPr>
             </a:pPr>
             <a:r>
-              <a:t>Zero Cloud Telemetry Leakage</a:t>
+              <a:t>• Drag-and-Drop Scanning: Drop any file to see real-time analysis in milliseconds.</a:t>
             </a:r>
           </a:p>
           <a:p>
             <a:pPr>
               <a:spcBef>
-                <a:spcPts val="1400"/>
+                <a:spcPts val="1000"/>
               </a:spcBef>
-              <a:defRPr sz="1400">
+              <a:defRPr sz="1350">
                 <a:solidFill>
                   <a:srgbClr val="555048"/>
                 </a:solidFill>
@@ -5333,7 +5394,39 @@
               </a:defRPr>
             </a:pPr>
             <a:r>
-              <a:t>Hospitals, defense contractors, and banks cannot upload confidential files to public cloud APIs. Nullify runs 100% on your hardware. Not a single byte is sent over the internet.</a:t>
+              <a:t>• Live Confidence Radar: See risk percentage and threat family classification clearly.</a:t>
+            </a:r>
+          </a:p>
+          <a:p>
+            <a:pPr>
+              <a:spcBef>
+                <a:spcPts val="1000"/>
+              </a:spcBef>
+              <a:defRPr sz="1350">
+                <a:solidFill>
+                  <a:srgbClr val="555048"/>
+                </a:solidFill>
+                <a:latin typeface="Segoe UI"/>
+              </a:defRPr>
+            </a:pPr>
+            <a:r>
+              <a:t>• Built-in Demo Samples: One-click buttons to test safe trojans, ransomware, and benign files.</a:t>
+            </a:r>
+          </a:p>
+          <a:p>
+            <a:pPr>
+              <a:spcBef>
+                <a:spcPts val="1000"/>
+              </a:spcBef>
+              <a:defRPr sz="1350">
+                <a:solidFill>
+                  <a:srgbClr val="555048"/>
+                </a:solidFill>
+                <a:latin typeface="Segoe UI"/>
+              </a:defRPr>
+            </a:pPr>
+            <a:r>
+              <a:t>• 1-Click YARA Copy: Instantly copy auto-generated rules to your clipboard.</a:t>
             </a:r>
           </a:p>
         </p:txBody>
@@ -5346,19 +5439,17 @@
         </p:nvSpPr>
         <p:spPr>
           <a:xfrm>
-            <a:off x="4434840" y="1645920"/>
-            <a:ext cx="3383280" cy="4434840"/>
+            <a:off x="1097280" y="1920240"/>
+            <a:ext cx="2926080" cy="320040"/>
           </a:xfrm>
           <a:prstGeom prst="roundRect">
             <a:avLst/>
           </a:prstGeom>
           <a:solidFill>
-            <a:srgbClr val="FFFFFF"/>
+            <a:srgbClr val="ECFDF5"/>
           </a:solidFill>
-          <a:ln w="12700">
-            <a:solidFill>
-              <a:srgbClr val="E2DCD2"/>
-            </a:solidFill>
+          <a:ln>
+            <a:noFill/>
           </a:ln>
         </p:spPr>
         <p:style>
@@ -5376,101 +5467,43 @@
           </a:fontRef>
         </p:style>
         <p:txBody>
-          <a:bodyPr rtlCol="0" anchor="ctr"/>
-          <a:lstStyle/>
-          <a:p>
-            <a:pPr algn="ctr"/>
-          </a:p>
-        </p:txBody>
-      </p:sp>
-      <p:sp>
-        <p:nvSpPr>
-          <p:cNvPr id="8" name="TextBox 7"/>
-          <p:cNvSpPr txBox="1"/>
-          <p:nvPr/>
-        </p:nvSpPr>
-        <p:spPr>
-          <a:xfrm>
-            <a:off x="4709160" y="1920240"/>
-            <a:ext cx="2834640" cy="3840480"/>
-          </a:xfrm>
-          <a:prstGeom prst="rect">
-            <a:avLst/>
-          </a:prstGeom>
-          <a:noFill/>
-        </p:spPr>
-        <p:txBody>
-          <a:bodyPr wrap="square" lIns="0" tIns="0" rIns="0" bIns="0">
-            <a:spAutoFit/>
-          </a:bodyPr>
-          <a:lstStyle/>
-          <a:p>
-            <a:pPr>
-              <a:defRPr sz="2000" b="1">
-                <a:solidFill>
-                  <a:srgbClr val="2563EB"/>
-                </a:solidFill>
-                <a:latin typeface="Segoe UI"/>
-              </a:defRPr>
-            </a:pPr>
-            <a:r>
-              <a:t>🔌 Connects to Your SIEM</a:t>
-            </a:r>
-          </a:p>
-          <a:p>
-            <a:pPr>
-              <a:spcBef>
-                <a:spcPts val="800"/>
-              </a:spcBef>
-              <a:defRPr sz="1400" b="1">
-                <a:solidFill>
-                  <a:srgbClr val="15120E"/>
-                </a:solidFill>
-                <a:latin typeface="Segoe UI"/>
-              </a:defRPr>
-            </a:pPr>
-            <a:r>
-              <a:t>Production REST API Built In</a:t>
-            </a:r>
-          </a:p>
-          <a:p>
-            <a:pPr>
-              <a:spcBef>
-                <a:spcPts val="1400"/>
-              </a:spcBef>
-              <a:defRPr sz="1400">
-                <a:solidFill>
-                  <a:srgbClr val="555048"/>
-                </a:solidFill>
-                <a:latin typeface="Segoe UI"/>
-              </a:defRPr>
-            </a:pPr>
-            <a:r>
-              <a:t>Built with FastAPI and OpenAPI. Exposes clean REST endpoints so your security operations team can integrate it with Splunk, Microsoft Sentinel, or Cortex XSOAR in minutes.</a:t>
-            </a:r>
-          </a:p>
-        </p:txBody>
-      </p:sp>
-      <p:sp>
-        <p:nvSpPr>
-          <p:cNvPr id="9" name="Rounded Rectangle 8"/>
+          <a:bodyPr rtlCol="0" anchor="ctr" lIns="0" tIns="0" rIns="0" bIns="0"/>
+          <a:lstStyle/>
+          <a:p>
+            <a:pPr algn="ctr">
+              <a:defRPr sz="950" b="1">
+                <a:solidFill>
+                  <a:srgbClr val="059669"/>
+                </a:solidFill>
+                <a:latin typeface="Consolas"/>
+              </a:defRPr>
+            </a:pPr>
+            <a:r>
+              <a:t>[ WEB INTERFACE ]</a:t>
+            </a:r>
+          </a:p>
+        </p:txBody>
+      </p:sp>
+      <p:sp>
+        <p:nvSpPr>
+          <p:cNvPr id="8" name="Rounded Rectangle 7"/>
           <p:cNvSpPr/>
           <p:nvPr/>
         </p:nvSpPr>
         <p:spPr>
           <a:xfrm>
-            <a:off x="8046720" y="1645920"/>
-            <a:ext cx="3383280" cy="4434840"/>
+            <a:off x="6245352" y="1645920"/>
+            <a:ext cx="5120640" cy="4434840"/>
           </a:xfrm>
           <a:prstGeom prst="roundRect">
             <a:avLst/>
           </a:prstGeom>
           <a:solidFill>
-            <a:srgbClr val="FFFFFF"/>
+            <a:srgbClr val="14110D"/>
           </a:solidFill>
           <a:ln w="12700">
             <a:solidFill>
-              <a:srgbClr val="E2DCD2"/>
+              <a:srgbClr val="322B22"/>
             </a:solidFill>
           </a:ln>
         </p:spPr>
@@ -5498,14 +5531,14 @@
       </p:sp>
       <p:sp>
         <p:nvSpPr>
-          <p:cNvPr id="10" name="TextBox 9"/>
+          <p:cNvPr id="9" name="TextBox 8"/>
           <p:cNvSpPr txBox="1"/>
           <p:nvPr/>
         </p:nvSpPr>
         <p:spPr>
           <a:xfrm>
-            <a:off x="8321040" y="1920240"/>
-            <a:ext cx="2834640" cy="3840480"/>
+            <a:off x="6519672" y="1920240"/>
+            <a:ext cx="4572000" cy="3931920"/>
           </a:xfrm>
           <a:prstGeom prst="rect">
             <a:avLst/>
@@ -5519,54 +5552,107 @@
           <a:lstStyle/>
           <a:p>
             <a:pPr>
-              <a:defRPr sz="2000" b="1">
-                <a:solidFill>
-                  <a:srgbClr val="D97706"/>
-                </a:solidFill>
-                <a:latin typeface="Segoe UI"/>
-              </a:defRPr>
-            </a:pPr>
-            <a:r>
-              <a:t>📦 Docker &amp; Air-Gapped Ready</a:t>
+              <a:defRPr sz="1100" b="1">
+                <a:solidFill>
+                  <a:srgbClr val="10B981"/>
+                </a:solidFill>
+                <a:latin typeface="Consolas"/>
+              </a:defRPr>
+            </a:pPr>
+            <a:r>
+              <a:t>[ TERMINAL INTERFACE ]</a:t>
             </a:r>
           </a:p>
           <a:p>
             <a:pPr>
               <a:spcBef>
-                <a:spcPts val="800"/>
+                <a:spcPts val="600"/>
               </a:spcBef>
-              <a:defRPr sz="1400" b="1">
-                <a:solidFill>
-                  <a:srgbClr val="15120E"/>
+              <a:defRPr sz="2000" b="1">
+                <a:solidFill>
+                  <a:srgbClr val="FAF8F5"/>
                 </a:solidFill>
                 <a:latin typeface="Segoe UI"/>
               </a:defRPr>
             </a:pPr>
             <a:r>
-              <a:t>Runs Anywhere Without Internet</a:t>
+              <a:t>Single-Command CLI ($ nullify)</a:t>
             </a:r>
           </a:p>
           <a:p>
             <a:pPr>
               <a:spcBef>
-                <a:spcPts val="1400"/>
+                <a:spcPts val="1200"/>
               </a:spcBef>
-              <a:defRPr sz="1400">
-                <a:solidFill>
-                  <a:srgbClr val="555048"/>
-                </a:solidFill>
-                <a:latin typeface="Segoe UI"/>
-              </a:defRPr>
-            </a:pPr>
-            <a:r>
-              <a:t>Ships as a lightweight Docker container or standalone binary. Operates seamlessly inside secure, offline, air-gapped data centers.</a:t>
-            </a:r>
-          </a:p>
-        </p:txBody>
-      </p:sp>
-      <p:sp>
-        <p:nvSpPr>
-          <p:cNvPr id="11" name="Rectangle 10"/>
+              <a:defRPr sz="1100">
+                <a:solidFill>
+                  <a:srgbClr val="BFB9AF"/>
+                </a:solidFill>
+                <a:latin typeface="Consolas"/>
+              </a:defRPr>
+            </a:pPr>
+            <a:r>
+              <a:t>$ nullify</a:t>
+            </a:r>
+            <a:br/>
+            <a:r>
+              <a:t>========================================</a:t>
+            </a:r>
+            <a:br/>
+            <a:r>
+              <a:t>   See it. Trace it. Nullify it.</a:t>
+            </a:r>
+            <a:br/>
+            <a:r>
+              <a:t>========================================</a:t>
+            </a:r>
+            <a:br/>
+            <a:r>
+              <a:t>[1] Quick Scan</a:t>
+            </a:r>
+            <a:br/>
+            <a:r>
+              <a:t>[2] Deep Detonation</a:t>
+            </a:r>
+            <a:br/>
+            <a:r>
+              <a:t>[3] Behavioral Log</a:t>
+            </a:r>
+            <a:br/>
+            <a:r>
+              <a:t>[4] Batch Scan Folder</a:t>
+            </a:r>
+            <a:br/>
+            <a:r>
+              <a:t>[5] Launch Web Console</a:t>
+            </a:r>
+            <a:br/>
+            <a:r>
+              <a:t>[0] Exit</a:t>
+            </a:r>
+            <a:br/>
+            <a:br/>
+            <a:r>
+              <a:t>Select option: 1</a:t>
+            </a:r>
+            <a:br/>
+            <a:r>
+              <a:t>&gt; Scanning suspicious_binary.exe ...</a:t>
+            </a:r>
+            <a:br/>
+            <a:r>
+              <a:t>&gt; VERDICT: MALICIOUS (98.4% Confidence)</a:t>
+            </a:r>
+            <a:br/>
+            <a:r>
+              <a:t>&gt; Parsed in 0.1ms • YARA Rule Created!</a:t>
+            </a:r>
+          </a:p>
+        </p:txBody>
+      </p:sp>
+      <p:sp>
+        <p:nvSpPr>
+          <p:cNvPr id="10" name="Rectangle 9"/>
           <p:cNvSpPr/>
           <p:nvPr/>
         </p:nvSpPr>
@@ -5609,7 +5695,7 @@
       </p:sp>
       <p:sp>
         <p:nvSpPr>
-          <p:cNvPr id="12" name="TextBox 11"/>
+          <p:cNvPr id="11" name="TextBox 10"/>
           <p:cNvSpPr txBox="1"/>
           <p:nvPr/>
         </p:nvSpPr>
@@ -5636,7 +5722,7 @@
                 </a:solidFill>
                 <a:latin typeface="Consolas"/>
               </a:rPr>
-              <a:t>NULLIFY  •  AUTONOMOUS CYBER DEFENSE</a:t>
+              <a:t>EGATE  ●  NULLIFY AUTONOMOUS DEFENSE</a:t>
             </a:r>
             <a:r>
               <a:rPr i="1" sz="1000">
@@ -5654,7 +5740,7 @@
                 </a:solidFill>
                 <a:latin typeface="Consolas"/>
               </a:rPr>
-              <a:t>10 / 11</a:t>
+              <a:t>10 / 12</a:t>
             </a:r>
           </a:p>
         </p:txBody>
@@ -5692,7 +5778,7 @@
             <a:avLst/>
           </a:prstGeom>
           <a:solidFill>
-            <a:srgbClr val="15120E"/>
+            <a:srgbClr val="FBF8F3"/>
           </a:solidFill>
           <a:ln>
             <a:noFill/>
@@ -5722,6 +5808,732 @@
       </p:sp>
       <p:sp>
         <p:nvSpPr>
+          <p:cNvPr id="3" name="TextBox 2"/>
+          <p:cNvSpPr txBox="1"/>
+          <p:nvPr/>
+        </p:nvSpPr>
+        <p:spPr>
+          <a:xfrm>
+            <a:off x="822960" y="502920"/>
+            <a:ext cx="10515600" cy="320040"/>
+          </a:xfrm>
+          <a:prstGeom prst="rect">
+            <a:avLst/>
+          </a:prstGeom>
+          <a:noFill/>
+        </p:spPr>
+        <p:txBody>
+          <a:bodyPr wrap="none" lIns="0" tIns="0" rIns="0" bIns="0">
+            <a:spAutoFit/>
+          </a:bodyPr>
+          <a:lstStyle/>
+          <a:p>
+            <a:pPr>
+              <a:defRPr sz="1100" b="1">
+                <a:solidFill>
+                  <a:srgbClr val="059669"/>
+                </a:solidFill>
+                <a:latin typeface="Consolas"/>
+              </a:defRPr>
+            </a:pPr>
+            <a:r>
+              <a:t>●  SECURITY &amp; PRIVACY</a:t>
+            </a:r>
+          </a:p>
+        </p:txBody>
+      </p:sp>
+      <p:sp>
+        <p:nvSpPr>
+          <p:cNvPr id="4" name="TextBox 3"/>
+          <p:cNvSpPr txBox="1"/>
+          <p:nvPr/>
+        </p:nvSpPr>
+        <p:spPr>
+          <a:xfrm>
+            <a:off x="822960" y="822960"/>
+            <a:ext cx="10515600" cy="685800"/>
+          </a:xfrm>
+          <a:prstGeom prst="rect">
+            <a:avLst/>
+          </a:prstGeom>
+          <a:noFill/>
+        </p:spPr>
+        <p:txBody>
+          <a:bodyPr wrap="square" lIns="0" tIns="0" rIns="0" bIns="0">
+            <a:spAutoFit/>
+          </a:bodyPr>
+          <a:lstStyle/>
+          <a:p>
+            <a:pPr>
+              <a:defRPr sz="3200" b="1">
+                <a:solidFill>
+                  <a:srgbClr val="14110D"/>
+                </a:solidFill>
+                <a:latin typeface="Georgia"/>
+              </a:defRPr>
+            </a:pPr>
+            <a:r>
+              <a:t>Your Data Never Leaves Your Network</a:t>
+            </a:r>
+          </a:p>
+        </p:txBody>
+      </p:sp>
+      <p:sp>
+        <p:nvSpPr>
+          <p:cNvPr id="5" name="Rounded Rectangle 4"/>
+          <p:cNvSpPr/>
+          <p:nvPr/>
+        </p:nvSpPr>
+        <p:spPr>
+          <a:xfrm>
+            <a:off x="822960" y="1645920"/>
+            <a:ext cx="3383280" cy="4434840"/>
+          </a:xfrm>
+          <a:prstGeom prst="roundRect">
+            <a:avLst/>
+          </a:prstGeom>
+          <a:solidFill>
+            <a:srgbClr val="FFFFFF"/>
+          </a:solidFill>
+          <a:ln w="12700">
+            <a:solidFill>
+              <a:srgbClr val="E2DCD2"/>
+            </a:solidFill>
+          </a:ln>
+        </p:spPr>
+        <p:style>
+          <a:lnRef idx="1">
+            <a:schemeClr val="accent1"/>
+          </a:lnRef>
+          <a:fillRef idx="3">
+            <a:schemeClr val="accent1"/>
+          </a:fillRef>
+          <a:effectRef idx="2">
+            <a:schemeClr val="accent1"/>
+          </a:effectRef>
+          <a:fontRef idx="minor">
+            <a:schemeClr val="lt1"/>
+          </a:fontRef>
+        </p:style>
+        <p:txBody>
+          <a:bodyPr rtlCol="0" anchor="ctr"/>
+          <a:lstStyle/>
+          <a:p>
+            <a:pPr algn="ctr"/>
+          </a:p>
+        </p:txBody>
+      </p:sp>
+      <p:sp>
+        <p:nvSpPr>
+          <p:cNvPr id="6" name="Rounded Rectangle 5"/>
+          <p:cNvSpPr/>
+          <p:nvPr/>
+        </p:nvSpPr>
+        <p:spPr>
+          <a:xfrm>
+            <a:off x="1097280" y="1920240"/>
+            <a:ext cx="2011680" cy="320040"/>
+          </a:xfrm>
+          <a:prstGeom prst="roundRect">
+            <a:avLst/>
+          </a:prstGeom>
+          <a:solidFill>
+            <a:srgbClr val="F5F1EA"/>
+          </a:solidFill>
+          <a:ln>
+            <a:noFill/>
+          </a:ln>
+        </p:spPr>
+        <p:style>
+          <a:lnRef idx="1">
+            <a:schemeClr val="accent1"/>
+          </a:lnRef>
+          <a:fillRef idx="3">
+            <a:schemeClr val="accent1"/>
+          </a:fillRef>
+          <a:effectRef idx="2">
+            <a:schemeClr val="accent1"/>
+          </a:effectRef>
+          <a:fontRef idx="minor">
+            <a:schemeClr val="lt1"/>
+          </a:fontRef>
+        </p:style>
+        <p:txBody>
+          <a:bodyPr rtlCol="0" anchor="ctr" lIns="0" tIns="0" rIns="0" bIns="0"/>
+          <a:lstStyle/>
+          <a:p>
+            <a:pPr algn="ctr">
+              <a:defRPr sz="950" b="1">
+                <a:solidFill>
+                  <a:srgbClr val="059669"/>
+                </a:solidFill>
+                <a:latin typeface="Consolas"/>
+              </a:defRPr>
+            </a:pPr>
+            <a:r>
+              <a:t>[ PRIVACY ]</a:t>
+            </a:r>
+          </a:p>
+        </p:txBody>
+      </p:sp>
+      <p:sp>
+        <p:nvSpPr>
+          <p:cNvPr id="7" name="TextBox 6"/>
+          <p:cNvSpPr txBox="1"/>
+          <p:nvPr/>
+        </p:nvSpPr>
+        <p:spPr>
+          <a:xfrm>
+            <a:off x="1097280" y="2423160"/>
+            <a:ext cx="2834640" cy="3474720"/>
+          </a:xfrm>
+          <a:prstGeom prst="rect">
+            <a:avLst/>
+          </a:prstGeom>
+          <a:noFill/>
+        </p:spPr>
+        <p:txBody>
+          <a:bodyPr wrap="square" lIns="0" tIns="0" rIns="0" bIns="0">
+            <a:spAutoFit/>
+          </a:bodyPr>
+          <a:lstStyle/>
+          <a:p>
+            <a:pPr>
+              <a:defRPr sz="1900" b="1">
+                <a:solidFill>
+                  <a:srgbClr val="059669"/>
+                </a:solidFill>
+                <a:latin typeface="Segoe UI"/>
+              </a:defRPr>
+            </a:pPr>
+            <a:r>
+              <a:t>100% Local Execution</a:t>
+            </a:r>
+          </a:p>
+          <a:p>
+            <a:pPr>
+              <a:spcBef>
+                <a:spcPts val="600"/>
+              </a:spcBef>
+              <a:defRPr sz="1400" b="1">
+                <a:solidFill>
+                  <a:srgbClr val="14110D"/>
+                </a:solidFill>
+                <a:latin typeface="Segoe UI"/>
+              </a:defRPr>
+            </a:pPr>
+            <a:r>
+              <a:t>Zero Cloud Telemetry Leakage</a:t>
+            </a:r>
+          </a:p>
+          <a:p>
+            <a:pPr>
+              <a:spcBef>
+                <a:spcPts val="1200"/>
+              </a:spcBef>
+              <a:defRPr sz="1350">
+                <a:solidFill>
+                  <a:srgbClr val="555048"/>
+                </a:solidFill>
+                <a:latin typeface="Segoe UI"/>
+              </a:defRPr>
+            </a:pPr>
+            <a:r>
+              <a:t>Hospitals, defense contractors, and banks cannot upload confidential files to public cloud APIs. Nullify runs 100% on your hardware. Not a single byte is sent over the internet.</a:t>
+            </a:r>
+          </a:p>
+        </p:txBody>
+      </p:sp>
+      <p:sp>
+        <p:nvSpPr>
+          <p:cNvPr id="8" name="Rounded Rectangle 7"/>
+          <p:cNvSpPr/>
+          <p:nvPr/>
+        </p:nvSpPr>
+        <p:spPr>
+          <a:xfrm>
+            <a:off x="4434840" y="1645920"/>
+            <a:ext cx="3383280" cy="4434840"/>
+          </a:xfrm>
+          <a:prstGeom prst="roundRect">
+            <a:avLst/>
+          </a:prstGeom>
+          <a:solidFill>
+            <a:srgbClr val="FFFFFF"/>
+          </a:solidFill>
+          <a:ln w="12700">
+            <a:solidFill>
+              <a:srgbClr val="E2DCD2"/>
+            </a:solidFill>
+          </a:ln>
+        </p:spPr>
+        <p:style>
+          <a:lnRef idx="1">
+            <a:schemeClr val="accent1"/>
+          </a:lnRef>
+          <a:fillRef idx="3">
+            <a:schemeClr val="accent1"/>
+          </a:fillRef>
+          <a:effectRef idx="2">
+            <a:schemeClr val="accent1"/>
+          </a:effectRef>
+          <a:fontRef idx="minor">
+            <a:schemeClr val="lt1"/>
+          </a:fontRef>
+        </p:style>
+        <p:txBody>
+          <a:bodyPr rtlCol="0" anchor="ctr"/>
+          <a:lstStyle/>
+          <a:p>
+            <a:pPr algn="ctr"/>
+          </a:p>
+        </p:txBody>
+      </p:sp>
+      <p:sp>
+        <p:nvSpPr>
+          <p:cNvPr id="9" name="Rounded Rectangle 8"/>
+          <p:cNvSpPr/>
+          <p:nvPr/>
+        </p:nvSpPr>
+        <p:spPr>
+          <a:xfrm>
+            <a:off x="4709160" y="1920240"/>
+            <a:ext cx="2011680" cy="320040"/>
+          </a:xfrm>
+          <a:prstGeom prst="roundRect">
+            <a:avLst/>
+          </a:prstGeom>
+          <a:solidFill>
+            <a:srgbClr val="F5F1EA"/>
+          </a:solidFill>
+          <a:ln>
+            <a:noFill/>
+          </a:ln>
+        </p:spPr>
+        <p:style>
+          <a:lnRef idx="1">
+            <a:schemeClr val="accent1"/>
+          </a:lnRef>
+          <a:fillRef idx="3">
+            <a:schemeClr val="accent1"/>
+          </a:fillRef>
+          <a:effectRef idx="2">
+            <a:schemeClr val="accent1"/>
+          </a:effectRef>
+          <a:fontRef idx="minor">
+            <a:schemeClr val="lt1"/>
+          </a:fontRef>
+        </p:style>
+        <p:txBody>
+          <a:bodyPr rtlCol="0" anchor="ctr" lIns="0" tIns="0" rIns="0" bIns="0"/>
+          <a:lstStyle/>
+          <a:p>
+            <a:pPr algn="ctr">
+              <a:defRPr sz="950" b="1">
+                <a:solidFill>
+                  <a:srgbClr val="2563EB"/>
+                </a:solidFill>
+                <a:latin typeface="Consolas"/>
+              </a:defRPr>
+            </a:pPr>
+            <a:r>
+              <a:t>[ INTEGRATION ]</a:t>
+            </a:r>
+          </a:p>
+        </p:txBody>
+      </p:sp>
+      <p:sp>
+        <p:nvSpPr>
+          <p:cNvPr id="10" name="TextBox 9"/>
+          <p:cNvSpPr txBox="1"/>
+          <p:nvPr/>
+        </p:nvSpPr>
+        <p:spPr>
+          <a:xfrm>
+            <a:off x="4709160" y="2423160"/>
+            <a:ext cx="2834640" cy="3474720"/>
+          </a:xfrm>
+          <a:prstGeom prst="rect">
+            <a:avLst/>
+          </a:prstGeom>
+          <a:noFill/>
+        </p:spPr>
+        <p:txBody>
+          <a:bodyPr wrap="square" lIns="0" tIns="0" rIns="0" bIns="0">
+            <a:spAutoFit/>
+          </a:bodyPr>
+          <a:lstStyle/>
+          <a:p>
+            <a:pPr>
+              <a:defRPr sz="1900" b="1">
+                <a:solidFill>
+                  <a:srgbClr val="2563EB"/>
+                </a:solidFill>
+                <a:latin typeface="Segoe UI"/>
+              </a:defRPr>
+            </a:pPr>
+            <a:r>
+              <a:t>SIEM &amp; SOAR Ready</a:t>
+            </a:r>
+          </a:p>
+          <a:p>
+            <a:pPr>
+              <a:spcBef>
+                <a:spcPts val="600"/>
+              </a:spcBef>
+              <a:defRPr sz="1400" b="1">
+                <a:solidFill>
+                  <a:srgbClr val="14110D"/>
+                </a:solidFill>
+                <a:latin typeface="Segoe UI"/>
+              </a:defRPr>
+            </a:pPr>
+            <a:r>
+              <a:t>Production REST API Built In</a:t>
+            </a:r>
+          </a:p>
+          <a:p>
+            <a:pPr>
+              <a:spcBef>
+                <a:spcPts val="1200"/>
+              </a:spcBef>
+              <a:defRPr sz="1350">
+                <a:solidFill>
+                  <a:srgbClr val="555048"/>
+                </a:solidFill>
+                <a:latin typeface="Segoe UI"/>
+              </a:defRPr>
+            </a:pPr>
+            <a:r>
+              <a:t>Built with FastAPI and OpenAPI. Exposes clean REST endpoints so your security operations team can integrate it with Splunk, Microsoft Sentinel, or Cortex XSOAR in minutes.</a:t>
+            </a:r>
+          </a:p>
+        </p:txBody>
+      </p:sp>
+      <p:sp>
+        <p:nvSpPr>
+          <p:cNvPr id="11" name="Rounded Rectangle 10"/>
+          <p:cNvSpPr/>
+          <p:nvPr/>
+        </p:nvSpPr>
+        <p:spPr>
+          <a:xfrm>
+            <a:off x="8046720" y="1645920"/>
+            <a:ext cx="3383280" cy="4434840"/>
+          </a:xfrm>
+          <a:prstGeom prst="roundRect">
+            <a:avLst/>
+          </a:prstGeom>
+          <a:solidFill>
+            <a:srgbClr val="FFFFFF"/>
+          </a:solidFill>
+          <a:ln w="12700">
+            <a:solidFill>
+              <a:srgbClr val="E2DCD2"/>
+            </a:solidFill>
+          </a:ln>
+        </p:spPr>
+        <p:style>
+          <a:lnRef idx="1">
+            <a:schemeClr val="accent1"/>
+          </a:lnRef>
+          <a:fillRef idx="3">
+            <a:schemeClr val="accent1"/>
+          </a:fillRef>
+          <a:effectRef idx="2">
+            <a:schemeClr val="accent1"/>
+          </a:effectRef>
+          <a:fontRef idx="minor">
+            <a:schemeClr val="lt1"/>
+          </a:fontRef>
+        </p:style>
+        <p:txBody>
+          <a:bodyPr rtlCol="0" anchor="ctr"/>
+          <a:lstStyle/>
+          <a:p>
+            <a:pPr algn="ctr"/>
+          </a:p>
+        </p:txBody>
+      </p:sp>
+      <p:sp>
+        <p:nvSpPr>
+          <p:cNvPr id="12" name="Rounded Rectangle 11"/>
+          <p:cNvSpPr/>
+          <p:nvPr/>
+        </p:nvSpPr>
+        <p:spPr>
+          <a:xfrm>
+            <a:off x="8321040" y="1920240"/>
+            <a:ext cx="2011680" cy="320040"/>
+          </a:xfrm>
+          <a:prstGeom prst="roundRect">
+            <a:avLst/>
+          </a:prstGeom>
+          <a:solidFill>
+            <a:srgbClr val="F5F1EA"/>
+          </a:solidFill>
+          <a:ln>
+            <a:noFill/>
+          </a:ln>
+        </p:spPr>
+        <p:style>
+          <a:lnRef idx="1">
+            <a:schemeClr val="accent1"/>
+          </a:lnRef>
+          <a:fillRef idx="3">
+            <a:schemeClr val="accent1"/>
+          </a:fillRef>
+          <a:effectRef idx="2">
+            <a:schemeClr val="accent1"/>
+          </a:effectRef>
+          <a:fontRef idx="minor">
+            <a:schemeClr val="lt1"/>
+          </a:fontRef>
+        </p:style>
+        <p:txBody>
+          <a:bodyPr rtlCol="0" anchor="ctr" lIns="0" tIns="0" rIns="0" bIns="0"/>
+          <a:lstStyle/>
+          <a:p>
+            <a:pPr algn="ctr">
+              <a:defRPr sz="950" b="1">
+                <a:solidFill>
+                  <a:srgbClr val="D97706"/>
+                </a:solidFill>
+                <a:latin typeface="Consolas"/>
+              </a:defRPr>
+            </a:pPr>
+            <a:r>
+              <a:t>[ DEPLOYMENT ]</a:t>
+            </a:r>
+          </a:p>
+        </p:txBody>
+      </p:sp>
+      <p:sp>
+        <p:nvSpPr>
+          <p:cNvPr id="13" name="TextBox 12"/>
+          <p:cNvSpPr txBox="1"/>
+          <p:nvPr/>
+        </p:nvSpPr>
+        <p:spPr>
+          <a:xfrm>
+            <a:off x="8321040" y="2423160"/>
+            <a:ext cx="2834640" cy="3474720"/>
+          </a:xfrm>
+          <a:prstGeom prst="rect">
+            <a:avLst/>
+          </a:prstGeom>
+          <a:noFill/>
+        </p:spPr>
+        <p:txBody>
+          <a:bodyPr wrap="square" lIns="0" tIns="0" rIns="0" bIns="0">
+            <a:spAutoFit/>
+          </a:bodyPr>
+          <a:lstStyle/>
+          <a:p>
+            <a:pPr>
+              <a:defRPr sz="1900" b="1">
+                <a:solidFill>
+                  <a:srgbClr val="D97706"/>
+                </a:solidFill>
+                <a:latin typeface="Segoe UI"/>
+              </a:defRPr>
+            </a:pPr>
+            <a:r>
+              <a:t>Air-Gapped &amp; Offline</a:t>
+            </a:r>
+          </a:p>
+          <a:p>
+            <a:pPr>
+              <a:spcBef>
+                <a:spcPts val="600"/>
+              </a:spcBef>
+              <a:defRPr sz="1400" b="1">
+                <a:solidFill>
+                  <a:srgbClr val="14110D"/>
+                </a:solidFill>
+                <a:latin typeface="Segoe UI"/>
+              </a:defRPr>
+            </a:pPr>
+            <a:r>
+              <a:t>Docker &amp; Containerized Core</a:t>
+            </a:r>
+          </a:p>
+          <a:p>
+            <a:pPr>
+              <a:spcBef>
+                <a:spcPts val="1200"/>
+              </a:spcBef>
+              <a:defRPr sz="1350">
+                <a:solidFill>
+                  <a:srgbClr val="555048"/>
+                </a:solidFill>
+                <a:latin typeface="Segoe UI"/>
+              </a:defRPr>
+            </a:pPr>
+            <a:r>
+              <a:t>Ships as a lightweight Docker container or standalone binary. Operates seamlessly inside secure, offline, air-gapped data centers with zero external dependencies.</a:t>
+            </a:r>
+          </a:p>
+        </p:txBody>
+      </p:sp>
+      <p:sp>
+        <p:nvSpPr>
+          <p:cNvPr id="14" name="Rectangle 13"/>
+          <p:cNvSpPr/>
+          <p:nvPr/>
+        </p:nvSpPr>
+        <p:spPr>
+          <a:xfrm>
+            <a:off x="822960" y="6263640"/>
+            <a:ext cx="10545775" cy="9525"/>
+          </a:xfrm>
+          <a:prstGeom prst="rect">
+            <a:avLst/>
+          </a:prstGeom>
+          <a:solidFill>
+            <a:srgbClr val="E2DCD2"/>
+          </a:solidFill>
+          <a:ln>
+            <a:noFill/>
+          </a:ln>
+        </p:spPr>
+        <p:style>
+          <a:lnRef idx="1">
+            <a:schemeClr val="accent1"/>
+          </a:lnRef>
+          <a:fillRef idx="3">
+            <a:schemeClr val="accent1"/>
+          </a:fillRef>
+          <a:effectRef idx="2">
+            <a:schemeClr val="accent1"/>
+          </a:effectRef>
+          <a:fontRef idx="minor">
+            <a:schemeClr val="lt1"/>
+          </a:fontRef>
+        </p:style>
+        <p:txBody>
+          <a:bodyPr rtlCol="0" anchor="ctr"/>
+          <a:lstStyle/>
+          <a:p>
+            <a:pPr algn="ctr"/>
+          </a:p>
+        </p:txBody>
+      </p:sp>
+      <p:sp>
+        <p:nvSpPr>
+          <p:cNvPr id="15" name="TextBox 14"/>
+          <p:cNvSpPr txBox="1"/>
+          <p:nvPr/>
+        </p:nvSpPr>
+        <p:spPr>
+          <a:xfrm>
+            <a:off x="822960" y="6327648"/>
+            <a:ext cx="10545775" cy="320040"/>
+          </a:xfrm>
+          <a:prstGeom prst="rect">
+            <a:avLst/>
+          </a:prstGeom>
+          <a:noFill/>
+        </p:spPr>
+        <p:txBody>
+          <a:bodyPr wrap="none" lIns="0" tIns="0" rIns="0" bIns="0">
+            <a:spAutoFit/>
+          </a:bodyPr>
+          <a:lstStyle/>
+          <a:p>
+            <a:r>
+              <a:rPr sz="950">
+                <a:solidFill>
+                  <a:srgbClr val="827C73"/>
+                </a:solidFill>
+                <a:latin typeface="Consolas"/>
+              </a:rPr>
+              <a:t>EGATE  ●  NULLIFY AUTONOMOUS DEFENSE</a:t>
+            </a:r>
+            <a:r>
+              <a:rPr i="1" sz="1000">
+                <a:solidFill>
+                  <a:srgbClr val="555048"/>
+                </a:solidFill>
+                <a:latin typeface="Georgia"/>
+              </a:rPr>
+              <a:t>                               See it. Trace it. Nullify it.                               </a:t>
+            </a:r>
+            <a:r>
+              <a:rPr sz="950">
+                <a:solidFill>
+                  <a:srgbClr val="827C73"/>
+                </a:solidFill>
+                <a:latin typeface="Consolas"/>
+              </a:rPr>
+              <a:t>11 / 12</a:t>
+            </a:r>
+          </a:p>
+        </p:txBody>
+      </p:sp>
+    </p:spTree>
+  </p:cSld>
+  <p:clrMapOvr>
+    <a:masterClrMapping/>
+  </p:clrMapOvr>
+</p:sld>
+</file>
+
+<file path=ppt/slides/slide12.xml><?xml version="1.0" encoding="utf-8"?>
+<p:sld xmlns:a="http://schemas.openxmlformats.org/drawingml/2006/main" xmlns:p="http://schemas.openxmlformats.org/presentationml/2006/main" xmlns:r="http://schemas.openxmlformats.org/officeDocument/2006/relationships">
+  <p:cSld>
+    <p:spTree>
+      <p:nvGrpSpPr>
+        <p:cNvPr id="1" name=""/>
+        <p:cNvGrpSpPr/>
+        <p:nvPr/>
+      </p:nvGrpSpPr>
+      <p:grpSpPr/>
+      <p:sp>
+        <p:nvSpPr>
+          <p:cNvPr id="2" name="Rectangle 1"/>
+          <p:cNvSpPr/>
+          <p:nvPr/>
+        </p:nvSpPr>
+        <p:spPr>
+          <a:xfrm>
+            <a:off x="0" y="0"/>
+            <a:ext cx="12191695" cy="6858000"/>
+          </a:xfrm>
+          <a:prstGeom prst="rect">
+            <a:avLst/>
+          </a:prstGeom>
+          <a:solidFill>
+            <a:srgbClr val="14110D"/>
+          </a:solidFill>
+          <a:ln>
+            <a:noFill/>
+          </a:ln>
+        </p:spPr>
+        <p:style>
+          <a:lnRef idx="1">
+            <a:schemeClr val="accent1"/>
+          </a:lnRef>
+          <a:fillRef idx="3">
+            <a:schemeClr val="accent1"/>
+          </a:fillRef>
+          <a:effectRef idx="2">
+            <a:schemeClr val="accent1"/>
+          </a:effectRef>
+          <a:fontRef idx="minor">
+            <a:schemeClr val="lt1"/>
+          </a:fontRef>
+        </p:style>
+        <p:txBody>
+          <a:bodyPr rtlCol="0" anchor="ctr"/>
+          <a:lstStyle/>
+          <a:p>
+            <a:pPr algn="ctr"/>
+          </a:p>
+        </p:txBody>
+      </p:sp>
+      <p:sp>
+        <p:nvSpPr>
           <p:cNvPr id="3" name="Rounded Rectangle 2"/>
           <p:cNvSpPr/>
           <p:nvPr/>
@@ -5735,7 +6547,7 @@
             <a:avLst/>
           </a:prstGeom>
           <a:solidFill>
-            <a:srgbClr val="15120E"/>
+            <a:srgbClr val="14110D"/>
           </a:solidFill>
           <a:ln w="19050">
             <a:solidFill>
@@ -5773,14 +6585,81 @@
         </p:nvSpPr>
         <p:spPr>
           <a:xfrm>
-            <a:off x="1005840" y="1005840"/>
+            <a:off x="1005840" y="914400"/>
+            <a:ext cx="2194560" cy="822960"/>
+          </a:xfrm>
+          <a:prstGeom prst="roundRect">
+            <a:avLst/>
+          </a:prstGeom>
+          <a:solidFill>
+            <a:srgbClr val="FFFFFF"/>
+          </a:solidFill>
+          <a:ln>
+            <a:noFill/>
+          </a:ln>
+        </p:spPr>
+        <p:style>
+          <a:lnRef idx="1">
+            <a:schemeClr val="accent1"/>
+          </a:lnRef>
+          <a:fillRef idx="3">
+            <a:schemeClr val="accent1"/>
+          </a:fillRef>
+          <a:effectRef idx="2">
+            <a:schemeClr val="accent1"/>
+          </a:effectRef>
+          <a:fontRef idx="minor">
+            <a:schemeClr val="lt1"/>
+          </a:fontRef>
+        </p:style>
+        <p:txBody>
+          <a:bodyPr rtlCol="0" anchor="ctr"/>
+          <a:lstStyle/>
+          <a:p>
+            <a:pPr algn="ctr"/>
+          </a:p>
+        </p:txBody>
+      </p:sp>
+      <p:pic>
+        <p:nvPicPr>
+          <p:cNvPr id="5" name="Picture 4" descr="egate_logo_cropped.png"/>
+          <p:cNvPicPr>
+            <a:picLocks noChangeAspect="1"/>
+          </p:cNvPicPr>
+          <p:nvPr/>
+        </p:nvPicPr>
+        <p:blipFill>
+          <a:blip r:embed="rId2"/>
+          <a:stretch>
+            <a:fillRect/>
+          </a:stretch>
+        </p:blipFill>
+        <p:spPr>
+          <a:xfrm>
+            <a:off x="1097280" y="960120"/>
+            <a:ext cx="2011680" cy="1658277"/>
+          </a:xfrm>
+          <a:prstGeom prst="rect">
+            <a:avLst/>
+          </a:prstGeom>
+        </p:spPr>
+      </p:pic>
+      <p:sp>
+        <p:nvSpPr>
+          <p:cNvPr id="6" name="Rounded Rectangle 5"/>
+          <p:cNvSpPr/>
+          <p:nvPr/>
+        </p:nvSpPr>
+        <p:spPr>
+          <a:xfrm>
+            <a:off x="3337560" y="1143000"/>
             <a:ext cx="2377440" cy="365760"/>
           </a:xfrm>
           <a:prstGeom prst="roundRect">
             <a:avLst/>
           </a:prstGeom>
           <a:solidFill>
-            <a:srgbClr val="201B15"/>
+            <a:srgbClr val="1F1A14"/>
           </a:solidFill>
           <a:ln w="12700">
             <a:solidFill>
@@ -5807,7 +6686,7 @@
           <a:lstStyle/>
           <a:p>
             <a:pPr algn="ctr">
-              <a:defRPr sz="900" b="1">
+              <a:defRPr sz="950" b="1">
                 <a:solidFill>
                   <a:srgbClr val="10B981"/>
                 </a:solidFill>
@@ -5822,72 +6701,20 @@
       </p:sp>
       <p:sp>
         <p:nvSpPr>
-          <p:cNvPr id="5" name="TextBox 4"/>
-          <p:cNvSpPr txBox="1"/>
-          <p:nvPr/>
-        </p:nvSpPr>
-        <p:spPr>
-          <a:xfrm>
-            <a:off x="1005840" y="1645920"/>
-            <a:ext cx="10058400" cy="2011680"/>
-          </a:xfrm>
-          <a:prstGeom prst="rect">
-            <a:avLst/>
-          </a:prstGeom>
-          <a:noFill/>
-        </p:spPr>
-        <p:txBody>
-          <a:bodyPr wrap="square" lIns="0" tIns="0" rIns="0" bIns="0">
-            <a:spAutoFit/>
-          </a:bodyPr>
-          <a:lstStyle/>
-          <a:p>
-            <a:pPr>
-              <a:defRPr sz="5400" b="1">
-                <a:solidFill>
-                  <a:srgbClr val="FAF8F5"/>
-                </a:solidFill>
-                <a:latin typeface="Georgia"/>
-              </a:defRPr>
-            </a:pPr>
-            <a:r>
-              <a:t>Let's Run a Live Test.</a:t>
-            </a:r>
-          </a:p>
-          <a:p>
-            <a:pPr>
-              <a:spcBef>
-                <a:spcPts val="1200"/>
-              </a:spcBef>
-              <a:defRPr sz="2000">
-                <a:solidFill>
-                  <a:srgbClr val="BFB9AF"/>
-                </a:solidFill>
-                <a:latin typeface="Segoe UI"/>
-              </a:defRPr>
-            </a:pPr>
-            <a:r>
-              <a:t>Pick any file. Watch Nullify inspect, classify, and neutralize it in milliseconds.</a:t>
-            </a:r>
-          </a:p>
-        </p:txBody>
-      </p:sp>
-      <p:sp>
-        <p:nvSpPr>
-          <p:cNvPr id="6" name="Rounded Rectangle 5"/>
+          <p:cNvPr id="7" name="Rounded Rectangle 6"/>
           <p:cNvSpPr/>
           <p:nvPr/>
         </p:nvSpPr>
         <p:spPr>
           <a:xfrm>
-            <a:off x="1005840" y="3931920"/>
-            <a:ext cx="3291840" cy="1280160"/>
+            <a:off x="5852160" y="1143000"/>
+            <a:ext cx="2194560" cy="365760"/>
           </a:xfrm>
           <a:prstGeom prst="roundRect">
             <a:avLst/>
           </a:prstGeom>
           <a:solidFill>
-            <a:srgbClr val="201B15"/>
+            <a:srgbClr val="1F1A14"/>
           </a:solidFill>
           <a:ln w="12700">
             <a:solidFill>
@@ -5910,23 +6737,33 @@
           </a:fontRef>
         </p:style>
         <p:txBody>
-          <a:bodyPr rtlCol="0" anchor="ctr"/>
-          <a:lstStyle/>
-          <a:p>
-            <a:pPr algn="ctr"/>
-          </a:p>
-        </p:txBody>
-      </p:sp>
-      <p:sp>
-        <p:nvSpPr>
-          <p:cNvPr id="7" name="TextBox 6"/>
+          <a:bodyPr rtlCol="0" anchor="ctr" lIns="0" tIns="0" rIns="0" bIns="0"/>
+          <a:lstStyle/>
+          <a:p>
+            <a:pPr algn="ctr">
+              <a:defRPr sz="950" b="1">
+                <a:solidFill>
+                  <a:srgbClr val="BFB9AF"/>
+                </a:solidFill>
+                <a:latin typeface="Consolas"/>
+              </a:defRPr>
+            </a:pPr>
+            <a:r>
+              <a:t>EGATE &amp; NULLIFY</a:t>
+            </a:r>
+          </a:p>
+        </p:txBody>
+      </p:sp>
+      <p:sp>
+        <p:nvSpPr>
+          <p:cNvPr id="8" name="TextBox 7"/>
           <p:cNvSpPr txBox="1"/>
           <p:nvPr/>
         </p:nvSpPr>
         <p:spPr>
           <a:xfrm>
-            <a:off x="1234440" y="4069080"/>
-            <a:ext cx="2834640" cy="1005840"/>
+            <a:off x="1005840" y="2011680"/>
+            <a:ext cx="10058400" cy="1645920"/>
           </a:xfrm>
           <a:prstGeom prst="rect">
             <a:avLst/>
@@ -5940,23 +6777,23 @@
           <a:lstStyle/>
           <a:p>
             <a:pPr>
-              <a:defRPr sz="1600" b="1">
-                <a:solidFill>
-                  <a:srgbClr val="10B981"/>
-                </a:solidFill>
-                <a:latin typeface="Segoe UI"/>
-              </a:defRPr>
-            </a:pPr>
-            <a:r>
-              <a:t>✓ Fully Functional Now</a:t>
+              <a:defRPr sz="5400" b="1">
+                <a:solidFill>
+                  <a:srgbClr val="FAF8F5"/>
+                </a:solidFill>
+                <a:latin typeface="Georgia"/>
+              </a:defRPr>
+            </a:pPr>
+            <a:r>
+              <a:t>Let's Run a Live Test.</a:t>
             </a:r>
           </a:p>
           <a:p>
             <a:pPr>
               <a:spcBef>
-                <a:spcPts val="400"/>
+                <a:spcPts val="1000"/>
               </a:spcBef>
-              <a:defRPr sz="1300">
+              <a:defRPr sz="2000">
                 <a:solidFill>
                   <a:srgbClr val="BFB9AF"/>
                 </a:solidFill>
@@ -5964,27 +6801,27 @@
               </a:defRPr>
             </a:pPr>
             <a:r>
-              <a:t>Web console, CLI, and C-engine are compiled and running live right now.</a:t>
-            </a:r>
-          </a:p>
-        </p:txBody>
-      </p:sp>
-      <p:sp>
-        <p:nvSpPr>
-          <p:cNvPr id="8" name="Rounded Rectangle 7"/>
+              <a:t>Pick any file. Watch Nullify inspect, classify, and neutralize it in milliseconds.</a:t>
+            </a:r>
+          </a:p>
+        </p:txBody>
+      </p:sp>
+      <p:sp>
+        <p:nvSpPr>
+          <p:cNvPr id="9" name="Rounded Rectangle 8"/>
           <p:cNvSpPr/>
           <p:nvPr/>
         </p:nvSpPr>
         <p:spPr>
           <a:xfrm>
-            <a:off x="4480560" y="3931920"/>
-            <a:ext cx="3291840" cy="1280160"/>
+            <a:off x="1005840" y="3931920"/>
+            <a:ext cx="3291840" cy="1325880"/>
           </a:xfrm>
           <a:prstGeom prst="roundRect">
             <a:avLst/>
           </a:prstGeom>
           <a:solidFill>
-            <a:srgbClr val="201B15"/>
+            <a:srgbClr val="1F1A14"/>
           </a:solidFill>
           <a:ln w="12700">
             <a:solidFill>
@@ -6016,14 +6853,14 @@
       </p:sp>
       <p:sp>
         <p:nvSpPr>
-          <p:cNvPr id="9" name="TextBox 8"/>
+          <p:cNvPr id="10" name="TextBox 9"/>
           <p:cNvSpPr txBox="1"/>
           <p:nvPr/>
         </p:nvSpPr>
         <p:spPr>
           <a:xfrm>
-            <a:off x="4709160" y="4069080"/>
-            <a:ext cx="2834640" cy="1005840"/>
+            <a:off x="1234440" y="4069080"/>
+            <a:ext cx="2834640" cy="1051560"/>
           </a:xfrm>
           <a:prstGeom prst="rect">
             <a:avLst/>
@@ -6037,15 +6874,31 @@
           <a:lstStyle/>
           <a:p>
             <a:pPr>
-              <a:defRPr sz="1600" b="1">
+              <a:defRPr sz="950" b="1">
                 <a:solidFill>
                   <a:srgbClr val="10B981"/>
                 </a:solidFill>
+                <a:latin typeface="Consolas"/>
+              </a:defRPr>
+            </a:pPr>
+            <a:r>
+              <a:t>[ 01 // PRODUCTION ]</a:t>
+            </a:r>
+          </a:p>
+          <a:p>
+            <a:pPr>
+              <a:spcBef>
+                <a:spcPts val="200"/>
+              </a:spcBef>
+              <a:defRPr sz="1550" b="1">
+                <a:solidFill>
+                  <a:srgbClr val="FAF8F5"/>
+                </a:solidFill>
                 <a:latin typeface="Segoe UI"/>
               </a:defRPr>
             </a:pPr>
             <a:r>
-              <a:t>✓ 62 / 62 Tests Green</a:t>
+              <a:t>Fully Functional Now</a:t>
             </a:r>
           </a:p>
           <a:p>
@@ -6053,7 +6906,7 @@
               <a:spcBef>
                 <a:spcPts val="400"/>
               </a:spcBef>
-              <a:defRPr sz="1300">
+              <a:defRPr sz="1200">
                 <a:solidFill>
                   <a:srgbClr val="BFB9AF"/>
                 </a:solidFill>
@@ -6061,27 +6914,27 @@
               </a:defRPr>
             </a:pPr>
             <a:r>
-              <a:t>Comprehensive automated test suite guarantees zero regressions.</a:t>
-            </a:r>
-          </a:p>
-        </p:txBody>
-      </p:sp>
-      <p:sp>
-        <p:nvSpPr>
-          <p:cNvPr id="10" name="Rounded Rectangle 9"/>
+              <a:t>Web console, CLI, and C-engine are compiled and running live right now.</a:t>
+            </a:r>
+          </a:p>
+        </p:txBody>
+      </p:sp>
+      <p:sp>
+        <p:nvSpPr>
+          <p:cNvPr id="11" name="Rounded Rectangle 10"/>
           <p:cNvSpPr/>
           <p:nvPr/>
         </p:nvSpPr>
         <p:spPr>
           <a:xfrm>
-            <a:off x="7955279" y="3931920"/>
-            <a:ext cx="3291840" cy="1280160"/>
+            <a:off x="4480560" y="3931920"/>
+            <a:ext cx="3291840" cy="1325880"/>
           </a:xfrm>
           <a:prstGeom prst="roundRect">
             <a:avLst/>
           </a:prstGeom>
           <a:solidFill>
-            <a:srgbClr val="201B15"/>
+            <a:srgbClr val="1F1A14"/>
           </a:solidFill>
           <a:ln w="12700">
             <a:solidFill>
@@ -6113,14 +6966,14 @@
       </p:sp>
       <p:sp>
         <p:nvSpPr>
-          <p:cNvPr id="11" name="TextBox 10"/>
+          <p:cNvPr id="12" name="TextBox 11"/>
           <p:cNvSpPr txBox="1"/>
           <p:nvPr/>
         </p:nvSpPr>
         <p:spPr>
           <a:xfrm>
-            <a:off x="8183879" y="4069080"/>
-            <a:ext cx="2834640" cy="1005840"/>
+            <a:off x="4709160" y="4069080"/>
+            <a:ext cx="2834640" cy="1051560"/>
           </a:xfrm>
           <a:prstGeom prst="rect">
             <a:avLst/>
@@ -6134,15 +6987,31 @@
           <a:lstStyle/>
           <a:p>
             <a:pPr>
-              <a:defRPr sz="1600" b="1">
+              <a:defRPr sz="950" b="1">
                 <a:solidFill>
                   <a:srgbClr val="10B981"/>
                 </a:solidFill>
+                <a:latin typeface="Consolas"/>
+              </a:defRPr>
+            </a:pPr>
+            <a:r>
+              <a:t>[ 02 // QUALITY ]</a:t>
+            </a:r>
+          </a:p>
+          <a:p>
+            <a:pPr>
+              <a:spcBef>
+                <a:spcPts val="200"/>
+              </a:spcBef>
+              <a:defRPr sz="1550" b="1">
+                <a:solidFill>
+                  <a:srgbClr val="FAF8F5"/>
+                </a:solidFill>
                 <a:latin typeface="Segoe UI"/>
               </a:defRPr>
             </a:pPr>
             <a:r>
-              <a:t>✓ Open Source on GitHub</a:t>
+              <a:t>62 / 62 Tests Green</a:t>
             </a:r>
           </a:p>
           <a:p>
@@ -6150,7 +7019,7 @@
               <a:spcBef>
                 <a:spcPts val="400"/>
               </a:spcBef>
-              <a:defRPr sz="1300">
+              <a:defRPr sz="1200">
                 <a:solidFill>
                   <a:srgbClr val="BFB9AF"/>
                 </a:solidFill>
@@ -6158,27 +7027,27 @@
               </a:defRPr>
             </a:pPr>
             <a:r>
-              <a:t>Clean, documented, production-ready codebase ready for inspection.</a:t>
-            </a:r>
-          </a:p>
-        </p:txBody>
-      </p:sp>
-      <p:sp>
-        <p:nvSpPr>
-          <p:cNvPr id="12" name="Rounded Rectangle 11"/>
+              <a:t>Comprehensive automated test suite guarantees zero regressions.</a:t>
+            </a:r>
+          </a:p>
+        </p:txBody>
+      </p:sp>
+      <p:sp>
+        <p:nvSpPr>
+          <p:cNvPr id="13" name="Rounded Rectangle 12"/>
           <p:cNvSpPr/>
           <p:nvPr/>
         </p:nvSpPr>
         <p:spPr>
           <a:xfrm>
-            <a:off x="1005840" y="5394960"/>
-            <a:ext cx="10180015" cy="685800"/>
+            <a:off x="7955279" y="3931920"/>
+            <a:ext cx="3291840" cy="1325880"/>
           </a:xfrm>
           <a:prstGeom prst="roundRect">
             <a:avLst/>
           </a:prstGeom>
           <a:solidFill>
-            <a:srgbClr val="201B15"/>
+            <a:srgbClr val="1F1A14"/>
           </a:solidFill>
           <a:ln w="12700">
             <a:solidFill>
@@ -6210,7 +7079,120 @@
       </p:sp>
       <p:sp>
         <p:nvSpPr>
-          <p:cNvPr id="13" name="TextBox 12"/>
+          <p:cNvPr id="14" name="TextBox 13"/>
+          <p:cNvSpPr txBox="1"/>
+          <p:nvPr/>
+        </p:nvSpPr>
+        <p:spPr>
+          <a:xfrm>
+            <a:off x="8183879" y="4069080"/>
+            <a:ext cx="2834640" cy="1051560"/>
+          </a:xfrm>
+          <a:prstGeom prst="rect">
+            <a:avLst/>
+          </a:prstGeom>
+          <a:noFill/>
+        </p:spPr>
+        <p:txBody>
+          <a:bodyPr wrap="square" lIns="0" tIns="0" rIns="0" bIns="0">
+            <a:spAutoFit/>
+          </a:bodyPr>
+          <a:lstStyle/>
+          <a:p>
+            <a:pPr>
+              <a:defRPr sz="950" b="1">
+                <a:solidFill>
+                  <a:srgbClr val="10B981"/>
+                </a:solidFill>
+                <a:latin typeface="Consolas"/>
+              </a:defRPr>
+            </a:pPr>
+            <a:r>
+              <a:t>[ 03 // OPEN CODE ]</a:t>
+            </a:r>
+          </a:p>
+          <a:p>
+            <a:pPr>
+              <a:spcBef>
+                <a:spcPts val="200"/>
+              </a:spcBef>
+              <a:defRPr sz="1550" b="1">
+                <a:solidFill>
+                  <a:srgbClr val="FAF8F5"/>
+                </a:solidFill>
+                <a:latin typeface="Segoe UI"/>
+              </a:defRPr>
+            </a:pPr>
+            <a:r>
+              <a:t>Verified on GitHub</a:t>
+            </a:r>
+          </a:p>
+          <a:p>
+            <a:pPr>
+              <a:spcBef>
+                <a:spcPts val="400"/>
+              </a:spcBef>
+              <a:defRPr sz="1200">
+                <a:solidFill>
+                  <a:srgbClr val="BFB9AF"/>
+                </a:solidFill>
+                <a:latin typeface="Segoe UI"/>
+              </a:defRPr>
+            </a:pPr>
+            <a:r>
+              <a:t>Clean, documented, production-ready codebase ready for inspection.</a:t>
+            </a:r>
+          </a:p>
+        </p:txBody>
+      </p:sp>
+      <p:sp>
+        <p:nvSpPr>
+          <p:cNvPr id="15" name="Rounded Rectangle 14"/>
+          <p:cNvSpPr/>
+          <p:nvPr/>
+        </p:nvSpPr>
+        <p:spPr>
+          <a:xfrm>
+            <a:off x="1005840" y="5394960"/>
+            <a:ext cx="10180015" cy="685800"/>
+          </a:xfrm>
+          <a:prstGeom prst="roundRect">
+            <a:avLst/>
+          </a:prstGeom>
+          <a:solidFill>
+            <a:srgbClr val="1F1A14"/>
+          </a:solidFill>
+          <a:ln w="12700">
+            <a:solidFill>
+              <a:srgbClr val="322B22"/>
+            </a:solidFill>
+          </a:ln>
+        </p:spPr>
+        <p:style>
+          <a:lnRef idx="1">
+            <a:schemeClr val="accent1"/>
+          </a:lnRef>
+          <a:fillRef idx="3">
+            <a:schemeClr val="accent1"/>
+          </a:fillRef>
+          <a:effectRef idx="2">
+            <a:schemeClr val="accent1"/>
+          </a:effectRef>
+          <a:fontRef idx="minor">
+            <a:schemeClr val="lt1"/>
+          </a:fontRef>
+        </p:style>
+        <p:txBody>
+          <a:bodyPr rtlCol="0" anchor="ctr"/>
+          <a:lstStyle/>
+          <a:p>
+            <a:pPr algn="ctr"/>
+          </a:p>
+        </p:txBody>
+      </p:sp>
+      <p:sp>
+        <p:nvSpPr>
+          <p:cNvPr id="16" name="TextBox 15"/>
           <p:cNvSpPr txBox="1"/>
           <p:nvPr/>
         </p:nvSpPr>
@@ -6253,7 +7235,7 @@
       </p:sp>
       <p:sp>
         <p:nvSpPr>
-          <p:cNvPr id="14" name="Rectangle 13"/>
+          <p:cNvPr id="17" name="Rectangle 16"/>
           <p:cNvSpPr/>
           <p:nvPr/>
         </p:nvSpPr>
@@ -6296,7 +7278,7 @@
       </p:sp>
       <p:sp>
         <p:nvSpPr>
-          <p:cNvPr id="15" name="TextBox 14"/>
+          <p:cNvPr id="18" name="TextBox 17"/>
           <p:cNvSpPr txBox="1"/>
           <p:nvPr/>
         </p:nvSpPr>
@@ -6323,7 +7305,7 @@
                 </a:solidFill>
                 <a:latin typeface="Consolas"/>
               </a:rPr>
-              <a:t>NULLIFY  •  AUTONOMOUS CYBER DEFENSE</a:t>
+              <a:t>EGATE  ●  NULLIFY AUTONOMOUS DEFENSE</a:t>
             </a:r>
             <a:r>
               <a:rPr i="1" sz="1000">
@@ -6341,7 +7323,7 @@
                 </a:solidFill>
                 <a:latin typeface="Consolas"/>
               </a:rPr>
-              <a:t>11 / 11</a:t>
+              <a:t>12 / 12</a:t>
             </a:r>
           </a:p>
         </p:txBody>
@@ -6438,7 +7420,7 @@
               </a:defRPr>
             </a:pPr>
             <a:r>
-              <a:t>●  THE PROBLEM</a:t>
+              <a:t>●  BRAND IDENTITY</a:t>
             </a:r>
           </a:p>
         </p:txBody>
@@ -6468,13 +7450,13 @@
             <a:pPr>
               <a:defRPr sz="3200" b="1">
                 <a:solidFill>
-                  <a:srgbClr val="15120E"/>
+                  <a:srgbClr val="14110D"/>
                 </a:solidFill>
                 <a:latin typeface="Georgia"/>
               </a:defRPr>
             </a:pPr>
             <a:r>
-              <a:t>Traditional Antivirus Can't Keep Up</a:t>
+              <a:t>EGATE &amp; Nullify: Built for Sovereign Security</a:t>
             </a:r>
           </a:p>
         </p:txBody>
@@ -6488,7 +7470,7 @@
         <p:spPr>
           <a:xfrm>
             <a:off x="822960" y="1645920"/>
-            <a:ext cx="3383280" cy="3657600"/>
+            <a:ext cx="4389120" cy="4434840"/>
           </a:xfrm>
           <a:prstGeom prst="roundRect">
             <a:avLst/>
@@ -6524,16 +7506,40 @@
           </a:p>
         </p:txBody>
       </p:sp>
-      <p:sp>
-        <p:nvSpPr>
-          <p:cNvPr id="6" name="TextBox 5"/>
+      <p:pic>
+        <p:nvPicPr>
+          <p:cNvPr id="6" name="Picture 5" descr="egate_logo.png"/>
+          <p:cNvPicPr>
+            <a:picLocks noChangeAspect="1"/>
+          </p:cNvPicPr>
+          <p:nvPr/>
+        </p:nvPicPr>
+        <p:blipFill>
+          <a:blip r:embed="rId2"/>
+          <a:stretch>
+            <a:fillRect/>
+          </a:stretch>
+        </p:blipFill>
+        <p:spPr>
+          <a:xfrm>
+            <a:off x="1188720" y="2011680"/>
+            <a:ext cx="3657600" cy="2828441"/>
+          </a:xfrm>
+          <a:prstGeom prst="rect">
+            <a:avLst/>
+          </a:prstGeom>
+        </p:spPr>
+      </p:pic>
+      <p:sp>
+        <p:nvSpPr>
+          <p:cNvPr id="7" name="TextBox 6"/>
           <p:cNvSpPr txBox="1"/>
           <p:nvPr/>
         </p:nvSpPr>
         <p:spPr>
           <a:xfrm>
-            <a:off x="1097280" y="1828800"/>
-            <a:ext cx="2834640" cy="640080"/>
+            <a:off x="1097280" y="5120640"/>
+            <a:ext cx="3840480" cy="731520"/>
           </a:xfrm>
           <a:prstGeom prst="rect">
             <a:avLst/>
@@ -6546,68 +7552,29 @@
           </a:bodyPr>
           <a:lstStyle/>
           <a:p>
-            <a:pPr>
-              <a:defRPr sz="3800" b="1">
-                <a:solidFill>
-                  <a:srgbClr val="DC2626"/>
-                </a:solidFill>
-                <a:latin typeface="Georgia"/>
-              </a:defRPr>
-            </a:pPr>
-            <a:r>
-              <a:t>01</a:t>
-            </a:r>
-          </a:p>
-        </p:txBody>
-      </p:sp>
-      <p:sp>
-        <p:nvSpPr>
-          <p:cNvPr id="7" name="TextBox 6"/>
-          <p:cNvSpPr txBox="1"/>
-          <p:nvPr/>
-        </p:nvSpPr>
-        <p:spPr>
-          <a:xfrm>
-            <a:off x="1097280" y="2514600"/>
-            <a:ext cx="2834640" cy="2011680"/>
-          </a:xfrm>
-          <a:prstGeom prst="rect">
-            <a:avLst/>
-          </a:prstGeom>
-          <a:noFill/>
-        </p:spPr>
-        <p:txBody>
-          <a:bodyPr wrap="square" lIns="0" tIns="0" rIns="0" bIns="0">
-            <a:spAutoFit/>
-          </a:bodyPr>
-          <a:lstStyle/>
-          <a:p>
-            <a:pPr>
-              <a:defRPr sz="1800" b="1">
-                <a:solidFill>
-                  <a:srgbClr val="15120E"/>
+            <a:pPr algn="ctr">
+              <a:defRPr sz="1100" b="1">
+                <a:solidFill>
+                  <a:srgbClr val="059669"/>
+                </a:solidFill>
+                <a:latin typeface="Consolas"/>
+              </a:defRPr>
+            </a:pPr>
+            <a:r>
+              <a:t>EGATE CYBERSECURITY GATEWAY</a:t>
+            </a:r>
+          </a:p>
+          <a:p>
+            <a:pPr algn="ctr">
+              <a:defRPr sz="1050">
+                <a:solidFill>
+                  <a:srgbClr val="555048"/>
                 </a:solidFill>
                 <a:latin typeface="Segoe UI"/>
               </a:defRPr>
             </a:pPr>
             <a:r>
-              <a:t>New Malware is Invisible</a:t>
-            </a:r>
-          </a:p>
-          <a:p>
-            <a:pPr>
-              <a:spcBef>
-                <a:spcPts val="800"/>
-              </a:spcBef>
-              <a:defRPr sz="1400">
-                <a:solidFill>
-                  <a:srgbClr val="555048"/>
-                </a:solidFill>
-                <a:latin typeface="Segoe UI"/>
-              </a:defRPr>
-            </a:pPr>
-            <a:r>
-              <a:t>Traditional antivirus checks for known hashes. But attackers constantly change their code, so signatures fail on day one.</a:t>
+              <a:t>Next-Generation Autonomous Threat Defense</a:t>
             </a:r>
           </a:p>
         </p:txBody>
@@ -6620,61 +7587,8 @@
         </p:nvSpPr>
         <p:spPr>
           <a:xfrm>
-            <a:off x="1097280" y="4754880"/>
-            <a:ext cx="2834640" cy="347472"/>
-          </a:xfrm>
-          <a:prstGeom prst="roundRect">
-            <a:avLst/>
-          </a:prstGeom>
-          <a:solidFill>
-            <a:srgbClr val="FEF2F2"/>
-          </a:solidFill>
-          <a:ln>
-            <a:noFill/>
-          </a:ln>
-        </p:spPr>
-        <p:style>
-          <a:lnRef idx="1">
-            <a:schemeClr val="accent1"/>
-          </a:lnRef>
-          <a:fillRef idx="3">
-            <a:schemeClr val="accent1"/>
-          </a:fillRef>
-          <a:effectRef idx="2">
-            <a:schemeClr val="accent1"/>
-          </a:effectRef>
-          <a:fontRef idx="minor">
-            <a:schemeClr val="lt1"/>
-          </a:fontRef>
-        </p:style>
-        <p:txBody>
-          <a:bodyPr rtlCol="0" anchor="ctr" lIns="0" tIns="0" rIns="0" bIns="0"/>
-          <a:lstStyle/>
-          <a:p>
-            <a:pPr algn="ctr">
-              <a:defRPr sz="900" b="1">
-                <a:solidFill>
-                  <a:srgbClr val="DC2626"/>
-                </a:solidFill>
-                <a:latin typeface="Consolas"/>
-              </a:defRPr>
-            </a:pPr>
-            <a:r>
-              <a:t>450,000+ new attacks every day</a:t>
-            </a:r>
-          </a:p>
-        </p:txBody>
-      </p:sp>
-      <p:sp>
-        <p:nvSpPr>
-          <p:cNvPr id="9" name="Rounded Rectangle 8"/>
-          <p:cNvSpPr/>
-          <p:nvPr/>
-        </p:nvSpPr>
-        <p:spPr>
-          <a:xfrm>
-            <a:off x="4434840" y="1645920"/>
-            <a:ext cx="3383280" cy="3657600"/>
+            <a:off x="5486400" y="1645920"/>
+            <a:ext cx="5882335" cy="4434840"/>
           </a:xfrm>
           <a:prstGeom prst="roundRect">
             <a:avLst/>
@@ -6712,50 +7626,14 @@
       </p:sp>
       <p:sp>
         <p:nvSpPr>
-          <p:cNvPr id="10" name="TextBox 9"/>
+          <p:cNvPr id="9" name="TextBox 8"/>
           <p:cNvSpPr txBox="1"/>
           <p:nvPr/>
         </p:nvSpPr>
         <p:spPr>
           <a:xfrm>
-            <a:off x="4709160" y="1828800"/>
-            <a:ext cx="2834640" cy="640080"/>
-          </a:xfrm>
-          <a:prstGeom prst="rect">
-            <a:avLst/>
-          </a:prstGeom>
-          <a:noFill/>
-        </p:spPr>
-        <p:txBody>
-          <a:bodyPr wrap="none" lIns="0" tIns="0" rIns="0" bIns="0">
-            <a:spAutoFit/>
-          </a:bodyPr>
-          <a:lstStyle/>
-          <a:p>
-            <a:pPr>
-              <a:defRPr sz="3800" b="1">
-                <a:solidFill>
-                  <a:srgbClr val="D97706"/>
-                </a:solidFill>
-                <a:latin typeface="Georgia"/>
-              </a:defRPr>
-            </a:pPr>
-            <a:r>
-              <a:t>02</a:t>
-            </a:r>
-          </a:p>
-        </p:txBody>
-      </p:sp>
-      <p:sp>
-        <p:nvSpPr>
-          <p:cNvPr id="11" name="TextBox 10"/>
-          <p:cNvSpPr txBox="1"/>
-          <p:nvPr/>
-        </p:nvSpPr>
-        <p:spPr>
-          <a:xfrm>
-            <a:off x="4709160" y="2514600"/>
-            <a:ext cx="2834640" cy="2011680"/>
+            <a:off x="5806440" y="1920240"/>
+            <a:ext cx="5257800" cy="3931920"/>
           </a:xfrm>
           <a:prstGeom prst="rect">
             <a:avLst/>
@@ -6769,23 +7647,23 @@
           <a:lstStyle/>
           <a:p>
             <a:pPr>
-              <a:defRPr sz="1800" b="1">
-                <a:solidFill>
-                  <a:srgbClr val="15120E"/>
+              <a:defRPr sz="1550" b="1">
+                <a:solidFill>
+                  <a:srgbClr val="14110D"/>
                 </a:solidFill>
                 <a:latin typeface="Segoe UI"/>
               </a:defRPr>
             </a:pPr>
             <a:r>
-              <a:t>Sandboxes are Too Slow</a:t>
+              <a:t>[ 01 ]  THE GATEWAY: EGATE</a:t>
             </a:r>
           </a:p>
           <a:p>
             <a:pPr>
               <a:spcBef>
-                <a:spcPts val="800"/>
+                <a:spcPts val="400"/>
               </a:spcBef>
-              <a:defRPr sz="1400">
+              <a:defRPr sz="1300">
                 <a:solidFill>
                   <a:srgbClr val="555048"/>
                 </a:solidFill>
@@ -6793,185 +7671,31 @@
               </a:defRPr>
             </a:pPr>
             <a:r>
-              <a:t>Testing a file in a virtual machine takes 5 to 15 minutes. Firewalls and email filters cannot put traffic on hold that long.</a:t>
-            </a:r>
-          </a:p>
-        </p:txBody>
-      </p:sp>
-      <p:sp>
-        <p:nvSpPr>
-          <p:cNvPr id="12" name="Rounded Rectangle 11"/>
-          <p:cNvSpPr/>
-          <p:nvPr/>
-        </p:nvSpPr>
-        <p:spPr>
-          <a:xfrm>
-            <a:off x="4709160" y="4754880"/>
-            <a:ext cx="2834640" cy="347472"/>
-          </a:xfrm>
-          <a:prstGeom prst="roundRect">
-            <a:avLst/>
-          </a:prstGeom>
-          <a:solidFill>
-            <a:srgbClr val="FFFBEB"/>
-          </a:solidFill>
-          <a:ln>
-            <a:noFill/>
-          </a:ln>
-        </p:spPr>
-        <p:style>
-          <a:lnRef idx="1">
-            <a:schemeClr val="accent1"/>
-          </a:lnRef>
-          <a:fillRef idx="3">
-            <a:schemeClr val="accent1"/>
-          </a:fillRef>
-          <a:effectRef idx="2">
-            <a:schemeClr val="accent1"/>
-          </a:effectRef>
-          <a:fontRef idx="minor">
-            <a:schemeClr val="lt1"/>
-          </a:fontRef>
-        </p:style>
-        <p:txBody>
-          <a:bodyPr rtlCol="0" anchor="ctr" lIns="0" tIns="0" rIns="0" bIns="0"/>
-          <a:lstStyle/>
-          <a:p>
-            <a:pPr algn="ctr">
-              <a:defRPr sz="900" b="1">
-                <a:solidFill>
-                  <a:srgbClr val="D97706"/>
-                </a:solidFill>
-                <a:latin typeface="Consolas"/>
-              </a:defRPr>
-            </a:pPr>
-            <a:r>
-              <a:t>15-minute delay is dangerous</a:t>
-            </a:r>
-          </a:p>
-        </p:txBody>
-      </p:sp>
-      <p:sp>
-        <p:nvSpPr>
-          <p:cNvPr id="13" name="Rounded Rectangle 12"/>
-          <p:cNvSpPr/>
-          <p:nvPr/>
-        </p:nvSpPr>
-        <p:spPr>
-          <a:xfrm>
-            <a:off x="8046720" y="1645920"/>
-            <a:ext cx="3383280" cy="3657600"/>
-          </a:xfrm>
-          <a:prstGeom prst="roundRect">
-            <a:avLst/>
-          </a:prstGeom>
-          <a:solidFill>
-            <a:srgbClr val="FFFFFF"/>
-          </a:solidFill>
-          <a:ln w="12700">
-            <a:solidFill>
-              <a:srgbClr val="E2DCD2"/>
-            </a:solidFill>
-          </a:ln>
-        </p:spPr>
-        <p:style>
-          <a:lnRef idx="1">
-            <a:schemeClr val="accent1"/>
-          </a:lnRef>
-          <a:fillRef idx="3">
-            <a:schemeClr val="accent1"/>
-          </a:fillRef>
-          <a:effectRef idx="2">
-            <a:schemeClr val="accent1"/>
-          </a:effectRef>
-          <a:fontRef idx="minor">
-            <a:schemeClr val="lt1"/>
-          </a:fontRef>
-        </p:style>
-        <p:txBody>
-          <a:bodyPr rtlCol="0" anchor="ctr"/>
-          <a:lstStyle/>
-          <a:p>
-            <a:pPr algn="ctr"/>
-          </a:p>
-        </p:txBody>
-      </p:sp>
-      <p:sp>
-        <p:nvSpPr>
-          <p:cNvPr id="14" name="TextBox 13"/>
-          <p:cNvSpPr txBox="1"/>
-          <p:nvPr/>
-        </p:nvSpPr>
-        <p:spPr>
-          <a:xfrm>
-            <a:off x="8321040" y="1828800"/>
-            <a:ext cx="2834640" cy="640080"/>
-          </a:xfrm>
-          <a:prstGeom prst="rect">
-            <a:avLst/>
-          </a:prstGeom>
-          <a:noFill/>
-        </p:spPr>
-        <p:txBody>
-          <a:bodyPr wrap="none" lIns="0" tIns="0" rIns="0" bIns="0">
-            <a:spAutoFit/>
-          </a:bodyPr>
-          <a:lstStyle/>
-          <a:p>
-            <a:pPr>
-              <a:defRPr sz="3800" b="1">
-                <a:solidFill>
-                  <a:srgbClr val="2563EB"/>
-                </a:solidFill>
-                <a:latin typeface="Georgia"/>
-              </a:defRPr>
-            </a:pPr>
-            <a:r>
-              <a:t>03</a:t>
-            </a:r>
-          </a:p>
-        </p:txBody>
-      </p:sp>
-      <p:sp>
-        <p:nvSpPr>
-          <p:cNvPr id="15" name="TextBox 14"/>
-          <p:cNvSpPr txBox="1"/>
-          <p:nvPr/>
-        </p:nvSpPr>
-        <p:spPr>
-          <a:xfrm>
-            <a:off x="8321040" y="2514600"/>
-            <a:ext cx="2834640" cy="2011680"/>
-          </a:xfrm>
-          <a:prstGeom prst="rect">
-            <a:avLst/>
-          </a:prstGeom>
-          <a:noFill/>
-        </p:spPr>
-        <p:txBody>
-          <a:bodyPr wrap="square" lIns="0" tIns="0" rIns="0" bIns="0">
-            <a:spAutoFit/>
-          </a:bodyPr>
-          <a:lstStyle/>
-          <a:p>
-            <a:pPr>
-              <a:defRPr sz="1800" b="1">
-                <a:solidFill>
-                  <a:srgbClr val="15120E"/>
-                </a:solidFill>
-                <a:latin typeface="Segoe UI"/>
-              </a:defRPr>
-            </a:pPr>
-            <a:r>
-              <a:t>Security Tools Crash</a:t>
+              <a:t>The zero-trust gatekeeper standing at the network perimeter. Every executable, script, and document must pass through the EGATE before execution is permitted.</a:t>
             </a:r>
           </a:p>
           <a:p>
             <a:pPr>
               <a:spcBef>
-                <a:spcPts val="800"/>
+                <a:spcPts val="1800"/>
               </a:spcBef>
-              <a:defRPr sz="1400">
+              <a:defRPr sz="1550" b="1">
+                <a:solidFill>
+                  <a:srgbClr val="14110D"/>
+                </a:solidFill>
+                <a:latin typeface="Segoe UI"/>
+              </a:defRPr>
+            </a:pPr>
+            <a:r>
+              <a:t>[ 02 ]  THE ENGINE: NULLIFY</a:t>
+            </a:r>
+          </a:p>
+          <a:p>
+            <a:pPr>
+              <a:spcBef>
+                <a:spcPts val="400"/>
+              </a:spcBef>
+              <a:defRPr sz="1300">
                 <a:solidFill>
                   <a:srgbClr val="555048"/>
                 </a:solidFill>
@@ -6979,155 +7703,46 @@
               </a:defRPr>
             </a:pPr>
             <a:r>
-              <a:t>Most open-source security tools are written in Python. When thousands of files hit at once, they lag, freeze, and run out of memory.</a:t>
-            </a:r>
-          </a:p>
-        </p:txBody>
-      </p:sp>
-      <p:sp>
-        <p:nvSpPr>
-          <p:cNvPr id="16" name="Rounded Rectangle 15"/>
-          <p:cNvSpPr/>
-          <p:nvPr/>
-        </p:nvSpPr>
-        <p:spPr>
-          <a:xfrm>
-            <a:off x="8321040" y="4754880"/>
-            <a:ext cx="2834640" cy="347472"/>
-          </a:xfrm>
-          <a:prstGeom prst="roundRect">
-            <a:avLst/>
-          </a:prstGeom>
-          <a:solidFill>
-            <a:srgbClr val="EFF6FF"/>
-          </a:solidFill>
-          <a:ln>
-            <a:noFill/>
-          </a:ln>
-        </p:spPr>
-        <p:style>
-          <a:lnRef idx="1">
-            <a:schemeClr val="accent1"/>
-          </a:lnRef>
-          <a:fillRef idx="3">
-            <a:schemeClr val="accent1"/>
-          </a:fillRef>
-          <a:effectRef idx="2">
-            <a:schemeClr val="accent1"/>
-          </a:effectRef>
-          <a:fontRef idx="minor">
-            <a:schemeClr val="lt1"/>
-          </a:fontRef>
-        </p:style>
-        <p:txBody>
-          <a:bodyPr rtlCol="0" anchor="ctr" lIns="0" tIns="0" rIns="0" bIns="0"/>
-          <a:lstStyle/>
-          <a:p>
-            <a:pPr algn="ctr">
-              <a:defRPr sz="900" b="1">
-                <a:solidFill>
-                  <a:srgbClr val="2563EB"/>
-                </a:solidFill>
-                <a:latin typeface="Consolas"/>
-              </a:defRPr>
-            </a:pPr>
-            <a:r>
-              <a:t>Python runtime bottlenecks</a:t>
-            </a:r>
-          </a:p>
-        </p:txBody>
-      </p:sp>
-      <p:sp>
-        <p:nvSpPr>
-          <p:cNvPr id="17" name="Rounded Rectangle 16"/>
-          <p:cNvSpPr/>
-          <p:nvPr/>
-        </p:nvSpPr>
-        <p:spPr>
-          <a:xfrm>
-            <a:off x="822960" y="5486400"/>
-            <a:ext cx="10545775" cy="594360"/>
-          </a:xfrm>
-          <a:prstGeom prst="roundRect">
-            <a:avLst/>
-          </a:prstGeom>
-          <a:solidFill>
-            <a:srgbClr val="F5F1EA"/>
-          </a:solidFill>
-          <a:ln w="12700">
-            <a:solidFill>
-              <a:srgbClr val="E2DCD2"/>
-            </a:solidFill>
-          </a:ln>
-        </p:spPr>
-        <p:style>
-          <a:lnRef idx="1">
-            <a:schemeClr val="accent1"/>
-          </a:lnRef>
-          <a:fillRef idx="3">
-            <a:schemeClr val="accent1"/>
-          </a:fillRef>
-          <a:effectRef idx="2">
-            <a:schemeClr val="accent1"/>
-          </a:effectRef>
-          <a:fontRef idx="minor">
-            <a:schemeClr val="lt1"/>
-          </a:fontRef>
-        </p:style>
-        <p:txBody>
-          <a:bodyPr rtlCol="0" anchor="ctr"/>
-          <a:lstStyle/>
-          <a:p>
-            <a:pPr algn="ctr"/>
-          </a:p>
-        </p:txBody>
-      </p:sp>
-      <p:sp>
-        <p:nvSpPr>
-          <p:cNvPr id="18" name="TextBox 17"/>
-          <p:cNvSpPr txBox="1"/>
-          <p:nvPr/>
-        </p:nvSpPr>
-        <p:spPr>
-          <a:xfrm>
-            <a:off x="1051560" y="5596128"/>
-            <a:ext cx="10058400" cy="365760"/>
-          </a:xfrm>
-          <a:prstGeom prst="rect">
-            <a:avLst/>
-          </a:prstGeom>
-          <a:noFill/>
-        </p:spPr>
-        <p:txBody>
-          <a:bodyPr wrap="none" lIns="0" tIns="0" rIns="0" bIns="0">
-            <a:spAutoFit/>
-          </a:bodyPr>
-          <a:lstStyle/>
-          <a:p>
-            <a:r>
-              <a:rPr b="1" sz="1200">
-                <a:solidFill>
-                  <a:srgbClr val="DC2626"/>
-                </a:solidFill>
-                <a:latin typeface="Consolas"/>
-              </a:rPr>
-              <a:t>THE RESULT: </a:t>
-            </a:r>
-            <a:r>
-              <a:rPr sz="1350">
-                <a:solidFill>
-                  <a:srgbClr val="15120E"/>
+              <a:t>The autonomous algorithmic brain. Built to reduce threat dwell time, attacker lateral movement, and incident triage latency to absolute zero (Nullify).</a:t>
+            </a:r>
+          </a:p>
+          <a:p>
+            <a:pPr>
+              <a:spcBef>
+                <a:spcPts val="1800"/>
+              </a:spcBef>
+              <a:defRPr sz="1550" b="1">
+                <a:solidFill>
+                  <a:srgbClr val="14110D"/>
                 </a:solidFill>
                 <a:latin typeface="Segoe UI"/>
-              </a:rPr>
-              <a:t>Organizations are forced to choose between fast but blind antivirus, or slow 15-minute sandboxes.</a:t>
-            </a:r>
-          </a:p>
-        </p:txBody>
-      </p:sp>
-      <p:sp>
-        <p:nvSpPr>
-          <p:cNvPr id="19" name="Rectangle 18"/>
+              </a:defRPr>
+            </a:pPr>
+            <a:r>
+              <a:t>[ 03 ]  THE VISUAL SYMBOLOGY</a:t>
+            </a:r>
+          </a:p>
+          <a:p>
+            <a:pPr>
+              <a:spcBef>
+                <a:spcPts val="400"/>
+              </a:spcBef>
+              <a:defRPr sz="1300">
+                <a:solidFill>
+                  <a:srgbClr val="555048"/>
+                </a:solidFill>
+                <a:latin typeface="Segoe UI"/>
+              </a:defRPr>
+            </a:pPr>
+            <a:r>
+              <a:t>Emerald Green represents active immunity and verified execution health. Obsidian Charcoal represents air-gapped sovereign privacy. Clean geometry represents mathematical certainty across 2,381 feature dimensions.</a:t>
+            </a:r>
+          </a:p>
+        </p:txBody>
+      </p:sp>
+      <p:sp>
+        <p:nvSpPr>
+          <p:cNvPr id="10" name="Rectangle 9"/>
           <p:cNvSpPr/>
           <p:nvPr/>
         </p:nvSpPr>
@@ -7170,7 +7785,7 @@
       </p:sp>
       <p:sp>
         <p:nvSpPr>
-          <p:cNvPr id="20" name="TextBox 19"/>
+          <p:cNvPr id="11" name="TextBox 10"/>
           <p:cNvSpPr txBox="1"/>
           <p:nvPr/>
         </p:nvSpPr>
@@ -7197,7 +7812,7 @@
                 </a:solidFill>
                 <a:latin typeface="Consolas"/>
               </a:rPr>
-              <a:t>NULLIFY  •  AUTONOMOUS CYBER DEFENSE</a:t>
+              <a:t>EGATE  ●  NULLIFY AUTONOMOUS DEFENSE</a:t>
             </a:r>
             <a:r>
               <a:rPr i="1" sz="1000">
@@ -7215,7 +7830,7 @@
                 </a:solidFill>
                 <a:latin typeface="Consolas"/>
               </a:rPr>
-              <a:t>02 / 11</a:t>
+              <a:t>02 / 12</a:t>
             </a:r>
           </a:p>
         </p:txBody>
@@ -7312,7 +7927,7 @@
               </a:defRPr>
             </a:pPr>
             <a:r>
-              <a:t>●  THE SOLUTION</a:t>
+              <a:t>●  THE PROBLEM</a:t>
             </a:r>
           </a:p>
         </p:txBody>
@@ -7342,13 +7957,13 @@
             <a:pPr>
               <a:defRPr sz="3200" b="1">
                 <a:solidFill>
-                  <a:srgbClr val="15120E"/>
+                  <a:srgbClr val="14110D"/>
                 </a:solidFill>
                 <a:latin typeface="Georgia"/>
               </a:defRPr>
             </a:pPr>
             <a:r>
-              <a:t>Nullify: Real-Time Autonomous Defense</a:t>
+              <a:t>Traditional Antivirus Can't Keep Up</a:t>
             </a:r>
           </a:p>
         </p:txBody>
@@ -7362,7 +7977,7 @@
         <p:spPr>
           <a:xfrm>
             <a:off x="822960" y="1645920"/>
-            <a:ext cx="6217920" cy="4434840"/>
+            <a:ext cx="3383280" cy="3657600"/>
           </a:xfrm>
           <a:prstGeom prst="roundRect">
             <a:avLst/>
@@ -7400,14 +8015,67 @@
       </p:sp>
       <p:sp>
         <p:nvSpPr>
-          <p:cNvPr id="6" name="TextBox 5"/>
+          <p:cNvPr id="6" name="Rounded Rectangle 5"/>
+          <p:cNvSpPr/>
+          <p:nvPr/>
+        </p:nvSpPr>
+        <p:spPr>
+          <a:xfrm>
+            <a:off x="1097280" y="1874519"/>
+            <a:ext cx="2011680" cy="320040"/>
+          </a:xfrm>
+          <a:prstGeom prst="roundRect">
+            <a:avLst/>
+          </a:prstGeom>
+          <a:solidFill>
+            <a:srgbClr val="FEF2F2"/>
+          </a:solidFill>
+          <a:ln>
+            <a:noFill/>
+          </a:ln>
+        </p:spPr>
+        <p:style>
+          <a:lnRef idx="1">
+            <a:schemeClr val="accent1"/>
+          </a:lnRef>
+          <a:fillRef idx="3">
+            <a:schemeClr val="accent1"/>
+          </a:fillRef>
+          <a:effectRef idx="2">
+            <a:schemeClr val="accent1"/>
+          </a:effectRef>
+          <a:fontRef idx="minor">
+            <a:schemeClr val="lt1"/>
+          </a:fontRef>
+        </p:style>
+        <p:txBody>
+          <a:bodyPr rtlCol="0" anchor="ctr" lIns="0" tIns="0" rIns="0" bIns="0"/>
+          <a:lstStyle/>
+          <a:p>
+            <a:pPr algn="ctr">
+              <a:defRPr sz="950" b="1">
+                <a:solidFill>
+                  <a:srgbClr val="DC2626"/>
+                </a:solidFill>
+                <a:latin typeface="Consolas"/>
+              </a:defRPr>
+            </a:pPr>
+            <a:r>
+              <a:t>[ CHALLENGE 01 ]</a:t>
+            </a:r>
+          </a:p>
+        </p:txBody>
+      </p:sp>
+      <p:sp>
+        <p:nvSpPr>
+          <p:cNvPr id="7" name="TextBox 6"/>
           <p:cNvSpPr txBox="1"/>
           <p:nvPr/>
         </p:nvSpPr>
         <p:spPr>
           <a:xfrm>
-            <a:off x="1097280" y="1920240"/>
-            <a:ext cx="5669280" cy="3931920"/>
+            <a:off x="1097280" y="2331720"/>
+            <a:ext cx="2834640" cy="2194560"/>
           </a:xfrm>
           <a:prstGeom prst="rect">
             <a:avLst/>
@@ -7423,21 +8091,21 @@
             <a:pPr>
               <a:defRPr sz="1800" b="1">
                 <a:solidFill>
-                  <a:srgbClr val="15120E"/>
+                  <a:srgbClr val="14110D"/>
                 </a:solidFill>
                 <a:latin typeface="Segoe UI"/>
               </a:defRPr>
             </a:pPr>
             <a:r>
-              <a:t>⚡ Sub-Millisecond Speed</a:t>
+              <a:t>New Malware is Invisible</a:t>
             </a:r>
           </a:p>
           <a:p>
             <a:pPr>
               <a:spcBef>
-                <a:spcPts val="400"/>
+                <a:spcPts val="800"/>
               </a:spcBef>
-              <a:defRPr sz="1400">
+              <a:defRPr sz="1350">
                 <a:solidFill>
                   <a:srgbClr val="555048"/>
                 </a:solidFill>
@@ -7445,85 +8113,74 @@
               </a:defRPr>
             </a:pPr>
             <a:r>
-              <a:t>We rewrote the heavy file inspection in pure C. It analyzes binaries in under 15 milliseconds — fast enough for live network firewalls.</a:t>
-            </a:r>
-          </a:p>
-          <a:p>
-            <a:pPr>
-              <a:spcBef>
-                <a:spcPts val="1800"/>
-              </a:spcBef>
-              <a:defRPr sz="1800" b="1">
-                <a:solidFill>
-                  <a:srgbClr val="15120E"/>
-                </a:solidFill>
-                <a:latin typeface="Segoe UI"/>
-              </a:defRPr>
-            </a:pPr>
-            <a:r>
-              <a:t>🤖 6 Specialized AI Agents</a:t>
-            </a:r>
-          </a:p>
-          <a:p>
-            <a:pPr>
-              <a:spcBef>
-                <a:spcPts val="400"/>
-              </a:spcBef>
-              <a:defRPr sz="1400">
-                <a:solidFill>
-                  <a:srgbClr val="555048"/>
-                </a:solidFill>
-                <a:latin typeface="Segoe UI"/>
-              </a:defRPr>
-            </a:pPr>
-            <a:r>
-              <a:t>Instead of a single clumsy chatbot, six focused agents handle file headers, code patterns, behavioral logs, and threat reasoning.</a:t>
-            </a:r>
-          </a:p>
-          <a:p>
-            <a:pPr>
-              <a:spcBef>
-                <a:spcPts val="1800"/>
-              </a:spcBef>
-              <a:defRPr sz="1800" b="1">
-                <a:solidFill>
-                  <a:srgbClr val="15120E"/>
-                </a:solidFill>
-                <a:latin typeface="Segoe UI"/>
-              </a:defRPr>
-            </a:pPr>
-            <a:r>
-              <a:t>🛡️ Instant Auto-Defense</a:t>
-            </a:r>
-          </a:p>
-          <a:p>
-            <a:pPr>
-              <a:spcBef>
-                <a:spcPts val="400"/>
-              </a:spcBef>
-              <a:defRPr sz="1400">
-                <a:solidFill>
-                  <a:srgbClr val="555048"/>
-                </a:solidFill>
-                <a:latin typeface="Segoe UI"/>
-              </a:defRPr>
-            </a:pPr>
-            <a:r>
-              <a:t>Nullify doesn't just alert you. It automatically writes an enterprise YARA rule so you can block the threat across your entire network.</a:t>
-            </a:r>
-          </a:p>
-        </p:txBody>
-      </p:sp>
-      <p:sp>
-        <p:nvSpPr>
-          <p:cNvPr id="7" name="Rounded Rectangle 6"/>
+              <a:t>Traditional antivirus checks for known hashes. But attackers constantly change their code, so signature blacklists fail on day one.</a:t>
+            </a:r>
+          </a:p>
+        </p:txBody>
+      </p:sp>
+      <p:sp>
+        <p:nvSpPr>
+          <p:cNvPr id="8" name="Rounded Rectangle 7"/>
           <p:cNvSpPr/>
           <p:nvPr/>
         </p:nvSpPr>
         <p:spPr>
           <a:xfrm>
-            <a:off x="7269480" y="1645920"/>
-            <a:ext cx="4096512" cy="1371600"/>
+            <a:off x="1097280" y="4754880"/>
+            <a:ext cx="2834640" cy="347472"/>
+          </a:xfrm>
+          <a:prstGeom prst="roundRect">
+            <a:avLst/>
+          </a:prstGeom>
+          <a:solidFill>
+            <a:srgbClr val="FEF2F2"/>
+          </a:solidFill>
+          <a:ln>
+            <a:noFill/>
+          </a:ln>
+        </p:spPr>
+        <p:style>
+          <a:lnRef idx="1">
+            <a:schemeClr val="accent1"/>
+          </a:lnRef>
+          <a:fillRef idx="3">
+            <a:schemeClr val="accent1"/>
+          </a:fillRef>
+          <a:effectRef idx="2">
+            <a:schemeClr val="accent1"/>
+          </a:effectRef>
+          <a:fontRef idx="minor">
+            <a:schemeClr val="lt1"/>
+          </a:fontRef>
+        </p:style>
+        <p:txBody>
+          <a:bodyPr rtlCol="0" anchor="ctr" lIns="0" tIns="0" rIns="0" bIns="0"/>
+          <a:lstStyle/>
+          <a:p>
+            <a:pPr algn="ctr">
+              <a:defRPr sz="950" b="1">
+                <a:solidFill>
+                  <a:srgbClr val="DC2626"/>
+                </a:solidFill>
+                <a:latin typeface="Consolas"/>
+              </a:defRPr>
+            </a:pPr>
+            <a:r>
+              <a:t>450,000+ new attacks every day</a:t>
+            </a:r>
+          </a:p>
+        </p:txBody>
+      </p:sp>
+      <p:sp>
+        <p:nvSpPr>
+          <p:cNvPr id="9" name="Rounded Rectangle 8"/>
+          <p:cNvSpPr/>
+          <p:nvPr/>
+        </p:nvSpPr>
+        <p:spPr>
+          <a:xfrm>
+            <a:off x="4434840" y="1645920"/>
+            <a:ext cx="3383280" cy="3657600"/>
           </a:xfrm>
           <a:prstGeom prst="roundRect">
             <a:avLst/>
@@ -7561,14 +8218,67 @@
       </p:sp>
       <p:sp>
         <p:nvSpPr>
-          <p:cNvPr id="8" name="TextBox 7"/>
+          <p:cNvPr id="10" name="Rounded Rectangle 9"/>
+          <p:cNvSpPr/>
+          <p:nvPr/>
+        </p:nvSpPr>
+        <p:spPr>
+          <a:xfrm>
+            <a:off x="4709160" y="1874519"/>
+            <a:ext cx="2011680" cy="320040"/>
+          </a:xfrm>
+          <a:prstGeom prst="roundRect">
+            <a:avLst/>
+          </a:prstGeom>
+          <a:solidFill>
+            <a:srgbClr val="FFFBEB"/>
+          </a:solidFill>
+          <a:ln>
+            <a:noFill/>
+          </a:ln>
+        </p:spPr>
+        <p:style>
+          <a:lnRef idx="1">
+            <a:schemeClr val="accent1"/>
+          </a:lnRef>
+          <a:fillRef idx="3">
+            <a:schemeClr val="accent1"/>
+          </a:fillRef>
+          <a:effectRef idx="2">
+            <a:schemeClr val="accent1"/>
+          </a:effectRef>
+          <a:fontRef idx="minor">
+            <a:schemeClr val="lt1"/>
+          </a:fontRef>
+        </p:style>
+        <p:txBody>
+          <a:bodyPr rtlCol="0" anchor="ctr" lIns="0" tIns="0" rIns="0" bIns="0"/>
+          <a:lstStyle/>
+          <a:p>
+            <a:pPr algn="ctr">
+              <a:defRPr sz="950" b="1">
+                <a:solidFill>
+                  <a:srgbClr val="D97706"/>
+                </a:solidFill>
+                <a:latin typeface="Consolas"/>
+              </a:defRPr>
+            </a:pPr>
+            <a:r>
+              <a:t>[ CHALLENGE 02 ]</a:t>
+            </a:r>
+          </a:p>
+        </p:txBody>
+      </p:sp>
+      <p:sp>
+        <p:nvSpPr>
+          <p:cNvPr id="11" name="TextBox 10"/>
           <p:cNvSpPr txBox="1"/>
           <p:nvPr/>
         </p:nvSpPr>
         <p:spPr>
           <a:xfrm>
-            <a:off x="7498079" y="1783080"/>
-            <a:ext cx="3657600" cy="1097280"/>
+            <a:off x="4709160" y="2331720"/>
+            <a:ext cx="2834640" cy="2194560"/>
           </a:xfrm>
           <a:prstGeom prst="rect">
             <a:avLst/>
@@ -7582,45 +8292,98 @@
           <a:lstStyle/>
           <a:p>
             <a:pPr>
-              <a:defRPr sz="3600" b="1">
-                <a:solidFill>
-                  <a:srgbClr val="059669"/>
-                </a:solidFill>
-                <a:latin typeface="Georgia"/>
-              </a:defRPr>
-            </a:pPr>
-            <a:r>
-              <a:t>&lt; 15 ms</a:t>
+              <a:defRPr sz="1800" b="1">
+                <a:solidFill>
+                  <a:srgbClr val="14110D"/>
+                </a:solidFill>
+                <a:latin typeface="Segoe UI"/>
+              </a:defRPr>
+            </a:pPr>
+            <a:r>
+              <a:t>Sandboxes are Too Slow</a:t>
             </a:r>
           </a:p>
           <a:p>
             <a:pPr>
               <a:spcBef>
-                <a:spcPts val="200"/>
+                <a:spcPts val="800"/>
               </a:spcBef>
-              <a:defRPr sz="1200" b="1">
-                <a:solidFill>
-                  <a:srgbClr val="15120E"/>
+              <a:defRPr sz="1350">
+                <a:solidFill>
+                  <a:srgbClr val="555048"/>
                 </a:solidFill>
                 <a:latin typeface="Segoe UI"/>
               </a:defRPr>
             </a:pPr>
             <a:r>
-              <a:t>TRIAGE SPEED  •  Full analysis in milliseconds</a:t>
-            </a:r>
-          </a:p>
-        </p:txBody>
-      </p:sp>
-      <p:sp>
-        <p:nvSpPr>
-          <p:cNvPr id="9" name="Rounded Rectangle 8"/>
+              <a:t>Testing a file in a virtual machine takes 5 to 15 minutes. Firewalls and email filters cannot put live traffic on hold that long.</a:t>
+            </a:r>
+          </a:p>
+        </p:txBody>
+      </p:sp>
+      <p:sp>
+        <p:nvSpPr>
+          <p:cNvPr id="12" name="Rounded Rectangle 11"/>
           <p:cNvSpPr/>
           <p:nvPr/>
         </p:nvSpPr>
         <p:spPr>
           <a:xfrm>
-            <a:off x="7269480" y="3182112"/>
-            <a:ext cx="4096512" cy="1371600"/>
+            <a:off x="4709160" y="4754880"/>
+            <a:ext cx="2834640" cy="347472"/>
+          </a:xfrm>
+          <a:prstGeom prst="roundRect">
+            <a:avLst/>
+          </a:prstGeom>
+          <a:solidFill>
+            <a:srgbClr val="FFFBEB"/>
+          </a:solidFill>
+          <a:ln>
+            <a:noFill/>
+          </a:ln>
+        </p:spPr>
+        <p:style>
+          <a:lnRef idx="1">
+            <a:schemeClr val="accent1"/>
+          </a:lnRef>
+          <a:fillRef idx="3">
+            <a:schemeClr val="accent1"/>
+          </a:fillRef>
+          <a:effectRef idx="2">
+            <a:schemeClr val="accent1"/>
+          </a:effectRef>
+          <a:fontRef idx="minor">
+            <a:schemeClr val="lt1"/>
+          </a:fontRef>
+        </p:style>
+        <p:txBody>
+          <a:bodyPr rtlCol="0" anchor="ctr" lIns="0" tIns="0" rIns="0" bIns="0"/>
+          <a:lstStyle/>
+          <a:p>
+            <a:pPr algn="ctr">
+              <a:defRPr sz="950" b="1">
+                <a:solidFill>
+                  <a:srgbClr val="D97706"/>
+                </a:solidFill>
+                <a:latin typeface="Consolas"/>
+              </a:defRPr>
+            </a:pPr>
+            <a:r>
+              <a:t>15-minute delay is dangerous</a:t>
+            </a:r>
+          </a:p>
+        </p:txBody>
+      </p:sp>
+      <p:sp>
+        <p:nvSpPr>
+          <p:cNvPr id="13" name="Rounded Rectangle 12"/>
+          <p:cNvSpPr/>
+          <p:nvPr/>
+        </p:nvSpPr>
+        <p:spPr>
+          <a:xfrm>
+            <a:off x="8046720" y="1645920"/>
+            <a:ext cx="3383280" cy="3657600"/>
           </a:xfrm>
           <a:prstGeom prst="roundRect">
             <a:avLst/>
@@ -7658,14 +8421,67 @@
       </p:sp>
       <p:sp>
         <p:nvSpPr>
-          <p:cNvPr id="10" name="TextBox 9"/>
+          <p:cNvPr id="14" name="Rounded Rectangle 13"/>
+          <p:cNvSpPr/>
+          <p:nvPr/>
+        </p:nvSpPr>
+        <p:spPr>
+          <a:xfrm>
+            <a:off x="8321040" y="1874519"/>
+            <a:ext cx="2011680" cy="320040"/>
+          </a:xfrm>
+          <a:prstGeom prst="roundRect">
+            <a:avLst/>
+          </a:prstGeom>
+          <a:solidFill>
+            <a:srgbClr val="EFF6FF"/>
+          </a:solidFill>
+          <a:ln>
+            <a:noFill/>
+          </a:ln>
+        </p:spPr>
+        <p:style>
+          <a:lnRef idx="1">
+            <a:schemeClr val="accent1"/>
+          </a:lnRef>
+          <a:fillRef idx="3">
+            <a:schemeClr val="accent1"/>
+          </a:fillRef>
+          <a:effectRef idx="2">
+            <a:schemeClr val="accent1"/>
+          </a:effectRef>
+          <a:fontRef idx="minor">
+            <a:schemeClr val="lt1"/>
+          </a:fontRef>
+        </p:style>
+        <p:txBody>
+          <a:bodyPr rtlCol="0" anchor="ctr" lIns="0" tIns="0" rIns="0" bIns="0"/>
+          <a:lstStyle/>
+          <a:p>
+            <a:pPr algn="ctr">
+              <a:defRPr sz="950" b="1">
+                <a:solidFill>
+                  <a:srgbClr val="2563EB"/>
+                </a:solidFill>
+                <a:latin typeface="Consolas"/>
+              </a:defRPr>
+            </a:pPr>
+            <a:r>
+              <a:t>[ CHALLENGE 03 ]</a:t>
+            </a:r>
+          </a:p>
+        </p:txBody>
+      </p:sp>
+      <p:sp>
+        <p:nvSpPr>
+          <p:cNvPr id="15" name="TextBox 14"/>
           <p:cNvSpPr txBox="1"/>
           <p:nvPr/>
         </p:nvSpPr>
         <p:spPr>
           <a:xfrm>
-            <a:off x="7498079" y="3319272"/>
-            <a:ext cx="3657600" cy="1097280"/>
+            <a:off x="8321040" y="2331720"/>
+            <a:ext cx="2834640" cy="2194560"/>
           </a:xfrm>
           <a:prstGeom prst="rect">
             <a:avLst/>
@@ -7679,51 +8495,104 @@
           <a:lstStyle/>
           <a:p>
             <a:pPr>
-              <a:defRPr sz="3600" b="1">
-                <a:solidFill>
-                  <a:srgbClr val="2563EB"/>
-                </a:solidFill>
-                <a:latin typeface="Georgia"/>
-              </a:defRPr>
-            </a:pPr>
-            <a:r>
-              <a:t>500x</a:t>
+              <a:defRPr sz="1800" b="1">
+                <a:solidFill>
+                  <a:srgbClr val="14110D"/>
+                </a:solidFill>
+                <a:latin typeface="Segoe UI"/>
+              </a:defRPr>
+            </a:pPr>
+            <a:r>
+              <a:t>Security Tools Crash</a:t>
             </a:r>
           </a:p>
           <a:p>
             <a:pPr>
               <a:spcBef>
-                <a:spcPts val="200"/>
+                <a:spcPts val="800"/>
               </a:spcBef>
-              <a:defRPr sz="1200" b="1">
-                <a:solidFill>
-                  <a:srgbClr val="15120E"/>
+              <a:defRPr sz="1350">
+                <a:solidFill>
+                  <a:srgbClr val="555048"/>
                 </a:solidFill>
                 <a:latin typeface="Segoe UI"/>
               </a:defRPr>
             </a:pPr>
             <a:r>
-              <a:t>FASTER IN C  •  Custom C engine vs standard Python</a:t>
-            </a:r>
-          </a:p>
-        </p:txBody>
-      </p:sp>
-      <p:sp>
-        <p:nvSpPr>
-          <p:cNvPr id="11" name="Rounded Rectangle 10"/>
+              <a:t>Most open-source security tools are written in Python. When thousands of files hit at once, they lag, freeze, and run out of memory.</a:t>
+            </a:r>
+          </a:p>
+        </p:txBody>
+      </p:sp>
+      <p:sp>
+        <p:nvSpPr>
+          <p:cNvPr id="16" name="Rounded Rectangle 15"/>
           <p:cNvSpPr/>
           <p:nvPr/>
         </p:nvSpPr>
         <p:spPr>
           <a:xfrm>
-            <a:off x="7269480" y="4718304"/>
-            <a:ext cx="4096512" cy="1371600"/>
+            <a:off x="8321040" y="4754880"/>
+            <a:ext cx="2834640" cy="347472"/>
           </a:xfrm>
           <a:prstGeom prst="roundRect">
             <a:avLst/>
           </a:prstGeom>
           <a:solidFill>
-            <a:srgbClr val="FFFFFF"/>
+            <a:srgbClr val="EFF6FF"/>
+          </a:solidFill>
+          <a:ln>
+            <a:noFill/>
+          </a:ln>
+        </p:spPr>
+        <p:style>
+          <a:lnRef idx="1">
+            <a:schemeClr val="accent1"/>
+          </a:lnRef>
+          <a:fillRef idx="3">
+            <a:schemeClr val="accent1"/>
+          </a:fillRef>
+          <a:effectRef idx="2">
+            <a:schemeClr val="accent1"/>
+          </a:effectRef>
+          <a:fontRef idx="minor">
+            <a:schemeClr val="lt1"/>
+          </a:fontRef>
+        </p:style>
+        <p:txBody>
+          <a:bodyPr rtlCol="0" anchor="ctr" lIns="0" tIns="0" rIns="0" bIns="0"/>
+          <a:lstStyle/>
+          <a:p>
+            <a:pPr algn="ctr">
+              <a:defRPr sz="950" b="1">
+                <a:solidFill>
+                  <a:srgbClr val="2563EB"/>
+                </a:solidFill>
+                <a:latin typeface="Consolas"/>
+              </a:defRPr>
+            </a:pPr>
+            <a:r>
+              <a:t>Python runtime memory bottlenecks</a:t>
+            </a:r>
+          </a:p>
+        </p:txBody>
+      </p:sp>
+      <p:sp>
+        <p:nvSpPr>
+          <p:cNvPr id="17" name="Rounded Rectangle 16"/>
+          <p:cNvSpPr/>
+          <p:nvPr/>
+        </p:nvSpPr>
+        <p:spPr>
+          <a:xfrm>
+            <a:off x="822960" y="5486400"/>
+            <a:ext cx="10545775" cy="594360"/>
+          </a:xfrm>
+          <a:prstGeom prst="roundRect">
+            <a:avLst/>
+          </a:prstGeom>
+          <a:solidFill>
+            <a:srgbClr val="F5F1EA"/>
           </a:solidFill>
           <a:ln w="12700">
             <a:solidFill>
@@ -7755,14 +8624,14 @@
       </p:sp>
       <p:sp>
         <p:nvSpPr>
-          <p:cNvPr id="12" name="TextBox 11"/>
+          <p:cNvPr id="18" name="TextBox 17"/>
           <p:cNvSpPr txBox="1"/>
           <p:nvPr/>
         </p:nvSpPr>
         <p:spPr>
           <a:xfrm>
-            <a:off x="7498079" y="4855464"/>
-            <a:ext cx="3657600" cy="1097280"/>
+            <a:off x="1051560" y="5596128"/>
+            <a:ext cx="10058400" cy="365760"/>
           </a:xfrm>
           <a:prstGeom prst="rect">
             <a:avLst/>
@@ -7770,44 +8639,35 @@
           <a:noFill/>
         </p:spPr>
         <p:txBody>
-          <a:bodyPr wrap="square" lIns="0" tIns="0" rIns="0" bIns="0">
+          <a:bodyPr wrap="none" lIns="0" tIns="0" rIns="0" bIns="0">
             <a:spAutoFit/>
           </a:bodyPr>
           <a:lstStyle/>
           <a:p>
-            <a:pPr>
-              <a:defRPr sz="3600" b="1">
-                <a:solidFill>
-                  <a:srgbClr val="D97706"/>
-                </a:solidFill>
-                <a:latin typeface="Georgia"/>
-              </a:defRPr>
-            </a:pPr>
-            <a:r>
-              <a:t>100%</a:t>
-            </a:r>
-          </a:p>
-          <a:p>
-            <a:pPr>
-              <a:spcBef>
-                <a:spcPts val="200"/>
-              </a:spcBef>
-              <a:defRPr sz="1200" b="1">
-                <a:solidFill>
-                  <a:srgbClr val="15120E"/>
+            <a:r>
+              <a:rPr b="1" sz="1200">
+                <a:solidFill>
+                  <a:srgbClr val="DC2626"/>
+                </a:solidFill>
+                <a:latin typeface="Consolas"/>
+              </a:rPr>
+              <a:t>THE REALITY: </a:t>
+            </a:r>
+            <a:r>
+              <a:rPr sz="1350">
+                <a:solidFill>
+                  <a:srgbClr val="14110D"/>
                 </a:solidFill>
                 <a:latin typeface="Segoe UI"/>
-              </a:defRPr>
-            </a:pPr>
-            <a:r>
-              <a:t>LOCAL &amp; PRIVATE  •  Zero data leaves your network</a:t>
-            </a:r>
-          </a:p>
-        </p:txBody>
-      </p:sp>
-      <p:sp>
-        <p:nvSpPr>
-          <p:cNvPr id="13" name="Rectangle 12"/>
+              </a:rPr>
+              <a:t>Organizations are forced to choose between fast but blind antivirus, or slow 15-minute sandboxes.</a:t>
+            </a:r>
+          </a:p>
+        </p:txBody>
+      </p:sp>
+      <p:sp>
+        <p:nvSpPr>
+          <p:cNvPr id="19" name="Rectangle 18"/>
           <p:cNvSpPr/>
           <p:nvPr/>
         </p:nvSpPr>
@@ -7850,7 +8710,7 @@
       </p:sp>
       <p:sp>
         <p:nvSpPr>
-          <p:cNvPr id="14" name="TextBox 13"/>
+          <p:cNvPr id="20" name="TextBox 19"/>
           <p:cNvSpPr txBox="1"/>
           <p:nvPr/>
         </p:nvSpPr>
@@ -7877,7 +8737,7 @@
                 </a:solidFill>
                 <a:latin typeface="Consolas"/>
               </a:rPr>
-              <a:t>NULLIFY  •  AUTONOMOUS CYBER DEFENSE</a:t>
+              <a:t>EGATE  ●  NULLIFY AUTONOMOUS DEFENSE</a:t>
             </a:r>
             <a:r>
               <a:rPr i="1" sz="1000">
@@ -7895,7 +8755,7 @@
                 </a:solidFill>
                 <a:latin typeface="Consolas"/>
               </a:rPr>
-              <a:t>03 / 11</a:t>
+              <a:t>03 / 12</a:t>
             </a:r>
           </a:p>
         </p:txBody>
@@ -7992,7 +8852,7 @@
               </a:defRPr>
             </a:pPr>
             <a:r>
-              <a:t>●  ARCHITECTURE</a:t>
+              <a:t>●  THE SOLUTION</a:t>
             </a:r>
           </a:p>
         </p:txBody>
@@ -8022,13 +8882,13 @@
             <a:pPr>
               <a:defRPr sz="3200" b="1">
                 <a:solidFill>
-                  <a:srgbClr val="15120E"/>
+                  <a:srgbClr val="14110D"/>
                 </a:solidFill>
                 <a:latin typeface="Georgia"/>
               </a:defRPr>
             </a:pPr>
             <a:r>
-              <a:t>How the 6 AI Agents Work Together</a:t>
+              <a:t>Nullify: Real-Time Autonomous Defense</a:t>
             </a:r>
           </a:p>
         </p:txBody>
@@ -8042,7 +8902,7 @@
         <p:spPr>
           <a:xfrm>
             <a:off x="822960" y="1645920"/>
-            <a:ext cx="5120640" cy="4434840"/>
+            <a:ext cx="6217920" cy="4434840"/>
           </a:xfrm>
           <a:prstGeom prst="roundRect">
             <a:avLst/>
@@ -8080,67 +8940,14 @@
       </p:sp>
       <p:sp>
         <p:nvSpPr>
-          <p:cNvPr id="6" name="Rounded Rectangle 5"/>
-          <p:cNvSpPr/>
-          <p:nvPr/>
-        </p:nvSpPr>
-        <p:spPr>
-          <a:xfrm>
-            <a:off x="1097280" y="1874519"/>
-            <a:ext cx="2926080" cy="347472"/>
-          </a:xfrm>
-          <a:prstGeom prst="roundRect">
-            <a:avLst/>
-          </a:prstGeom>
-          <a:solidFill>
-            <a:srgbClr val="ECFDF5"/>
-          </a:solidFill>
-          <a:ln>
-            <a:noFill/>
-          </a:ln>
-        </p:spPr>
-        <p:style>
-          <a:lnRef idx="1">
-            <a:schemeClr val="accent1"/>
-          </a:lnRef>
-          <a:fillRef idx="3">
-            <a:schemeClr val="accent1"/>
-          </a:fillRef>
-          <a:effectRef idx="2">
-            <a:schemeClr val="accent1"/>
-          </a:effectRef>
-          <a:fontRef idx="minor">
-            <a:schemeClr val="lt1"/>
-          </a:fontRef>
-        </p:style>
-        <p:txBody>
-          <a:bodyPr rtlCol="0" anchor="ctr" lIns="0" tIns="0" rIns="0" bIns="0"/>
-          <a:lstStyle/>
-          <a:p>
-            <a:pPr algn="ctr">
-              <a:defRPr sz="900" b="1">
-                <a:solidFill>
-                  <a:srgbClr val="059669"/>
-                </a:solidFill>
-                <a:latin typeface="Consolas"/>
-              </a:defRPr>
-            </a:pPr>
-            <a:r>
-              <a:t>STAGE 1: NATIVE C SPEED</a:t>
-            </a:r>
-          </a:p>
-        </p:txBody>
-      </p:sp>
-      <p:sp>
-        <p:nvSpPr>
-          <p:cNvPr id="7" name="TextBox 6"/>
+          <p:cNvPr id="6" name="TextBox 5"/>
           <p:cNvSpPr txBox="1"/>
           <p:nvPr/>
         </p:nvSpPr>
         <p:spPr>
           <a:xfrm>
-            <a:off x="1097280" y="2377440"/>
-            <a:ext cx="4572000" cy="3474720"/>
+            <a:off x="1097280" y="1920240"/>
+            <a:ext cx="5669280" cy="3931920"/>
           </a:xfrm>
           <a:prstGeom prst="rect">
             <a:avLst/>
@@ -8156,21 +8963,21 @@
             <a:pPr>
               <a:defRPr sz="1700" b="1">
                 <a:solidFill>
-                  <a:srgbClr val="15120E"/>
+                  <a:srgbClr val="14110D"/>
                 </a:solidFill>
                 <a:latin typeface="Segoe UI"/>
               </a:defRPr>
             </a:pPr>
             <a:r>
-              <a:t>Agent 1: Triage Agent</a:t>
+              <a:t>[ 01 // SPEED ]  Sub-Millisecond Native C Triage</a:t>
             </a:r>
           </a:p>
           <a:p>
             <a:pPr>
               <a:spcBef>
-                <a:spcPts val="500"/>
+                <a:spcPts val="400"/>
               </a:spcBef>
-              <a:defRPr sz="1400">
+              <a:defRPr sz="1350">
                 <a:solidFill>
                   <a:srgbClr val="555048"/>
                 </a:solidFill>
@@ -8178,31 +8985,31 @@
               </a:defRPr>
             </a:pPr>
             <a:r>
-              <a:t>Checks file type, verifies headers, and streams MD5, SHA-1, and SHA-256 hashes in a single pass in under 1 millisecond.</a:t>
+              <a:t>We rewrote heavy file inspection in pure C. It analyzes binaries in under 15 milliseconds — fast enough for live network firewalls.</a:t>
             </a:r>
           </a:p>
           <a:p>
             <a:pPr>
               <a:spcBef>
-                <a:spcPts val="2000"/>
+                <a:spcPts val="1800"/>
               </a:spcBef>
               <a:defRPr sz="1700" b="1">
                 <a:solidFill>
-                  <a:srgbClr val="15120E"/>
+                  <a:srgbClr val="14110D"/>
                 </a:solidFill>
                 <a:latin typeface="Segoe UI"/>
               </a:defRPr>
             </a:pPr>
             <a:r>
-              <a:t>Agent 2: Static Analysis Agent</a:t>
+              <a:t>[ 02 // COGNITION ]  6 Specialized Autonomous Agents</a:t>
             </a:r>
           </a:p>
           <a:p>
             <a:pPr>
               <a:spcBef>
-                <a:spcPts val="500"/>
+                <a:spcPts val="400"/>
               </a:spcBef>
-              <a:defRPr sz="1400">
+              <a:defRPr sz="1350">
                 <a:solidFill>
                   <a:srgbClr val="555048"/>
                 </a:solidFill>
@@ -8210,21 +9017,53 @@
               </a:defRPr>
             </a:pPr>
             <a:r>
-              <a:t>Parses executable imports directly in memory. Detects dangerous APIs (memory injection, keylogging) and backdoor registry keys.</a:t>
-            </a:r>
-          </a:p>
-        </p:txBody>
-      </p:sp>
-      <p:sp>
-        <p:nvSpPr>
-          <p:cNvPr id="8" name="Rounded Rectangle 7"/>
+              <a:t>Instead of a single clumsy chatbot, six focused agents handle file headers, code patterns, behavioral logs, and threat reasoning.</a:t>
+            </a:r>
+          </a:p>
+          <a:p>
+            <a:pPr>
+              <a:spcBef>
+                <a:spcPts val="1800"/>
+              </a:spcBef>
+              <a:defRPr sz="1700" b="1">
+                <a:solidFill>
+                  <a:srgbClr val="14110D"/>
+                </a:solidFill>
+                <a:latin typeface="Segoe UI"/>
+              </a:defRPr>
+            </a:pPr>
+            <a:r>
+              <a:t>[ 03 // ACTION ]  Instant Auto-Defense &amp; YARA</a:t>
+            </a:r>
+          </a:p>
+          <a:p>
+            <a:pPr>
+              <a:spcBef>
+                <a:spcPts val="400"/>
+              </a:spcBef>
+              <a:defRPr sz="1350">
+                <a:solidFill>
+                  <a:srgbClr val="555048"/>
+                </a:solidFill>
+                <a:latin typeface="Segoe UI"/>
+              </a:defRPr>
+            </a:pPr>
+            <a:r>
+              <a:t>Nullify doesn't just alert you. It automatically writes an enterprise YARA rule so you can block the threat across your entire network.</a:t>
+            </a:r>
+          </a:p>
+        </p:txBody>
+      </p:sp>
+      <p:sp>
+        <p:nvSpPr>
+          <p:cNvPr id="7" name="Rounded Rectangle 6"/>
           <p:cNvSpPr/>
           <p:nvPr/>
         </p:nvSpPr>
         <p:spPr>
           <a:xfrm>
-            <a:off x="6245352" y="1645920"/>
-            <a:ext cx="5120640" cy="4434840"/>
+            <a:off x="7269480" y="1645920"/>
+            <a:ext cx="4096512" cy="1371600"/>
           </a:xfrm>
           <a:prstGeom prst="roundRect">
             <a:avLst/>
@@ -8262,23 +9101,77 @@
       </p:sp>
       <p:sp>
         <p:nvSpPr>
+          <p:cNvPr id="8" name="TextBox 7"/>
+          <p:cNvSpPr txBox="1"/>
+          <p:nvPr/>
+        </p:nvSpPr>
+        <p:spPr>
+          <a:xfrm>
+            <a:off x="7498079" y="1783080"/>
+            <a:ext cx="3657600" cy="1097280"/>
+          </a:xfrm>
+          <a:prstGeom prst="rect">
+            <a:avLst/>
+          </a:prstGeom>
+          <a:noFill/>
+        </p:spPr>
+        <p:txBody>
+          <a:bodyPr wrap="square" lIns="0" tIns="0" rIns="0" bIns="0">
+            <a:spAutoFit/>
+          </a:bodyPr>
+          <a:lstStyle/>
+          <a:p>
+            <a:pPr>
+              <a:defRPr sz="3600" b="1">
+                <a:solidFill>
+                  <a:srgbClr val="059669"/>
+                </a:solidFill>
+                <a:latin typeface="Georgia"/>
+              </a:defRPr>
+            </a:pPr>
+            <a:r>
+              <a:t>&lt; 15 ms</a:t>
+            </a:r>
+          </a:p>
+          <a:p>
+            <a:pPr>
+              <a:spcBef>
+                <a:spcPts val="200"/>
+              </a:spcBef>
+              <a:defRPr sz="1200" b="1">
+                <a:solidFill>
+                  <a:srgbClr val="14110D"/>
+                </a:solidFill>
+                <a:latin typeface="Segoe UI"/>
+              </a:defRPr>
+            </a:pPr>
+            <a:r>
+              <a:t>FULL TRIAGE SPEED  •  Analysis completed in milliseconds</a:t>
+            </a:r>
+          </a:p>
+        </p:txBody>
+      </p:sp>
+      <p:sp>
+        <p:nvSpPr>
           <p:cNvPr id="9" name="Rounded Rectangle 8"/>
           <p:cNvSpPr/>
           <p:nvPr/>
         </p:nvSpPr>
         <p:spPr>
           <a:xfrm>
-            <a:off x="6519672" y="1874519"/>
-            <a:ext cx="2926080" cy="347472"/>
+            <a:off x="7269480" y="3182112"/>
+            <a:ext cx="4096512" cy="1371600"/>
           </a:xfrm>
           <a:prstGeom prst="roundRect">
             <a:avLst/>
           </a:prstGeom>
           <a:solidFill>
-            <a:srgbClr val="EFF6FF"/>
+            <a:srgbClr val="FFFFFF"/>
           </a:solidFill>
-          <a:ln>
-            <a:noFill/>
+          <a:ln w="12700">
+            <a:solidFill>
+              <a:srgbClr val="E2DCD2"/>
+            </a:solidFill>
           </a:ln>
         </p:spPr>
         <p:style>
@@ -8296,20 +9189,10 @@
           </a:fontRef>
         </p:style>
         <p:txBody>
-          <a:bodyPr rtlCol="0" anchor="ctr" lIns="0" tIns="0" rIns="0" bIns="0"/>
-          <a:lstStyle/>
-          <a:p>
-            <a:pPr algn="ctr">
-              <a:defRPr sz="900" b="1">
-                <a:solidFill>
-                  <a:srgbClr val="2563EB"/>
-                </a:solidFill>
-                <a:latin typeface="Consolas"/>
-              </a:defRPr>
-            </a:pPr>
-            <a:r>
-              <a:t>STAGE 2: AI INTELLIGENCE</a:t>
-            </a:r>
+          <a:bodyPr rtlCol="0" anchor="ctr"/>
+          <a:lstStyle/>
+          <a:p>
+            <a:pPr algn="ctr"/>
           </a:p>
         </p:txBody>
       </p:sp>
@@ -8321,8 +9204,8 @@
         </p:nvSpPr>
         <p:spPr>
           <a:xfrm>
-            <a:off x="6519672" y="2377440"/>
-            <a:ext cx="4572000" cy="3474720"/>
+            <a:off x="7498079" y="3319272"/>
+            <a:ext cx="3657600" cy="1097280"/>
           </a:xfrm>
           <a:prstGeom prst="rect">
             <a:avLst/>
@@ -8336,134 +9219,135 @@
           <a:lstStyle/>
           <a:p>
             <a:pPr>
-              <a:defRPr sz="1550" b="1">
-                <a:solidFill>
-                  <a:srgbClr val="15120E"/>
-                </a:solidFill>
-                <a:latin typeface="Segoe UI"/>
-              </a:defRPr>
-            </a:pPr>
-            <a:r>
-              <a:t>Agent 3: Behavioral Agent</a:t>
+              <a:defRPr sz="3600" b="1">
+                <a:solidFill>
+                  <a:srgbClr val="2563EB"/>
+                </a:solidFill>
+                <a:latin typeface="Georgia"/>
+              </a:defRPr>
+            </a:pPr>
+            <a:r>
+              <a:t>500x</a:t>
             </a:r>
           </a:p>
           <a:p>
             <a:pPr>
               <a:spcBef>
-                <a:spcPts val="300"/>
+                <a:spcPts val="200"/>
               </a:spcBef>
-              <a:defRPr sz="1300">
-                <a:solidFill>
-                  <a:srgbClr val="555048"/>
+              <a:defRPr sz="1200" b="1">
+                <a:solidFill>
+                  <a:srgbClr val="14110D"/>
                 </a:solidFill>
                 <a:latin typeface="Segoe UI"/>
               </a:defRPr>
             </a:pPr>
             <a:r>
-              <a:t>Traces process execution trees and correlates Windows Sysmon logs.</a:t>
+              <a:t>FASTER IN C  •  Native C engine vs standard Python</a:t>
+            </a:r>
+          </a:p>
+        </p:txBody>
+      </p:sp>
+      <p:sp>
+        <p:nvSpPr>
+          <p:cNvPr id="11" name="Rounded Rectangle 10"/>
+          <p:cNvSpPr/>
+          <p:nvPr/>
+        </p:nvSpPr>
+        <p:spPr>
+          <a:xfrm>
+            <a:off x="7269480" y="4718304"/>
+            <a:ext cx="4096512" cy="1371600"/>
+          </a:xfrm>
+          <a:prstGeom prst="roundRect">
+            <a:avLst/>
+          </a:prstGeom>
+          <a:solidFill>
+            <a:srgbClr val="FFFFFF"/>
+          </a:solidFill>
+          <a:ln w="12700">
+            <a:solidFill>
+              <a:srgbClr val="E2DCD2"/>
+            </a:solidFill>
+          </a:ln>
+        </p:spPr>
+        <p:style>
+          <a:lnRef idx="1">
+            <a:schemeClr val="accent1"/>
+          </a:lnRef>
+          <a:fillRef idx="3">
+            <a:schemeClr val="accent1"/>
+          </a:fillRef>
+          <a:effectRef idx="2">
+            <a:schemeClr val="accent1"/>
+          </a:effectRef>
+          <a:fontRef idx="minor">
+            <a:schemeClr val="lt1"/>
+          </a:fontRef>
+        </p:style>
+        <p:txBody>
+          <a:bodyPr rtlCol="0" anchor="ctr"/>
+          <a:lstStyle/>
+          <a:p>
+            <a:pPr algn="ctr"/>
+          </a:p>
+        </p:txBody>
+      </p:sp>
+      <p:sp>
+        <p:nvSpPr>
+          <p:cNvPr id="12" name="TextBox 11"/>
+          <p:cNvSpPr txBox="1"/>
+          <p:nvPr/>
+        </p:nvSpPr>
+        <p:spPr>
+          <a:xfrm>
+            <a:off x="7498079" y="4855464"/>
+            <a:ext cx="3657600" cy="1097280"/>
+          </a:xfrm>
+          <a:prstGeom prst="rect">
+            <a:avLst/>
+          </a:prstGeom>
+          <a:noFill/>
+        </p:spPr>
+        <p:txBody>
+          <a:bodyPr wrap="square" lIns="0" tIns="0" rIns="0" bIns="0">
+            <a:spAutoFit/>
+          </a:bodyPr>
+          <a:lstStyle/>
+          <a:p>
+            <a:pPr>
+              <a:defRPr sz="3600" b="1">
+                <a:solidFill>
+                  <a:srgbClr val="D97706"/>
+                </a:solidFill>
+                <a:latin typeface="Georgia"/>
+              </a:defRPr>
+            </a:pPr>
+            <a:r>
+              <a:t>100%</a:t>
             </a:r>
           </a:p>
           <a:p>
             <a:pPr>
               <a:spcBef>
-                <a:spcPts val="1000"/>
+                <a:spcPts val="200"/>
               </a:spcBef>
-              <a:defRPr sz="1550" b="1">
-                <a:solidFill>
-                  <a:srgbClr val="15120E"/>
+              <a:defRPr sz="1200" b="1">
+                <a:solidFill>
+                  <a:srgbClr val="14110D"/>
                 </a:solidFill>
                 <a:latin typeface="Segoe UI"/>
               </a:defRPr>
             </a:pPr>
             <a:r>
-              <a:t>Agent 4: Classification Agent</a:t>
-            </a:r>
-          </a:p>
-          <a:p>
-            <a:pPr>
-              <a:spcBef>
-                <a:spcPts val="300"/>
-              </a:spcBef>
-              <a:defRPr sz="1300">
-                <a:solidFill>
-                  <a:srgbClr val="555048"/>
-                </a:solidFill>
-                <a:latin typeface="Segoe UI"/>
-              </a:defRPr>
-            </a:pPr>
-            <a:r>
-              <a:t>Scores 2,381 features using an ML model trained on 1.1 million binaries.</a:t>
-            </a:r>
-          </a:p>
-          <a:p>
-            <a:pPr>
-              <a:spcBef>
-                <a:spcPts val="1000"/>
-              </a:spcBef>
-              <a:defRPr sz="1550" b="1">
-                <a:solidFill>
-                  <a:srgbClr val="15120E"/>
-                </a:solidFill>
-                <a:latin typeface="Segoe UI"/>
-              </a:defRPr>
-            </a:pPr>
-            <a:r>
-              <a:t>Agent 5: Reasoning Agent</a:t>
-            </a:r>
-          </a:p>
-          <a:p>
-            <a:pPr>
-              <a:spcBef>
-                <a:spcPts val="300"/>
-              </a:spcBef>
-              <a:defRPr sz="1300">
-                <a:solidFill>
-                  <a:srgbClr val="555048"/>
-                </a:solidFill>
-                <a:latin typeface="Segoe UI"/>
-              </a:defRPr>
-            </a:pPr>
-            <a:r>
-              <a:t>Explains *why* the file is malicious in plain English for security analysts.</a:t>
-            </a:r>
-          </a:p>
-          <a:p>
-            <a:pPr>
-              <a:spcBef>
-                <a:spcPts val="1000"/>
-              </a:spcBef>
-              <a:defRPr sz="1550" b="1">
-                <a:solidFill>
-                  <a:srgbClr val="15120E"/>
-                </a:solidFill>
-                <a:latin typeface="Segoe UI"/>
-              </a:defRPr>
-            </a:pPr>
-            <a:r>
-              <a:t>Agent 6: Defense Agent</a:t>
-            </a:r>
-          </a:p>
-          <a:p>
-            <a:pPr>
-              <a:spcBef>
-                <a:spcPts val="300"/>
-              </a:spcBef>
-              <a:defRPr sz="1300">
-                <a:solidFill>
-                  <a:srgbClr val="555048"/>
-                </a:solidFill>
-                <a:latin typeface="Segoe UI"/>
-              </a:defRPr>
-            </a:pPr>
-            <a:r>
-              <a:t>Automatically writes a clean, syntax-validated YARA rule to block it.</a:t>
-            </a:r>
-          </a:p>
-        </p:txBody>
-      </p:sp>
-      <p:sp>
-        <p:nvSpPr>
-          <p:cNvPr id="11" name="Rectangle 10"/>
+              <a:t>LOCAL &amp; PRIVATE  •  Zero telemetry leaves your network</a:t>
+            </a:r>
+          </a:p>
+        </p:txBody>
+      </p:sp>
+      <p:sp>
+        <p:nvSpPr>
+          <p:cNvPr id="13" name="Rectangle 12"/>
           <p:cNvSpPr/>
           <p:nvPr/>
         </p:nvSpPr>
@@ -8506,7 +9390,7 @@
       </p:sp>
       <p:sp>
         <p:nvSpPr>
-          <p:cNvPr id="12" name="TextBox 11"/>
+          <p:cNvPr id="14" name="TextBox 13"/>
           <p:cNvSpPr txBox="1"/>
           <p:nvPr/>
         </p:nvSpPr>
@@ -8533,7 +9417,7 @@
                 </a:solidFill>
                 <a:latin typeface="Consolas"/>
               </a:rPr>
-              <a:t>NULLIFY  •  AUTONOMOUS CYBER DEFENSE</a:t>
+              <a:t>EGATE  ●  NULLIFY AUTONOMOUS DEFENSE</a:t>
             </a:r>
             <a:r>
               <a:rPr i="1" sz="1000">
@@ -8551,7 +9435,7 @@
                 </a:solidFill>
                 <a:latin typeface="Consolas"/>
               </a:rPr>
-              <a:t>04 / 11</a:t>
+              <a:t>04 / 12</a:t>
             </a:r>
           </a:p>
         </p:txBody>
@@ -8648,7 +9532,7 @@
               </a:defRPr>
             </a:pPr>
             <a:r>
-              <a:t>●  PERFORMANCE BREAKTHROUGH</a:t>
+              <a:t>●  ARCHITECTURE</a:t>
             </a:r>
           </a:p>
         </p:txBody>
@@ -8678,13 +9562,13 @@
             <a:pPr>
               <a:defRPr sz="3200" b="1">
                 <a:solidFill>
-                  <a:srgbClr val="15120E"/>
+                  <a:srgbClr val="14110D"/>
                 </a:solidFill>
                 <a:latin typeface="Georgia"/>
               </a:defRPr>
             </a:pPr>
             <a:r>
-              <a:t>The Secret to Our Speed: Native C Code</a:t>
+              <a:t>How the 6 AI Agents Work Together</a:t>
             </a:r>
           </a:p>
         </p:txBody>
@@ -8698,7 +9582,7 @@
         <p:spPr>
           <a:xfrm>
             <a:off x="822960" y="1645920"/>
-            <a:ext cx="3383280" cy="3657600"/>
+            <a:ext cx="6217920" cy="4434840"/>
           </a:xfrm>
           <a:prstGeom prst="roundRect">
             <a:avLst/>
@@ -8742,8 +9626,8 @@
         </p:nvSpPr>
         <p:spPr>
           <a:xfrm>
-            <a:off x="1097280" y="1828800"/>
-            <a:ext cx="2834640" cy="3291840"/>
+            <a:off x="1097280" y="1874519"/>
+            <a:ext cx="5669280" cy="4023360"/>
           </a:xfrm>
           <a:prstGeom prst="rect">
             <a:avLst/>
@@ -8757,63 +9641,130 @@
           <a:lstStyle/>
           <a:p>
             <a:pPr>
-              <a:defRPr sz="4000" b="1">
+              <a:spcBef>
+                <a:spcPts val="1400"/>
+              </a:spcBef>
+              <a:defRPr sz="1100" b="1">
                 <a:solidFill>
                   <a:srgbClr val="059669"/>
                 </a:solidFill>
-                <a:latin typeface="Georgia"/>
-              </a:defRPr>
-            </a:pPr>
-            <a:r>
-              <a:t>500x Faster</a:t>
+                <a:latin typeface="Consolas"/>
+              </a:defRPr>
+            </a:pPr>
+            <a:r>
+              <a:t>[ STAGE 1: NATIVE C SPEED ]</a:t>
             </a:r>
           </a:p>
           <a:p>
             <a:pPr>
               <a:spcBef>
-                <a:spcPts val="600"/>
+                <a:spcPts val="400"/>
               </a:spcBef>
-              <a:defRPr sz="1800" b="1">
-                <a:solidFill>
-                  <a:srgbClr val="15120E"/>
+              <a:defRPr sz="1200">
+                <a:solidFill>
+                  <a:srgbClr val="14110D"/>
                 </a:solidFill>
                 <a:latin typeface="Segoe UI"/>
               </a:defRPr>
             </a:pPr>
             <a:r>
-              <a:t>PE Import Parsing</a:t>
+              <a:t>• Agent 1: Triage Agent: Checks magic bytes, headers, and streams MD5/SHA-1/SHA-256 in &lt; 1ms.</a:t>
             </a:r>
           </a:p>
           <a:p>
             <a:pPr>
               <a:spcBef>
-                <a:spcPts val="800"/>
+                <a:spcPts val="400"/>
+              </a:spcBef>
+              <a:defRPr sz="1200">
+                <a:solidFill>
+                  <a:srgbClr val="14110D"/>
+                </a:solidFill>
+                <a:latin typeface="Segoe UI"/>
+              </a:defRPr>
+            </a:pPr>
+            <a:r>
+              <a:t>• Agent 2: Static Analysis Agent: Traverses PE imports in memory, detecting dangerous APIs and backdoor keys.</a:t>
+            </a:r>
+          </a:p>
+          <a:p>
+            <a:pPr>
+              <a:spcBef>
+                <a:spcPts val="1400"/>
               </a:spcBef>
               <a:defRPr sz="1100" b="1">
                 <a:solidFill>
-                  <a:srgbClr val="059669"/>
+                  <a:srgbClr val="2563EB"/>
                 </a:solidFill>
                 <a:latin typeface="Consolas"/>
               </a:defRPr>
             </a:pPr>
             <a:r>
-              <a:t>Python: 50.0 ms  →  C: 0.1 ms</a:t>
+              <a:t>[ STAGE 2: AI COGNITION &amp; DEFENSE ]</a:t>
             </a:r>
           </a:p>
           <a:p>
             <a:pPr>
               <a:spcBef>
-                <a:spcPts val="1000"/>
+                <a:spcPts val="400"/>
               </a:spcBef>
-              <a:defRPr sz="1350">
-                <a:solidFill>
-                  <a:srgbClr val="555048"/>
+              <a:defRPr sz="1200">
+                <a:solidFill>
+                  <a:srgbClr val="14110D"/>
                 </a:solidFill>
                 <a:latin typeface="Segoe UI"/>
               </a:defRPr>
             </a:pPr>
             <a:r>
-              <a:t>Reads executable import tables directly in memory without slow Python libraries.</a:t>
+              <a:t>• Agent 3: Behavioral Agent: Traces process trees and correlates Sysmon JSONL logs.</a:t>
+            </a:r>
+          </a:p>
+          <a:p>
+            <a:pPr>
+              <a:spcBef>
+                <a:spcPts val="400"/>
+              </a:spcBef>
+              <a:defRPr sz="1200">
+                <a:solidFill>
+                  <a:srgbClr val="14110D"/>
+                </a:solidFill>
+                <a:latin typeface="Segoe UI"/>
+              </a:defRPr>
+            </a:pPr>
+            <a:r>
+              <a:t>• Agent 4: Classification Agent: Evaluates 2,381 features via EMBER 2017 machine learning.</a:t>
+            </a:r>
+          </a:p>
+          <a:p>
+            <a:pPr>
+              <a:spcBef>
+                <a:spcPts val="400"/>
+              </a:spcBef>
+              <a:defRPr sz="1200">
+                <a:solidFill>
+                  <a:srgbClr val="14110D"/>
+                </a:solidFill>
+                <a:latin typeface="Segoe UI"/>
+              </a:defRPr>
+            </a:pPr>
+            <a:r>
+              <a:t>• Agent 5: Reasoning Agent: Synthesizes plain-English explanations with MITRE ATT&amp;CK tags.</a:t>
+            </a:r>
+          </a:p>
+          <a:p>
+            <a:pPr>
+              <a:spcBef>
+                <a:spcPts val="400"/>
+              </a:spcBef>
+              <a:defRPr sz="1200">
+                <a:solidFill>
+                  <a:srgbClr val="14110D"/>
+                </a:solidFill>
+                <a:latin typeface="Segoe UI"/>
+              </a:defRPr>
+            </a:pPr>
+            <a:r>
+              <a:t>• Agent 6: Defense Agent: Auto-generates syntax-validated YARA rules ready for deployment.</a:t>
             </a:r>
           </a:p>
         </p:txBody>
@@ -8826,18 +9777,18 @@
         </p:nvSpPr>
         <p:spPr>
           <a:xfrm>
-            <a:off x="4434840" y="1645920"/>
-            <a:ext cx="3383280" cy="3657600"/>
+            <a:off x="7269480" y="1645920"/>
+            <a:ext cx="4096512" cy="4434840"/>
           </a:xfrm>
           <a:prstGeom prst="roundRect">
             <a:avLst/>
           </a:prstGeom>
           <a:solidFill>
-            <a:srgbClr val="FFFFFF"/>
+            <a:srgbClr val="1F1A14"/>
           </a:solidFill>
           <a:ln w="12700">
             <a:solidFill>
-              <a:srgbClr val="E2DCD2"/>
+              <a:srgbClr val="322B22"/>
             </a:solidFill>
           </a:ln>
         </p:spPr>
@@ -8863,274 +9814,40 @@
           </a:p>
         </p:txBody>
       </p:sp>
-      <p:sp>
-        <p:nvSpPr>
-          <p:cNvPr id="8" name="TextBox 7"/>
+      <p:pic>
+        <p:nvPicPr>
+          <p:cNvPr id="8" name="Picture 7" descr="neural_agent_mesh.jpg"/>
+          <p:cNvPicPr>
+            <a:picLocks noChangeAspect="1"/>
+          </p:cNvPicPr>
+          <p:nvPr/>
+        </p:nvPicPr>
+        <p:blipFill>
+          <a:blip r:embed="rId2"/>
+          <a:stretch>
+            <a:fillRect/>
+          </a:stretch>
+        </p:blipFill>
+        <p:spPr>
+          <a:xfrm>
+            <a:off x="7360920" y="1737360"/>
+            <a:ext cx="3913632" cy="2184353"/>
+          </a:xfrm>
+          <a:prstGeom prst="rect">
+            <a:avLst/>
+          </a:prstGeom>
+        </p:spPr>
+      </p:pic>
+      <p:sp>
+        <p:nvSpPr>
+          <p:cNvPr id="9" name="TextBox 8"/>
           <p:cNvSpPr txBox="1"/>
           <p:nvPr/>
         </p:nvSpPr>
         <p:spPr>
           <a:xfrm>
-            <a:off x="4709160" y="1828800"/>
-            <a:ext cx="2834640" cy="3291840"/>
-          </a:xfrm>
-          <a:prstGeom prst="rect">
-            <a:avLst/>
-          </a:prstGeom>
-          <a:noFill/>
-        </p:spPr>
-        <p:txBody>
-          <a:bodyPr wrap="square" lIns="0" tIns="0" rIns="0" bIns="0">
-            <a:spAutoFit/>
-          </a:bodyPr>
-          <a:lstStyle/>
-          <a:p>
-            <a:pPr>
-              <a:defRPr sz="4000" b="1">
-                <a:solidFill>
-                  <a:srgbClr val="2563EB"/>
-                </a:solidFill>
-                <a:latin typeface="Georgia"/>
-              </a:defRPr>
-            </a:pPr>
-            <a:r>
-              <a:t>18x Faster</a:t>
-            </a:r>
-          </a:p>
-          <a:p>
-            <a:pPr>
-              <a:spcBef>
-                <a:spcPts val="600"/>
-              </a:spcBef>
-              <a:defRPr sz="1800" b="1">
-                <a:solidFill>
-                  <a:srgbClr val="15120E"/>
-                </a:solidFill>
-                <a:latin typeface="Segoe UI"/>
-              </a:defRPr>
-            </a:pPr>
-            <a:r>
-              <a:t>Pattern Scanner</a:t>
-            </a:r>
-          </a:p>
-          <a:p>
-            <a:pPr>
-              <a:spcBef>
-                <a:spcPts val="800"/>
-              </a:spcBef>
-              <a:defRPr sz="1100" b="1">
-                <a:solidFill>
-                  <a:srgbClr val="2563EB"/>
-                </a:solidFill>
-                <a:latin typeface="Consolas"/>
-              </a:defRPr>
-            </a:pPr>
-            <a:r>
-              <a:t>Python: 15.4 ms  →  C: 0.8 ms</a:t>
-            </a:r>
-          </a:p>
-          <a:p>
-            <a:pPr>
-              <a:spcBef>
-                <a:spcPts val="1000"/>
-              </a:spcBef>
-              <a:defRPr sz="1350">
-                <a:solidFill>
-                  <a:srgbClr val="555048"/>
-                </a:solidFill>
-                <a:latin typeface="Segoe UI"/>
-              </a:defRPr>
-            </a:pPr>
-            <a:r>
-              <a:t>Finds hidden registry keys, download cradles, and backdoor strings in a single pass.</a:t>
-            </a:r>
-          </a:p>
-        </p:txBody>
-      </p:sp>
-      <p:sp>
-        <p:nvSpPr>
-          <p:cNvPr id="9" name="Rounded Rectangle 8"/>
-          <p:cNvSpPr/>
-          <p:nvPr/>
-        </p:nvSpPr>
-        <p:spPr>
-          <a:xfrm>
-            <a:off x="8046720" y="1645920"/>
-            <a:ext cx="3383280" cy="3657600"/>
-          </a:xfrm>
-          <a:prstGeom prst="roundRect">
-            <a:avLst/>
-          </a:prstGeom>
-          <a:solidFill>
-            <a:srgbClr val="FFFFFF"/>
-          </a:solidFill>
-          <a:ln w="12700">
-            <a:solidFill>
-              <a:srgbClr val="E2DCD2"/>
-            </a:solidFill>
-          </a:ln>
-        </p:spPr>
-        <p:style>
-          <a:lnRef idx="1">
-            <a:schemeClr val="accent1"/>
-          </a:lnRef>
-          <a:fillRef idx="3">
-            <a:schemeClr val="accent1"/>
-          </a:fillRef>
-          <a:effectRef idx="2">
-            <a:schemeClr val="accent1"/>
-          </a:effectRef>
-          <a:fontRef idx="minor">
-            <a:schemeClr val="lt1"/>
-          </a:fontRef>
-        </p:style>
-        <p:txBody>
-          <a:bodyPr rtlCol="0" anchor="ctr"/>
-          <a:lstStyle/>
-          <a:p>
-            <a:pPr algn="ctr"/>
-          </a:p>
-        </p:txBody>
-      </p:sp>
-      <p:sp>
-        <p:nvSpPr>
-          <p:cNvPr id="10" name="TextBox 9"/>
-          <p:cNvSpPr txBox="1"/>
-          <p:nvPr/>
-        </p:nvSpPr>
-        <p:spPr>
-          <a:xfrm>
-            <a:off x="8321040" y="1828800"/>
-            <a:ext cx="2834640" cy="3291840"/>
-          </a:xfrm>
-          <a:prstGeom prst="rect">
-            <a:avLst/>
-          </a:prstGeom>
-          <a:noFill/>
-        </p:spPr>
-        <p:txBody>
-          <a:bodyPr wrap="square" lIns="0" tIns="0" rIns="0" bIns="0">
-            <a:spAutoFit/>
-          </a:bodyPr>
-          <a:lstStyle/>
-          <a:p>
-            <a:pPr>
-              <a:defRPr sz="4000" b="1">
-                <a:solidFill>
-                  <a:srgbClr val="D97706"/>
-                </a:solidFill>
-                <a:latin typeface="Georgia"/>
-              </a:defRPr>
-            </a:pPr>
-            <a:r>
-              <a:t>8x Faster</a:t>
-            </a:r>
-          </a:p>
-          <a:p>
-            <a:pPr>
-              <a:spcBef>
-                <a:spcPts val="600"/>
-              </a:spcBef>
-              <a:defRPr sz="1800" b="1">
-                <a:solidFill>
-                  <a:srgbClr val="15120E"/>
-                </a:solidFill>
-                <a:latin typeface="Segoe UI"/>
-              </a:defRPr>
-            </a:pPr>
-            <a:r>
-              <a:t>File Hashing</a:t>
-            </a:r>
-          </a:p>
-          <a:p>
-            <a:pPr>
-              <a:spcBef>
-                <a:spcPts val="800"/>
-              </a:spcBef>
-              <a:defRPr sz="1100" b="1">
-                <a:solidFill>
-                  <a:srgbClr val="D97706"/>
-                </a:solidFill>
-                <a:latin typeface="Consolas"/>
-              </a:defRPr>
-            </a:pPr>
-            <a:r>
-              <a:t>Python: 8.9 ms  →  C: 1.1 ms</a:t>
-            </a:r>
-          </a:p>
-          <a:p>
-            <a:pPr>
-              <a:spcBef>
-                <a:spcPts val="1000"/>
-              </a:spcBef>
-              <a:defRPr sz="1350">
-                <a:solidFill>
-                  <a:srgbClr val="555048"/>
-                </a:solidFill>
-                <a:latin typeface="Segoe UI"/>
-              </a:defRPr>
-            </a:pPr>
-            <a:r>
-              <a:t>Streams 64KB blocks, updating MD5, SHA-1, and SHA-256 at the same time.</a:t>
-            </a:r>
-          </a:p>
-        </p:txBody>
-      </p:sp>
-      <p:sp>
-        <p:nvSpPr>
-          <p:cNvPr id="11" name="Rounded Rectangle 10"/>
-          <p:cNvSpPr/>
-          <p:nvPr/>
-        </p:nvSpPr>
-        <p:spPr>
-          <a:xfrm>
-            <a:off x="822960" y="5486400"/>
-            <a:ext cx="10545775" cy="594360"/>
-          </a:xfrm>
-          <a:prstGeom prst="roundRect">
-            <a:avLst/>
-          </a:prstGeom>
-          <a:solidFill>
-            <a:srgbClr val="F5F1EA"/>
-          </a:solidFill>
-          <a:ln w="12700">
-            <a:solidFill>
-              <a:srgbClr val="E2DCD2"/>
-            </a:solidFill>
-          </a:ln>
-        </p:spPr>
-        <p:style>
-          <a:lnRef idx="1">
-            <a:schemeClr val="accent1"/>
-          </a:lnRef>
-          <a:fillRef idx="3">
-            <a:schemeClr val="accent1"/>
-          </a:fillRef>
-          <a:effectRef idx="2">
-            <a:schemeClr val="accent1"/>
-          </a:effectRef>
-          <a:fontRef idx="minor">
-            <a:schemeClr val="lt1"/>
-          </a:fontRef>
-        </p:style>
-        <p:txBody>
-          <a:bodyPr rtlCol="0" anchor="ctr"/>
-          <a:lstStyle/>
-          <a:p>
-            <a:pPr algn="ctr"/>
-          </a:p>
-        </p:txBody>
-      </p:sp>
-      <p:sp>
-        <p:nvSpPr>
-          <p:cNvPr id="12" name="TextBox 11"/>
-          <p:cNvSpPr txBox="1"/>
-          <p:nvPr/>
-        </p:nvSpPr>
-        <p:spPr>
-          <a:xfrm>
-            <a:off x="1051560" y="5596128"/>
-            <a:ext cx="10058400" cy="365760"/>
+            <a:off x="7452360" y="5349240"/>
+            <a:ext cx="3749039" cy="548640"/>
           </a:xfrm>
           <a:prstGeom prst="rect">
             <a:avLst/>
@@ -9143,30 +9860,23 @@
           </a:bodyPr>
           <a:lstStyle/>
           <a:p>
-            <a:r>
-              <a:rPr b="1" sz="1200">
-                <a:solidFill>
-                  <a:srgbClr val="059669"/>
+            <a:pPr algn="ctr">
+              <a:defRPr sz="1000" b="1">
+                <a:solidFill>
+                  <a:srgbClr val="10B981"/>
                 </a:solidFill>
                 <a:latin typeface="Consolas"/>
-              </a:rPr>
-              <a:t>ZERO DEPENDENCIES: </a:t>
-            </a:r>
-            <a:r>
-              <a:rPr sz="1350">
-                <a:solidFill>
-                  <a:srgbClr val="15120E"/>
-                </a:solidFill>
-                <a:latin typeface="Segoe UI"/>
-              </a:rPr>
-              <a:t>Runs anywhere. Pure C11 with no external OpenSSL headers required, plus automatic Python fallback.</a:t>
-            </a:r>
-          </a:p>
-        </p:txBody>
-      </p:sp>
-      <p:sp>
-        <p:nvSpPr>
-          <p:cNvPr id="13" name="Rectangle 12"/>
+              </a:defRPr>
+            </a:pPr>
+            <a:r>
+              <a:t>COLLABORATIVE AGENT LATTICE</a:t>
+            </a:r>
+          </a:p>
+        </p:txBody>
+      </p:sp>
+      <p:sp>
+        <p:nvSpPr>
+          <p:cNvPr id="10" name="Rectangle 9"/>
           <p:cNvSpPr/>
           <p:nvPr/>
         </p:nvSpPr>
@@ -9209,7 +9919,7 @@
       </p:sp>
       <p:sp>
         <p:nvSpPr>
-          <p:cNvPr id="14" name="TextBox 13"/>
+          <p:cNvPr id="11" name="TextBox 10"/>
           <p:cNvSpPr txBox="1"/>
           <p:nvPr/>
         </p:nvSpPr>
@@ -9236,7 +9946,7 @@
                 </a:solidFill>
                 <a:latin typeface="Consolas"/>
               </a:rPr>
-              <a:t>NULLIFY  •  AUTONOMOUS CYBER DEFENSE</a:t>
+              <a:t>EGATE  ●  NULLIFY AUTONOMOUS DEFENSE</a:t>
             </a:r>
             <a:r>
               <a:rPr i="1" sz="1000">
@@ -9254,7 +9964,7 @@
                 </a:solidFill>
                 <a:latin typeface="Consolas"/>
               </a:rPr>
-              <a:t>05 / 11</a:t>
+              <a:t>05 / 12</a:t>
             </a:r>
           </a:p>
         </p:txBody>
@@ -9351,7 +10061,7 @@
               </a:defRPr>
             </a:pPr>
             <a:r>
-              <a:t>●  MACHINE LEARNING</a:t>
+              <a:t>●  PERFORMANCE BREAKTHROUGH</a:t>
             </a:r>
           </a:p>
         </p:txBody>
@@ -9381,13 +10091,13 @@
             <a:pPr>
               <a:defRPr sz="3200" b="1">
                 <a:solidFill>
-                  <a:srgbClr val="15120E"/>
+                  <a:srgbClr val="14110D"/>
                 </a:solidFill>
                 <a:latin typeface="Georgia"/>
               </a:defRPr>
             </a:pPr>
             <a:r>
-              <a:t>Trained on 1.1 Million Real Binaries</a:t>
+              <a:t>The Secret to Our Speed: Native C Code</a:t>
             </a:r>
           </a:p>
         </p:txBody>
@@ -9401,7 +10111,7 @@
         <p:spPr>
           <a:xfrm>
             <a:off x="822960" y="1645920"/>
-            <a:ext cx="3383280" cy="4434840"/>
+            <a:ext cx="3383280" cy="3657600"/>
           </a:xfrm>
           <a:prstGeom prst="roundRect">
             <a:avLst/>
@@ -9445,8 +10155,8 @@
         </p:nvSpPr>
         <p:spPr>
           <a:xfrm>
-            <a:off x="1097280" y="1920240"/>
-            <a:ext cx="2834640" cy="3840480"/>
+            <a:off x="1097280" y="1828800"/>
+            <a:ext cx="2834640" cy="3291840"/>
           </a:xfrm>
           <a:prstGeom prst="rect">
             <a:avLst/>
@@ -9460,7 +10170,10 @@
           <a:lstStyle/>
           <a:p>
             <a:pPr>
-              <a:defRPr sz="3600" b="1">
+              <a:spcBef>
+                <a:spcPts val="1800"/>
+              </a:spcBef>
+              <a:defRPr sz="3800" b="1">
                 <a:solidFill>
                   <a:srgbClr val="059669"/>
                 </a:solidFill>
@@ -9468,7 +10181,39 @@
               </a:defRPr>
             </a:pPr>
             <a:r>
-              <a:t>2,381 Features</a:t>
+              <a:t>500x Faster</a:t>
+            </a:r>
+          </a:p>
+          <a:p>
+            <a:pPr>
+              <a:spcBef>
+                <a:spcPts val="400"/>
+              </a:spcBef>
+              <a:defRPr sz="1800" b="1">
+                <a:solidFill>
+                  <a:srgbClr val="14110D"/>
+                </a:solidFill>
+                <a:latin typeface="Segoe UI"/>
+              </a:defRPr>
+            </a:pPr>
+            <a:r>
+              <a:t>PE Import Parsing</a:t>
+            </a:r>
+          </a:p>
+          <a:p>
+            <a:pPr>
+              <a:spcBef>
+                <a:spcPts val="600"/>
+              </a:spcBef>
+              <a:defRPr sz="1100" b="1">
+                <a:solidFill>
+                  <a:srgbClr val="059669"/>
+                </a:solidFill>
+                <a:latin typeface="Consolas"/>
+              </a:defRPr>
+            </a:pPr>
+            <a:r>
+              <a:t>Python: 50.0 ms  →  C: 0.1 ms</a:t>
             </a:r>
           </a:p>
           <a:p>
@@ -9476,31 +10221,15 @@
               <a:spcBef>
                 <a:spcPts val="800"/>
               </a:spcBef>
-              <a:defRPr sz="1800" b="1">
-                <a:solidFill>
-                  <a:srgbClr val="15120E"/>
+              <a:defRPr sz="1300">
+                <a:solidFill>
+                  <a:srgbClr val="555048"/>
                 </a:solidFill>
                 <a:latin typeface="Segoe UI"/>
               </a:defRPr>
             </a:pPr>
             <a:r>
-              <a:t>Deep Binary Inspection</a:t>
-            </a:r>
-          </a:p>
-          <a:p>
-            <a:pPr>
-              <a:spcBef>
-                <a:spcPts val="1200"/>
-              </a:spcBef>
-              <a:defRPr sz="1400">
-                <a:solidFill>
-                  <a:srgbClr val="555048"/>
-                </a:solidFill>
-                <a:latin typeface="Segoe UI"/>
-              </a:defRPr>
-            </a:pPr>
-            <a:r>
-              <a:t>Nullify analyzes 2,381 unique characteristics of each file: byte randomness (entropy), printable strings, section sizes, and header anomalies.</a:t>
+              <a:t>Reads executable import tables directly in memory without slow Python libraries.</a:t>
             </a:r>
           </a:p>
         </p:txBody>
@@ -9513,8 +10242,61 @@
         </p:nvSpPr>
         <p:spPr>
           <a:xfrm>
+            <a:off x="1097280" y="1828800"/>
+            <a:ext cx="1828800" cy="292608"/>
+          </a:xfrm>
+          <a:prstGeom prst="roundRect">
+            <a:avLst/>
+          </a:prstGeom>
+          <a:solidFill>
+            <a:srgbClr val="F5F1EA"/>
+          </a:solidFill>
+          <a:ln>
+            <a:noFill/>
+          </a:ln>
+        </p:spPr>
+        <p:style>
+          <a:lnRef idx="1">
+            <a:schemeClr val="accent1"/>
+          </a:lnRef>
+          <a:fillRef idx="3">
+            <a:schemeClr val="accent1"/>
+          </a:fillRef>
+          <a:effectRef idx="2">
+            <a:schemeClr val="accent1"/>
+          </a:effectRef>
+          <a:fontRef idx="minor">
+            <a:schemeClr val="lt1"/>
+          </a:fontRef>
+        </p:style>
+        <p:txBody>
+          <a:bodyPr rtlCol="0" anchor="ctr" lIns="0" tIns="0" rIns="0" bIns="0"/>
+          <a:lstStyle/>
+          <a:p>
+            <a:pPr algn="ctr">
+              <a:defRPr sz="950" b="1">
+                <a:solidFill>
+                  <a:srgbClr val="059669"/>
+                </a:solidFill>
+                <a:latin typeface="Consolas"/>
+              </a:defRPr>
+            </a:pPr>
+            <a:r>
+              <a:t>[ ENGINE // 01 ]</a:t>
+            </a:r>
+          </a:p>
+        </p:txBody>
+      </p:sp>
+      <p:sp>
+        <p:nvSpPr>
+          <p:cNvPr id="8" name="Rounded Rectangle 7"/>
+          <p:cNvSpPr/>
+          <p:nvPr/>
+        </p:nvSpPr>
+        <p:spPr>
+          <a:xfrm>
             <a:off x="4434840" y="1645920"/>
-            <a:ext cx="3383280" cy="4434840"/>
+            <a:ext cx="3383280" cy="3657600"/>
           </a:xfrm>
           <a:prstGeom prst="roundRect">
             <a:avLst/>
@@ -9552,14 +10334,14 @@
       </p:sp>
       <p:sp>
         <p:nvSpPr>
-          <p:cNvPr id="8" name="TextBox 7"/>
+          <p:cNvPr id="9" name="TextBox 8"/>
           <p:cNvSpPr txBox="1"/>
           <p:nvPr/>
         </p:nvSpPr>
         <p:spPr>
           <a:xfrm>
-            <a:off x="4709160" y="1920240"/>
-            <a:ext cx="2834640" cy="3840480"/>
+            <a:off x="4709160" y="1828800"/>
+            <a:ext cx="2834640" cy="3291840"/>
           </a:xfrm>
           <a:prstGeom prst="rect">
             <a:avLst/>
@@ -9573,7 +10355,10 @@
           <a:lstStyle/>
           <a:p>
             <a:pPr>
-              <a:defRPr sz="3600" b="1">
+              <a:spcBef>
+                <a:spcPts val="1800"/>
+              </a:spcBef>
+              <a:defRPr sz="3800" b="1">
                 <a:solidFill>
                   <a:srgbClr val="2563EB"/>
                 </a:solidFill>
@@ -9581,7 +10366,39 @@
               </a:defRPr>
             </a:pPr>
             <a:r>
-              <a:t>99.9% Accuracy</a:t>
+              <a:t>18x Faster</a:t>
+            </a:r>
+          </a:p>
+          <a:p>
+            <a:pPr>
+              <a:spcBef>
+                <a:spcPts val="400"/>
+              </a:spcBef>
+              <a:defRPr sz="1800" b="1">
+                <a:solidFill>
+                  <a:srgbClr val="14110D"/>
+                </a:solidFill>
+                <a:latin typeface="Segoe UI"/>
+              </a:defRPr>
+            </a:pPr>
+            <a:r>
+              <a:t>Pattern Scanner</a:t>
+            </a:r>
+          </a:p>
+          <a:p>
+            <a:pPr>
+              <a:spcBef>
+                <a:spcPts val="600"/>
+              </a:spcBef>
+              <a:defRPr sz="1100" b="1">
+                <a:solidFill>
+                  <a:srgbClr val="2563EB"/>
+                </a:solidFill>
+                <a:latin typeface="Consolas"/>
+              </a:defRPr>
+            </a:pPr>
+            <a:r>
+              <a:t>Python: 15.4 ms  →  C: 0.8 ms</a:t>
             </a:r>
           </a:p>
           <a:p>
@@ -9589,45 +10406,82 @@
               <a:spcBef>
                 <a:spcPts val="800"/>
               </a:spcBef>
-              <a:defRPr sz="1800" b="1">
-                <a:solidFill>
-                  <a:srgbClr val="15120E"/>
+              <a:defRPr sz="1300">
+                <a:solidFill>
+                  <a:srgbClr val="555048"/>
                 </a:solidFill>
                 <a:latin typeface="Segoe UI"/>
               </a:defRPr>
             </a:pPr>
             <a:r>
-              <a:t>Trained on EMBER 2017</a:t>
-            </a:r>
-          </a:p>
-          <a:p>
-            <a:pPr>
-              <a:spcBef>
-                <a:spcPts val="1200"/>
-              </a:spcBef>
-              <a:defRPr sz="1400">
-                <a:solidFill>
-                  <a:srgbClr val="555048"/>
-                </a:solidFill>
-                <a:latin typeface="Segoe UI"/>
-              </a:defRPr>
-            </a:pPr>
-            <a:r>
-              <a:t>Trained on 1.1 million verified benign and malicious files. Our gradient-boosted decision trees deliver industry-leading accuracy without hallucinating.</a:t>
-            </a:r>
-          </a:p>
-        </p:txBody>
-      </p:sp>
-      <p:sp>
-        <p:nvSpPr>
-          <p:cNvPr id="9" name="Rounded Rectangle 8"/>
+              <a:t>Finds hidden registry keys, download cradles, and backdoor strings in a single pass.</a:t>
+            </a:r>
+          </a:p>
+        </p:txBody>
+      </p:sp>
+      <p:sp>
+        <p:nvSpPr>
+          <p:cNvPr id="10" name="Rounded Rectangle 9"/>
           <p:cNvSpPr/>
           <p:nvPr/>
         </p:nvSpPr>
         <p:spPr>
           <a:xfrm>
+            <a:off x="4709160" y="1828800"/>
+            <a:ext cx="1828800" cy="292608"/>
+          </a:xfrm>
+          <a:prstGeom prst="roundRect">
+            <a:avLst/>
+          </a:prstGeom>
+          <a:solidFill>
+            <a:srgbClr val="F5F1EA"/>
+          </a:solidFill>
+          <a:ln>
+            <a:noFill/>
+          </a:ln>
+        </p:spPr>
+        <p:style>
+          <a:lnRef idx="1">
+            <a:schemeClr val="accent1"/>
+          </a:lnRef>
+          <a:fillRef idx="3">
+            <a:schemeClr val="accent1"/>
+          </a:fillRef>
+          <a:effectRef idx="2">
+            <a:schemeClr val="accent1"/>
+          </a:effectRef>
+          <a:fontRef idx="minor">
+            <a:schemeClr val="lt1"/>
+          </a:fontRef>
+        </p:style>
+        <p:txBody>
+          <a:bodyPr rtlCol="0" anchor="ctr" lIns="0" tIns="0" rIns="0" bIns="0"/>
+          <a:lstStyle/>
+          <a:p>
+            <a:pPr algn="ctr">
+              <a:defRPr sz="950" b="1">
+                <a:solidFill>
+                  <a:srgbClr val="2563EB"/>
+                </a:solidFill>
+                <a:latin typeface="Consolas"/>
+              </a:defRPr>
+            </a:pPr>
+            <a:r>
+              <a:t>[ ENGINE // 02 ]</a:t>
+            </a:r>
+          </a:p>
+        </p:txBody>
+      </p:sp>
+      <p:sp>
+        <p:nvSpPr>
+          <p:cNvPr id="11" name="Rounded Rectangle 10"/>
+          <p:cNvSpPr/>
+          <p:nvPr/>
+        </p:nvSpPr>
+        <p:spPr>
+          <a:xfrm>
             <a:off x="8046720" y="1645920"/>
-            <a:ext cx="3383280" cy="4434840"/>
+            <a:ext cx="3383280" cy="3657600"/>
           </a:xfrm>
           <a:prstGeom prst="roundRect">
             <a:avLst/>
@@ -9665,14 +10519,14 @@
       </p:sp>
       <p:sp>
         <p:nvSpPr>
-          <p:cNvPr id="10" name="TextBox 9"/>
+          <p:cNvPr id="12" name="TextBox 11"/>
           <p:cNvSpPr txBox="1"/>
           <p:nvPr/>
         </p:nvSpPr>
         <p:spPr>
           <a:xfrm>
-            <a:off x="8321040" y="1920240"/>
-            <a:ext cx="2834640" cy="3840480"/>
+            <a:off x="8321040" y="1828800"/>
+            <a:ext cx="2834640" cy="3291840"/>
           </a:xfrm>
           <a:prstGeom prst="rect">
             <a:avLst/>
@@ -9686,7 +10540,10 @@
           <a:lstStyle/>
           <a:p>
             <a:pPr>
-              <a:defRPr sz="3600" b="1">
+              <a:spcBef>
+                <a:spcPts val="1800"/>
+              </a:spcBef>
+              <a:defRPr sz="3800" b="1">
                 <a:solidFill>
                   <a:srgbClr val="D97706"/>
                 </a:solidFill>
@@ -9694,7 +10551,39 @@
               </a:defRPr>
             </a:pPr>
             <a:r>
-              <a:t>Zero False Alarms</a:t>
+              <a:t>8x Faster</a:t>
+            </a:r>
+          </a:p>
+          <a:p>
+            <a:pPr>
+              <a:spcBef>
+                <a:spcPts val="400"/>
+              </a:spcBef>
+              <a:defRPr sz="1800" b="1">
+                <a:solidFill>
+                  <a:srgbClr val="14110D"/>
+                </a:solidFill>
+                <a:latin typeface="Segoe UI"/>
+              </a:defRPr>
+            </a:pPr>
+            <a:r>
+              <a:t>File Multi-Hashing</a:t>
+            </a:r>
+          </a:p>
+          <a:p>
+            <a:pPr>
+              <a:spcBef>
+                <a:spcPts val="600"/>
+              </a:spcBef>
+              <a:defRPr sz="1100" b="1">
+                <a:solidFill>
+                  <a:srgbClr val="D97706"/>
+                </a:solidFill>
+                <a:latin typeface="Consolas"/>
+              </a:defRPr>
+            </a:pPr>
+            <a:r>
+              <a:t>Python: 8.9 ms  →  C: 1.1 ms</a:t>
             </a:r>
           </a:p>
           <a:p>
@@ -9702,38 +10591,163 @@
               <a:spcBef>
                 <a:spcPts val="800"/>
               </a:spcBef>
-              <a:defRPr sz="1800" b="1">
-                <a:solidFill>
-                  <a:srgbClr val="15120E"/>
+              <a:defRPr sz="1300">
+                <a:solidFill>
+                  <a:srgbClr val="555048"/>
                 </a:solidFill>
                 <a:latin typeface="Segoe UI"/>
               </a:defRPr>
             </a:pPr>
             <a:r>
-              <a:t>Smart Linux vs Windows Guard</a:t>
-            </a:r>
-          </a:p>
-          <a:p>
-            <a:pPr>
-              <a:spcBef>
-                <a:spcPts val="1200"/>
-              </a:spcBef>
-              <a:defRPr sz="1400">
-                <a:solidFill>
-                  <a:srgbClr val="555048"/>
+              <a:t>Streams 64KB blocks, updating MD5, SHA-1, and SHA-256 at the exact same time.</a:t>
+            </a:r>
+          </a:p>
+        </p:txBody>
+      </p:sp>
+      <p:sp>
+        <p:nvSpPr>
+          <p:cNvPr id="13" name="Rounded Rectangle 12"/>
+          <p:cNvSpPr/>
+          <p:nvPr/>
+        </p:nvSpPr>
+        <p:spPr>
+          <a:xfrm>
+            <a:off x="8321040" y="1828800"/>
+            <a:ext cx="1828800" cy="292608"/>
+          </a:xfrm>
+          <a:prstGeom prst="roundRect">
+            <a:avLst/>
+          </a:prstGeom>
+          <a:solidFill>
+            <a:srgbClr val="F5F1EA"/>
+          </a:solidFill>
+          <a:ln>
+            <a:noFill/>
+          </a:ln>
+        </p:spPr>
+        <p:style>
+          <a:lnRef idx="1">
+            <a:schemeClr val="accent1"/>
+          </a:lnRef>
+          <a:fillRef idx="3">
+            <a:schemeClr val="accent1"/>
+          </a:fillRef>
+          <a:effectRef idx="2">
+            <a:schemeClr val="accent1"/>
+          </a:effectRef>
+          <a:fontRef idx="minor">
+            <a:schemeClr val="lt1"/>
+          </a:fontRef>
+        </p:style>
+        <p:txBody>
+          <a:bodyPr rtlCol="0" anchor="ctr" lIns="0" tIns="0" rIns="0" bIns="0"/>
+          <a:lstStyle/>
+          <a:p>
+            <a:pPr algn="ctr">
+              <a:defRPr sz="950" b="1">
+                <a:solidFill>
+                  <a:srgbClr val="D97706"/>
+                </a:solidFill>
+                <a:latin typeface="Consolas"/>
+              </a:defRPr>
+            </a:pPr>
+            <a:r>
+              <a:t>[ ENGINE // 03 ]</a:t>
+            </a:r>
+          </a:p>
+        </p:txBody>
+      </p:sp>
+      <p:sp>
+        <p:nvSpPr>
+          <p:cNvPr id="14" name="Rounded Rectangle 13"/>
+          <p:cNvSpPr/>
+          <p:nvPr/>
+        </p:nvSpPr>
+        <p:spPr>
+          <a:xfrm>
+            <a:off x="822960" y="5486400"/>
+            <a:ext cx="10545775" cy="594360"/>
+          </a:xfrm>
+          <a:prstGeom prst="roundRect">
+            <a:avLst/>
+          </a:prstGeom>
+          <a:solidFill>
+            <a:srgbClr val="F5F1EA"/>
+          </a:solidFill>
+          <a:ln w="12700">
+            <a:solidFill>
+              <a:srgbClr val="E2DCD2"/>
+            </a:solidFill>
+          </a:ln>
+        </p:spPr>
+        <p:style>
+          <a:lnRef idx="1">
+            <a:schemeClr val="accent1"/>
+          </a:lnRef>
+          <a:fillRef idx="3">
+            <a:schemeClr val="accent1"/>
+          </a:fillRef>
+          <a:effectRef idx="2">
+            <a:schemeClr val="accent1"/>
+          </a:effectRef>
+          <a:fontRef idx="minor">
+            <a:schemeClr val="lt1"/>
+          </a:fontRef>
+        </p:style>
+        <p:txBody>
+          <a:bodyPr rtlCol="0" anchor="ctr"/>
+          <a:lstStyle/>
+          <a:p>
+            <a:pPr algn="ctr"/>
+          </a:p>
+        </p:txBody>
+      </p:sp>
+      <p:sp>
+        <p:nvSpPr>
+          <p:cNvPr id="15" name="TextBox 14"/>
+          <p:cNvSpPr txBox="1"/>
+          <p:nvPr/>
+        </p:nvSpPr>
+        <p:spPr>
+          <a:xfrm>
+            <a:off x="1051560" y="5596128"/>
+            <a:ext cx="10058400" cy="365760"/>
+          </a:xfrm>
+          <a:prstGeom prst="rect">
+            <a:avLst/>
+          </a:prstGeom>
+          <a:noFill/>
+        </p:spPr>
+        <p:txBody>
+          <a:bodyPr wrap="none" lIns="0" tIns="0" rIns="0" bIns="0">
+            <a:spAutoFit/>
+          </a:bodyPr>
+          <a:lstStyle/>
+          <a:p>
+            <a:r>
+              <a:rPr b="1" sz="1200">
+                <a:solidFill>
+                  <a:srgbClr val="059669"/>
+                </a:solidFill>
+                <a:latin typeface="Consolas"/>
+              </a:rPr>
+              <a:t>ZERO EXTERNAL DEPENDENCIES: </a:t>
+            </a:r>
+            <a:r>
+              <a:rPr sz="1300">
+                <a:solidFill>
+                  <a:srgbClr val="14110D"/>
                 </a:solidFill>
                 <a:latin typeface="Segoe UI"/>
-              </a:defRPr>
-            </a:pPr>
-            <a:r>
-              <a:t>Most antivirus tools trigger false alarms on Linux files because they try to force Windows rules. Nullify detects file types accurately so safe code isn't flagged.</a:t>
-            </a:r>
-          </a:p>
-        </p:txBody>
-      </p:sp>
-      <p:sp>
-        <p:nvSpPr>
-          <p:cNvPr id="11" name="Rectangle 10"/>
+              </a:rPr>
+              <a:t>Pure C11 (-O3) with built-in RFC 3174 SHA-1 and MD5. No OpenSSL link errors, plus automatic Python fallback.</a:t>
+            </a:r>
+          </a:p>
+        </p:txBody>
+      </p:sp>
+      <p:sp>
+        <p:nvSpPr>
+          <p:cNvPr id="16" name="Rectangle 15"/>
           <p:cNvSpPr/>
           <p:nvPr/>
         </p:nvSpPr>
@@ -9776,7 +10790,7 @@
       </p:sp>
       <p:sp>
         <p:nvSpPr>
-          <p:cNvPr id="12" name="TextBox 11"/>
+          <p:cNvPr id="17" name="TextBox 16"/>
           <p:cNvSpPr txBox="1"/>
           <p:nvPr/>
         </p:nvSpPr>
@@ -9803,7 +10817,7 @@
                 </a:solidFill>
                 <a:latin typeface="Consolas"/>
               </a:rPr>
-              <a:t>NULLIFY  •  AUTONOMOUS CYBER DEFENSE</a:t>
+              <a:t>EGATE  ●  NULLIFY AUTONOMOUS DEFENSE</a:t>
             </a:r>
             <a:r>
               <a:rPr i="1" sz="1000">
@@ -9821,7 +10835,7 @@
                 </a:solidFill>
                 <a:latin typeface="Consolas"/>
               </a:rPr>
-              <a:t>06 / 11</a:t>
+              <a:t>06 / 12</a:t>
             </a:r>
           </a:p>
         </p:txBody>
@@ -9918,7 +10932,7 @@
               </a:defRPr>
             </a:pPr>
             <a:r>
-              <a:t>●  ACTIVE DEFENSE</a:t>
+              <a:t>●  MACHINE LEARNING</a:t>
             </a:r>
           </a:p>
         </p:txBody>
@@ -9948,13 +10962,13 @@
             <a:pPr>
               <a:defRPr sz="3200" b="1">
                 <a:solidFill>
-                  <a:srgbClr val="15120E"/>
+                  <a:srgbClr val="14110D"/>
                 </a:solidFill>
                 <a:latin typeface="Georgia"/>
               </a:defRPr>
             </a:pPr>
             <a:r>
-              <a:t>From Threat Detection to Immunity in Seconds</a:t>
+              <a:t>Trained on 1.1 Million Real Binaries</a:t>
             </a:r>
           </a:p>
         </p:txBody>
@@ -9968,7 +10982,7 @@
         <p:spPr>
           <a:xfrm>
             <a:off x="822960" y="1645920"/>
-            <a:ext cx="5120640" cy="4434840"/>
+            <a:ext cx="3383280" cy="4434840"/>
           </a:xfrm>
           <a:prstGeom prst="roundRect">
             <a:avLst/>
@@ -10006,173 +11020,23 @@
       </p:sp>
       <p:sp>
         <p:nvSpPr>
-          <p:cNvPr id="6" name="TextBox 5"/>
-          <p:cNvSpPr txBox="1"/>
+          <p:cNvPr id="6" name="Rounded Rectangle 5"/>
+          <p:cNvSpPr/>
           <p:nvPr/>
         </p:nvSpPr>
         <p:spPr>
           <a:xfrm>
             <a:off x="1097280" y="1920240"/>
-            <a:ext cx="4572000" cy="3931920"/>
-          </a:xfrm>
-          <a:prstGeom prst="rect">
-            <a:avLst/>
-          </a:prstGeom>
-          <a:noFill/>
-        </p:spPr>
-        <p:txBody>
-          <a:bodyPr wrap="square" lIns="0" tIns="0" rIns="0" bIns="0">
-            <a:spAutoFit/>
-          </a:bodyPr>
-          <a:lstStyle/>
-          <a:p>
-            <a:pPr>
-              <a:defRPr sz="1100" b="1">
-                <a:solidFill>
-                  <a:srgbClr val="DC2626"/>
-                </a:solidFill>
-                <a:latin typeface="Consolas"/>
-              </a:defRPr>
-            </a:pPr>
-            <a:r>
-              <a:t>NOT JUST AN ALERT — ACTIVE IMMUNITY</a:t>
-            </a:r>
-          </a:p>
-          <a:p>
-            <a:pPr>
-              <a:spcBef>
-                <a:spcPts val="600"/>
-              </a:spcBef>
-              <a:defRPr sz="2000" b="1">
-                <a:solidFill>
-                  <a:srgbClr val="15120E"/>
-                </a:solidFill>
-                <a:latin typeface="Segoe UI"/>
-              </a:defRPr>
-            </a:pPr>
-            <a:r>
-              <a:t>Tells You What Happened &amp; Blocks It Everywhere</a:t>
-            </a:r>
-          </a:p>
-          <a:p>
-            <a:pPr>
-              <a:spcBef>
-                <a:spcPts val="1400"/>
-              </a:spcBef>
-              <a:defRPr sz="1500" b="1">
-                <a:solidFill>
-                  <a:srgbClr val="15120E"/>
-                </a:solidFill>
-                <a:latin typeface="Segoe UI"/>
-              </a:defRPr>
-            </a:pPr>
-            <a:r>
-              <a:t>• Explains the Threat Clearly:</a:t>
-            </a:r>
-          </a:p>
-          <a:p>
-            <a:pPr>
-              <a:spcBef>
-                <a:spcPts val="200"/>
-              </a:spcBef>
-              <a:defRPr sz="1350">
-                <a:solidFill>
-                  <a:srgbClr val="555048"/>
-                </a:solidFill>
-                <a:latin typeface="Segoe UI"/>
-              </a:defRPr>
-            </a:pPr>
-            <a:r>
-              <a:t>Identifies the exact techniques the attacker used (e.g. injecting code into processes or setting up secret auto-run keys).</a:t>
-            </a:r>
-          </a:p>
-          <a:p>
-            <a:pPr>
-              <a:spcBef>
-                <a:spcPts val="1400"/>
-              </a:spcBef>
-              <a:defRPr sz="1500" b="1">
-                <a:solidFill>
-                  <a:srgbClr val="15120E"/>
-                </a:solidFill>
-                <a:latin typeface="Segoe UI"/>
-              </a:defRPr>
-            </a:pPr>
-            <a:r>
-              <a:t>• Maps to MITRE ATT&amp;CK:</a:t>
-            </a:r>
-          </a:p>
-          <a:p>
-            <a:pPr>
-              <a:spcBef>
-                <a:spcPts val="200"/>
-              </a:spcBef>
-              <a:defRPr sz="1350">
-                <a:solidFill>
-                  <a:srgbClr val="555048"/>
-                </a:solidFill>
-                <a:latin typeface="Segoe UI"/>
-              </a:defRPr>
-            </a:pPr>
-            <a:r>
-              <a:t>Industry-standard tagging (T1055, T1547) so security teams understand the risk instantly.</a:t>
-            </a:r>
-          </a:p>
-          <a:p>
-            <a:pPr>
-              <a:spcBef>
-                <a:spcPts val="1400"/>
-              </a:spcBef>
-              <a:defRPr sz="1500" b="1">
-                <a:solidFill>
-                  <a:srgbClr val="15120E"/>
-                </a:solidFill>
-                <a:latin typeface="Segoe UI"/>
-              </a:defRPr>
-            </a:pPr>
-            <a:r>
-              <a:t>• Writes the Defense Rule:</a:t>
-            </a:r>
-          </a:p>
-          <a:p>
-            <a:pPr>
-              <a:spcBef>
-                <a:spcPts val="200"/>
-              </a:spcBef>
-              <a:defRPr sz="1350">
-                <a:solidFill>
-                  <a:srgbClr val="555048"/>
-                </a:solidFill>
-                <a:latin typeface="Segoe UI"/>
-              </a:defRPr>
-            </a:pPr>
-            <a:r>
-              <a:t>Generates a complete, ready-to-use YARA rule that your firewalls, EDR, and mail filters can apply right away.</a:t>
-            </a:r>
-          </a:p>
-        </p:txBody>
-      </p:sp>
-      <p:sp>
-        <p:nvSpPr>
-          <p:cNvPr id="7" name="Rounded Rectangle 6"/>
-          <p:cNvSpPr/>
-          <p:nvPr/>
-        </p:nvSpPr>
-        <p:spPr>
-          <a:xfrm>
-            <a:off x="6245352" y="1645920"/>
-            <a:ext cx="5120640" cy="4434840"/>
+            <a:ext cx="2011680" cy="320040"/>
           </a:xfrm>
           <a:prstGeom prst="roundRect">
             <a:avLst/>
           </a:prstGeom>
           <a:solidFill>
-            <a:srgbClr val="15120E"/>
+            <a:srgbClr val="F5F1EA"/>
           </a:solidFill>
-          <a:ln w="12700">
-            <a:solidFill>
-              <a:srgbClr val="322B22"/>
-            </a:solidFill>
+          <a:ln>
+            <a:noFill/>
           </a:ln>
         </p:spPr>
         <p:style>
@@ -10190,23 +11054,33 @@
           </a:fontRef>
         </p:style>
         <p:txBody>
-          <a:bodyPr rtlCol="0" anchor="ctr"/>
-          <a:lstStyle/>
-          <a:p>
-            <a:pPr algn="ctr"/>
-          </a:p>
-        </p:txBody>
-      </p:sp>
-      <p:sp>
-        <p:nvSpPr>
-          <p:cNvPr id="8" name="TextBox 7"/>
+          <a:bodyPr rtlCol="0" anchor="ctr" lIns="0" tIns="0" rIns="0" bIns="0"/>
+          <a:lstStyle/>
+          <a:p>
+            <a:pPr algn="ctr">
+              <a:defRPr sz="950" b="1">
+                <a:solidFill>
+                  <a:srgbClr val="059669"/>
+                </a:solidFill>
+                <a:latin typeface="Consolas"/>
+              </a:defRPr>
+            </a:pPr>
+            <a:r>
+              <a:t>[ FEATURE SPACE ]</a:t>
+            </a:r>
+          </a:p>
+        </p:txBody>
+      </p:sp>
+      <p:sp>
+        <p:nvSpPr>
+          <p:cNvPr id="7" name="TextBox 6"/>
           <p:cNvSpPr txBox="1"/>
           <p:nvPr/>
         </p:nvSpPr>
         <p:spPr>
           <a:xfrm>
-            <a:off x="6519672" y="1920240"/>
-            <a:ext cx="4572000" cy="3931920"/>
+            <a:off x="1097280" y="2423160"/>
+            <a:ext cx="2834640" cy="3474720"/>
           </a:xfrm>
           <a:prstGeom prst="rect">
             <a:avLst/>
@@ -10220,106 +11094,338 @@
           <a:lstStyle/>
           <a:p>
             <a:pPr>
-              <a:defRPr sz="1100" b="1">
-                <a:solidFill>
-                  <a:srgbClr val="10B981"/>
-                </a:solidFill>
-                <a:latin typeface="Consolas"/>
-              </a:defRPr>
-            </a:pPr>
-            <a:r>
-              <a:t>AUTO-GENERATED YARA DEFENSE RULE</a:t>
+              <a:defRPr sz="2000" b="1">
+                <a:solidFill>
+                  <a:srgbClr val="14110D"/>
+                </a:solidFill>
+                <a:latin typeface="Segoe UI"/>
+              </a:defRPr>
+            </a:pPr>
+            <a:r>
+              <a:t>2,381 Features Analyzed</a:t>
             </a:r>
           </a:p>
           <a:p>
             <a:pPr>
               <a:spcBef>
-                <a:spcPts val="1200"/>
+                <a:spcPts val="1400"/>
               </a:spcBef>
-              <a:defRPr sz="1200">
-                <a:solidFill>
-                  <a:srgbClr val="BFB9AF"/>
+              <a:defRPr sz="1400">
+                <a:solidFill>
+                  <a:srgbClr val="555048"/>
+                </a:solidFill>
+                <a:latin typeface="Segoe UI"/>
+              </a:defRPr>
+            </a:pPr>
+            <a:r>
+              <a:t>Nullify analyzes 2,381 unique characteristics of each file: byte randomness (entropy), printable strings, section sizes, and header anomalies.</a:t>
+            </a:r>
+          </a:p>
+        </p:txBody>
+      </p:sp>
+      <p:sp>
+        <p:nvSpPr>
+          <p:cNvPr id="8" name="Rounded Rectangle 7"/>
+          <p:cNvSpPr/>
+          <p:nvPr/>
+        </p:nvSpPr>
+        <p:spPr>
+          <a:xfrm>
+            <a:off x="4434840" y="1645920"/>
+            <a:ext cx="3383280" cy="4434840"/>
+          </a:xfrm>
+          <a:prstGeom prst="roundRect">
+            <a:avLst/>
+          </a:prstGeom>
+          <a:solidFill>
+            <a:srgbClr val="FFFFFF"/>
+          </a:solidFill>
+          <a:ln w="12700">
+            <a:solidFill>
+              <a:srgbClr val="E2DCD2"/>
+            </a:solidFill>
+          </a:ln>
+        </p:spPr>
+        <p:style>
+          <a:lnRef idx="1">
+            <a:schemeClr val="accent1"/>
+          </a:lnRef>
+          <a:fillRef idx="3">
+            <a:schemeClr val="accent1"/>
+          </a:fillRef>
+          <a:effectRef idx="2">
+            <a:schemeClr val="accent1"/>
+          </a:effectRef>
+          <a:fontRef idx="minor">
+            <a:schemeClr val="lt1"/>
+          </a:fontRef>
+        </p:style>
+        <p:txBody>
+          <a:bodyPr rtlCol="0" anchor="ctr"/>
+          <a:lstStyle/>
+          <a:p>
+            <a:pPr algn="ctr"/>
+          </a:p>
+        </p:txBody>
+      </p:sp>
+      <p:sp>
+        <p:nvSpPr>
+          <p:cNvPr id="9" name="Rounded Rectangle 8"/>
+          <p:cNvSpPr/>
+          <p:nvPr/>
+        </p:nvSpPr>
+        <p:spPr>
+          <a:xfrm>
+            <a:off x="4709160" y="1920240"/>
+            <a:ext cx="2011680" cy="320040"/>
+          </a:xfrm>
+          <a:prstGeom prst="roundRect">
+            <a:avLst/>
+          </a:prstGeom>
+          <a:solidFill>
+            <a:srgbClr val="F5F1EA"/>
+          </a:solidFill>
+          <a:ln>
+            <a:noFill/>
+          </a:ln>
+        </p:spPr>
+        <p:style>
+          <a:lnRef idx="1">
+            <a:schemeClr val="accent1"/>
+          </a:lnRef>
+          <a:fillRef idx="3">
+            <a:schemeClr val="accent1"/>
+          </a:fillRef>
+          <a:effectRef idx="2">
+            <a:schemeClr val="accent1"/>
+          </a:effectRef>
+          <a:fontRef idx="minor">
+            <a:schemeClr val="lt1"/>
+          </a:fontRef>
+        </p:style>
+        <p:txBody>
+          <a:bodyPr rtlCol="0" anchor="ctr" lIns="0" tIns="0" rIns="0" bIns="0"/>
+          <a:lstStyle/>
+          <a:p>
+            <a:pPr algn="ctr">
+              <a:defRPr sz="950" b="1">
+                <a:solidFill>
+                  <a:srgbClr val="2563EB"/>
                 </a:solidFill>
                 <a:latin typeface="Consolas"/>
               </a:defRPr>
             </a:pPr>
             <a:r>
-              <a:t>rule Nullify_AutoDefense_Trojan {</a:t>
-            </a:r>
-            <a:br/>
-            <a:r>
-              <a:t>    meta:</a:t>
-            </a:r>
-            <a:br/>
-            <a:r>
-              <a:t>        description = "Auto-generated by Nullify"</a:t>
-            </a:r>
-            <a:br/>
-            <a:r>
-              <a:t>        threat      = "Trojan / Backdoor"</a:t>
-            </a:r>
-            <a:br/>
-            <a:r>
-              <a:t>        confidence  = "98.4%"</a:t>
-            </a:r>
-            <a:br/>
-            <a:r>
-              <a:t>    strings:</a:t>
-            </a:r>
-            <a:br/>
-            <a:r>
-              <a:t>        $run_key = "CurrentVersion\\Run" nocase</a:t>
-            </a:r>
-            <a:br/>
-            <a:r>
-              <a:t>        $ps_exec = "powershell -enc" nocase</a:t>
-            </a:r>
-            <a:br/>
-            <a:r>
-              <a:t>        $inject  = "VirtualAllocEx"</a:t>
-            </a:r>
-            <a:br/>
-            <a:r>
-              <a:t>    condition:</a:t>
-            </a:r>
-            <a:br/>
-            <a:r>
-              <a:t>        uint16(0) == 0x5A4D and</a:t>
-            </a:r>
-            <a:br/>
-            <a:r>
-              <a:t>        filesize &lt; 5MB and</a:t>
-            </a:r>
-            <a:br/>
-            <a:r>
-              <a:t>        (2 of ($*))</a:t>
-            </a:r>
-            <a:br/>
-            <a:r>
-              <a:t>}</a:t>
+              <a:t>[ VALIDATION ]</a:t>
+            </a:r>
+          </a:p>
+        </p:txBody>
+      </p:sp>
+      <p:sp>
+        <p:nvSpPr>
+          <p:cNvPr id="10" name="TextBox 9"/>
+          <p:cNvSpPr txBox="1"/>
+          <p:nvPr/>
+        </p:nvSpPr>
+        <p:spPr>
+          <a:xfrm>
+            <a:off x="4709160" y="2423160"/>
+            <a:ext cx="2834640" cy="3474720"/>
+          </a:xfrm>
+          <a:prstGeom prst="rect">
+            <a:avLst/>
+          </a:prstGeom>
+          <a:noFill/>
+        </p:spPr>
+        <p:txBody>
+          <a:bodyPr wrap="square" lIns="0" tIns="0" rIns="0" bIns="0">
+            <a:spAutoFit/>
+          </a:bodyPr>
+          <a:lstStyle/>
+          <a:p>
+            <a:pPr>
+              <a:defRPr sz="2000" b="1">
+                <a:solidFill>
+                  <a:srgbClr val="14110D"/>
+                </a:solidFill>
+                <a:latin typeface="Segoe UI"/>
+              </a:defRPr>
+            </a:pPr>
+            <a:r>
+              <a:t>99.9% Proven Accuracy</a:t>
             </a:r>
           </a:p>
           <a:p>
             <a:pPr>
               <a:spcBef>
-                <a:spcPts val="1600"/>
+                <a:spcPts val="1400"/>
               </a:spcBef>
-              <a:defRPr sz="1250" b="1">
-                <a:solidFill>
-                  <a:srgbClr val="10B981"/>
+              <a:defRPr sz="1400">
+                <a:solidFill>
+                  <a:srgbClr val="555048"/>
                 </a:solidFill>
                 <a:latin typeface="Segoe UI"/>
               </a:defRPr>
             </a:pPr>
             <a:r>
-              <a:t>✓ Ready to push to CrowdStrike, SentinelOne, or Defender.</a:t>
-            </a:r>
-          </a:p>
-        </p:txBody>
-      </p:sp>
-      <p:sp>
-        <p:nvSpPr>
-          <p:cNvPr id="9" name="Rectangle 8"/>
+              <a:t>Trained on 1.1 million verified benign and malicious files from the EMBER benchmark. Gradient-boosted trees classify threats without hallucinating.</a:t>
+            </a:r>
+          </a:p>
+        </p:txBody>
+      </p:sp>
+      <p:sp>
+        <p:nvSpPr>
+          <p:cNvPr id="11" name="Rounded Rectangle 10"/>
+          <p:cNvSpPr/>
+          <p:nvPr/>
+        </p:nvSpPr>
+        <p:spPr>
+          <a:xfrm>
+            <a:off x="8046720" y="1645920"/>
+            <a:ext cx="3383280" cy="4434840"/>
+          </a:xfrm>
+          <a:prstGeom prst="roundRect">
+            <a:avLst/>
+          </a:prstGeom>
+          <a:solidFill>
+            <a:srgbClr val="FFFFFF"/>
+          </a:solidFill>
+          <a:ln w="12700">
+            <a:solidFill>
+              <a:srgbClr val="E2DCD2"/>
+            </a:solidFill>
+          </a:ln>
+        </p:spPr>
+        <p:style>
+          <a:lnRef idx="1">
+            <a:schemeClr val="accent1"/>
+          </a:lnRef>
+          <a:fillRef idx="3">
+            <a:schemeClr val="accent1"/>
+          </a:fillRef>
+          <a:effectRef idx="2">
+            <a:schemeClr val="accent1"/>
+          </a:effectRef>
+          <a:fontRef idx="minor">
+            <a:schemeClr val="lt1"/>
+          </a:fontRef>
+        </p:style>
+        <p:txBody>
+          <a:bodyPr rtlCol="0" anchor="ctr"/>
+          <a:lstStyle/>
+          <a:p>
+            <a:pPr algn="ctr"/>
+          </a:p>
+        </p:txBody>
+      </p:sp>
+      <p:sp>
+        <p:nvSpPr>
+          <p:cNvPr id="12" name="Rounded Rectangle 11"/>
+          <p:cNvSpPr/>
+          <p:nvPr/>
+        </p:nvSpPr>
+        <p:spPr>
+          <a:xfrm>
+            <a:off x="8321040" y="1920240"/>
+            <a:ext cx="2011680" cy="320040"/>
+          </a:xfrm>
+          <a:prstGeom prst="roundRect">
+            <a:avLst/>
+          </a:prstGeom>
+          <a:solidFill>
+            <a:srgbClr val="F5F1EA"/>
+          </a:solidFill>
+          <a:ln>
+            <a:noFill/>
+          </a:ln>
+        </p:spPr>
+        <p:style>
+          <a:lnRef idx="1">
+            <a:schemeClr val="accent1"/>
+          </a:lnRef>
+          <a:fillRef idx="3">
+            <a:schemeClr val="accent1"/>
+          </a:fillRef>
+          <a:effectRef idx="2">
+            <a:schemeClr val="accent1"/>
+          </a:effectRef>
+          <a:fontRef idx="minor">
+            <a:schemeClr val="lt1"/>
+          </a:fontRef>
+        </p:style>
+        <p:txBody>
+          <a:bodyPr rtlCol="0" anchor="ctr" lIns="0" tIns="0" rIns="0" bIns="0"/>
+          <a:lstStyle/>
+          <a:p>
+            <a:pPr algn="ctr">
+              <a:defRPr sz="950" b="1">
+                <a:solidFill>
+                  <a:srgbClr val="D97706"/>
+                </a:solidFill>
+                <a:latin typeface="Consolas"/>
+              </a:defRPr>
+            </a:pPr>
+            <a:r>
+              <a:t>[ SMART GUARD ]</a:t>
+            </a:r>
+          </a:p>
+        </p:txBody>
+      </p:sp>
+      <p:sp>
+        <p:nvSpPr>
+          <p:cNvPr id="13" name="TextBox 12"/>
+          <p:cNvSpPr txBox="1"/>
+          <p:nvPr/>
+        </p:nvSpPr>
+        <p:spPr>
+          <a:xfrm>
+            <a:off x="8321040" y="2423160"/>
+            <a:ext cx="2834640" cy="3474720"/>
+          </a:xfrm>
+          <a:prstGeom prst="rect">
+            <a:avLst/>
+          </a:prstGeom>
+          <a:noFill/>
+        </p:spPr>
+        <p:txBody>
+          <a:bodyPr wrap="square" lIns="0" tIns="0" rIns="0" bIns="0">
+            <a:spAutoFit/>
+          </a:bodyPr>
+          <a:lstStyle/>
+          <a:p>
+            <a:pPr>
+              <a:defRPr sz="2000" b="1">
+                <a:solidFill>
+                  <a:srgbClr val="14110D"/>
+                </a:solidFill>
+                <a:latin typeface="Segoe UI"/>
+              </a:defRPr>
+            </a:pPr>
+            <a:r>
+              <a:t>Zero False Alarms on Linux</a:t>
+            </a:r>
+          </a:p>
+          <a:p>
+            <a:pPr>
+              <a:spcBef>
+                <a:spcPts val="1400"/>
+              </a:spcBef>
+              <a:defRPr sz="1400">
+                <a:solidFill>
+                  <a:srgbClr val="555048"/>
+                </a:solidFill>
+                <a:latin typeface="Segoe UI"/>
+              </a:defRPr>
+            </a:pPr>
+            <a:r>
+              <a:t>Most antivirus tools trigger false alarms on Linux files because they try to force Windows rules. Nullify detects file types accurately so safe code isn't flagged.</a:t>
+            </a:r>
+          </a:p>
+        </p:txBody>
+      </p:sp>
+      <p:sp>
+        <p:nvSpPr>
+          <p:cNvPr id="14" name="Rectangle 13"/>
           <p:cNvSpPr/>
           <p:nvPr/>
         </p:nvSpPr>
@@ -10362,7 +11468,7 @@
       </p:sp>
       <p:sp>
         <p:nvSpPr>
-          <p:cNvPr id="10" name="TextBox 9"/>
+          <p:cNvPr id="15" name="TextBox 14"/>
           <p:cNvSpPr txBox="1"/>
           <p:nvPr/>
         </p:nvSpPr>
@@ -10389,7 +11495,7 @@
                 </a:solidFill>
                 <a:latin typeface="Consolas"/>
               </a:rPr>
-              <a:t>NULLIFY  •  AUTONOMOUS CYBER DEFENSE</a:t>
+              <a:t>EGATE  ●  NULLIFY AUTONOMOUS DEFENSE</a:t>
             </a:r>
             <a:r>
               <a:rPr i="1" sz="1000">
@@ -10407,7 +11513,7 @@
                 </a:solidFill>
                 <a:latin typeface="Consolas"/>
               </a:rPr>
-              <a:t>07 / 11</a:t>
+              <a:t>07 / 12</a:t>
             </a:r>
           </a:p>
         </p:txBody>
@@ -10504,7 +11610,7 @@
               </a:defRPr>
             </a:pPr>
             <a:r>
-              <a:t>●  BENCHMARKS</a:t>
+              <a:t>●  ACTIVE DEFENSE</a:t>
             </a:r>
           </a:p>
         </p:txBody>
@@ -10534,13 +11640,13 @@
             <a:pPr>
               <a:defRPr sz="3200" b="1">
                 <a:solidFill>
-                  <a:srgbClr val="15120E"/>
+                  <a:srgbClr val="14110D"/>
                 </a:solidFill>
                 <a:latin typeface="Georgia"/>
               </a:defRPr>
             </a:pPr>
             <a:r>
-              <a:t>How Nullify Compares to the Rest</a:t>
+              <a:t>From Threat Detection to Immunity in Seconds</a:t>
             </a:r>
           </a:p>
         </p:txBody>
@@ -10554,7 +11660,7 @@
         <p:spPr>
           <a:xfrm>
             <a:off x="822960" y="1645920"/>
-            <a:ext cx="3383280" cy="1463040"/>
+            <a:ext cx="5120640" cy="4434840"/>
           </a:xfrm>
           <a:prstGeom prst="roundRect">
             <a:avLst/>
@@ -10598,8 +11704,8 @@
         </p:nvSpPr>
         <p:spPr>
           <a:xfrm>
-            <a:off x="1051560" y="1783080"/>
-            <a:ext cx="2926080" cy="1188720"/>
+            <a:off x="1097280" y="1920240"/>
+            <a:ext cx="4572000" cy="3931920"/>
           </a:xfrm>
           <a:prstGeom prst="rect">
             <a:avLst/>
@@ -10613,15 +11719,34 @@
           <a:lstStyle/>
           <a:p>
             <a:pPr>
-              <a:defRPr sz="3600" b="1">
-                <a:solidFill>
-                  <a:srgbClr val="059669"/>
-                </a:solidFill>
-                <a:latin typeface="Georgia"/>
-              </a:defRPr>
-            </a:pPr>
-            <a:r>
-              <a:t>13.2 ms</a:t>
+              <a:spcBef>
+                <a:spcPts val="2200"/>
+              </a:spcBef>
+              <a:defRPr sz="2000" b="1">
+                <a:solidFill>
+                  <a:srgbClr val="14110D"/>
+                </a:solidFill>
+                <a:latin typeface="Segoe UI"/>
+              </a:defRPr>
+            </a:pPr>
+            <a:r>
+              <a:t>Tells You What Happened &amp; Blocks It Everywhere</a:t>
+            </a:r>
+          </a:p>
+          <a:p>
+            <a:pPr>
+              <a:spcBef>
+                <a:spcPts val="1200"/>
+              </a:spcBef>
+              <a:defRPr sz="1500" b="1">
+                <a:solidFill>
+                  <a:srgbClr val="14110D"/>
+                </a:solidFill>
+                <a:latin typeface="Segoe UI"/>
+              </a:defRPr>
+            </a:pPr>
+            <a:r>
+              <a:t>• Explains the Threat Clearly:</a:t>
             </a:r>
           </a:p>
           <a:p>
@@ -10629,20 +11754,39 @@
               <a:spcBef>
                 <a:spcPts val="200"/>
               </a:spcBef>
-              <a:defRPr sz="1300" b="1">
-                <a:solidFill>
-                  <a:srgbClr val="15120E"/>
+              <a:defRPr sz="1300">
+                <a:solidFill>
+                  <a:srgbClr val="555048"/>
                 </a:solidFill>
                 <a:latin typeface="Segoe UI"/>
               </a:defRPr>
             </a:pPr>
             <a:r>
-              <a:t>FULL TRIAGE TIME</a:t>
+              <a:t>Identifies the exact techniques the attacker used (e.g. injecting code into processes or setting up secret auto-run keys).</a:t>
             </a:r>
           </a:p>
           <a:p>
             <a:pPr>
-              <a:defRPr sz="1100">
+              <a:spcBef>
+                <a:spcPts val="1200"/>
+              </a:spcBef>
+              <a:defRPr sz="1500" b="1">
+                <a:solidFill>
+                  <a:srgbClr val="14110D"/>
+                </a:solidFill>
+                <a:latin typeface="Segoe UI"/>
+              </a:defRPr>
+            </a:pPr>
+            <a:r>
+              <a:t>• Maps to MITRE ATT&amp;CK:</a:t>
+            </a:r>
+          </a:p>
+          <a:p>
+            <a:pPr>
+              <a:spcBef>
+                <a:spcPts val="200"/>
+              </a:spcBef>
+              <a:defRPr sz="1300">
                 <a:solidFill>
                   <a:srgbClr val="555048"/>
                 </a:solidFill>
@@ -10650,7 +11794,39 @@
               </a:defRPr>
             </a:pPr>
             <a:r>
-              <a:t>Complete static inspection &amp; hashing</a:t>
+              <a:t>Industry-standard tagging (T1055, T1547) so security teams understand the risk instantly.</a:t>
+            </a:r>
+          </a:p>
+          <a:p>
+            <a:pPr>
+              <a:spcBef>
+                <a:spcPts val="1200"/>
+              </a:spcBef>
+              <a:defRPr sz="1500" b="1">
+                <a:solidFill>
+                  <a:srgbClr val="14110D"/>
+                </a:solidFill>
+                <a:latin typeface="Segoe UI"/>
+              </a:defRPr>
+            </a:pPr>
+            <a:r>
+              <a:t>• Writes the Defense Rule:</a:t>
+            </a:r>
+          </a:p>
+          <a:p>
+            <a:pPr>
+              <a:spcBef>
+                <a:spcPts val="200"/>
+              </a:spcBef>
+              <a:defRPr sz="1300">
+                <a:solidFill>
+                  <a:srgbClr val="555048"/>
+                </a:solidFill>
+                <a:latin typeface="Segoe UI"/>
+              </a:defRPr>
+            </a:pPr>
+            <a:r>
+              <a:t>Generates a complete, ready-to-use YARA rule that your firewalls, EDR, and mail filters can apply right away.</a:t>
             </a:r>
           </a:p>
         </p:txBody>
@@ -10663,19 +11839,17 @@
         </p:nvSpPr>
         <p:spPr>
           <a:xfrm>
-            <a:off x="4434840" y="1645920"/>
-            <a:ext cx="3383280" cy="1463040"/>
+            <a:off x="1097280" y="1920240"/>
+            <a:ext cx="3108960" cy="320040"/>
           </a:xfrm>
           <a:prstGeom prst="roundRect">
             <a:avLst/>
           </a:prstGeom>
           <a:solidFill>
-            <a:srgbClr val="FFFFFF"/>
+            <a:srgbClr val="FEF2F2"/>
           </a:solidFill>
-          <a:ln w="12700">
-            <a:solidFill>
-              <a:srgbClr val="E2DCD2"/>
-            </a:solidFill>
+          <a:ln>
+            <a:noFill/>
           </a:ln>
         </p:spPr>
         <p:style>
@@ -10693,98 +11867,43 @@
           </a:fontRef>
         </p:style>
         <p:txBody>
-          <a:bodyPr rtlCol="0" anchor="ctr"/>
-          <a:lstStyle/>
-          <a:p>
-            <a:pPr algn="ctr"/>
-          </a:p>
-        </p:txBody>
-      </p:sp>
-      <p:sp>
-        <p:nvSpPr>
-          <p:cNvPr id="8" name="TextBox 7"/>
-          <p:cNvSpPr txBox="1"/>
-          <p:nvPr/>
-        </p:nvSpPr>
-        <p:spPr>
-          <a:xfrm>
-            <a:off x="4663440" y="1783080"/>
-            <a:ext cx="2926080" cy="1188720"/>
-          </a:xfrm>
-          <a:prstGeom prst="rect">
-            <a:avLst/>
-          </a:prstGeom>
-          <a:noFill/>
-        </p:spPr>
-        <p:txBody>
-          <a:bodyPr wrap="square" lIns="0" tIns="0" rIns="0" bIns="0">
-            <a:spAutoFit/>
-          </a:bodyPr>
-          <a:lstStyle/>
-          <a:p>
-            <a:pPr>
-              <a:defRPr sz="3600" b="1">
-                <a:solidFill>
-                  <a:srgbClr val="2563EB"/>
-                </a:solidFill>
-                <a:latin typeface="Georgia"/>
-              </a:defRPr>
-            </a:pPr>
-            <a:r>
-              <a:t>75 files / sec</a:t>
-            </a:r>
-          </a:p>
-          <a:p>
-            <a:pPr>
-              <a:spcBef>
-                <a:spcPts val="200"/>
-              </a:spcBef>
-              <a:defRPr sz="1300" b="1">
-                <a:solidFill>
-                  <a:srgbClr val="15120E"/>
-                </a:solidFill>
-                <a:latin typeface="Segoe UI"/>
-              </a:defRPr>
-            </a:pPr>
-            <a:r>
-              <a:t>SINGLE-CORE THROUGHPUT</a:t>
-            </a:r>
-          </a:p>
-          <a:p>
-            <a:pPr>
-              <a:defRPr sz="1100">
-                <a:solidFill>
-                  <a:srgbClr val="555048"/>
-                </a:solidFill>
-                <a:latin typeface="Segoe UI"/>
-              </a:defRPr>
-            </a:pPr>
-            <a:r>
-              <a:t>Millions of files processed daily</a:t>
-            </a:r>
-          </a:p>
-        </p:txBody>
-      </p:sp>
-      <p:sp>
-        <p:nvSpPr>
-          <p:cNvPr id="9" name="Rounded Rectangle 8"/>
+          <a:bodyPr rtlCol="0" anchor="ctr" lIns="0" tIns="0" rIns="0" bIns="0"/>
+          <a:lstStyle/>
+          <a:p>
+            <a:pPr algn="ctr">
+              <a:defRPr sz="950" b="1">
+                <a:solidFill>
+                  <a:srgbClr val="DC2626"/>
+                </a:solidFill>
+                <a:latin typeface="Consolas"/>
+              </a:defRPr>
+            </a:pPr>
+            <a:r>
+              <a:t>[ AUTOMATED IMMUNITY ]</a:t>
+            </a:r>
+          </a:p>
+        </p:txBody>
+      </p:sp>
+      <p:sp>
+        <p:nvSpPr>
+          <p:cNvPr id="8" name="Rounded Rectangle 7"/>
           <p:cNvSpPr/>
           <p:nvPr/>
         </p:nvSpPr>
         <p:spPr>
           <a:xfrm>
-            <a:off x="8046720" y="1645920"/>
-            <a:ext cx="3383280" cy="1463040"/>
+            <a:off x="6245352" y="1645920"/>
+            <a:ext cx="5120640" cy="4434840"/>
           </a:xfrm>
           <a:prstGeom prst="roundRect">
             <a:avLst/>
           </a:prstGeom>
           <a:solidFill>
-            <a:srgbClr val="FFFFFF"/>
+            <a:srgbClr val="14110D"/>
           </a:solidFill>
           <a:ln w="12700">
             <a:solidFill>
-              <a:srgbClr val="E2DCD2"/>
+              <a:srgbClr val="322B22"/>
             </a:solidFill>
           </a:ln>
         </p:spPr>
@@ -10812,14 +11931,14 @@
       </p:sp>
       <p:sp>
         <p:nvSpPr>
-          <p:cNvPr id="10" name="TextBox 9"/>
+          <p:cNvPr id="9" name="TextBox 8"/>
           <p:cNvSpPr txBox="1"/>
           <p:nvPr/>
         </p:nvSpPr>
         <p:spPr>
           <a:xfrm>
-            <a:off x="8275320" y="1783080"/>
-            <a:ext cx="2926080" cy="1188720"/>
+            <a:off x="6519672" y="1920240"/>
+            <a:ext cx="4572000" cy="3931920"/>
           </a:xfrm>
           <a:prstGeom prst="rect">
             <a:avLst/>
@@ -10833,196 +11952,106 @@
           <a:lstStyle/>
           <a:p>
             <a:pPr>
-              <a:defRPr sz="3600" b="1">
-                <a:solidFill>
-                  <a:srgbClr val="D97706"/>
-                </a:solidFill>
-                <a:latin typeface="Georgia"/>
-              </a:defRPr>
-            </a:pPr>
-            <a:r>
-              <a:t>62 / 62</a:t>
+              <a:defRPr sz="1100" b="1">
+                <a:solidFill>
+                  <a:srgbClr val="10B981"/>
+                </a:solidFill>
+                <a:latin typeface="Consolas"/>
+              </a:defRPr>
+            </a:pPr>
+            <a:r>
+              <a:t>AUTO-GENERATED YARA DEFENSE RULE</a:t>
             </a:r>
           </a:p>
           <a:p>
             <a:pPr>
               <a:spcBef>
-                <a:spcPts val="200"/>
+                <a:spcPts val="1200"/>
               </a:spcBef>
-              <a:defRPr sz="1300" b="1">
-                <a:solidFill>
-                  <a:srgbClr val="15120E"/>
-                </a:solidFill>
-                <a:latin typeface="Segoe UI"/>
-              </a:defRPr>
-            </a:pPr>
-            <a:r>
-              <a:t>AUTOMATED TESTS PASSING</a:t>
-            </a:r>
-          </a:p>
-          <a:p>
-            <a:pPr>
-              <a:defRPr sz="1100">
-                <a:solidFill>
-                  <a:srgbClr val="555048"/>
-                </a:solidFill>
-                <a:latin typeface="Segoe UI"/>
-              </a:defRPr>
-            </a:pPr>
-            <a:r>
-              <a:t>100% test suite reliability</a:t>
-            </a:r>
-          </a:p>
-        </p:txBody>
-      </p:sp>
-      <p:sp>
-        <p:nvSpPr>
-          <p:cNvPr id="11" name="Rounded Rectangle 10"/>
-          <p:cNvSpPr/>
-          <p:nvPr/>
-        </p:nvSpPr>
-        <p:spPr>
-          <a:xfrm>
-            <a:off x="822960" y="3337560"/>
-            <a:ext cx="10545775" cy="2743200"/>
-          </a:xfrm>
-          <a:prstGeom prst="roundRect">
-            <a:avLst/>
-          </a:prstGeom>
-          <a:solidFill>
-            <a:srgbClr val="FFFFFF"/>
-          </a:solidFill>
-          <a:ln w="12700">
-            <a:solidFill>
-              <a:srgbClr val="E2DCD2"/>
-            </a:solidFill>
-          </a:ln>
-        </p:spPr>
-        <p:style>
-          <a:lnRef idx="1">
-            <a:schemeClr val="accent1"/>
-          </a:lnRef>
-          <a:fillRef idx="3">
-            <a:schemeClr val="accent1"/>
-          </a:fillRef>
-          <a:effectRef idx="2">
-            <a:schemeClr val="accent1"/>
-          </a:effectRef>
-          <a:fontRef idx="minor">
-            <a:schemeClr val="lt1"/>
-          </a:fontRef>
-        </p:style>
-        <p:txBody>
-          <a:bodyPr rtlCol="0" anchor="ctr"/>
-          <a:lstStyle/>
-          <a:p>
-            <a:pPr algn="ctr"/>
-          </a:p>
-        </p:txBody>
-      </p:sp>
-      <p:sp>
-        <p:nvSpPr>
-          <p:cNvPr id="12" name="TextBox 11"/>
-          <p:cNvSpPr txBox="1"/>
-          <p:nvPr/>
-        </p:nvSpPr>
-        <p:spPr>
-          <a:xfrm>
-            <a:off x="1097280" y="3520440"/>
-            <a:ext cx="10058400" cy="2377440"/>
-          </a:xfrm>
-          <a:prstGeom prst="rect">
-            <a:avLst/>
-          </a:prstGeom>
-          <a:noFill/>
-        </p:spPr>
-        <p:txBody>
-          <a:bodyPr wrap="square" lIns="0" tIns="0" rIns="0" bIns="0">
-            <a:spAutoFit/>
-          </a:bodyPr>
-          <a:lstStyle/>
-          <a:p>
-            <a:pPr>
-              <a:defRPr sz="1100" b="1">
-                <a:solidFill>
-                  <a:srgbClr val="059669"/>
+              <a:defRPr sz="1200">
+                <a:solidFill>
+                  <a:srgbClr val="BFB9AF"/>
                 </a:solidFill>
                 <a:latin typeface="Consolas"/>
               </a:defRPr>
             </a:pPr>
             <a:r>
-              <a:t>SPEED &amp; CAPABILITY SHOWDOWN</a:t>
+              <a:t>rule Nullify_AutoDefense_Trojan {</a:t>
+            </a:r>
+            <a:br/>
+            <a:r>
+              <a:t>    meta:</a:t>
+            </a:r>
+            <a:br/>
+            <a:r>
+              <a:t>        description = "Auto-generated by Nullify"</a:t>
+            </a:r>
+            <a:br/>
+            <a:r>
+              <a:t>        threat      = "Trojan / Backdoor"</a:t>
+            </a:r>
+            <a:br/>
+            <a:r>
+              <a:t>        confidence  = "98.4%"</a:t>
+            </a:r>
+            <a:br/>
+            <a:r>
+              <a:t>    strings:</a:t>
+            </a:r>
+            <a:br/>
+            <a:r>
+              <a:t>        $run_key = "CurrentVersion\\Run" nocase</a:t>
+            </a:r>
+            <a:br/>
+            <a:r>
+              <a:t>        $ps_exec = "powershell -enc" nocase</a:t>
+            </a:r>
+            <a:br/>
+            <a:r>
+              <a:t>        $inject  = "VirtualAllocEx"</a:t>
+            </a:r>
+            <a:br/>
+            <a:r>
+              <a:t>    condition:</a:t>
+            </a:r>
+            <a:br/>
+            <a:r>
+              <a:t>        uint16(0) == 0x5A4D and</a:t>
+            </a:r>
+            <a:br/>
+            <a:r>
+              <a:t>        filesize &lt; 5MB and</a:t>
+            </a:r>
+            <a:br/>
+            <a:r>
+              <a:t>        (2 of ($*))</a:t>
+            </a:r>
+            <a:br/>
+            <a:r>
+              <a:t>}</a:t>
             </a:r>
           </a:p>
           <a:p>
             <a:pPr>
               <a:spcBef>
-                <a:spcPts val="1000"/>
+                <a:spcPts val="1600"/>
               </a:spcBef>
-              <a:defRPr sz="1300" b="1">
-                <a:solidFill>
-                  <a:srgbClr val="059669"/>
-                </a:solidFill>
-                <a:latin typeface="Consolas"/>
-              </a:defRPr>
-            </a:pPr>
-            <a:r>
-              <a:t>Nullify (Our System)         | 13.2 ms        | Catches Zero-Days          | Auto-Writes YARA Rules</a:t>
-            </a:r>
-          </a:p>
-          <a:p>
-            <a:pPr>
-              <a:spcBef>
-                <a:spcPts val="1000"/>
-              </a:spcBef>
-              <a:defRPr sz="1300" b="0">
-                <a:solidFill>
-                  <a:srgbClr val="555048"/>
-                </a:solidFill>
-                <a:latin typeface="Consolas"/>
-              </a:defRPr>
-            </a:pPr>
-            <a:r>
-              <a:t>Traditional Antivirus        | 5.0 ms         | Blind to New Malware       | No YARA Rules</a:t>
-            </a:r>
-          </a:p>
-          <a:p>
-            <a:pPr>
-              <a:spcBef>
-                <a:spcPts val="1000"/>
-              </a:spcBef>
-              <a:defRPr sz="1300" b="0">
-                <a:solidFill>
-                  <a:srgbClr val="555048"/>
-                </a:solidFill>
-                <a:latin typeface="Consolas"/>
-              </a:defRPr>
-            </a:pPr>
-            <a:r>
-              <a:t>Cloud Sandboxes (Cuckoo)     | 15 Minutes     | Too Slow for Edge Routers  | Raw Log Dumps Only</a:t>
-            </a:r>
-          </a:p>
-          <a:p>
-            <a:pPr>
-              <a:spcBef>
-                <a:spcPts val="1000"/>
-              </a:spcBef>
-              <a:defRPr sz="1300" b="0">
-                <a:solidFill>
-                  <a:srgbClr val="555048"/>
-                </a:solidFill>
-                <a:latin typeface="Consolas"/>
-              </a:defRPr>
-            </a:pPr>
-            <a:r>
-              <a:t>Standard Python Tools        | 85.0 ms        | High Memory / Crashes      | Manual Scripting Required</a:t>
-            </a:r>
-          </a:p>
-        </p:txBody>
-      </p:sp>
-      <p:sp>
-        <p:nvSpPr>
-          <p:cNvPr id="13" name="Rectangle 12"/>
+              <a:defRPr sz="1250" b="1">
+                <a:solidFill>
+                  <a:srgbClr val="10B981"/>
+                </a:solidFill>
+                <a:latin typeface="Segoe UI"/>
+              </a:defRPr>
+            </a:pPr>
+            <a:r>
+              <a:t>✓ Ready to push to CrowdStrike, SentinelOne, or Windows Defender.</a:t>
+            </a:r>
+          </a:p>
+        </p:txBody>
+      </p:sp>
+      <p:sp>
+        <p:nvSpPr>
+          <p:cNvPr id="10" name="Rectangle 9"/>
           <p:cNvSpPr/>
           <p:nvPr/>
         </p:nvSpPr>
@@ -11065,7 +12094,7 @@
       </p:sp>
       <p:sp>
         <p:nvSpPr>
-          <p:cNvPr id="14" name="TextBox 13"/>
+          <p:cNvPr id="11" name="TextBox 10"/>
           <p:cNvSpPr txBox="1"/>
           <p:nvPr/>
         </p:nvSpPr>
@@ -11092,7 +12121,7 @@
                 </a:solidFill>
                 <a:latin typeface="Consolas"/>
               </a:rPr>
-              <a:t>NULLIFY  •  AUTONOMOUS CYBER DEFENSE</a:t>
+              <a:t>EGATE  ●  NULLIFY AUTONOMOUS DEFENSE</a:t>
             </a:r>
             <a:r>
               <a:rPr i="1" sz="1000">
@@ -11110,7 +12139,7 @@
                 </a:solidFill>
                 <a:latin typeface="Consolas"/>
               </a:rPr>
-              <a:t>08 / 11</a:t>
+              <a:t>08 / 12</a:t>
             </a:r>
           </a:p>
         </p:txBody>
@@ -11207,7 +12236,7 @@
               </a:defRPr>
             </a:pPr>
             <a:r>
-              <a:t>●  USER EXPERIENCE</a:t>
+              <a:t>●  BENCHMARKS</a:t>
             </a:r>
           </a:p>
         </p:txBody>
@@ -11237,13 +12266,13 @@
             <a:pPr>
               <a:defRPr sz="3200" b="1">
                 <a:solidFill>
-                  <a:srgbClr val="15120E"/>
+                  <a:srgbClr val="14110D"/>
                 </a:solidFill>
                 <a:latin typeface="Georgia"/>
               </a:defRPr>
             </a:pPr>
             <a:r>
-              <a:t>Two Intuitive Ways to Use Nullify</a:t>
+              <a:t>How Nullify Compares to the Rest</a:t>
             </a:r>
           </a:p>
         </p:txBody>
@@ -11257,7 +12286,7 @@
         <p:spPr>
           <a:xfrm>
             <a:off x="822960" y="1645920"/>
-            <a:ext cx="5120640" cy="4434840"/>
+            <a:ext cx="3383280" cy="1463040"/>
           </a:xfrm>
           <a:prstGeom prst="roundRect">
             <a:avLst/>
@@ -11301,8 +12330,8 @@
         </p:nvSpPr>
         <p:spPr>
           <a:xfrm>
-            <a:off x="1097280" y="1920240"/>
-            <a:ext cx="4572000" cy="3931920"/>
+            <a:off x="1051560" y="1783080"/>
+            <a:ext cx="2926080" cy="1188720"/>
           </a:xfrm>
           <a:prstGeom prst="rect">
             <a:avLst/>
@@ -11316,39 +12345,36 @@
           <a:lstStyle/>
           <a:p>
             <a:pPr>
-              <a:defRPr sz="1100" b="1">
+              <a:defRPr sz="3600" b="1">
                 <a:solidFill>
                   <a:srgbClr val="059669"/>
                 </a:solidFill>
-                <a:latin typeface="Consolas"/>
-              </a:defRPr>
-            </a:pPr>
-            <a:r>
-              <a:t>OPTION 1: MODERN WEB DASHBOARD</a:t>
+                <a:latin typeface="Georgia"/>
+              </a:defRPr>
+            </a:pPr>
+            <a:r>
+              <a:t>13.2 ms</a:t>
             </a:r>
           </a:p>
           <a:p>
             <a:pPr>
               <a:spcBef>
-                <a:spcPts val="600"/>
+                <a:spcPts val="200"/>
               </a:spcBef>
-              <a:defRPr sz="2000" b="1">
-                <a:solidFill>
-                  <a:srgbClr val="15120E"/>
+              <a:defRPr sz="1300" b="1">
+                <a:solidFill>
+                  <a:srgbClr val="14110D"/>
                 </a:solidFill>
                 <a:latin typeface="Segoe UI"/>
               </a:defRPr>
             </a:pPr>
             <a:r>
-              <a:t>Luxury Web Console (localhost:8000)</a:t>
+              <a:t>FULL TRIAGE TIME</a:t>
             </a:r>
           </a:p>
           <a:p>
             <a:pPr>
-              <a:spcBef>
-                <a:spcPts val="1000"/>
-              </a:spcBef>
-              <a:defRPr sz="1350">
+              <a:defRPr sz="1100">
                 <a:solidFill>
                   <a:srgbClr val="555048"/>
                 </a:solidFill>
@@ -11356,55 +12382,7 @@
               </a:defRPr>
             </a:pPr>
             <a:r>
-              <a:t>• Drag-and-Drop Scanning: Drop any file to see real-time analysis in milliseconds.</a:t>
-            </a:r>
-          </a:p>
-          <a:p>
-            <a:pPr>
-              <a:spcBef>
-                <a:spcPts val="1000"/>
-              </a:spcBef>
-              <a:defRPr sz="1350">
-                <a:solidFill>
-                  <a:srgbClr val="555048"/>
-                </a:solidFill>
-                <a:latin typeface="Segoe UI"/>
-              </a:defRPr>
-            </a:pPr>
-            <a:r>
-              <a:t>• Live Confidence Radar: See risk percentage and threat family classification.</a:t>
-            </a:r>
-          </a:p>
-          <a:p>
-            <a:pPr>
-              <a:spcBef>
-                <a:spcPts val="1000"/>
-              </a:spcBef>
-              <a:defRPr sz="1350">
-                <a:solidFill>
-                  <a:srgbClr val="555048"/>
-                </a:solidFill>
-                <a:latin typeface="Segoe UI"/>
-              </a:defRPr>
-            </a:pPr>
-            <a:r>
-              <a:t>• Built-in Demo Samples: One-click buttons to test safe trojans, ransomware, and benign files.</a:t>
-            </a:r>
-          </a:p>
-          <a:p>
-            <a:pPr>
-              <a:spcBef>
-                <a:spcPts val="1000"/>
-              </a:spcBef>
-              <a:defRPr sz="1350">
-                <a:solidFill>
-                  <a:srgbClr val="555048"/>
-                </a:solidFill>
-                <a:latin typeface="Segoe UI"/>
-              </a:defRPr>
-            </a:pPr>
-            <a:r>
-              <a:t>• 1-Click YARA Copy: Instantly copy auto-generated rules to your clipboard.</a:t>
+              <a:t>Complete static inspection &amp; hashing</a:t>
             </a:r>
           </a:p>
         </p:txBody>
@@ -11417,18 +12395,18 @@
         </p:nvSpPr>
         <p:spPr>
           <a:xfrm>
-            <a:off x="6245352" y="1645920"/>
-            <a:ext cx="5120640" cy="4434840"/>
+            <a:off x="4434840" y="1645920"/>
+            <a:ext cx="3383280" cy="1463040"/>
           </a:xfrm>
           <a:prstGeom prst="roundRect">
             <a:avLst/>
           </a:prstGeom>
           <a:solidFill>
-            <a:srgbClr val="15120E"/>
+            <a:srgbClr val="FFFFFF"/>
           </a:solidFill>
           <a:ln w="12700">
             <a:solidFill>
-              <a:srgbClr val="322B22"/>
+              <a:srgbClr val="E2DCD2"/>
             </a:solidFill>
           </a:ln>
         </p:spPr>
@@ -11462,8 +12440,8 @@
         </p:nvSpPr>
         <p:spPr>
           <a:xfrm>
-            <a:off x="6519672" y="1920240"/>
-            <a:ext cx="4572000" cy="3931920"/>
+            <a:off x="4663440" y="1783080"/>
+            <a:ext cx="2926080" cy="1188720"/>
           </a:xfrm>
           <a:prstGeom prst="rect">
             <a:avLst/>
@@ -11477,107 +12455,306 @@
           <a:lstStyle/>
           <a:p>
             <a:pPr>
-              <a:defRPr sz="1100" b="1">
-                <a:solidFill>
-                  <a:srgbClr val="10B981"/>
-                </a:solidFill>
-                <a:latin typeface="Consolas"/>
-              </a:defRPr>
-            </a:pPr>
-            <a:r>
-              <a:t>OPTION 2: INTERACTIVE TERMINAL</a:t>
+              <a:defRPr sz="3600" b="1">
+                <a:solidFill>
+                  <a:srgbClr val="2563EB"/>
+                </a:solidFill>
+                <a:latin typeface="Georgia"/>
+              </a:defRPr>
+            </a:pPr>
+            <a:r>
+              <a:t>75 files / sec</a:t>
             </a:r>
           </a:p>
           <a:p>
             <a:pPr>
               <a:spcBef>
-                <a:spcPts val="600"/>
+                <a:spcPts val="200"/>
               </a:spcBef>
-              <a:defRPr sz="2000" b="1">
-                <a:solidFill>
-                  <a:srgbClr val="FAF8F5"/>
+              <a:defRPr sz="1300" b="1">
+                <a:solidFill>
+                  <a:srgbClr val="14110D"/>
                 </a:solidFill>
                 <a:latin typeface="Segoe UI"/>
               </a:defRPr>
             </a:pPr>
             <a:r>
-              <a:t>Single-Command CLI ($ nullify)</a:t>
+              <a:t>SINGLE-CORE THROUGHPUT</a:t>
+            </a:r>
+          </a:p>
+          <a:p>
+            <a:pPr>
+              <a:defRPr sz="1100">
+                <a:solidFill>
+                  <a:srgbClr val="555048"/>
+                </a:solidFill>
+                <a:latin typeface="Segoe UI"/>
+              </a:defRPr>
+            </a:pPr>
+            <a:r>
+              <a:t>Millions of files processed daily</a:t>
+            </a:r>
+          </a:p>
+        </p:txBody>
+      </p:sp>
+      <p:sp>
+        <p:nvSpPr>
+          <p:cNvPr id="9" name="Rounded Rectangle 8"/>
+          <p:cNvSpPr/>
+          <p:nvPr/>
+        </p:nvSpPr>
+        <p:spPr>
+          <a:xfrm>
+            <a:off x="8046720" y="1645920"/>
+            <a:ext cx="3383280" cy="1463040"/>
+          </a:xfrm>
+          <a:prstGeom prst="roundRect">
+            <a:avLst/>
+          </a:prstGeom>
+          <a:solidFill>
+            <a:srgbClr val="FFFFFF"/>
+          </a:solidFill>
+          <a:ln w="12700">
+            <a:solidFill>
+              <a:srgbClr val="E2DCD2"/>
+            </a:solidFill>
+          </a:ln>
+        </p:spPr>
+        <p:style>
+          <a:lnRef idx="1">
+            <a:schemeClr val="accent1"/>
+          </a:lnRef>
+          <a:fillRef idx="3">
+            <a:schemeClr val="accent1"/>
+          </a:fillRef>
+          <a:effectRef idx="2">
+            <a:schemeClr val="accent1"/>
+          </a:effectRef>
+          <a:fontRef idx="minor">
+            <a:schemeClr val="lt1"/>
+          </a:fontRef>
+        </p:style>
+        <p:txBody>
+          <a:bodyPr rtlCol="0" anchor="ctr"/>
+          <a:lstStyle/>
+          <a:p>
+            <a:pPr algn="ctr"/>
+          </a:p>
+        </p:txBody>
+      </p:sp>
+      <p:sp>
+        <p:nvSpPr>
+          <p:cNvPr id="10" name="TextBox 9"/>
+          <p:cNvSpPr txBox="1"/>
+          <p:nvPr/>
+        </p:nvSpPr>
+        <p:spPr>
+          <a:xfrm>
+            <a:off x="8275320" y="1783080"/>
+            <a:ext cx="2926080" cy="1188720"/>
+          </a:xfrm>
+          <a:prstGeom prst="rect">
+            <a:avLst/>
+          </a:prstGeom>
+          <a:noFill/>
+        </p:spPr>
+        <p:txBody>
+          <a:bodyPr wrap="square" lIns="0" tIns="0" rIns="0" bIns="0">
+            <a:spAutoFit/>
+          </a:bodyPr>
+          <a:lstStyle/>
+          <a:p>
+            <a:pPr>
+              <a:defRPr sz="3600" b="1">
+                <a:solidFill>
+                  <a:srgbClr val="D97706"/>
+                </a:solidFill>
+                <a:latin typeface="Georgia"/>
+              </a:defRPr>
+            </a:pPr>
+            <a:r>
+              <a:t>62 / 62</a:t>
             </a:r>
           </a:p>
           <a:p>
             <a:pPr>
               <a:spcBef>
-                <a:spcPts val="1200"/>
+                <a:spcPts val="200"/>
               </a:spcBef>
+              <a:defRPr sz="1300" b="1">
+                <a:solidFill>
+                  <a:srgbClr val="14110D"/>
+                </a:solidFill>
+                <a:latin typeface="Segoe UI"/>
+              </a:defRPr>
+            </a:pPr>
+            <a:r>
+              <a:t>AUTOMATED TESTS PASSING</a:t>
+            </a:r>
+          </a:p>
+          <a:p>
+            <a:pPr>
               <a:defRPr sz="1100">
                 <a:solidFill>
-                  <a:srgbClr val="BFB9AF"/>
+                  <a:srgbClr val="555048"/>
+                </a:solidFill>
+                <a:latin typeface="Segoe UI"/>
+              </a:defRPr>
+            </a:pPr>
+            <a:r>
+              <a:t>100% test suite reliability</a:t>
+            </a:r>
+          </a:p>
+        </p:txBody>
+      </p:sp>
+      <p:sp>
+        <p:nvSpPr>
+          <p:cNvPr id="11" name="Rounded Rectangle 10"/>
+          <p:cNvSpPr/>
+          <p:nvPr/>
+        </p:nvSpPr>
+        <p:spPr>
+          <a:xfrm>
+            <a:off x="822960" y="3337560"/>
+            <a:ext cx="10545775" cy="2743200"/>
+          </a:xfrm>
+          <a:prstGeom prst="roundRect">
+            <a:avLst/>
+          </a:prstGeom>
+          <a:solidFill>
+            <a:srgbClr val="FFFFFF"/>
+          </a:solidFill>
+          <a:ln w="12700">
+            <a:solidFill>
+              <a:srgbClr val="E2DCD2"/>
+            </a:solidFill>
+          </a:ln>
+        </p:spPr>
+        <p:style>
+          <a:lnRef idx="1">
+            <a:schemeClr val="accent1"/>
+          </a:lnRef>
+          <a:fillRef idx="3">
+            <a:schemeClr val="accent1"/>
+          </a:fillRef>
+          <a:effectRef idx="2">
+            <a:schemeClr val="accent1"/>
+          </a:effectRef>
+          <a:fontRef idx="minor">
+            <a:schemeClr val="lt1"/>
+          </a:fontRef>
+        </p:style>
+        <p:txBody>
+          <a:bodyPr rtlCol="0" anchor="ctr"/>
+          <a:lstStyle/>
+          <a:p>
+            <a:pPr algn="ctr"/>
+          </a:p>
+        </p:txBody>
+      </p:sp>
+      <p:sp>
+        <p:nvSpPr>
+          <p:cNvPr id="12" name="TextBox 11"/>
+          <p:cNvSpPr txBox="1"/>
+          <p:nvPr/>
+        </p:nvSpPr>
+        <p:spPr>
+          <a:xfrm>
+            <a:off x="1097280" y="3520440"/>
+            <a:ext cx="10058400" cy="2377440"/>
+          </a:xfrm>
+          <a:prstGeom prst="rect">
+            <a:avLst/>
+          </a:prstGeom>
+          <a:noFill/>
+        </p:spPr>
+        <p:txBody>
+          <a:bodyPr wrap="square" lIns="0" tIns="0" rIns="0" bIns="0">
+            <a:spAutoFit/>
+          </a:bodyPr>
+          <a:lstStyle/>
+          <a:p>
+            <a:pPr>
+              <a:defRPr sz="1100" b="1">
+                <a:solidFill>
+                  <a:srgbClr val="059669"/>
                 </a:solidFill>
                 <a:latin typeface="Consolas"/>
               </a:defRPr>
             </a:pPr>
             <a:r>
-              <a:t>$ nullify</a:t>
-            </a:r>
-            <a:br/>
-            <a:r>
-              <a:t>========================================</a:t>
-            </a:r>
-            <a:br/>
-            <a:r>
-              <a:t>   See it. Trace it. Nullify it.</a:t>
-            </a:r>
-            <a:br/>
-            <a:r>
-              <a:t>========================================</a:t>
-            </a:r>
-            <a:br/>
-            <a:r>
-              <a:t>[1] Quick Scan</a:t>
-            </a:r>
-            <a:br/>
-            <a:r>
-              <a:t>[2] Deep Detonation</a:t>
-            </a:r>
-            <a:br/>
-            <a:r>
-              <a:t>[3] Behavioral Log</a:t>
-            </a:r>
-            <a:br/>
-            <a:r>
-              <a:t>[4] Batch Scan Folder</a:t>
-            </a:r>
-            <a:br/>
-            <a:r>
-              <a:t>[5] Launch Web Console</a:t>
-            </a:r>
-            <a:br/>
-            <a:r>
-              <a:t>[0] Exit</a:t>
-            </a:r>
-            <a:br/>
-            <a:br/>
-            <a:r>
-              <a:t>Select option: 1</a:t>
-            </a:r>
-            <a:br/>
-            <a:r>
-              <a:t>&gt; Scanning suspicious_binary.exe ...</a:t>
-            </a:r>
-            <a:br/>
-            <a:r>
-              <a:t>&gt; VERDICT: MALICIOUS (98.4% Confidence)</a:t>
-            </a:r>
-            <a:br/>
-            <a:r>
-              <a:t>&gt; Parsed in 0.1ms • YARA Rule Created!</a:t>
-            </a:r>
-          </a:p>
-        </p:txBody>
-      </p:sp>
-      <p:sp>
-        <p:nvSpPr>
-          <p:cNvPr id="9" name="Rectangle 8"/>
+              <a:t>SPEED &amp; CAPABILITY SHOWDOWN</a:t>
+            </a:r>
+          </a:p>
+          <a:p>
+            <a:pPr>
+              <a:spcBef>
+                <a:spcPts val="1000"/>
+              </a:spcBef>
+              <a:defRPr sz="1300" b="1">
+                <a:solidFill>
+                  <a:srgbClr val="059669"/>
+                </a:solidFill>
+                <a:latin typeface="Consolas"/>
+              </a:defRPr>
+            </a:pPr>
+            <a:r>
+              <a:t>Nullify (Our System)         | 13.2 ms        | Catches Zero-Days          | Auto-Writes YARA Rules</a:t>
+            </a:r>
+          </a:p>
+          <a:p>
+            <a:pPr>
+              <a:spcBef>
+                <a:spcPts val="1000"/>
+              </a:spcBef>
+              <a:defRPr sz="1300" b="0">
+                <a:solidFill>
+                  <a:srgbClr val="555048"/>
+                </a:solidFill>
+                <a:latin typeface="Consolas"/>
+              </a:defRPr>
+            </a:pPr>
+            <a:r>
+              <a:t>Traditional Antivirus        | 5.0 ms         | Blind to New Malware       | No YARA Rules</a:t>
+            </a:r>
+          </a:p>
+          <a:p>
+            <a:pPr>
+              <a:spcBef>
+                <a:spcPts val="1000"/>
+              </a:spcBef>
+              <a:defRPr sz="1300" b="0">
+                <a:solidFill>
+                  <a:srgbClr val="555048"/>
+                </a:solidFill>
+                <a:latin typeface="Consolas"/>
+              </a:defRPr>
+            </a:pPr>
+            <a:r>
+              <a:t>Cloud Sandboxes (Cuckoo)     | 15 Minutes     | Too Slow for Edge Routers  | Raw Log Dumps Only</a:t>
+            </a:r>
+          </a:p>
+          <a:p>
+            <a:pPr>
+              <a:spcBef>
+                <a:spcPts val="1000"/>
+              </a:spcBef>
+              <a:defRPr sz="1300" b="0">
+                <a:solidFill>
+                  <a:srgbClr val="555048"/>
+                </a:solidFill>
+                <a:latin typeface="Consolas"/>
+              </a:defRPr>
+            </a:pPr>
+            <a:r>
+              <a:t>Standard Python Tools        | 85.0 ms        | High Memory / Crashes      | Manual Scripting Required</a:t>
+            </a:r>
+          </a:p>
+        </p:txBody>
+      </p:sp>
+      <p:sp>
+        <p:nvSpPr>
+          <p:cNvPr id="13" name="Rectangle 12"/>
           <p:cNvSpPr/>
           <p:nvPr/>
         </p:nvSpPr>
@@ -11620,7 +12797,7 @@
       </p:sp>
       <p:sp>
         <p:nvSpPr>
-          <p:cNvPr id="10" name="TextBox 9"/>
+          <p:cNvPr id="14" name="TextBox 13"/>
           <p:cNvSpPr txBox="1"/>
           <p:nvPr/>
         </p:nvSpPr>
@@ -11647,7 +12824,7 @@
                 </a:solidFill>
                 <a:latin typeface="Consolas"/>
               </a:rPr>
-              <a:t>NULLIFY  •  AUTONOMOUS CYBER DEFENSE</a:t>
+              <a:t>EGATE  ●  NULLIFY AUTONOMOUS DEFENSE</a:t>
             </a:r>
             <a:r>
               <a:rPr i="1" sz="1000">
@@ -11665,7 +12842,7 @@
                 </a:solidFill>
                 <a:latin typeface="Consolas"/>
               </a:rPr>
-              <a:t>09 / 11</a:t>
+              <a:t>09 / 12</a:t>
             </a:r>
           </a:p>
         </p:txBody>

--- a/nullify_presentation.pptx
+++ b/nullify_presentation.pptx
@@ -853,7 +853,7 @@
           </a:p>
           <a:p>
             <a:r>
-              <a:t>Nullify is the autonomous algorithmic engine inside the gateway. It exists to reduce the threat dwell time to zero.</a:t>
+              <a:t>Nullify is the autonomous algorithmic engine inside the gateway. It exists to reduce threat dwell time to zero.</a:t>
             </a:r>
           </a:p>
           <a:p>
@@ -1128,7 +1128,7 @@
           </a:p>
           <a:p>
             <a:r>
-              <a:t>Each agent does one job perfectly, connected in a collaborative intelligence mesh.</a:t>
+              <a:t>Each agent does one job perfectly.</a:t>
             </a:r>
           </a:p>
         </p:txBody>
@@ -4576,7 +4576,7 @@
         <p:spPr>
           <a:xfrm>
             <a:off x="1005840" y="914400"/>
-            <a:ext cx="2194560" cy="822960"/>
+            <a:ext cx="2377440" cy="1005840"/>
           </a:xfrm>
           <a:prstGeom prst="roundRect">
             <a:avLst/>
@@ -4612,7 +4612,7 @@
       </p:sp>
       <p:pic>
         <p:nvPicPr>
-          <p:cNvPr id="5" name="Picture 4" descr="egate_logo_cropped.png"/>
+          <p:cNvPr id="5" name="Picture 4" descr="egate logo.png"/>
           <p:cNvPicPr>
             <a:picLocks noChangeAspect="1"/>
           </p:cNvPicPr>
@@ -4626,8 +4626,8 @@
         </p:blipFill>
         <p:spPr>
           <a:xfrm>
-            <a:off x="1097280" y="960120"/>
-            <a:ext cx="2011680" cy="1658277"/>
+            <a:off x="1603331" y="960120"/>
+            <a:ext cx="1182456" cy="914399"/>
           </a:xfrm>
           <a:prstGeom prst="rect">
             <a:avLst/>
@@ -4642,8 +4642,8 @@
         </p:nvSpPr>
         <p:spPr>
           <a:xfrm>
-            <a:off x="3337560" y="1143000"/>
-            <a:ext cx="2377440" cy="365760"/>
+            <a:off x="3566160" y="1234440"/>
+            <a:ext cx="2560320" cy="365760"/>
           </a:xfrm>
           <a:prstGeom prst="roundRect">
             <a:avLst/>
@@ -4697,8 +4697,8 @@
         </p:nvSpPr>
         <p:spPr>
           <a:xfrm>
-            <a:off x="5852160" y="1143000"/>
-            <a:ext cx="2011680" cy="365760"/>
+            <a:off x="6263640" y="1234440"/>
+            <a:ext cx="2194560" cy="365760"/>
           </a:xfrm>
           <a:prstGeom prst="roundRect">
             <a:avLst/>
@@ -4746,79 +4746,14 @@
       </p:sp>
       <p:sp>
         <p:nvSpPr>
-          <p:cNvPr id="8" name="TextBox 7"/>
-          <p:cNvSpPr txBox="1"/>
-          <p:nvPr/>
-        </p:nvSpPr>
-        <p:spPr>
-          <a:xfrm>
-            <a:off x="1005840" y="2011680"/>
-            <a:ext cx="5486400" cy="2560320"/>
-          </a:xfrm>
-          <a:prstGeom prst="rect">
-            <a:avLst/>
-          </a:prstGeom>
-          <a:noFill/>
-        </p:spPr>
-        <p:txBody>
-          <a:bodyPr wrap="square" lIns="0" tIns="0" rIns="0" bIns="0">
-            <a:spAutoFit/>
-          </a:bodyPr>
-          <a:lstStyle/>
-          <a:p>
-            <a:pPr>
-              <a:defRPr sz="5000" b="1">
-                <a:solidFill>
-                  <a:srgbClr val="FAF8F5"/>
-                </a:solidFill>
-                <a:latin typeface="Georgia"/>
-              </a:defRPr>
-            </a:pPr>
-            <a:r>
-              <a:t>See it. Trace it.</a:t>
-            </a:r>
-          </a:p>
-          <a:p>
-            <a:pPr>
-              <a:defRPr i="1" sz="5000" b="1">
-                <a:solidFill>
-                  <a:srgbClr val="10B981"/>
-                </a:solidFill>
-                <a:latin typeface="Georgia"/>
-              </a:defRPr>
-            </a:pPr>
-            <a:r>
-              <a:t>Nullify it.</a:t>
-            </a:r>
-          </a:p>
-          <a:p>
-            <a:pPr>
-              <a:spcBef>
-                <a:spcPts val="1400"/>
-              </a:spcBef>
-              <a:defRPr sz="1700">
-                <a:solidFill>
-                  <a:srgbClr val="BFB9AF"/>
-                </a:solidFill>
-                <a:latin typeface="Segoe UI"/>
-              </a:defRPr>
-            </a:pPr>
-            <a:r>
-              <a:t>Autonomous AI Threat Defense — From Detection to Immunity in Under 15 Milliseconds.</a:t>
-            </a:r>
-          </a:p>
-        </p:txBody>
-      </p:sp>
-      <p:sp>
-        <p:nvSpPr>
-          <p:cNvPr id="9" name="Rounded Rectangle 8"/>
+          <p:cNvPr id="8" name="Rounded Rectangle 7"/>
           <p:cNvSpPr/>
           <p:nvPr/>
         </p:nvSpPr>
         <p:spPr>
           <a:xfrm>
-            <a:off x="1005840" y="4846320"/>
-            <a:ext cx="1783080" cy="594360"/>
+            <a:off x="8595360" y="1234440"/>
+            <a:ext cx="2560320" cy="365760"/>
           </a:xfrm>
           <a:prstGeom prst="roundRect">
             <a:avLst/>
@@ -4853,17 +4788,78 @@
             <a:pPr algn="ctr">
               <a:defRPr sz="950" b="1">
                 <a:solidFill>
+                  <a:srgbClr val="BFB9AF"/>
+                </a:solidFill>
+                <a:latin typeface="Consolas"/>
+              </a:defRPr>
+            </a:pPr>
+            <a:r>
+              <a:t>READY FOR LIVE DEMO</a:t>
+            </a:r>
+          </a:p>
+        </p:txBody>
+      </p:sp>
+      <p:sp>
+        <p:nvSpPr>
+          <p:cNvPr id="9" name="TextBox 8"/>
+          <p:cNvSpPr txBox="1"/>
+          <p:nvPr/>
+        </p:nvSpPr>
+        <p:spPr>
+          <a:xfrm>
+            <a:off x="1005840" y="2286000"/>
+            <a:ext cx="10058400" cy="2377440"/>
+          </a:xfrm>
+          <a:prstGeom prst="rect">
+            <a:avLst/>
+          </a:prstGeom>
+          <a:noFill/>
+        </p:spPr>
+        <p:txBody>
+          <a:bodyPr wrap="square" lIns="0" tIns="0" rIns="0" bIns="0">
+            <a:spAutoFit/>
+          </a:bodyPr>
+          <a:lstStyle/>
+          <a:p>
+            <a:pPr>
+              <a:defRPr sz="5600" b="1">
+                <a:solidFill>
                   <a:srgbClr val="FAF8F5"/>
                 </a:solidFill>
-                <a:latin typeface="Consolas"/>
-              </a:defRPr>
-            </a:pPr>
-            <a:r>
-              <a:t>[ 01 // CORE ]</a:t>
-            </a:r>
-            <a:br/>
-            <a:r>
-              <a:t>15ms Native C Engine</a:t>
+                <a:latin typeface="Georgia"/>
+              </a:defRPr>
+            </a:pPr>
+            <a:r>
+              <a:t>See it. Trace it.</a:t>
+            </a:r>
+          </a:p>
+          <a:p>
+            <a:pPr>
+              <a:defRPr i="1" sz="5600" b="1">
+                <a:solidFill>
+                  <a:srgbClr val="10B981"/>
+                </a:solidFill>
+                <a:latin typeface="Georgia"/>
+              </a:defRPr>
+            </a:pPr>
+            <a:r>
+              <a:t>Nullify it.</a:t>
+            </a:r>
+          </a:p>
+          <a:p>
+            <a:pPr>
+              <a:spcBef>
+                <a:spcPts val="1400"/>
+              </a:spcBef>
+              <a:defRPr sz="1900">
+                <a:solidFill>
+                  <a:srgbClr val="BFB9AF"/>
+                </a:solidFill>
+                <a:latin typeface="Segoe UI"/>
+              </a:defRPr>
+            </a:pPr>
+            <a:r>
+              <a:t>Autonomous AI Threat Defense — From Detection to Immunity in Under 15 Milliseconds.</a:t>
             </a:r>
           </a:p>
         </p:txBody>
@@ -4876,8 +4872,8 @@
         </p:nvSpPr>
         <p:spPr>
           <a:xfrm>
-            <a:off x="2880360" y="4846320"/>
-            <a:ext cx="1783080" cy="594360"/>
+            <a:off x="1005840" y="4663440"/>
+            <a:ext cx="3291840" cy="1234440"/>
           </a:xfrm>
           <a:prstGeom prst="roundRect">
             <a:avLst/>
@@ -4906,37 +4902,75 @@
           </a:fontRef>
         </p:style>
         <p:txBody>
-          <a:bodyPr rtlCol="0" anchor="ctr" lIns="0" tIns="0" rIns="0" bIns="0"/>
-          <a:lstStyle/>
-          <a:p>
-            <a:pPr algn="ctr">
-              <a:defRPr sz="950" b="1">
+          <a:bodyPr rtlCol="0" anchor="ctr"/>
+          <a:lstStyle/>
+          <a:p>
+            <a:pPr algn="ctr"/>
+          </a:p>
+        </p:txBody>
+      </p:sp>
+      <p:sp>
+        <p:nvSpPr>
+          <p:cNvPr id="11" name="TextBox 10"/>
+          <p:cNvSpPr txBox="1"/>
+          <p:nvPr/>
+        </p:nvSpPr>
+        <p:spPr>
+          <a:xfrm>
+            <a:off x="1234440" y="4754880"/>
+            <a:ext cx="2834640" cy="1051560"/>
+          </a:xfrm>
+          <a:prstGeom prst="rect">
+            <a:avLst/>
+          </a:prstGeom>
+          <a:noFill/>
+        </p:spPr>
+        <p:txBody>
+          <a:bodyPr wrap="square" lIns="0" tIns="0" rIns="0" bIns="0">
+            <a:spAutoFit/>
+          </a:bodyPr>
+          <a:lstStyle/>
+          <a:p>
+            <a:pPr>
+              <a:defRPr sz="1450" b="1">
                 <a:solidFill>
                   <a:srgbClr val="FAF8F5"/>
                 </a:solidFill>
-                <a:latin typeface="Consolas"/>
-              </a:defRPr>
-            </a:pPr>
-            <a:r>
-              <a:t>[ 02 // MESH ]</a:t>
-            </a:r>
-            <a:br/>
-            <a:r>
-              <a:t>6 Collaborative AI Agents</a:t>
-            </a:r>
-          </a:p>
-        </p:txBody>
-      </p:sp>
-      <p:sp>
-        <p:nvSpPr>
-          <p:cNvPr id="11" name="Rounded Rectangle 10"/>
+                <a:latin typeface="Segoe UI"/>
+              </a:defRPr>
+            </a:pPr>
+            <a:r>
+              <a:t>[ 01 // SPEED ]  Sub-15ms Native C Engine</a:t>
+            </a:r>
+          </a:p>
+          <a:p>
+            <a:pPr>
+              <a:spcBef>
+                <a:spcPts val="300"/>
+              </a:spcBef>
+              <a:defRPr sz="1200">
+                <a:solidFill>
+                  <a:srgbClr val="BFB9AF"/>
+                </a:solidFill>
+                <a:latin typeface="Segoe UI"/>
+              </a:defRPr>
+            </a:pPr>
+            <a:r>
+              <a:t>C11 core analyzes binaries faster than a blink of an eye.</a:t>
+            </a:r>
+          </a:p>
+        </p:txBody>
+      </p:sp>
+      <p:sp>
+        <p:nvSpPr>
+          <p:cNvPr id="12" name="Rounded Rectangle 11"/>
           <p:cNvSpPr/>
           <p:nvPr/>
         </p:nvSpPr>
         <p:spPr>
           <a:xfrm>
-            <a:off x="4754879" y="4846320"/>
-            <a:ext cx="1783080" cy="594360"/>
+            <a:off x="4480560" y="4663440"/>
+            <a:ext cx="3291840" cy="1234440"/>
           </a:xfrm>
           <a:prstGeom prst="roundRect">
             <a:avLst/>
@@ -4965,37 +4999,75 @@
           </a:fontRef>
         </p:style>
         <p:txBody>
-          <a:bodyPr rtlCol="0" anchor="ctr" lIns="0" tIns="0" rIns="0" bIns="0"/>
-          <a:lstStyle/>
-          <a:p>
-            <a:pPr algn="ctr">
-              <a:defRPr sz="950" b="1">
+          <a:bodyPr rtlCol="0" anchor="ctr"/>
+          <a:lstStyle/>
+          <a:p>
+            <a:pPr algn="ctr"/>
+          </a:p>
+        </p:txBody>
+      </p:sp>
+      <p:sp>
+        <p:nvSpPr>
+          <p:cNvPr id="13" name="TextBox 12"/>
+          <p:cNvSpPr txBox="1"/>
+          <p:nvPr/>
+        </p:nvSpPr>
+        <p:spPr>
+          <a:xfrm>
+            <a:off x="4709160" y="4754880"/>
+            <a:ext cx="2834640" cy="1051560"/>
+          </a:xfrm>
+          <a:prstGeom prst="rect">
+            <a:avLst/>
+          </a:prstGeom>
+          <a:noFill/>
+        </p:spPr>
+        <p:txBody>
+          <a:bodyPr wrap="square" lIns="0" tIns="0" rIns="0" bIns="0">
+            <a:spAutoFit/>
+          </a:bodyPr>
+          <a:lstStyle/>
+          <a:p>
+            <a:pPr>
+              <a:defRPr sz="1450" b="1">
                 <a:solidFill>
                   <a:srgbClr val="FAF8F5"/>
                 </a:solidFill>
-                <a:latin typeface="Consolas"/>
-              </a:defRPr>
-            </a:pPr>
-            <a:r>
-              <a:t>[ 03 // YARA ]</a:t>
-            </a:r>
-            <a:br/>
-            <a:r>
-              <a:t>Instant Enterprise Rules</a:t>
-            </a:r>
-          </a:p>
-        </p:txBody>
-      </p:sp>
-      <p:sp>
-        <p:nvSpPr>
-          <p:cNvPr id="12" name="Rounded Rectangle 11"/>
+                <a:latin typeface="Segoe UI"/>
+              </a:defRPr>
+            </a:pPr>
+            <a:r>
+              <a:t>[ 02 // COGNITION ]  6 Collaborative AI Agents</a:t>
+            </a:r>
+          </a:p>
+          <a:p>
+            <a:pPr>
+              <a:spcBef>
+                <a:spcPts val="300"/>
+              </a:spcBef>
+              <a:defRPr sz="1200">
+                <a:solidFill>
+                  <a:srgbClr val="BFB9AF"/>
+                </a:solidFill>
+                <a:latin typeface="Segoe UI"/>
+              </a:defRPr>
+            </a:pPr>
+            <a:r>
+              <a:t>Specialized agents team up to inspect, explain, and defend.</a:t>
+            </a:r>
+          </a:p>
+        </p:txBody>
+      </p:sp>
+      <p:sp>
+        <p:nvSpPr>
+          <p:cNvPr id="14" name="Rounded Rectangle 13"/>
           <p:cNvSpPr/>
           <p:nvPr/>
         </p:nvSpPr>
         <p:spPr>
           <a:xfrm>
-            <a:off x="6675120" y="1005840"/>
-            <a:ext cx="4572000" cy="4526280"/>
+            <a:off x="7955279" y="4663440"/>
+            <a:ext cx="3291840" cy="1234440"/>
           </a:xfrm>
           <a:prstGeom prst="roundRect">
             <a:avLst/>
@@ -5031,33 +5103,61 @@
           </a:p>
         </p:txBody>
       </p:sp>
-      <p:pic>
-        <p:nvPicPr>
-          <p:cNvPr id="13" name="Picture 12" descr="cyber_shield_core.jpg"/>
-          <p:cNvPicPr>
-            <a:picLocks noChangeAspect="1"/>
-          </p:cNvPicPr>
-          <p:nvPr/>
-        </p:nvPicPr>
-        <p:blipFill>
-          <a:blip r:embed="rId3"/>
-          <a:stretch>
-            <a:fillRect/>
-          </a:stretch>
-        </p:blipFill>
-        <p:spPr>
-          <a:xfrm>
-            <a:off x="6766560" y="1097280"/>
-            <a:ext cx="4389120" cy="2449741"/>
+      <p:sp>
+        <p:nvSpPr>
+          <p:cNvPr id="15" name="TextBox 14"/>
+          <p:cNvSpPr txBox="1"/>
+          <p:nvPr/>
+        </p:nvSpPr>
+        <p:spPr>
+          <a:xfrm>
+            <a:off x="8183879" y="4754880"/>
+            <a:ext cx="2834640" cy="1051560"/>
           </a:xfrm>
           <a:prstGeom prst="rect">
             <a:avLst/>
           </a:prstGeom>
-        </p:spPr>
-      </p:pic>
-      <p:sp>
-        <p:nvSpPr>
-          <p:cNvPr id="14" name="Rectangle 13"/>
+          <a:noFill/>
+        </p:spPr>
+        <p:txBody>
+          <a:bodyPr wrap="square" lIns="0" tIns="0" rIns="0" bIns="0">
+            <a:spAutoFit/>
+          </a:bodyPr>
+          <a:lstStyle/>
+          <a:p>
+            <a:pPr>
+              <a:defRPr sz="1450" b="1">
+                <a:solidFill>
+                  <a:srgbClr val="FAF8F5"/>
+                </a:solidFill>
+                <a:latin typeface="Segoe UI"/>
+              </a:defRPr>
+            </a:pPr>
+            <a:r>
+              <a:t>[ 03 // DEFENSE ]  Instant Auto-YARA Immunity</a:t>
+            </a:r>
+          </a:p>
+          <a:p>
+            <a:pPr>
+              <a:spcBef>
+                <a:spcPts val="300"/>
+              </a:spcBef>
+              <a:defRPr sz="1200">
+                <a:solidFill>
+                  <a:srgbClr val="BFB9AF"/>
+                </a:solidFill>
+                <a:latin typeface="Segoe UI"/>
+              </a:defRPr>
+            </a:pPr>
+            <a:r>
+              <a:t>Writes instant defense rules to protect your whole network.</a:t>
+            </a:r>
+          </a:p>
+        </p:txBody>
+      </p:sp>
+      <p:sp>
+        <p:nvSpPr>
+          <p:cNvPr id="16" name="Rectangle 15"/>
           <p:cNvSpPr/>
           <p:nvPr/>
         </p:nvSpPr>
@@ -5100,7 +5200,7 @@
       </p:sp>
       <p:sp>
         <p:nvSpPr>
-          <p:cNvPr id="15" name="TextBox 14"/>
+          <p:cNvPr id="17" name="TextBox 16"/>
           <p:cNvSpPr txBox="1"/>
           <p:nvPr/>
         </p:nvSpPr>
@@ -5330,116 +5430,13 @@
       </p:sp>
       <p:sp>
         <p:nvSpPr>
-          <p:cNvPr id="6" name="TextBox 5"/>
-          <p:cNvSpPr txBox="1"/>
-          <p:nvPr/>
-        </p:nvSpPr>
-        <p:spPr>
-          <a:xfrm>
-            <a:off x="1097280" y="1920240"/>
-            <a:ext cx="4572000" cy="3931920"/>
-          </a:xfrm>
-          <a:prstGeom prst="rect">
-            <a:avLst/>
-          </a:prstGeom>
-          <a:noFill/>
-        </p:spPr>
-        <p:txBody>
-          <a:bodyPr wrap="square" lIns="0" tIns="0" rIns="0" bIns="0">
-            <a:spAutoFit/>
-          </a:bodyPr>
-          <a:lstStyle/>
-          <a:p>
-            <a:pPr>
-              <a:spcBef>
-                <a:spcPts val="2000"/>
-              </a:spcBef>
-              <a:defRPr sz="2000" b="1">
-                <a:solidFill>
-                  <a:srgbClr val="14110D"/>
-                </a:solidFill>
-                <a:latin typeface="Segoe UI"/>
-              </a:defRPr>
-            </a:pPr>
-            <a:r>
-              <a:t>Luxury Web Dashboard (localhost:8000)</a:t>
-            </a:r>
-          </a:p>
-          <a:p>
-            <a:pPr>
-              <a:spcBef>
-                <a:spcPts val="1000"/>
-              </a:spcBef>
-              <a:defRPr sz="1350">
-                <a:solidFill>
-                  <a:srgbClr val="555048"/>
-                </a:solidFill>
-                <a:latin typeface="Segoe UI"/>
-              </a:defRPr>
-            </a:pPr>
-            <a:r>
-              <a:t>• Drag-and-Drop Scanning: Drop any file to see real-time analysis in milliseconds.</a:t>
-            </a:r>
-          </a:p>
-          <a:p>
-            <a:pPr>
-              <a:spcBef>
-                <a:spcPts val="1000"/>
-              </a:spcBef>
-              <a:defRPr sz="1350">
-                <a:solidFill>
-                  <a:srgbClr val="555048"/>
-                </a:solidFill>
-                <a:latin typeface="Segoe UI"/>
-              </a:defRPr>
-            </a:pPr>
-            <a:r>
-              <a:t>• Live Confidence Radar: See risk percentage and threat family classification clearly.</a:t>
-            </a:r>
-          </a:p>
-          <a:p>
-            <a:pPr>
-              <a:spcBef>
-                <a:spcPts val="1000"/>
-              </a:spcBef>
-              <a:defRPr sz="1350">
-                <a:solidFill>
-                  <a:srgbClr val="555048"/>
-                </a:solidFill>
-                <a:latin typeface="Segoe UI"/>
-              </a:defRPr>
-            </a:pPr>
-            <a:r>
-              <a:t>• Built-in Demo Samples: One-click buttons to test safe trojans, ransomware, and benign files.</a:t>
-            </a:r>
-          </a:p>
-          <a:p>
-            <a:pPr>
-              <a:spcBef>
-                <a:spcPts val="1000"/>
-              </a:spcBef>
-              <a:defRPr sz="1350">
-                <a:solidFill>
-                  <a:srgbClr val="555048"/>
-                </a:solidFill>
-                <a:latin typeface="Segoe UI"/>
-              </a:defRPr>
-            </a:pPr>
-            <a:r>
-              <a:t>• 1-Click YARA Copy: Instantly copy auto-generated rules to your clipboard.</a:t>
-            </a:r>
-          </a:p>
-        </p:txBody>
-      </p:sp>
-      <p:sp>
-        <p:nvSpPr>
-          <p:cNvPr id="7" name="Rounded Rectangle 6"/>
+          <p:cNvPr id="6" name="Rounded Rectangle 5"/>
           <p:cNvSpPr/>
           <p:nvPr/>
         </p:nvSpPr>
         <p:spPr>
           <a:xfrm>
-            <a:off x="1097280" y="1920240"/>
+            <a:off x="1097280" y="1874519"/>
             <a:ext cx="2926080" cy="320040"/>
           </a:xfrm>
           <a:prstGeom prst="roundRect">
@@ -5480,6 +5477,106 @@
             </a:pPr>
             <a:r>
               <a:t>[ WEB INTERFACE ]</a:t>
+            </a:r>
+          </a:p>
+        </p:txBody>
+      </p:sp>
+      <p:sp>
+        <p:nvSpPr>
+          <p:cNvPr id="7" name="TextBox 6"/>
+          <p:cNvSpPr txBox="1"/>
+          <p:nvPr/>
+        </p:nvSpPr>
+        <p:spPr>
+          <a:xfrm>
+            <a:off x="1097280" y="2331720"/>
+            <a:ext cx="4572000" cy="3566160"/>
+          </a:xfrm>
+          <a:prstGeom prst="rect">
+            <a:avLst/>
+          </a:prstGeom>
+          <a:noFill/>
+        </p:spPr>
+        <p:txBody>
+          <a:bodyPr wrap="square" lIns="0" tIns="0" rIns="0" bIns="0">
+            <a:spAutoFit/>
+          </a:bodyPr>
+          <a:lstStyle/>
+          <a:p>
+            <a:pPr>
+              <a:defRPr sz="2000" b="1">
+                <a:solidFill>
+                  <a:srgbClr val="14110D"/>
+                </a:solidFill>
+                <a:latin typeface="Segoe UI"/>
+              </a:defRPr>
+            </a:pPr>
+            <a:r>
+              <a:t>Luxury Web Dashboard (localhost:8000)</a:t>
+            </a:r>
+          </a:p>
+          <a:p>
+            <a:pPr>
+              <a:spcBef>
+                <a:spcPts val="1000"/>
+              </a:spcBef>
+              <a:defRPr sz="1350">
+                <a:solidFill>
+                  <a:srgbClr val="555048"/>
+                </a:solidFill>
+                <a:latin typeface="Segoe UI"/>
+              </a:defRPr>
+            </a:pPr>
+            <a:r>
+              <a:t>• Drag-and-Drop Scanning: Drop any file to see real-time analysis in milliseconds.</a:t>
+            </a:r>
+          </a:p>
+          <a:p>
+            <a:pPr>
+              <a:spcBef>
+                <a:spcPts val="1000"/>
+              </a:spcBef>
+              <a:defRPr sz="1350">
+                <a:solidFill>
+                  <a:srgbClr val="555048"/>
+                </a:solidFill>
+                <a:latin typeface="Segoe UI"/>
+              </a:defRPr>
+            </a:pPr>
+            <a:r>
+              <a:t>• Live Confidence Radar: See risk percentage and threat family classification clearly.</a:t>
+            </a:r>
+          </a:p>
+          <a:p>
+            <a:pPr>
+              <a:spcBef>
+                <a:spcPts val="1000"/>
+              </a:spcBef>
+              <a:defRPr sz="1350">
+                <a:solidFill>
+                  <a:srgbClr val="555048"/>
+                </a:solidFill>
+                <a:latin typeface="Segoe UI"/>
+              </a:defRPr>
+            </a:pPr>
+            <a:r>
+              <a:t>• Built-in Demo Samples: One-click buttons to test safe trojans, ransomware, and benign files.</a:t>
+            </a:r>
+          </a:p>
+          <a:p>
+            <a:pPr>
+              <a:spcBef>
+                <a:spcPts val="1000"/>
+              </a:spcBef>
+              <a:defRPr sz="1350">
+                <a:solidFill>
+                  <a:srgbClr val="555048"/>
+                </a:solidFill>
+                <a:latin typeface="Segoe UI"/>
+              </a:defRPr>
+            </a:pPr>
+            <a:r>
+              <a:t>• 1-Click YARA Copy: Instantly copy auto-generated rules to your clipboard.</a:t>
             </a:r>
           </a:p>
         </p:txBody>
@@ -6586,7 +6683,7 @@
         <p:spPr>
           <a:xfrm>
             <a:off x="1005840" y="914400"/>
-            <a:ext cx="2194560" cy="822960"/>
+            <a:ext cx="2377440" cy="1005840"/>
           </a:xfrm>
           <a:prstGeom prst="roundRect">
             <a:avLst/>
@@ -6622,7 +6719,7 @@
       </p:sp>
       <p:pic>
         <p:nvPicPr>
-          <p:cNvPr id="5" name="Picture 4" descr="egate_logo_cropped.png"/>
+          <p:cNvPr id="5" name="Picture 4" descr="egate logo.png"/>
           <p:cNvPicPr>
             <a:picLocks noChangeAspect="1"/>
           </p:cNvPicPr>
@@ -6636,8 +6733,8 @@
         </p:blipFill>
         <p:spPr>
           <a:xfrm>
-            <a:off x="1097280" y="960120"/>
-            <a:ext cx="2011680" cy="1658277"/>
+            <a:off x="1603331" y="960120"/>
+            <a:ext cx="1182456" cy="914399"/>
           </a:xfrm>
           <a:prstGeom prst="rect">
             <a:avLst/>
@@ -6652,8 +6749,8 @@
         </p:nvSpPr>
         <p:spPr>
           <a:xfrm>
-            <a:off x="3337560" y="1143000"/>
-            <a:ext cx="2377440" cy="365760"/>
+            <a:off x="3566160" y="1234440"/>
+            <a:ext cx="2560320" cy="365760"/>
           </a:xfrm>
           <a:prstGeom prst="roundRect">
             <a:avLst/>
@@ -6707,7 +6804,7 @@
         </p:nvSpPr>
         <p:spPr>
           <a:xfrm>
-            <a:off x="5852160" y="1143000"/>
+            <a:off x="6263640" y="1234440"/>
             <a:ext cx="2194560" cy="365760"/>
           </a:xfrm>
           <a:prstGeom prst="roundRect">
@@ -6762,7 +6859,7 @@
         </p:nvSpPr>
         <p:spPr>
           <a:xfrm>
-            <a:off x="1005840" y="2011680"/>
+            <a:off x="1005840" y="2148840"/>
             <a:ext cx="10058400" cy="1645920"/>
           </a:xfrm>
           <a:prstGeom prst="rect">
@@ -7508,7 +7605,7 @@
       </p:sp>
       <p:pic>
         <p:nvPicPr>
-          <p:cNvPr id="6" name="Picture 5" descr="egate_logo.png"/>
+          <p:cNvPr id="6" name="Picture 5" descr="egate logo.png"/>
           <p:cNvPicPr>
             <a:picLocks noChangeAspect="1"/>
           </p:cNvPicPr>
@@ -7522,8 +7619,8 @@
         </p:blipFill>
         <p:spPr>
           <a:xfrm>
-            <a:off x="1188720" y="2011680"/>
-            <a:ext cx="3657600" cy="2828441"/>
+            <a:off x="1125588" y="1920240"/>
+            <a:ext cx="3783862" cy="2926080"/>
           </a:xfrm>
           <a:prstGeom prst="rect">
             <a:avLst/>
@@ -7538,7 +7635,7 @@
         </p:nvSpPr>
         <p:spPr>
           <a:xfrm>
-            <a:off x="1097280" y="5120640"/>
+            <a:off x="1097280" y="5166360"/>
             <a:ext cx="3840480" cy="731520"/>
           </a:xfrm>
           <a:prstGeom prst="rect">
@@ -9582,7 +9679,7 @@
         <p:spPr>
           <a:xfrm>
             <a:off x="822960" y="1645920"/>
-            <a:ext cx="6217920" cy="4434840"/>
+            <a:ext cx="5120640" cy="4434840"/>
           </a:xfrm>
           <a:prstGeom prst="roundRect">
             <a:avLst/>
@@ -9620,176 +9717,23 @@
       </p:sp>
       <p:sp>
         <p:nvSpPr>
-          <p:cNvPr id="6" name="TextBox 5"/>
-          <p:cNvSpPr txBox="1"/>
+          <p:cNvPr id="6" name="Rounded Rectangle 5"/>
+          <p:cNvSpPr/>
           <p:nvPr/>
         </p:nvSpPr>
         <p:spPr>
           <a:xfrm>
             <a:off x="1097280" y="1874519"/>
-            <a:ext cx="5669280" cy="4023360"/>
-          </a:xfrm>
-          <a:prstGeom prst="rect">
-            <a:avLst/>
-          </a:prstGeom>
-          <a:noFill/>
-        </p:spPr>
-        <p:txBody>
-          <a:bodyPr wrap="square" lIns="0" tIns="0" rIns="0" bIns="0">
-            <a:spAutoFit/>
-          </a:bodyPr>
-          <a:lstStyle/>
-          <a:p>
-            <a:pPr>
-              <a:spcBef>
-                <a:spcPts val="1400"/>
-              </a:spcBef>
-              <a:defRPr sz="1100" b="1">
-                <a:solidFill>
-                  <a:srgbClr val="059669"/>
-                </a:solidFill>
-                <a:latin typeface="Consolas"/>
-              </a:defRPr>
-            </a:pPr>
-            <a:r>
-              <a:t>[ STAGE 1: NATIVE C SPEED ]</a:t>
-            </a:r>
-          </a:p>
-          <a:p>
-            <a:pPr>
-              <a:spcBef>
-                <a:spcPts val="400"/>
-              </a:spcBef>
-              <a:defRPr sz="1200">
-                <a:solidFill>
-                  <a:srgbClr val="14110D"/>
-                </a:solidFill>
-                <a:latin typeface="Segoe UI"/>
-              </a:defRPr>
-            </a:pPr>
-            <a:r>
-              <a:t>• Agent 1: Triage Agent: Checks magic bytes, headers, and streams MD5/SHA-1/SHA-256 in &lt; 1ms.</a:t>
-            </a:r>
-          </a:p>
-          <a:p>
-            <a:pPr>
-              <a:spcBef>
-                <a:spcPts val="400"/>
-              </a:spcBef>
-              <a:defRPr sz="1200">
-                <a:solidFill>
-                  <a:srgbClr val="14110D"/>
-                </a:solidFill>
-                <a:latin typeface="Segoe UI"/>
-              </a:defRPr>
-            </a:pPr>
-            <a:r>
-              <a:t>• Agent 2: Static Analysis Agent: Traverses PE imports in memory, detecting dangerous APIs and backdoor keys.</a:t>
-            </a:r>
-          </a:p>
-          <a:p>
-            <a:pPr>
-              <a:spcBef>
-                <a:spcPts val="1400"/>
-              </a:spcBef>
-              <a:defRPr sz="1100" b="1">
-                <a:solidFill>
-                  <a:srgbClr val="2563EB"/>
-                </a:solidFill>
-                <a:latin typeface="Consolas"/>
-              </a:defRPr>
-            </a:pPr>
-            <a:r>
-              <a:t>[ STAGE 2: AI COGNITION &amp; DEFENSE ]</a:t>
-            </a:r>
-          </a:p>
-          <a:p>
-            <a:pPr>
-              <a:spcBef>
-                <a:spcPts val="400"/>
-              </a:spcBef>
-              <a:defRPr sz="1200">
-                <a:solidFill>
-                  <a:srgbClr val="14110D"/>
-                </a:solidFill>
-                <a:latin typeface="Segoe UI"/>
-              </a:defRPr>
-            </a:pPr>
-            <a:r>
-              <a:t>• Agent 3: Behavioral Agent: Traces process trees and correlates Sysmon JSONL logs.</a:t>
-            </a:r>
-          </a:p>
-          <a:p>
-            <a:pPr>
-              <a:spcBef>
-                <a:spcPts val="400"/>
-              </a:spcBef>
-              <a:defRPr sz="1200">
-                <a:solidFill>
-                  <a:srgbClr val="14110D"/>
-                </a:solidFill>
-                <a:latin typeface="Segoe UI"/>
-              </a:defRPr>
-            </a:pPr>
-            <a:r>
-              <a:t>• Agent 4: Classification Agent: Evaluates 2,381 features via EMBER 2017 machine learning.</a:t>
-            </a:r>
-          </a:p>
-          <a:p>
-            <a:pPr>
-              <a:spcBef>
-                <a:spcPts val="400"/>
-              </a:spcBef>
-              <a:defRPr sz="1200">
-                <a:solidFill>
-                  <a:srgbClr val="14110D"/>
-                </a:solidFill>
-                <a:latin typeface="Segoe UI"/>
-              </a:defRPr>
-            </a:pPr>
-            <a:r>
-              <a:t>• Agent 5: Reasoning Agent: Synthesizes plain-English explanations with MITRE ATT&amp;CK tags.</a:t>
-            </a:r>
-          </a:p>
-          <a:p>
-            <a:pPr>
-              <a:spcBef>
-                <a:spcPts val="400"/>
-              </a:spcBef>
-              <a:defRPr sz="1200">
-                <a:solidFill>
-                  <a:srgbClr val="14110D"/>
-                </a:solidFill>
-                <a:latin typeface="Segoe UI"/>
-              </a:defRPr>
-            </a:pPr>
-            <a:r>
-              <a:t>• Agent 6: Defense Agent: Auto-generates syntax-validated YARA rules ready for deployment.</a:t>
-            </a:r>
-          </a:p>
-        </p:txBody>
-      </p:sp>
-      <p:sp>
-        <p:nvSpPr>
-          <p:cNvPr id="7" name="Rounded Rectangle 6"/>
-          <p:cNvSpPr/>
-          <p:nvPr/>
-        </p:nvSpPr>
-        <p:spPr>
-          <a:xfrm>
-            <a:off x="7269480" y="1645920"/>
-            <a:ext cx="4096512" cy="4434840"/>
+            <a:ext cx="2926080" cy="347472"/>
           </a:xfrm>
           <a:prstGeom prst="roundRect">
             <a:avLst/>
           </a:prstGeom>
           <a:solidFill>
-            <a:srgbClr val="1F1A14"/>
+            <a:srgbClr val="ECFDF5"/>
           </a:solidFill>
-          <a:ln w="12700">
-            <a:solidFill>
-              <a:srgbClr val="322B22"/>
-            </a:solidFill>
+          <a:ln>
+            <a:noFill/>
           </a:ln>
         </p:spPr>
         <p:style>
@@ -9807,76 +9751,356 @@
           </a:fontRef>
         </p:style>
         <p:txBody>
-          <a:bodyPr rtlCol="0" anchor="ctr"/>
-          <a:lstStyle/>
-          <a:p>
-            <a:pPr algn="ctr"/>
-          </a:p>
-        </p:txBody>
-      </p:sp>
-      <p:pic>
-        <p:nvPicPr>
-          <p:cNvPr id="8" name="Picture 7" descr="neural_agent_mesh.jpg"/>
-          <p:cNvPicPr>
-            <a:picLocks noChangeAspect="1"/>
-          </p:cNvPicPr>
-          <p:nvPr/>
-        </p:nvPicPr>
-        <p:blipFill>
-          <a:blip r:embed="rId2"/>
-          <a:stretch>
-            <a:fillRect/>
-          </a:stretch>
-        </p:blipFill>
-        <p:spPr>
-          <a:xfrm>
-            <a:off x="7360920" y="1737360"/>
-            <a:ext cx="3913632" cy="2184353"/>
+          <a:bodyPr rtlCol="0" anchor="ctr" lIns="0" tIns="0" rIns="0" bIns="0"/>
+          <a:lstStyle/>
+          <a:p>
+            <a:pPr algn="ctr">
+              <a:defRPr sz="950" b="1">
+                <a:solidFill>
+                  <a:srgbClr val="059669"/>
+                </a:solidFill>
+                <a:latin typeface="Consolas"/>
+              </a:defRPr>
+            </a:pPr>
+            <a:r>
+              <a:t>[ STAGE 1: NATIVE C SPEED ]</a:t>
+            </a:r>
+          </a:p>
+        </p:txBody>
+      </p:sp>
+      <p:sp>
+        <p:nvSpPr>
+          <p:cNvPr id="7" name="TextBox 6"/>
+          <p:cNvSpPr txBox="1"/>
+          <p:nvPr/>
+        </p:nvSpPr>
+        <p:spPr>
+          <a:xfrm>
+            <a:off x="1097280" y="2377440"/>
+            <a:ext cx="4572000" cy="3474720"/>
           </a:xfrm>
           <a:prstGeom prst="rect">
             <a:avLst/>
           </a:prstGeom>
-        </p:spPr>
-      </p:pic>
-      <p:sp>
-        <p:nvSpPr>
-          <p:cNvPr id="9" name="TextBox 8"/>
-          <p:cNvSpPr txBox="1"/>
-          <p:nvPr/>
-        </p:nvSpPr>
-        <p:spPr>
-          <a:xfrm>
-            <a:off x="7452360" y="5349240"/>
-            <a:ext cx="3749039" cy="548640"/>
-          </a:xfrm>
-          <a:prstGeom prst="rect">
-            <a:avLst/>
-          </a:prstGeom>
           <a:noFill/>
         </p:spPr>
         <p:txBody>
-          <a:bodyPr wrap="none" lIns="0" tIns="0" rIns="0" bIns="0">
+          <a:bodyPr wrap="square" lIns="0" tIns="0" rIns="0" bIns="0">
             <a:spAutoFit/>
           </a:bodyPr>
           <a:lstStyle/>
           <a:p>
+            <a:pPr>
+              <a:defRPr sz="1700" b="1">
+                <a:solidFill>
+                  <a:srgbClr val="14110D"/>
+                </a:solidFill>
+                <a:latin typeface="Segoe UI"/>
+              </a:defRPr>
+            </a:pPr>
+            <a:r>
+              <a:t>Agent 1: Triage Agent</a:t>
+            </a:r>
+          </a:p>
+          <a:p>
+            <a:pPr>
+              <a:spcBef>
+                <a:spcPts val="600"/>
+              </a:spcBef>
+              <a:defRPr sz="1400">
+                <a:solidFill>
+                  <a:srgbClr val="555048"/>
+                </a:solidFill>
+                <a:latin typeface="Segoe UI"/>
+              </a:defRPr>
+            </a:pPr>
+            <a:r>
+              <a:t>Checks magic bytes, verifies PE/ELF headers, and streams MD5, SHA-1, and SHA-256 hashes in a single pass in under 1 millisecond.</a:t>
+            </a:r>
+          </a:p>
+          <a:p>
+            <a:pPr>
+              <a:spcBef>
+                <a:spcPts val="2200"/>
+              </a:spcBef>
+              <a:defRPr sz="1700" b="1">
+                <a:solidFill>
+                  <a:srgbClr val="14110D"/>
+                </a:solidFill>
+                <a:latin typeface="Segoe UI"/>
+              </a:defRPr>
+            </a:pPr>
+            <a:r>
+              <a:t>Agent 2: Static Analysis Agent</a:t>
+            </a:r>
+          </a:p>
+          <a:p>
+            <a:pPr>
+              <a:spcBef>
+                <a:spcPts val="600"/>
+              </a:spcBef>
+              <a:defRPr sz="1400">
+                <a:solidFill>
+                  <a:srgbClr val="555048"/>
+                </a:solidFill>
+                <a:latin typeface="Segoe UI"/>
+              </a:defRPr>
+            </a:pPr>
+            <a:r>
+              <a:t>Traverses Windows PE Import Directory directly in memory. Detects dangerous APIs (memory injection, keylogging) and backdoor registry keys in 0.1ms.</a:t>
+            </a:r>
+          </a:p>
+        </p:txBody>
+      </p:sp>
+      <p:sp>
+        <p:nvSpPr>
+          <p:cNvPr id="8" name="Rounded Rectangle 7"/>
+          <p:cNvSpPr/>
+          <p:nvPr/>
+        </p:nvSpPr>
+        <p:spPr>
+          <a:xfrm>
+            <a:off x="6245352" y="1645920"/>
+            <a:ext cx="5120640" cy="4434840"/>
+          </a:xfrm>
+          <a:prstGeom prst="roundRect">
+            <a:avLst/>
+          </a:prstGeom>
+          <a:solidFill>
+            <a:srgbClr val="FFFFFF"/>
+          </a:solidFill>
+          <a:ln w="12700">
+            <a:solidFill>
+              <a:srgbClr val="E2DCD2"/>
+            </a:solidFill>
+          </a:ln>
+        </p:spPr>
+        <p:style>
+          <a:lnRef idx="1">
+            <a:schemeClr val="accent1"/>
+          </a:lnRef>
+          <a:fillRef idx="3">
+            <a:schemeClr val="accent1"/>
+          </a:fillRef>
+          <a:effectRef idx="2">
+            <a:schemeClr val="accent1"/>
+          </a:effectRef>
+          <a:fontRef idx="minor">
+            <a:schemeClr val="lt1"/>
+          </a:fontRef>
+        </p:style>
+        <p:txBody>
+          <a:bodyPr rtlCol="0" anchor="ctr"/>
+          <a:lstStyle/>
+          <a:p>
+            <a:pPr algn="ctr"/>
+          </a:p>
+        </p:txBody>
+      </p:sp>
+      <p:sp>
+        <p:nvSpPr>
+          <p:cNvPr id="9" name="Rounded Rectangle 8"/>
+          <p:cNvSpPr/>
+          <p:nvPr/>
+        </p:nvSpPr>
+        <p:spPr>
+          <a:xfrm>
+            <a:off x="6519672" y="1874519"/>
+            <a:ext cx="3108960" cy="347472"/>
+          </a:xfrm>
+          <a:prstGeom prst="roundRect">
+            <a:avLst/>
+          </a:prstGeom>
+          <a:solidFill>
+            <a:srgbClr val="EFF6FF"/>
+          </a:solidFill>
+          <a:ln>
+            <a:noFill/>
+          </a:ln>
+        </p:spPr>
+        <p:style>
+          <a:lnRef idx="1">
+            <a:schemeClr val="accent1"/>
+          </a:lnRef>
+          <a:fillRef idx="3">
+            <a:schemeClr val="accent1"/>
+          </a:fillRef>
+          <a:effectRef idx="2">
+            <a:schemeClr val="accent1"/>
+          </a:effectRef>
+          <a:fontRef idx="minor">
+            <a:schemeClr val="lt1"/>
+          </a:fontRef>
+        </p:style>
+        <p:txBody>
+          <a:bodyPr rtlCol="0" anchor="ctr" lIns="0" tIns="0" rIns="0" bIns="0"/>
+          <a:lstStyle/>
+          <a:p>
             <a:pPr algn="ctr">
-              <a:defRPr sz="1000" b="1">
-                <a:solidFill>
-                  <a:srgbClr val="10B981"/>
+              <a:defRPr sz="950" b="1">
+                <a:solidFill>
+                  <a:srgbClr val="2563EB"/>
                 </a:solidFill>
                 <a:latin typeface="Consolas"/>
               </a:defRPr>
             </a:pPr>
             <a:r>
-              <a:t>COLLABORATIVE AGENT LATTICE</a:t>
-            </a:r>
-          </a:p>
-        </p:txBody>
-      </p:sp>
-      <p:sp>
-        <p:nvSpPr>
-          <p:cNvPr id="10" name="Rectangle 9"/>
+              <a:t>[ STAGE 2: AI COGNITION &amp; DEFENSE ]</a:t>
+            </a:r>
+          </a:p>
+        </p:txBody>
+      </p:sp>
+      <p:sp>
+        <p:nvSpPr>
+          <p:cNvPr id="10" name="TextBox 9"/>
+          <p:cNvSpPr txBox="1"/>
+          <p:nvPr/>
+        </p:nvSpPr>
+        <p:spPr>
+          <a:xfrm>
+            <a:off x="6519672" y="2377440"/>
+            <a:ext cx="4572000" cy="3474720"/>
+          </a:xfrm>
+          <a:prstGeom prst="rect">
+            <a:avLst/>
+          </a:prstGeom>
+          <a:noFill/>
+        </p:spPr>
+        <p:txBody>
+          <a:bodyPr wrap="square" lIns="0" tIns="0" rIns="0" bIns="0">
+            <a:spAutoFit/>
+          </a:bodyPr>
+          <a:lstStyle/>
+          <a:p>
+            <a:pPr>
+              <a:defRPr sz="1550" b="1">
+                <a:solidFill>
+                  <a:srgbClr val="14110D"/>
+                </a:solidFill>
+                <a:latin typeface="Segoe UI"/>
+              </a:defRPr>
+            </a:pPr>
+            <a:r>
+              <a:t>Agent 3: Behavioral Agent</a:t>
+            </a:r>
+          </a:p>
+          <a:p>
+            <a:pPr>
+              <a:spcBef>
+                <a:spcPts val="300"/>
+              </a:spcBef>
+              <a:defRPr sz="1300">
+                <a:solidFill>
+                  <a:srgbClr val="555048"/>
+                </a:solidFill>
+                <a:latin typeface="Segoe UI"/>
+              </a:defRPr>
+            </a:pPr>
+            <a:r>
+              <a:t>Traces process execution trees and correlates Windows Sysmon logs.</a:t>
+            </a:r>
+          </a:p>
+          <a:p>
+            <a:pPr>
+              <a:spcBef>
+                <a:spcPts val="1000"/>
+              </a:spcBef>
+              <a:defRPr sz="1550" b="1">
+                <a:solidFill>
+                  <a:srgbClr val="14110D"/>
+                </a:solidFill>
+                <a:latin typeface="Segoe UI"/>
+              </a:defRPr>
+            </a:pPr>
+            <a:r>
+              <a:t>Agent 4: Classification Agent</a:t>
+            </a:r>
+          </a:p>
+          <a:p>
+            <a:pPr>
+              <a:spcBef>
+                <a:spcPts val="300"/>
+              </a:spcBef>
+              <a:defRPr sz="1300">
+                <a:solidFill>
+                  <a:srgbClr val="555048"/>
+                </a:solidFill>
+                <a:latin typeface="Segoe UI"/>
+              </a:defRPr>
+            </a:pPr>
+            <a:r>
+              <a:t>Scores 2,381 features using an ML model trained on 1.1 million binaries.</a:t>
+            </a:r>
+          </a:p>
+          <a:p>
+            <a:pPr>
+              <a:spcBef>
+                <a:spcPts val="1000"/>
+              </a:spcBef>
+              <a:defRPr sz="1550" b="1">
+                <a:solidFill>
+                  <a:srgbClr val="14110D"/>
+                </a:solidFill>
+                <a:latin typeface="Segoe UI"/>
+              </a:defRPr>
+            </a:pPr>
+            <a:r>
+              <a:t>Agent 5: Reasoning Agent</a:t>
+            </a:r>
+          </a:p>
+          <a:p>
+            <a:pPr>
+              <a:spcBef>
+                <a:spcPts val="300"/>
+              </a:spcBef>
+              <a:defRPr sz="1300">
+                <a:solidFill>
+                  <a:srgbClr val="555048"/>
+                </a:solidFill>
+                <a:latin typeface="Segoe UI"/>
+              </a:defRPr>
+            </a:pPr>
+            <a:r>
+              <a:t>Explains *why* the file is malicious in plain English for security analysts.</a:t>
+            </a:r>
+          </a:p>
+          <a:p>
+            <a:pPr>
+              <a:spcBef>
+                <a:spcPts val="1000"/>
+              </a:spcBef>
+              <a:defRPr sz="1550" b="1">
+                <a:solidFill>
+                  <a:srgbClr val="14110D"/>
+                </a:solidFill>
+                <a:latin typeface="Segoe UI"/>
+              </a:defRPr>
+            </a:pPr>
+            <a:r>
+              <a:t>Agent 6: Defense Agent</a:t>
+            </a:r>
+          </a:p>
+          <a:p>
+            <a:pPr>
+              <a:spcBef>
+                <a:spcPts val="300"/>
+              </a:spcBef>
+              <a:defRPr sz="1300">
+                <a:solidFill>
+                  <a:srgbClr val="555048"/>
+                </a:solidFill>
+                <a:latin typeface="Segoe UI"/>
+              </a:defRPr>
+            </a:pPr>
+            <a:r>
+              <a:t>Automatically writes a clean, syntax-validated YARA rule to block it.</a:t>
+            </a:r>
+          </a:p>
+        </p:txBody>
+      </p:sp>
+      <p:sp>
+        <p:nvSpPr>
+          <p:cNvPr id="11" name="Rectangle 10"/>
           <p:cNvSpPr/>
           <p:nvPr/>
         </p:nvSpPr>
@@ -9919,7 +10143,7 @@
       </p:sp>
       <p:sp>
         <p:nvSpPr>
-          <p:cNvPr id="11" name="TextBox 10"/>
+          <p:cNvPr id="12" name="TextBox 11"/>
           <p:cNvSpPr txBox="1"/>
           <p:nvPr/>
         </p:nvSpPr>
@@ -10149,94 +10373,7 @@
       </p:sp>
       <p:sp>
         <p:nvSpPr>
-          <p:cNvPr id="6" name="TextBox 5"/>
-          <p:cNvSpPr txBox="1"/>
-          <p:nvPr/>
-        </p:nvSpPr>
-        <p:spPr>
-          <a:xfrm>
-            <a:off x="1097280" y="1828800"/>
-            <a:ext cx="2834640" cy="3291840"/>
-          </a:xfrm>
-          <a:prstGeom prst="rect">
-            <a:avLst/>
-          </a:prstGeom>
-          <a:noFill/>
-        </p:spPr>
-        <p:txBody>
-          <a:bodyPr wrap="square" lIns="0" tIns="0" rIns="0" bIns="0">
-            <a:spAutoFit/>
-          </a:bodyPr>
-          <a:lstStyle/>
-          <a:p>
-            <a:pPr>
-              <a:spcBef>
-                <a:spcPts val="1800"/>
-              </a:spcBef>
-              <a:defRPr sz="3800" b="1">
-                <a:solidFill>
-                  <a:srgbClr val="059669"/>
-                </a:solidFill>
-                <a:latin typeface="Georgia"/>
-              </a:defRPr>
-            </a:pPr>
-            <a:r>
-              <a:t>500x Faster</a:t>
-            </a:r>
-          </a:p>
-          <a:p>
-            <a:pPr>
-              <a:spcBef>
-                <a:spcPts val="400"/>
-              </a:spcBef>
-              <a:defRPr sz="1800" b="1">
-                <a:solidFill>
-                  <a:srgbClr val="14110D"/>
-                </a:solidFill>
-                <a:latin typeface="Segoe UI"/>
-              </a:defRPr>
-            </a:pPr>
-            <a:r>
-              <a:t>PE Import Parsing</a:t>
-            </a:r>
-          </a:p>
-          <a:p>
-            <a:pPr>
-              <a:spcBef>
-                <a:spcPts val="600"/>
-              </a:spcBef>
-              <a:defRPr sz="1100" b="1">
-                <a:solidFill>
-                  <a:srgbClr val="059669"/>
-                </a:solidFill>
-                <a:latin typeface="Consolas"/>
-              </a:defRPr>
-            </a:pPr>
-            <a:r>
-              <a:t>Python: 50.0 ms  →  C: 0.1 ms</a:t>
-            </a:r>
-          </a:p>
-          <a:p>
-            <a:pPr>
-              <a:spcBef>
-                <a:spcPts val="800"/>
-              </a:spcBef>
-              <a:defRPr sz="1300">
-                <a:solidFill>
-                  <a:srgbClr val="555048"/>
-                </a:solidFill>
-                <a:latin typeface="Segoe UI"/>
-              </a:defRPr>
-            </a:pPr>
-            <a:r>
-              <a:t>Reads executable import tables directly in memory without slow Python libraries.</a:t>
-            </a:r>
-          </a:p>
-        </p:txBody>
-      </p:sp>
-      <p:sp>
-        <p:nvSpPr>
-          <p:cNvPr id="7" name="Rounded Rectangle 6"/>
+          <p:cNvPr id="6" name="Rounded Rectangle 5"/>
           <p:cNvSpPr/>
           <p:nvPr/>
         </p:nvSpPr>
@@ -10283,6 +10420,90 @@
             </a:pPr>
             <a:r>
               <a:t>[ ENGINE // 01 ]</a:t>
+            </a:r>
+          </a:p>
+        </p:txBody>
+      </p:sp>
+      <p:sp>
+        <p:nvSpPr>
+          <p:cNvPr id="7" name="TextBox 6"/>
+          <p:cNvSpPr txBox="1"/>
+          <p:nvPr/>
+        </p:nvSpPr>
+        <p:spPr>
+          <a:xfrm>
+            <a:off x="1097280" y="2194560"/>
+            <a:ext cx="2834640" cy="2926080"/>
+          </a:xfrm>
+          <a:prstGeom prst="rect">
+            <a:avLst/>
+          </a:prstGeom>
+          <a:noFill/>
+        </p:spPr>
+        <p:txBody>
+          <a:bodyPr wrap="square" lIns="0" tIns="0" rIns="0" bIns="0">
+            <a:spAutoFit/>
+          </a:bodyPr>
+          <a:lstStyle/>
+          <a:p>
+            <a:pPr>
+              <a:defRPr sz="3800" b="1">
+                <a:solidFill>
+                  <a:srgbClr val="059669"/>
+                </a:solidFill>
+                <a:latin typeface="Georgia"/>
+              </a:defRPr>
+            </a:pPr>
+            <a:r>
+              <a:t>500x Faster</a:t>
+            </a:r>
+          </a:p>
+          <a:p>
+            <a:pPr>
+              <a:spcBef>
+                <a:spcPts val="400"/>
+              </a:spcBef>
+              <a:defRPr sz="1800" b="1">
+                <a:solidFill>
+                  <a:srgbClr val="14110D"/>
+                </a:solidFill>
+                <a:latin typeface="Segoe UI"/>
+              </a:defRPr>
+            </a:pPr>
+            <a:r>
+              <a:t>PE Import Parsing</a:t>
+            </a:r>
+          </a:p>
+          <a:p>
+            <a:pPr>
+              <a:spcBef>
+                <a:spcPts val="600"/>
+              </a:spcBef>
+              <a:defRPr sz="1100" b="1">
+                <a:solidFill>
+                  <a:srgbClr val="059669"/>
+                </a:solidFill>
+                <a:latin typeface="Consolas"/>
+              </a:defRPr>
+            </a:pPr>
+            <a:r>
+              <a:t>Python: 50.0 ms  →  C: 0.1 ms</a:t>
+            </a:r>
+          </a:p>
+          <a:p>
+            <a:pPr>
+              <a:spcBef>
+                <a:spcPts val="800"/>
+              </a:spcBef>
+              <a:defRPr sz="1300">
+                <a:solidFill>
+                  <a:srgbClr val="555048"/>
+                </a:solidFill>
+                <a:latin typeface="Segoe UI"/>
+              </a:defRPr>
+            </a:pPr>
+            <a:r>
+              <a:t>Reads executable import tables directly in memory without slow Python libraries.</a:t>
             </a:r>
           </a:p>
         </p:txBody>
@@ -10334,94 +10555,7 @@
       </p:sp>
       <p:sp>
         <p:nvSpPr>
-          <p:cNvPr id="9" name="TextBox 8"/>
-          <p:cNvSpPr txBox="1"/>
-          <p:nvPr/>
-        </p:nvSpPr>
-        <p:spPr>
-          <a:xfrm>
-            <a:off x="4709160" y="1828800"/>
-            <a:ext cx="2834640" cy="3291840"/>
-          </a:xfrm>
-          <a:prstGeom prst="rect">
-            <a:avLst/>
-          </a:prstGeom>
-          <a:noFill/>
-        </p:spPr>
-        <p:txBody>
-          <a:bodyPr wrap="square" lIns="0" tIns="0" rIns="0" bIns="0">
-            <a:spAutoFit/>
-          </a:bodyPr>
-          <a:lstStyle/>
-          <a:p>
-            <a:pPr>
-              <a:spcBef>
-                <a:spcPts val="1800"/>
-              </a:spcBef>
-              <a:defRPr sz="3800" b="1">
-                <a:solidFill>
-                  <a:srgbClr val="2563EB"/>
-                </a:solidFill>
-                <a:latin typeface="Georgia"/>
-              </a:defRPr>
-            </a:pPr>
-            <a:r>
-              <a:t>18x Faster</a:t>
-            </a:r>
-          </a:p>
-          <a:p>
-            <a:pPr>
-              <a:spcBef>
-                <a:spcPts val="400"/>
-              </a:spcBef>
-              <a:defRPr sz="1800" b="1">
-                <a:solidFill>
-                  <a:srgbClr val="14110D"/>
-                </a:solidFill>
-                <a:latin typeface="Segoe UI"/>
-              </a:defRPr>
-            </a:pPr>
-            <a:r>
-              <a:t>Pattern Scanner</a:t>
-            </a:r>
-          </a:p>
-          <a:p>
-            <a:pPr>
-              <a:spcBef>
-                <a:spcPts val="600"/>
-              </a:spcBef>
-              <a:defRPr sz="1100" b="1">
-                <a:solidFill>
-                  <a:srgbClr val="2563EB"/>
-                </a:solidFill>
-                <a:latin typeface="Consolas"/>
-              </a:defRPr>
-            </a:pPr>
-            <a:r>
-              <a:t>Python: 15.4 ms  →  C: 0.8 ms</a:t>
-            </a:r>
-          </a:p>
-          <a:p>
-            <a:pPr>
-              <a:spcBef>
-                <a:spcPts val="800"/>
-              </a:spcBef>
-              <a:defRPr sz="1300">
-                <a:solidFill>
-                  <a:srgbClr val="555048"/>
-                </a:solidFill>
-                <a:latin typeface="Segoe UI"/>
-              </a:defRPr>
-            </a:pPr>
-            <a:r>
-              <a:t>Finds hidden registry keys, download cradles, and backdoor strings in a single pass.</a:t>
-            </a:r>
-          </a:p>
-        </p:txBody>
-      </p:sp>
-      <p:sp>
-        <p:nvSpPr>
-          <p:cNvPr id="10" name="Rounded Rectangle 9"/>
+          <p:cNvPr id="9" name="Rounded Rectangle 8"/>
           <p:cNvSpPr/>
           <p:nvPr/>
         </p:nvSpPr>
@@ -10468,6 +10602,90 @@
             </a:pPr>
             <a:r>
               <a:t>[ ENGINE // 02 ]</a:t>
+            </a:r>
+          </a:p>
+        </p:txBody>
+      </p:sp>
+      <p:sp>
+        <p:nvSpPr>
+          <p:cNvPr id="10" name="TextBox 9"/>
+          <p:cNvSpPr txBox="1"/>
+          <p:nvPr/>
+        </p:nvSpPr>
+        <p:spPr>
+          <a:xfrm>
+            <a:off x="4709160" y="2194560"/>
+            <a:ext cx="2834640" cy="2926080"/>
+          </a:xfrm>
+          <a:prstGeom prst="rect">
+            <a:avLst/>
+          </a:prstGeom>
+          <a:noFill/>
+        </p:spPr>
+        <p:txBody>
+          <a:bodyPr wrap="square" lIns="0" tIns="0" rIns="0" bIns="0">
+            <a:spAutoFit/>
+          </a:bodyPr>
+          <a:lstStyle/>
+          <a:p>
+            <a:pPr>
+              <a:defRPr sz="3800" b="1">
+                <a:solidFill>
+                  <a:srgbClr val="2563EB"/>
+                </a:solidFill>
+                <a:latin typeface="Georgia"/>
+              </a:defRPr>
+            </a:pPr>
+            <a:r>
+              <a:t>18x Faster</a:t>
+            </a:r>
+          </a:p>
+          <a:p>
+            <a:pPr>
+              <a:spcBef>
+                <a:spcPts val="400"/>
+              </a:spcBef>
+              <a:defRPr sz="1800" b="1">
+                <a:solidFill>
+                  <a:srgbClr val="14110D"/>
+                </a:solidFill>
+                <a:latin typeface="Segoe UI"/>
+              </a:defRPr>
+            </a:pPr>
+            <a:r>
+              <a:t>Pattern Scanner</a:t>
+            </a:r>
+          </a:p>
+          <a:p>
+            <a:pPr>
+              <a:spcBef>
+                <a:spcPts val="600"/>
+              </a:spcBef>
+              <a:defRPr sz="1100" b="1">
+                <a:solidFill>
+                  <a:srgbClr val="2563EB"/>
+                </a:solidFill>
+                <a:latin typeface="Consolas"/>
+              </a:defRPr>
+            </a:pPr>
+            <a:r>
+              <a:t>Python: 15.4 ms  →  C: 0.8 ms</a:t>
+            </a:r>
+          </a:p>
+          <a:p>
+            <a:pPr>
+              <a:spcBef>
+                <a:spcPts val="800"/>
+              </a:spcBef>
+              <a:defRPr sz="1300">
+                <a:solidFill>
+                  <a:srgbClr val="555048"/>
+                </a:solidFill>
+                <a:latin typeface="Segoe UI"/>
+              </a:defRPr>
+            </a:pPr>
+            <a:r>
+              <a:t>Finds hidden registry keys, download cradles, and backdoor strings in a single pass.</a:t>
             </a:r>
           </a:p>
         </p:txBody>
@@ -10519,94 +10737,7 @@
       </p:sp>
       <p:sp>
         <p:nvSpPr>
-          <p:cNvPr id="12" name="TextBox 11"/>
-          <p:cNvSpPr txBox="1"/>
-          <p:nvPr/>
-        </p:nvSpPr>
-        <p:spPr>
-          <a:xfrm>
-            <a:off x="8321040" y="1828800"/>
-            <a:ext cx="2834640" cy="3291840"/>
-          </a:xfrm>
-          <a:prstGeom prst="rect">
-            <a:avLst/>
-          </a:prstGeom>
-          <a:noFill/>
-        </p:spPr>
-        <p:txBody>
-          <a:bodyPr wrap="square" lIns="0" tIns="0" rIns="0" bIns="0">
-            <a:spAutoFit/>
-          </a:bodyPr>
-          <a:lstStyle/>
-          <a:p>
-            <a:pPr>
-              <a:spcBef>
-                <a:spcPts val="1800"/>
-              </a:spcBef>
-              <a:defRPr sz="3800" b="1">
-                <a:solidFill>
-                  <a:srgbClr val="D97706"/>
-                </a:solidFill>
-                <a:latin typeface="Georgia"/>
-              </a:defRPr>
-            </a:pPr>
-            <a:r>
-              <a:t>8x Faster</a:t>
-            </a:r>
-          </a:p>
-          <a:p>
-            <a:pPr>
-              <a:spcBef>
-                <a:spcPts val="400"/>
-              </a:spcBef>
-              <a:defRPr sz="1800" b="1">
-                <a:solidFill>
-                  <a:srgbClr val="14110D"/>
-                </a:solidFill>
-                <a:latin typeface="Segoe UI"/>
-              </a:defRPr>
-            </a:pPr>
-            <a:r>
-              <a:t>File Multi-Hashing</a:t>
-            </a:r>
-          </a:p>
-          <a:p>
-            <a:pPr>
-              <a:spcBef>
-                <a:spcPts val="600"/>
-              </a:spcBef>
-              <a:defRPr sz="1100" b="1">
-                <a:solidFill>
-                  <a:srgbClr val="D97706"/>
-                </a:solidFill>
-                <a:latin typeface="Consolas"/>
-              </a:defRPr>
-            </a:pPr>
-            <a:r>
-              <a:t>Python: 8.9 ms  →  C: 1.1 ms</a:t>
-            </a:r>
-          </a:p>
-          <a:p>
-            <a:pPr>
-              <a:spcBef>
-                <a:spcPts val="800"/>
-              </a:spcBef>
-              <a:defRPr sz="1300">
-                <a:solidFill>
-                  <a:srgbClr val="555048"/>
-                </a:solidFill>
-                <a:latin typeface="Segoe UI"/>
-              </a:defRPr>
-            </a:pPr>
-            <a:r>
-              <a:t>Streams 64KB blocks, updating MD5, SHA-1, and SHA-256 at the exact same time.</a:t>
-            </a:r>
-          </a:p>
-        </p:txBody>
-      </p:sp>
-      <p:sp>
-        <p:nvSpPr>
-          <p:cNvPr id="13" name="Rounded Rectangle 12"/>
+          <p:cNvPr id="12" name="Rounded Rectangle 11"/>
           <p:cNvSpPr/>
           <p:nvPr/>
         </p:nvSpPr>
@@ -10653,6 +10784,90 @@
             </a:pPr>
             <a:r>
               <a:t>[ ENGINE // 03 ]</a:t>
+            </a:r>
+          </a:p>
+        </p:txBody>
+      </p:sp>
+      <p:sp>
+        <p:nvSpPr>
+          <p:cNvPr id="13" name="TextBox 12"/>
+          <p:cNvSpPr txBox="1"/>
+          <p:nvPr/>
+        </p:nvSpPr>
+        <p:spPr>
+          <a:xfrm>
+            <a:off x="8321040" y="2194560"/>
+            <a:ext cx="2834640" cy="2926080"/>
+          </a:xfrm>
+          <a:prstGeom prst="rect">
+            <a:avLst/>
+          </a:prstGeom>
+          <a:noFill/>
+        </p:spPr>
+        <p:txBody>
+          <a:bodyPr wrap="square" lIns="0" tIns="0" rIns="0" bIns="0">
+            <a:spAutoFit/>
+          </a:bodyPr>
+          <a:lstStyle/>
+          <a:p>
+            <a:pPr>
+              <a:defRPr sz="3800" b="1">
+                <a:solidFill>
+                  <a:srgbClr val="D97706"/>
+                </a:solidFill>
+                <a:latin typeface="Georgia"/>
+              </a:defRPr>
+            </a:pPr>
+            <a:r>
+              <a:t>8x Faster</a:t>
+            </a:r>
+          </a:p>
+          <a:p>
+            <a:pPr>
+              <a:spcBef>
+                <a:spcPts val="400"/>
+              </a:spcBef>
+              <a:defRPr sz="1800" b="1">
+                <a:solidFill>
+                  <a:srgbClr val="14110D"/>
+                </a:solidFill>
+                <a:latin typeface="Segoe UI"/>
+              </a:defRPr>
+            </a:pPr>
+            <a:r>
+              <a:t>File Multi-Hashing</a:t>
+            </a:r>
+          </a:p>
+          <a:p>
+            <a:pPr>
+              <a:spcBef>
+                <a:spcPts val="600"/>
+              </a:spcBef>
+              <a:defRPr sz="1100" b="1">
+                <a:solidFill>
+                  <a:srgbClr val="D97706"/>
+                </a:solidFill>
+                <a:latin typeface="Consolas"/>
+              </a:defRPr>
+            </a:pPr>
+            <a:r>
+              <a:t>Python: 8.9 ms  →  C: 1.1 ms</a:t>
+            </a:r>
+          </a:p>
+          <a:p>
+            <a:pPr>
+              <a:spcBef>
+                <a:spcPts val="800"/>
+              </a:spcBef>
+              <a:defRPr sz="1300">
+                <a:solidFill>
+                  <a:srgbClr val="555048"/>
+                </a:solidFill>
+                <a:latin typeface="Segoe UI"/>
+              </a:defRPr>
+            </a:pPr>
+            <a:r>
+              <a:t>Streams 64KB blocks, updating MD5, SHA-1, and SHA-256 at the exact same time.</a:t>
             </a:r>
           </a:p>
         </p:txBody>
@@ -11698,148 +11913,13 @@
       </p:sp>
       <p:sp>
         <p:nvSpPr>
-          <p:cNvPr id="6" name="TextBox 5"/>
-          <p:cNvSpPr txBox="1"/>
-          <p:nvPr/>
-        </p:nvSpPr>
-        <p:spPr>
-          <a:xfrm>
-            <a:off x="1097280" y="1920240"/>
-            <a:ext cx="4572000" cy="3931920"/>
-          </a:xfrm>
-          <a:prstGeom prst="rect">
-            <a:avLst/>
-          </a:prstGeom>
-          <a:noFill/>
-        </p:spPr>
-        <p:txBody>
-          <a:bodyPr wrap="square" lIns="0" tIns="0" rIns="0" bIns="0">
-            <a:spAutoFit/>
-          </a:bodyPr>
-          <a:lstStyle/>
-          <a:p>
-            <a:pPr>
-              <a:spcBef>
-                <a:spcPts val="2200"/>
-              </a:spcBef>
-              <a:defRPr sz="2000" b="1">
-                <a:solidFill>
-                  <a:srgbClr val="14110D"/>
-                </a:solidFill>
-                <a:latin typeface="Segoe UI"/>
-              </a:defRPr>
-            </a:pPr>
-            <a:r>
-              <a:t>Tells You What Happened &amp; Blocks It Everywhere</a:t>
-            </a:r>
-          </a:p>
-          <a:p>
-            <a:pPr>
-              <a:spcBef>
-                <a:spcPts val="1200"/>
-              </a:spcBef>
-              <a:defRPr sz="1500" b="1">
-                <a:solidFill>
-                  <a:srgbClr val="14110D"/>
-                </a:solidFill>
-                <a:latin typeface="Segoe UI"/>
-              </a:defRPr>
-            </a:pPr>
-            <a:r>
-              <a:t>• Explains the Threat Clearly:</a:t>
-            </a:r>
-          </a:p>
-          <a:p>
-            <a:pPr>
-              <a:spcBef>
-                <a:spcPts val="200"/>
-              </a:spcBef>
-              <a:defRPr sz="1300">
-                <a:solidFill>
-                  <a:srgbClr val="555048"/>
-                </a:solidFill>
-                <a:latin typeface="Segoe UI"/>
-              </a:defRPr>
-            </a:pPr>
-            <a:r>
-              <a:t>Identifies the exact techniques the attacker used (e.g. injecting code into processes or setting up secret auto-run keys).</a:t>
-            </a:r>
-          </a:p>
-          <a:p>
-            <a:pPr>
-              <a:spcBef>
-                <a:spcPts val="1200"/>
-              </a:spcBef>
-              <a:defRPr sz="1500" b="1">
-                <a:solidFill>
-                  <a:srgbClr val="14110D"/>
-                </a:solidFill>
-                <a:latin typeface="Segoe UI"/>
-              </a:defRPr>
-            </a:pPr>
-            <a:r>
-              <a:t>• Maps to MITRE ATT&amp;CK:</a:t>
-            </a:r>
-          </a:p>
-          <a:p>
-            <a:pPr>
-              <a:spcBef>
-                <a:spcPts val="200"/>
-              </a:spcBef>
-              <a:defRPr sz="1300">
-                <a:solidFill>
-                  <a:srgbClr val="555048"/>
-                </a:solidFill>
-                <a:latin typeface="Segoe UI"/>
-              </a:defRPr>
-            </a:pPr>
-            <a:r>
-              <a:t>Industry-standard tagging (T1055, T1547) so security teams understand the risk instantly.</a:t>
-            </a:r>
-          </a:p>
-          <a:p>
-            <a:pPr>
-              <a:spcBef>
-                <a:spcPts val="1200"/>
-              </a:spcBef>
-              <a:defRPr sz="1500" b="1">
-                <a:solidFill>
-                  <a:srgbClr val="14110D"/>
-                </a:solidFill>
-                <a:latin typeface="Segoe UI"/>
-              </a:defRPr>
-            </a:pPr>
-            <a:r>
-              <a:t>• Writes the Defense Rule:</a:t>
-            </a:r>
-          </a:p>
-          <a:p>
-            <a:pPr>
-              <a:spcBef>
-                <a:spcPts val="200"/>
-              </a:spcBef>
-              <a:defRPr sz="1300">
-                <a:solidFill>
-                  <a:srgbClr val="555048"/>
-                </a:solidFill>
-                <a:latin typeface="Segoe UI"/>
-              </a:defRPr>
-            </a:pPr>
-            <a:r>
-              <a:t>Generates a complete, ready-to-use YARA rule that your firewalls, EDR, and mail filters can apply right away.</a:t>
-            </a:r>
-          </a:p>
-        </p:txBody>
-      </p:sp>
-      <p:sp>
-        <p:nvSpPr>
-          <p:cNvPr id="7" name="Rounded Rectangle 6"/>
+          <p:cNvPr id="6" name="Rounded Rectangle 5"/>
           <p:cNvSpPr/>
           <p:nvPr/>
         </p:nvSpPr>
         <p:spPr>
           <a:xfrm>
-            <a:off x="1097280" y="1920240"/>
+            <a:off x="1097280" y="1874519"/>
             <a:ext cx="3108960" cy="320040"/>
           </a:xfrm>
           <a:prstGeom prst="roundRect">
@@ -11880,6 +11960,138 @@
             </a:pPr>
             <a:r>
               <a:t>[ AUTOMATED IMMUNITY ]</a:t>
+            </a:r>
+          </a:p>
+        </p:txBody>
+      </p:sp>
+      <p:sp>
+        <p:nvSpPr>
+          <p:cNvPr id="7" name="TextBox 6"/>
+          <p:cNvSpPr txBox="1"/>
+          <p:nvPr/>
+        </p:nvSpPr>
+        <p:spPr>
+          <a:xfrm>
+            <a:off x="1097280" y="2331720"/>
+            <a:ext cx="4572000" cy="3566160"/>
+          </a:xfrm>
+          <a:prstGeom prst="rect">
+            <a:avLst/>
+          </a:prstGeom>
+          <a:noFill/>
+        </p:spPr>
+        <p:txBody>
+          <a:bodyPr wrap="square" lIns="0" tIns="0" rIns="0" bIns="0">
+            <a:spAutoFit/>
+          </a:bodyPr>
+          <a:lstStyle/>
+          <a:p>
+            <a:pPr>
+              <a:defRPr sz="2000" b="1">
+                <a:solidFill>
+                  <a:srgbClr val="14110D"/>
+                </a:solidFill>
+                <a:latin typeface="Segoe UI"/>
+              </a:defRPr>
+            </a:pPr>
+            <a:r>
+              <a:t>Tells You What Happened &amp; Blocks It Everywhere</a:t>
+            </a:r>
+          </a:p>
+          <a:p>
+            <a:pPr>
+              <a:spcBef>
+                <a:spcPts val="1200"/>
+              </a:spcBef>
+              <a:defRPr sz="1500" b="1">
+                <a:solidFill>
+                  <a:srgbClr val="14110D"/>
+                </a:solidFill>
+                <a:latin typeface="Segoe UI"/>
+              </a:defRPr>
+            </a:pPr>
+            <a:r>
+              <a:t>• Explains the Threat Clearly:</a:t>
+            </a:r>
+          </a:p>
+          <a:p>
+            <a:pPr>
+              <a:spcBef>
+                <a:spcPts val="200"/>
+              </a:spcBef>
+              <a:defRPr sz="1300">
+                <a:solidFill>
+                  <a:srgbClr val="555048"/>
+                </a:solidFill>
+                <a:latin typeface="Segoe UI"/>
+              </a:defRPr>
+            </a:pPr>
+            <a:r>
+              <a:t>Identifies the exact techniques the attacker used (e.g. injecting code into processes or setting up secret auto-run keys).</a:t>
+            </a:r>
+          </a:p>
+          <a:p>
+            <a:pPr>
+              <a:spcBef>
+                <a:spcPts val="1200"/>
+              </a:spcBef>
+              <a:defRPr sz="1500" b="1">
+                <a:solidFill>
+                  <a:srgbClr val="14110D"/>
+                </a:solidFill>
+                <a:latin typeface="Segoe UI"/>
+              </a:defRPr>
+            </a:pPr>
+            <a:r>
+              <a:t>• Maps to MITRE ATT&amp;CK:</a:t>
+            </a:r>
+          </a:p>
+          <a:p>
+            <a:pPr>
+              <a:spcBef>
+                <a:spcPts val="200"/>
+              </a:spcBef>
+              <a:defRPr sz="1300">
+                <a:solidFill>
+                  <a:srgbClr val="555048"/>
+                </a:solidFill>
+                <a:latin typeface="Segoe UI"/>
+              </a:defRPr>
+            </a:pPr>
+            <a:r>
+              <a:t>Industry-standard tagging (T1055, T1547) so security teams understand the risk instantly.</a:t>
+            </a:r>
+          </a:p>
+          <a:p>
+            <a:pPr>
+              <a:spcBef>
+                <a:spcPts val="1200"/>
+              </a:spcBef>
+              <a:defRPr sz="1500" b="1">
+                <a:solidFill>
+                  <a:srgbClr val="14110D"/>
+                </a:solidFill>
+                <a:latin typeface="Segoe UI"/>
+              </a:defRPr>
+            </a:pPr>
+            <a:r>
+              <a:t>• Writes the Defense Rule:</a:t>
+            </a:r>
+          </a:p>
+          <a:p>
+            <a:pPr>
+              <a:spcBef>
+                <a:spcPts val="200"/>
+              </a:spcBef>
+              <a:defRPr sz="1300">
+                <a:solidFill>
+                  <a:srgbClr val="555048"/>
+                </a:solidFill>
+                <a:latin typeface="Segoe UI"/>
+              </a:defRPr>
+            </a:pPr>
+            <a:r>
+              <a:t>Generates a complete, ready-to-use YARA rule that your firewalls, EDR, and mail filters can apply right away.</a:t>
             </a:r>
           </a:p>
         </p:txBody>
